--- a/Final_Digital_FIR_Final_FYP_Presentation.pptx
+++ b/Final_Digital_FIR_Final_FYP_Presentation.pptx
@@ -279,7 +279,7 @@
       </p15:sldGuideLst>
     </p:ext>
     <p:ext uri="http://customooxmlschemas.google.com/">
-      <go:slidesCustomData xmlns="" xmlns:mc="http://schemas.openxmlformats.org/markup-compatibility/2006" xmlns:mv="urn:schemas-microsoft-com:mac:vml" xmlns:c="http://schemas.openxmlformats.org/drawingml/2006/chart" xmlns:dgm="http://schemas.openxmlformats.org/drawingml/2006/diagram" xmlns:o="urn:schemas-microsoft-com:office:office" xmlns:v="urn:schemas-microsoft-com:vml" xmlns:pvml="urn:schemas-microsoft-com:office:powerpoint" xmlns:com="http://schemas.openxmlformats.org/drawingml/2006/compatibility" xmlns:p14="http://schemas.microsoft.com/office/powerpoint/2010/main" xmlns:p15="http://schemas.microsoft.com/office/powerpoint/2012/main" xmlns:ahyp="http://schemas.microsoft.com/office/drawing/2018/hyperlinkcolor" xmlns:go="http://customooxmlschemas.google.com/" r:id="rId27" roundtripDataSignature="AMtx7mgqso+muD7qxSKyk66oXGt+27nMBQ=="/>
+      <go:slidesCustomData xmlns:go="http://customooxmlschemas.google.com/" xmlns:ahyp="http://schemas.microsoft.com/office/drawing/2018/hyperlinkcolor" xmlns:p15="http://schemas.microsoft.com/office/powerpoint/2012/main" xmlns:p14="http://schemas.microsoft.com/office/powerpoint/2010/main" xmlns:com="http://schemas.openxmlformats.org/drawingml/2006/compatibility" xmlns:pvml="urn:schemas-microsoft-com:office:powerpoint" xmlns:v="urn:schemas-microsoft-com:vml" xmlns:o="urn:schemas-microsoft-com:office:office" xmlns:dgm="http://schemas.openxmlformats.org/drawingml/2006/diagram" xmlns:c="http://schemas.openxmlformats.org/drawingml/2006/chart" xmlns:mv="urn:schemas-microsoft-com:mac:vml" xmlns:mc="http://schemas.openxmlformats.org/markup-compatibility/2006" xmlns="" r:id="rId27" roundtripDataSignature="AMtx7mgqso+muD7qxSKyk66oXGt+27nMBQ=="/>
     </p:ext>
   </p:extLst>
 </p:presentation>
@@ -16499,13 +16499,13 @@
   <p:clrMapOvr>
     <a:masterClrMapping/>
   </p:clrMapOvr>
-  <mc:AlternateContent xmlns:mc="http://schemas.openxmlformats.org/markup-compatibility/2006">
-    <mc:Choice xmlns:p14="http://schemas.microsoft.com/office/powerpoint/2010/main" Requires="p14">
+  <mc:AlternateContent xmlns:mc="http://schemas.openxmlformats.org/markup-compatibility/2006" xmlns:p14="http://schemas.microsoft.com/office/powerpoint/2010/main">
+    <mc:Choice Requires="p14">
       <p:transition spd="slow" p14:dur="3400">
         <p14:reveal/>
       </p:transition>
     </mc:Choice>
-    <mc:Fallback>
+    <mc:Fallback xmlns="">
       <p:transition spd="slow">
         <p:fade/>
       </p:transition>
@@ -16584,13 +16584,13 @@
   <p:clrMapOvr>
     <a:masterClrMapping/>
   </p:clrMapOvr>
-  <mc:AlternateContent xmlns:mc="http://schemas.openxmlformats.org/markup-compatibility/2006">
-    <mc:Choice xmlns:p14="http://schemas.microsoft.com/office/powerpoint/2010/main" Requires="p14">
+  <mc:AlternateContent xmlns:mc="http://schemas.openxmlformats.org/markup-compatibility/2006" xmlns:p14="http://schemas.microsoft.com/office/powerpoint/2010/main">
+    <mc:Choice Requires="p14">
       <p:transition spd="slow">
         <p14:flash/>
       </p:transition>
     </mc:Choice>
-    <mc:Fallback>
+    <mc:Fallback xmlns="">
       <p:transition spd="slow">
         <p:fade/>
       </p:transition>
@@ -17011,13 +17011,13 @@
   <p:clrMapOvr>
     <a:masterClrMapping/>
   </p:clrMapOvr>
-  <mc:AlternateContent xmlns:mc="http://schemas.openxmlformats.org/markup-compatibility/2006">
-    <mc:Choice xmlns:p15="http://schemas.microsoft.com/office/powerpoint/2012/main" Requires="p15">
+  <mc:AlternateContent xmlns:mc="http://schemas.openxmlformats.org/markup-compatibility/2006" xmlns:p15="http://schemas.microsoft.com/office/powerpoint/2012/main">
+    <mc:Choice Requires="p15">
       <p:transition xmlns:p14="http://schemas.microsoft.com/office/powerpoint/2010/main" spd="slow" p14:dur="2000">
         <p15:prstTrans prst="prestige"/>
       </p:transition>
     </mc:Choice>
-    <mc:Fallback>
+    <mc:Fallback xmlns="">
       <p:transition spd="slow">
         <p:fade/>
       </p:transition>
@@ -17096,13 +17096,13 @@
   <p:clrMapOvr>
     <a:masterClrMapping/>
   </p:clrMapOvr>
-  <mc:AlternateContent xmlns:mc="http://schemas.openxmlformats.org/markup-compatibility/2006">
-    <mc:Choice xmlns:p15="http://schemas.microsoft.com/office/powerpoint/2012/main" Requires="p15">
+  <mc:AlternateContent xmlns:mc="http://schemas.openxmlformats.org/markup-compatibility/2006" xmlns:p15="http://schemas.microsoft.com/office/powerpoint/2012/main">
+    <mc:Choice Requires="p15">
       <p:transition xmlns:p14="http://schemas.microsoft.com/office/powerpoint/2010/main" spd="slow" p14:dur="1250">
         <p15:prstTrans prst="peelOff"/>
       </p:transition>
     </mc:Choice>
-    <mc:Fallback>
+    <mc:Fallback xmlns="">
       <p:transition spd="slow">
         <p:fade/>
       </p:transition>
@@ -17849,13 +17849,13 @@
   <p:clrMapOvr>
     <a:masterClrMapping/>
   </p:clrMapOvr>
-  <mc:AlternateContent xmlns:mc="http://schemas.openxmlformats.org/markup-compatibility/2006">
-    <mc:Choice xmlns:p15="http://schemas.microsoft.com/office/powerpoint/2012/main" Requires="p15">
+  <mc:AlternateContent xmlns:mc="http://schemas.openxmlformats.org/markup-compatibility/2006" xmlns:p15="http://schemas.microsoft.com/office/powerpoint/2012/main">
+    <mc:Choice Requires="p15">
       <p:transition xmlns:p14="http://schemas.microsoft.com/office/powerpoint/2010/main" spd="slow" p14:dur="2000">
         <p15:prstTrans prst="wind"/>
       </p:transition>
     </mc:Choice>
-    <mc:Fallback>
+    <mc:Fallback xmlns="">
       <p:transition spd="slow">
         <p:fade/>
       </p:transition>
@@ -18775,13 +18775,13 @@
   <p:clrMapOvr>
     <a:masterClrMapping/>
   </p:clrMapOvr>
-  <mc:AlternateContent xmlns:mc="http://schemas.openxmlformats.org/markup-compatibility/2006">
-    <mc:Choice xmlns:p15="http://schemas.microsoft.com/office/powerpoint/2012/main" Requires="p15">
+  <mc:AlternateContent xmlns:mc="http://schemas.openxmlformats.org/markup-compatibility/2006" xmlns:p15="http://schemas.microsoft.com/office/powerpoint/2012/main">
+    <mc:Choice Requires="p15">
       <p:transition xmlns:p14="http://schemas.microsoft.com/office/powerpoint/2010/main" spd="slow" p14:dur="2000">
         <p15:prstTrans prst="fallOver"/>
       </p:transition>
     </mc:Choice>
-    <mc:Fallback>
+    <mc:Fallback xmlns="">
       <p:transition spd="slow">
         <p:fade/>
       </p:transition>
@@ -18860,13 +18860,13 @@
   <p:clrMapOvr>
     <a:masterClrMapping/>
   </p:clrMapOvr>
-  <mc:AlternateContent xmlns:mc="http://schemas.openxmlformats.org/markup-compatibility/2006">
-    <mc:Choice xmlns:p14="http://schemas.microsoft.com/office/powerpoint/2010/main" Requires="p14">
+  <mc:AlternateContent xmlns:mc="http://schemas.openxmlformats.org/markup-compatibility/2006" xmlns:p14="http://schemas.microsoft.com/office/powerpoint/2010/main">
+    <mc:Choice Requires="p14">
       <p:transition spd="slow" p14:dur="1500">
         <p:split orient="vert"/>
       </p:transition>
     </mc:Choice>
-    <mc:Fallback>
+    <mc:Fallback xmlns="">
       <p:transition spd="slow">
         <p:split orient="vert"/>
       </p:transition>
@@ -19451,13 +19451,13 @@
   <p:clrMapOvr>
     <a:masterClrMapping/>
   </p:clrMapOvr>
-  <mc:AlternateContent xmlns:mc="http://schemas.openxmlformats.org/markup-compatibility/2006">
-    <mc:Choice xmlns:p14="http://schemas.microsoft.com/office/powerpoint/2010/main" Requires="p14">
+  <mc:AlternateContent xmlns:mc="http://schemas.openxmlformats.org/markup-compatibility/2006" xmlns:p14="http://schemas.microsoft.com/office/powerpoint/2010/main">
+    <mc:Choice Requires="p14">
       <p:transition spd="slow" p14:dur="1200">
         <p:dissolve/>
       </p:transition>
     </mc:Choice>
-    <mc:Fallback>
+    <mc:Fallback xmlns="">
       <p:transition spd="slow">
         <p:dissolve/>
       </p:transition>
@@ -20531,13 +20531,13 @@
   <p:clrMapOvr>
     <a:masterClrMapping/>
   </p:clrMapOvr>
-  <mc:AlternateContent xmlns:mc="http://schemas.openxmlformats.org/markup-compatibility/2006">
-    <mc:Choice xmlns:p14="http://schemas.microsoft.com/office/powerpoint/2010/main" Requires="p14">
+  <mc:AlternateContent xmlns:mc="http://schemas.openxmlformats.org/markup-compatibility/2006" xmlns:p14="http://schemas.microsoft.com/office/powerpoint/2010/main">
+    <mc:Choice Requires="p14">
       <p:transition spd="slow" p14:dur="2500">
         <p:checker/>
       </p:transition>
     </mc:Choice>
-    <mc:Fallback>
+    <mc:Fallback xmlns="">
       <p:transition spd="slow">
         <p:checker/>
       </p:transition>
@@ -21360,13 +21360,13 @@
   <p:clrMapOvr>
     <a:masterClrMapping/>
   </p:clrMapOvr>
-  <mc:AlternateContent xmlns:mc="http://schemas.openxmlformats.org/markup-compatibility/2006">
-    <mc:Choice xmlns:p15="http://schemas.microsoft.com/office/powerpoint/2012/main" Requires="p15">
+  <mc:AlternateContent xmlns:mc="http://schemas.openxmlformats.org/markup-compatibility/2006" xmlns:p15="http://schemas.microsoft.com/office/powerpoint/2012/main">
+    <mc:Choice Requires="p15">
       <p:transition xmlns:p14="http://schemas.microsoft.com/office/powerpoint/2010/main" spd="slow" p14:dur="2000">
         <p15:prstTrans prst="fallOver"/>
       </p:transition>
     </mc:Choice>
-    <mc:Fallback>
+    <mc:Fallback xmlns="">
       <p:transition spd="slow">
         <p:fade/>
       </p:transition>
@@ -21594,13 +21594,13 @@
   <p:clrMapOvr>
     <a:masterClrMapping/>
   </p:clrMapOvr>
-  <mc:AlternateContent xmlns:mc="http://schemas.openxmlformats.org/markup-compatibility/2006">
-    <mc:Choice xmlns:p14="http://schemas.microsoft.com/office/powerpoint/2010/main" Requires="p14">
+  <mc:AlternateContent xmlns:mc="http://schemas.openxmlformats.org/markup-compatibility/2006" xmlns:p14="http://schemas.microsoft.com/office/powerpoint/2010/main">
+    <mc:Choice Requires="p14">
       <p:transition spd="slow" p14:dur="800">
         <p:circle/>
       </p:transition>
     </mc:Choice>
-    <mc:Fallback>
+    <mc:Fallback xmlns="">
       <p:transition spd="slow">
         <p:circle/>
       </p:transition>
@@ -21962,13 +21962,13 @@
   <p:clrMapOvr>
     <a:masterClrMapping/>
   </p:clrMapOvr>
-  <mc:AlternateContent xmlns:mc="http://schemas.openxmlformats.org/markup-compatibility/2006">
-    <mc:Choice xmlns:p15="http://schemas.microsoft.com/office/powerpoint/2012/main" Requires="p15">
+  <mc:AlternateContent xmlns:mc="http://schemas.openxmlformats.org/markup-compatibility/2006" xmlns:p15="http://schemas.microsoft.com/office/powerpoint/2012/main">
+    <mc:Choice Requires="p15">
       <p:transition xmlns:p14="http://schemas.microsoft.com/office/powerpoint/2010/main" spd="slow" p14:dur="2000">
         <p15:prstTrans prst="crush"/>
       </p:transition>
     </mc:Choice>
-    <mc:Fallback>
+    <mc:Fallback xmlns="">
       <p:transition spd="slow">
         <p:fade/>
       </p:transition>
@@ -22483,13 +22483,13 @@
   <p:clrMapOvr>
     <a:masterClrMapping/>
   </p:clrMapOvr>
-  <mc:AlternateContent xmlns:mc="http://schemas.openxmlformats.org/markup-compatibility/2006">
-    <mc:Choice xmlns:p14="http://schemas.microsoft.com/office/powerpoint/2010/main" Requires="p14">
+  <mc:AlternateContent xmlns:mc="http://schemas.openxmlformats.org/markup-compatibility/2006" xmlns:p14="http://schemas.microsoft.com/office/powerpoint/2010/main">
+    <mc:Choice Requires="p14">
       <p:transition spd="slow" p14:dur="1500">
         <p:split orient="vert"/>
       </p:transition>
     </mc:Choice>
-    <mc:Fallback>
+    <mc:Fallback xmlns="">
       <p:transition spd="slow">
         <p:split orient="vert"/>
       </p:transition>
@@ -22554,13 +22554,13 @@
   <p:clrMapOvr>
     <a:masterClrMapping/>
   </p:clrMapOvr>
-  <mc:AlternateContent xmlns:mc="http://schemas.openxmlformats.org/markup-compatibility/2006">
-    <mc:Choice xmlns:p14="http://schemas.microsoft.com/office/powerpoint/2010/main" Requires="p14">
+  <mc:AlternateContent xmlns:mc="http://schemas.openxmlformats.org/markup-compatibility/2006" xmlns:p14="http://schemas.microsoft.com/office/powerpoint/2010/main">
+    <mc:Choice Requires="p14">
       <p:transition spd="med" p14:dur="700">
         <p:fade/>
       </p:transition>
     </mc:Choice>
-    <mc:Fallback>
+    <mc:Fallback xmlns="">
       <p:transition spd="med">
         <p:fade/>
       </p:transition>
@@ -22926,13 +22926,13 @@
   <p:clrMapOvr>
     <a:masterClrMapping/>
   </p:clrMapOvr>
-  <mc:AlternateContent xmlns:mc="http://schemas.openxmlformats.org/markup-compatibility/2006">
-    <mc:Choice xmlns:p15="http://schemas.microsoft.com/office/powerpoint/2012/main" Requires="p15">
+  <mc:AlternateContent xmlns:mc="http://schemas.openxmlformats.org/markup-compatibility/2006" xmlns:p15="http://schemas.microsoft.com/office/powerpoint/2012/main">
+    <mc:Choice Requires="p15">
       <p:transition xmlns:p14="http://schemas.microsoft.com/office/powerpoint/2010/main" spd="slow" p14:dur="6000">
         <p15:prstTrans prst="curtains"/>
       </p:transition>
     </mc:Choice>
-    <mc:Fallback>
+    <mc:Fallback xmlns="">
       <p:transition spd="slow">
         <p:fade/>
       </p:transition>
@@ -23285,13 +23285,13 @@
   <p:clrMapOvr>
     <a:masterClrMapping/>
   </p:clrMapOvr>
-  <mc:AlternateContent xmlns:mc="http://schemas.openxmlformats.org/markup-compatibility/2006">
-    <mc:Choice xmlns:p14="http://schemas.microsoft.com/office/powerpoint/2010/main" Requires="p14">
+  <mc:AlternateContent xmlns:mc="http://schemas.openxmlformats.org/markup-compatibility/2006" xmlns:p14="http://schemas.microsoft.com/office/powerpoint/2010/main">
+    <mc:Choice Requires="p14">
       <p:transition spd="slow" p14:dur="1500">
         <p:split orient="vert"/>
       </p:transition>
     </mc:Choice>
-    <mc:Fallback>
+    <mc:Fallback xmlns="">
       <p:transition spd="slow">
         <p:split orient="vert"/>
       </p:transition>
@@ -23336,7 +23336,7 @@
         </p:nvSpPr>
         <p:spPr>
           <a:xfrm>
-            <a:off x="750023" y="2854037"/>
+            <a:off x="694606" y="4581242"/>
             <a:ext cx="7772400" cy="481879"/>
           </a:xfrm>
           <a:prstGeom prst="rect">
@@ -23370,13 +23370,13 @@
   <p:clrMapOvr>
     <a:masterClrMapping/>
   </p:clrMapOvr>
-  <mc:AlternateContent xmlns:mc="http://schemas.openxmlformats.org/markup-compatibility/2006">
-    <mc:Choice xmlns:p14="http://schemas.microsoft.com/office/powerpoint/2010/main" Requires="p14">
+  <mc:AlternateContent xmlns:mc="http://schemas.openxmlformats.org/markup-compatibility/2006" xmlns:p14="http://schemas.microsoft.com/office/powerpoint/2010/main">
+    <mc:Choice Requires="p14">
       <p:transition spd="slow">
         <p14:flash/>
       </p:transition>
     </mc:Choice>
-    <mc:Fallback>
+    <mc:Fallback xmlns="">
       <p:transition spd="slow">
         <p:fade/>
       </p:transition>
@@ -25315,13 +25315,13 @@
   <p:clrMapOvr>
     <a:masterClrMapping/>
   </p:clrMapOvr>
-  <mc:AlternateContent xmlns:mc="http://schemas.openxmlformats.org/markup-compatibility/2006">
-    <mc:Choice xmlns:p14="http://schemas.microsoft.com/office/powerpoint/2010/main" Requires="p14">
+  <mc:AlternateContent xmlns:mc="http://schemas.openxmlformats.org/markup-compatibility/2006" xmlns:p14="http://schemas.microsoft.com/office/powerpoint/2010/main">
+    <mc:Choice Requires="p14">
       <p:transition spd="slow" p14:dur="800">
         <p:circle/>
       </p:transition>
     </mc:Choice>
-    <mc:Fallback>
+    <mc:Fallback xmlns="">
       <p:transition spd="slow">
         <p:circle/>
       </p:transition>

--- a/Final_Digital_FIR_Final_FYP_Presentation.pptx
+++ b/Final_Digital_FIR_Final_FYP_Presentation.pptx
@@ -5,7 +5,7 @@
     <p:sldMasterId id="2147483648" r:id="rId1"/>
   </p:sldMasterIdLst>
   <p:notesMasterIdLst>
-    <p:notesMasterId r:id="rId25"/>
+    <p:notesMasterId r:id="rId26"/>
   </p:notesMasterIdLst>
   <p:sldIdLst>
     <p:sldId id="256" r:id="rId2"/>
@@ -13,24 +13,25 @@
     <p:sldId id="258" r:id="rId4"/>
     <p:sldId id="259" r:id="rId5"/>
     <p:sldId id="260" r:id="rId6"/>
-    <p:sldId id="261" r:id="rId7"/>
+    <p:sldId id="279" r:id="rId7"/>
     <p:sldId id="262" r:id="rId8"/>
-    <p:sldId id="263" r:id="rId9"/>
-    <p:sldId id="264" r:id="rId10"/>
-    <p:sldId id="265" r:id="rId11"/>
-    <p:sldId id="266" r:id="rId12"/>
-    <p:sldId id="267" r:id="rId13"/>
-    <p:sldId id="268" r:id="rId14"/>
-    <p:sldId id="269" r:id="rId15"/>
-    <p:sldId id="270" r:id="rId16"/>
-    <p:sldId id="271" r:id="rId17"/>
-    <p:sldId id="272" r:id="rId18"/>
-    <p:sldId id="273" r:id="rId19"/>
-    <p:sldId id="274" r:id="rId20"/>
-    <p:sldId id="275" r:id="rId21"/>
-    <p:sldId id="276" r:id="rId22"/>
-    <p:sldId id="277" r:id="rId23"/>
-    <p:sldId id="278" r:id="rId24"/>
+    <p:sldId id="280" r:id="rId9"/>
+    <p:sldId id="263" r:id="rId10"/>
+    <p:sldId id="264" r:id="rId11"/>
+    <p:sldId id="265" r:id="rId12"/>
+    <p:sldId id="266" r:id="rId13"/>
+    <p:sldId id="267" r:id="rId14"/>
+    <p:sldId id="268" r:id="rId15"/>
+    <p:sldId id="269" r:id="rId16"/>
+    <p:sldId id="270" r:id="rId17"/>
+    <p:sldId id="271" r:id="rId18"/>
+    <p:sldId id="272" r:id="rId19"/>
+    <p:sldId id="273" r:id="rId20"/>
+    <p:sldId id="274" r:id="rId21"/>
+    <p:sldId id="275" r:id="rId22"/>
+    <p:sldId id="276" r:id="rId23"/>
+    <p:sldId id="277" r:id="rId24"/>
+    <p:sldId id="278" r:id="rId25"/>
   </p:sldIdLst>
   <p:sldSz cx="9144000" cy="6858000" type="screen4x3"/>
   <p:notesSz cx="7315200" cy="9601200"/>
@@ -279,7 +280,7 @@
       </p15:sldGuideLst>
     </p:ext>
     <p:ext uri="http://customooxmlschemas.google.com/">
-      <go:slidesCustomData xmlns:go="http://customooxmlschemas.google.com/" xmlns:ahyp="http://schemas.microsoft.com/office/drawing/2018/hyperlinkcolor" xmlns:p15="http://schemas.microsoft.com/office/powerpoint/2012/main" xmlns:p14="http://schemas.microsoft.com/office/powerpoint/2010/main" xmlns:com="http://schemas.openxmlformats.org/drawingml/2006/compatibility" xmlns:pvml="urn:schemas-microsoft-com:office:powerpoint" xmlns:v="urn:schemas-microsoft-com:vml" xmlns:o="urn:schemas-microsoft-com:office:office" xmlns:dgm="http://schemas.openxmlformats.org/drawingml/2006/diagram" xmlns:c="http://schemas.openxmlformats.org/drawingml/2006/chart" xmlns:mv="urn:schemas-microsoft-com:mac:vml" xmlns:mc="http://schemas.openxmlformats.org/markup-compatibility/2006" xmlns="" r:id="rId27" roundtripDataSignature="AMtx7mgqso+muD7qxSKyk66oXGt+27nMBQ=="/>
+      <go:slidesCustomData xmlns="" xmlns:mc="http://schemas.openxmlformats.org/markup-compatibility/2006" xmlns:mv="urn:schemas-microsoft-com:mac:vml" xmlns:c="http://schemas.openxmlformats.org/drawingml/2006/chart" xmlns:dgm="http://schemas.openxmlformats.org/drawingml/2006/diagram" xmlns:o="urn:schemas-microsoft-com:office:office" xmlns:v="urn:schemas-microsoft-com:vml" xmlns:pvml="urn:schemas-microsoft-com:office:powerpoint" xmlns:com="http://schemas.openxmlformats.org/drawingml/2006/compatibility" xmlns:p14="http://schemas.microsoft.com/office/powerpoint/2010/main" xmlns:p15="http://schemas.microsoft.com/office/powerpoint/2012/main" xmlns:ahyp="http://schemas.microsoft.com/office/drawing/2018/hyperlinkcolor" xmlns:go="http://customooxmlschemas.google.com/" r:id="rId27" roundtripDataSignature="AMtx7mgqso+muD7qxSKyk66oXGt+27nMBQ=="/>
     </p:ext>
   </p:extLst>
 </p:presentation>
@@ -1001,6 +1002,133 @@
   <p:cSld>
     <p:spTree>
       <p:nvGrpSpPr>
+        <p:cNvPr id="1" name="Shape 129"/>
+        <p:cNvGrpSpPr/>
+        <p:nvPr/>
+      </p:nvGrpSpPr>
+      <p:grpSpPr>
+        <a:xfrm>
+          <a:off x="0" y="0"/>
+          <a:ext cx="0" cy="0"/>
+          <a:chOff x="0" y="0"/>
+          <a:chExt cx="0" cy="0"/>
+        </a:xfrm>
+      </p:grpSpPr>
+      <p:sp>
+        <p:nvSpPr>
+          <p:cNvPr id="130" name="Google Shape;130;g2039867fdc9_0_16:notes"/>
+          <p:cNvSpPr txBox="1">
+            <a:spLocks noGrp="1"/>
+          </p:cNvSpPr>
+          <p:nvPr>
+            <p:ph type="body" idx="1"/>
+          </p:nvPr>
+        </p:nvSpPr>
+        <p:spPr>
+          <a:xfrm>
+            <a:off x="731500" y="4560550"/>
+            <a:ext cx="5852100" cy="4320600"/>
+          </a:xfrm>
+          <a:prstGeom prst="rect">
+            <a:avLst/>
+          </a:prstGeom>
+          <a:noFill/>
+          <a:ln>
+            <a:noFill/>
+          </a:ln>
+        </p:spPr>
+        <p:txBody>
+          <a:bodyPr spcFirstLastPara="1" wrap="square" lIns="91425" tIns="91425" rIns="91425" bIns="91425" anchor="t" anchorCtr="0">
+            <a:noAutofit/>
+          </a:bodyPr>
+          <a:lstStyle/>
+          <a:p>
+            <a:pPr marL="0" lvl="0" indent="0" algn="l" rtl="0">
+              <a:lnSpc>
+                <a:spcPct val="100000"/>
+              </a:lnSpc>
+              <a:spcBef>
+                <a:spcPts val="0"/>
+              </a:spcBef>
+              <a:spcAft>
+                <a:spcPts val="0"/>
+              </a:spcAft>
+              <a:buSzPts val="1100"/>
+              <a:buNone/>
+            </a:pPr>
+            <a:endParaRPr/>
+          </a:p>
+        </p:txBody>
+      </p:sp>
+      <p:sp>
+        <p:nvSpPr>
+          <p:cNvPr id="131" name="Google Shape;131;g2039867fdc9_0_16:notes"/>
+          <p:cNvSpPr>
+            <a:spLocks noGrp="1" noRot="1" noChangeAspect="1"/>
+          </p:cNvSpPr>
+          <p:nvPr>
+            <p:ph type="sldImg" idx="2"/>
+          </p:nvPr>
+        </p:nvSpPr>
+        <p:spPr>
+          <a:xfrm>
+            <a:off x="1257300" y="720725"/>
+            <a:ext cx="4800600" cy="3600450"/>
+          </a:xfrm>
+          <a:custGeom>
+            <a:avLst/>
+            <a:gdLst/>
+            <a:ahLst/>
+            <a:cxnLst/>
+            <a:rect l="l" t="t" r="r" b="b"/>
+            <a:pathLst>
+              <a:path w="120000" h="120000" extrusionOk="0">
+                <a:moveTo>
+                  <a:pt x="0" y="0"/>
+                </a:moveTo>
+                <a:lnTo>
+                  <a:pt x="120000" y="0"/>
+                </a:lnTo>
+                <a:lnTo>
+                  <a:pt x="120000" y="120000"/>
+                </a:lnTo>
+                <a:lnTo>
+                  <a:pt x="0" y="120000"/>
+                </a:lnTo>
+                <a:close/>
+              </a:path>
+            </a:pathLst>
+          </a:custGeom>
+          <a:noFill/>
+          <a:ln w="9525" cap="flat" cmpd="sng">
+            <a:solidFill>
+              <a:srgbClr val="000000"/>
+            </a:solidFill>
+            <a:prstDash val="solid"/>
+            <a:round/>
+            <a:headEnd type="none" w="sm" len="sm"/>
+            <a:tailEnd type="none" w="sm" len="sm"/>
+          </a:ln>
+        </p:spPr>
+      </p:sp>
+    </p:spTree>
+    <p:extLst>
+      <p:ext uri="{BB962C8B-B14F-4D97-AF65-F5344CB8AC3E}">
+        <p14:creationId xmlns:p14="http://schemas.microsoft.com/office/powerpoint/2010/main" val="3778490037"/>
+      </p:ext>
+    </p:extLst>
+  </p:cSld>
+  <p:clrMapOvr>
+    <a:masterClrMapping/>
+  </p:clrMapOvr>
+</p:notes>
+</file>
+
+<file path=ppt/notesSlides/notesSlide11.xml><?xml version="1.0" encoding="utf-8"?>
+<p:notes xmlns:a="http://schemas.openxmlformats.org/drawingml/2006/main" xmlns:r="http://schemas.openxmlformats.org/officeDocument/2006/relationships" xmlns:p="http://schemas.openxmlformats.org/presentationml/2006/main" showMasterSp="0" showMasterPhAnim="0">
+  <p:cSld>
+    <p:spTree>
+      <p:nvGrpSpPr>
         <p:cNvPr id="1" name="Shape 135"/>
         <p:cNvGrpSpPr/>
         <p:nvPr/>
@@ -1123,7 +1251,7 @@
 </p:notes>
 </file>
 
-<file path=ppt/notesSlides/notesSlide11.xml><?xml version="1.0" encoding="utf-8"?>
+<file path=ppt/notesSlides/notesSlide12.xml><?xml version="1.0" encoding="utf-8"?>
 <p:notes xmlns:a="http://schemas.openxmlformats.org/drawingml/2006/main" xmlns:r="http://schemas.openxmlformats.org/officeDocument/2006/relationships" xmlns:p="http://schemas.openxmlformats.org/presentationml/2006/main" showMasterSp="0" showMasterPhAnim="0">
   <p:cSld>
     <p:spTree>
@@ -1250,7 +1378,7 @@
 </p:notes>
 </file>
 
-<file path=ppt/notesSlides/notesSlide12.xml><?xml version="1.0" encoding="utf-8"?>
+<file path=ppt/notesSlides/notesSlide13.xml><?xml version="1.0" encoding="utf-8"?>
 <p:notes xmlns:a="http://schemas.openxmlformats.org/drawingml/2006/main" xmlns:r="http://schemas.openxmlformats.org/officeDocument/2006/relationships" xmlns:p="http://schemas.openxmlformats.org/presentationml/2006/main" showMasterSp="0" showMasterPhAnim="0">
   <p:cSld>
     <p:spTree>
@@ -1377,7 +1505,7 @@
 </p:notes>
 </file>
 
-<file path=ppt/notesSlides/notesSlide13.xml><?xml version="1.0" encoding="utf-8"?>
+<file path=ppt/notesSlides/notesSlide14.xml><?xml version="1.0" encoding="utf-8"?>
 <p:notes xmlns:a="http://schemas.openxmlformats.org/drawingml/2006/main" xmlns:r="http://schemas.openxmlformats.org/officeDocument/2006/relationships" xmlns:p="http://schemas.openxmlformats.org/presentationml/2006/main" showMasterSp="0" showMasterPhAnim="0">
   <p:cSld>
     <p:spTree>
@@ -1504,7 +1632,7 @@
 </p:notes>
 </file>
 
-<file path=ppt/notesSlides/notesSlide14.xml><?xml version="1.0" encoding="utf-8"?>
+<file path=ppt/notesSlides/notesSlide15.xml><?xml version="1.0" encoding="utf-8"?>
 <p:notes xmlns:a="http://schemas.openxmlformats.org/drawingml/2006/main" xmlns:r="http://schemas.openxmlformats.org/officeDocument/2006/relationships" xmlns:p="http://schemas.openxmlformats.org/presentationml/2006/main" showMasterSp="0" showMasterPhAnim="0">
   <p:cSld>
     <p:spTree>
@@ -1631,7 +1759,7 @@
 </p:notes>
 </file>
 
-<file path=ppt/notesSlides/notesSlide15.xml><?xml version="1.0" encoding="utf-8"?>
+<file path=ppt/notesSlides/notesSlide16.xml><?xml version="1.0" encoding="utf-8"?>
 <p:notes xmlns:a="http://schemas.openxmlformats.org/drawingml/2006/main" xmlns:r="http://schemas.openxmlformats.org/officeDocument/2006/relationships" xmlns:p="http://schemas.openxmlformats.org/presentationml/2006/main" showMasterSp="0" showMasterPhAnim="0">
   <p:cSld>
     <p:spTree>
@@ -1758,7 +1886,7 @@
 </p:notes>
 </file>
 
-<file path=ppt/notesSlides/notesSlide16.xml><?xml version="1.0" encoding="utf-8"?>
+<file path=ppt/notesSlides/notesSlide17.xml><?xml version="1.0" encoding="utf-8"?>
 <p:notes xmlns:a="http://schemas.openxmlformats.org/drawingml/2006/main" xmlns:r="http://schemas.openxmlformats.org/officeDocument/2006/relationships" xmlns:p="http://schemas.openxmlformats.org/presentationml/2006/main" showMasterSp="0" showMasterPhAnim="0">
   <p:cSld>
     <p:spTree>
@@ -1885,7 +2013,7 @@
 </p:notes>
 </file>
 
-<file path=ppt/notesSlides/notesSlide17.xml><?xml version="1.0" encoding="utf-8"?>
+<file path=ppt/notesSlides/notesSlide18.xml><?xml version="1.0" encoding="utf-8"?>
 <p:notes xmlns:a="http://schemas.openxmlformats.org/drawingml/2006/main" xmlns:r="http://schemas.openxmlformats.org/officeDocument/2006/relationships" xmlns:p="http://schemas.openxmlformats.org/presentationml/2006/main" showMasterSp="0" showMasterPhAnim="0">
   <p:cSld>
     <p:spTree>
@@ -2637,7 +2765,7 @@
     </p:spTree>
     <p:extLst>
       <p:ext uri="{BB962C8B-B14F-4D97-AF65-F5344CB8AC3E}">
-        <p14:creationId xmlns:p14="http://schemas.microsoft.com/office/powerpoint/2010/main" val="3250569624"/>
+        <p14:creationId xmlns:p14="http://schemas.microsoft.com/office/powerpoint/2010/main" val="3560748245"/>
       </p:ext>
     </p:extLst>
   </p:cSld>
@@ -2779,6 +2907,133 @@
   <p:cSld>
     <p:spTree>
       <p:nvGrpSpPr>
+        <p:cNvPr id="1" name="Shape 141"/>
+        <p:cNvGrpSpPr/>
+        <p:nvPr/>
+      </p:nvGrpSpPr>
+      <p:grpSpPr>
+        <a:xfrm>
+          <a:off x="0" y="0"/>
+          <a:ext cx="0" cy="0"/>
+          <a:chOff x="0" y="0"/>
+          <a:chExt cx="0" cy="0"/>
+        </a:xfrm>
+      </p:grpSpPr>
+      <p:sp>
+        <p:nvSpPr>
+          <p:cNvPr id="142" name="Google Shape;142;p9:notes"/>
+          <p:cNvSpPr txBox="1">
+            <a:spLocks noGrp="1"/>
+          </p:cNvSpPr>
+          <p:nvPr>
+            <p:ph type="body" idx="1"/>
+          </p:nvPr>
+        </p:nvSpPr>
+        <p:spPr>
+          <a:xfrm>
+            <a:off x="731500" y="4560550"/>
+            <a:ext cx="5852150" cy="4320525"/>
+          </a:xfrm>
+          <a:prstGeom prst="rect">
+            <a:avLst/>
+          </a:prstGeom>
+          <a:noFill/>
+          <a:ln>
+            <a:noFill/>
+          </a:ln>
+        </p:spPr>
+        <p:txBody>
+          <a:bodyPr spcFirstLastPara="1" wrap="square" lIns="91425" tIns="91425" rIns="91425" bIns="91425" anchor="t" anchorCtr="0">
+            <a:noAutofit/>
+          </a:bodyPr>
+          <a:lstStyle/>
+          <a:p>
+            <a:pPr marL="0" lvl="0" indent="0" algn="l" rtl="0">
+              <a:lnSpc>
+                <a:spcPct val="100000"/>
+              </a:lnSpc>
+              <a:spcBef>
+                <a:spcPts val="0"/>
+              </a:spcBef>
+              <a:spcAft>
+                <a:spcPts val="0"/>
+              </a:spcAft>
+              <a:buSzPts val="1100"/>
+              <a:buNone/>
+            </a:pPr>
+            <a:endParaRPr/>
+          </a:p>
+        </p:txBody>
+      </p:sp>
+      <p:sp>
+        <p:nvSpPr>
+          <p:cNvPr id="143" name="Google Shape;143;p9:notes"/>
+          <p:cNvSpPr>
+            <a:spLocks noGrp="1" noRot="1" noChangeAspect="1"/>
+          </p:cNvSpPr>
+          <p:nvPr>
+            <p:ph type="sldImg" idx="2"/>
+          </p:nvPr>
+        </p:nvSpPr>
+        <p:spPr>
+          <a:xfrm>
+            <a:off x="1257300" y="720725"/>
+            <a:ext cx="4800600" cy="3600450"/>
+          </a:xfrm>
+          <a:custGeom>
+            <a:avLst/>
+            <a:gdLst/>
+            <a:ahLst/>
+            <a:cxnLst/>
+            <a:rect l="l" t="t" r="r" b="b"/>
+            <a:pathLst>
+              <a:path w="120000" h="120000" extrusionOk="0">
+                <a:moveTo>
+                  <a:pt x="0" y="0"/>
+                </a:moveTo>
+                <a:lnTo>
+                  <a:pt x="120000" y="0"/>
+                </a:lnTo>
+                <a:lnTo>
+                  <a:pt x="120000" y="120000"/>
+                </a:lnTo>
+                <a:lnTo>
+                  <a:pt x="0" y="120000"/>
+                </a:lnTo>
+                <a:close/>
+              </a:path>
+            </a:pathLst>
+          </a:custGeom>
+          <a:noFill/>
+          <a:ln w="9525" cap="flat" cmpd="sng">
+            <a:solidFill>
+              <a:srgbClr val="000000"/>
+            </a:solidFill>
+            <a:prstDash val="solid"/>
+            <a:round/>
+            <a:headEnd type="none" w="sm" len="sm"/>
+            <a:tailEnd type="none" w="sm" len="sm"/>
+          </a:ln>
+        </p:spPr>
+      </p:sp>
+    </p:spTree>
+    <p:extLst>
+      <p:ext uri="{BB962C8B-B14F-4D97-AF65-F5344CB8AC3E}">
+        <p14:creationId xmlns:p14="http://schemas.microsoft.com/office/powerpoint/2010/main" val="2979896780"/>
+      </p:ext>
+    </p:extLst>
+  </p:cSld>
+  <p:clrMapOvr>
+    <a:masterClrMapping/>
+  </p:clrMapOvr>
+</p:notes>
+</file>
+
+<file path=ppt/notesSlides/notesSlide9.xml><?xml version="1.0" encoding="utf-8"?>
+<p:notes xmlns:a="http://schemas.openxmlformats.org/drawingml/2006/main" xmlns:r="http://schemas.openxmlformats.org/officeDocument/2006/relationships" xmlns:p="http://schemas.openxmlformats.org/presentationml/2006/main" showMasterSp="0" showMasterPhAnim="0">
+  <p:cSld>
+    <p:spTree>
+      <p:nvGrpSpPr>
         <p:cNvPr id="1" name="Shape 123"/>
         <p:cNvGrpSpPr/>
         <p:nvPr/>
@@ -2892,133 +3147,6 @@
     <p:extLst>
       <p:ext uri="{BB962C8B-B14F-4D97-AF65-F5344CB8AC3E}">
         <p14:creationId xmlns:p14="http://schemas.microsoft.com/office/powerpoint/2010/main" val="13170161"/>
-      </p:ext>
-    </p:extLst>
-  </p:cSld>
-  <p:clrMapOvr>
-    <a:masterClrMapping/>
-  </p:clrMapOvr>
-</p:notes>
-</file>
-
-<file path=ppt/notesSlides/notesSlide9.xml><?xml version="1.0" encoding="utf-8"?>
-<p:notes xmlns:a="http://schemas.openxmlformats.org/drawingml/2006/main" xmlns:r="http://schemas.openxmlformats.org/officeDocument/2006/relationships" xmlns:p="http://schemas.openxmlformats.org/presentationml/2006/main" showMasterSp="0" showMasterPhAnim="0">
-  <p:cSld>
-    <p:spTree>
-      <p:nvGrpSpPr>
-        <p:cNvPr id="1" name="Shape 129"/>
-        <p:cNvGrpSpPr/>
-        <p:nvPr/>
-      </p:nvGrpSpPr>
-      <p:grpSpPr>
-        <a:xfrm>
-          <a:off x="0" y="0"/>
-          <a:ext cx="0" cy="0"/>
-          <a:chOff x="0" y="0"/>
-          <a:chExt cx="0" cy="0"/>
-        </a:xfrm>
-      </p:grpSpPr>
-      <p:sp>
-        <p:nvSpPr>
-          <p:cNvPr id="130" name="Google Shape;130;g2039867fdc9_0_16:notes"/>
-          <p:cNvSpPr txBox="1">
-            <a:spLocks noGrp="1"/>
-          </p:cNvSpPr>
-          <p:nvPr>
-            <p:ph type="body" idx="1"/>
-          </p:nvPr>
-        </p:nvSpPr>
-        <p:spPr>
-          <a:xfrm>
-            <a:off x="731500" y="4560550"/>
-            <a:ext cx="5852100" cy="4320600"/>
-          </a:xfrm>
-          <a:prstGeom prst="rect">
-            <a:avLst/>
-          </a:prstGeom>
-          <a:noFill/>
-          <a:ln>
-            <a:noFill/>
-          </a:ln>
-        </p:spPr>
-        <p:txBody>
-          <a:bodyPr spcFirstLastPara="1" wrap="square" lIns="91425" tIns="91425" rIns="91425" bIns="91425" anchor="t" anchorCtr="0">
-            <a:noAutofit/>
-          </a:bodyPr>
-          <a:lstStyle/>
-          <a:p>
-            <a:pPr marL="0" lvl="0" indent="0" algn="l" rtl="0">
-              <a:lnSpc>
-                <a:spcPct val="100000"/>
-              </a:lnSpc>
-              <a:spcBef>
-                <a:spcPts val="0"/>
-              </a:spcBef>
-              <a:spcAft>
-                <a:spcPts val="0"/>
-              </a:spcAft>
-              <a:buSzPts val="1100"/>
-              <a:buNone/>
-            </a:pPr>
-            <a:endParaRPr/>
-          </a:p>
-        </p:txBody>
-      </p:sp>
-      <p:sp>
-        <p:nvSpPr>
-          <p:cNvPr id="131" name="Google Shape;131;g2039867fdc9_0_16:notes"/>
-          <p:cNvSpPr>
-            <a:spLocks noGrp="1" noRot="1" noChangeAspect="1"/>
-          </p:cNvSpPr>
-          <p:nvPr>
-            <p:ph type="sldImg" idx="2"/>
-          </p:nvPr>
-        </p:nvSpPr>
-        <p:spPr>
-          <a:xfrm>
-            <a:off x="1257300" y="720725"/>
-            <a:ext cx="4800600" cy="3600450"/>
-          </a:xfrm>
-          <a:custGeom>
-            <a:avLst/>
-            <a:gdLst/>
-            <a:ahLst/>
-            <a:cxnLst/>
-            <a:rect l="l" t="t" r="r" b="b"/>
-            <a:pathLst>
-              <a:path w="120000" h="120000" extrusionOk="0">
-                <a:moveTo>
-                  <a:pt x="0" y="0"/>
-                </a:moveTo>
-                <a:lnTo>
-                  <a:pt x="120000" y="0"/>
-                </a:lnTo>
-                <a:lnTo>
-                  <a:pt x="120000" y="120000"/>
-                </a:lnTo>
-                <a:lnTo>
-                  <a:pt x="0" y="120000"/>
-                </a:lnTo>
-                <a:close/>
-              </a:path>
-            </a:pathLst>
-          </a:custGeom>
-          <a:noFill/>
-          <a:ln w="9525" cap="flat" cmpd="sng">
-            <a:solidFill>
-              <a:srgbClr val="000000"/>
-            </a:solidFill>
-            <a:prstDash val="solid"/>
-            <a:round/>
-            <a:headEnd type="none" w="sm" len="sm"/>
-            <a:tailEnd type="none" w="sm" len="sm"/>
-          </a:ln>
-        </p:spPr>
-      </p:sp>
-    </p:spTree>
-    <p:extLst>
-      <p:ext uri="{BB962C8B-B14F-4D97-AF65-F5344CB8AC3E}">
-        <p14:creationId xmlns:p14="http://schemas.microsoft.com/office/powerpoint/2010/main" val="3778490037"/>
       </p:ext>
     </p:extLst>
   </p:cSld>
@@ -16405,7 +16533,7 @@
         <p:spPr>
           <a:xfrm>
             <a:off x="1371600" y="3886200"/>
-            <a:ext cx="6400800" cy="1752600"/>
+            <a:ext cx="6400800" cy="2255982"/>
           </a:xfrm>
           <a:prstGeom prst="rect">
             <a:avLst/>
@@ -16423,7 +16551,7 @@
           <a:p>
             <a:pPr algn="ctr"/>
             <a:r>
-              <a:rPr sz="1800" b="0">
+              <a:rPr sz="1800" b="1" dirty="0">
                 <a:solidFill>
                   <a:srgbClr val="141414"/>
                 </a:solidFill>
@@ -16435,18 +16563,24 @@
           <a:p>
             <a:pPr algn="ctr"/>
             <a:r>
-              <a:rPr sz="1800" b="0">
+              <a:rPr sz="1800" dirty="0">
                 <a:solidFill>
                   <a:srgbClr val="141414"/>
                 </a:solidFill>
                 <a:latin typeface="Arial"/>
               </a:rPr>
-              <a:t>A Blockchain Based Secure First Information Report Management System for the Pakistan Police</a:t>
-            </a:r>
-          </a:p>
-          <a:p>
-            <a:pPr algn="ctr"/>
-            <a:endParaRPr sz="1800" b="0">
+              <a:t>A Blockchain Based Secure First Information Report Management </a:t>
+            </a:r>
+            <a:r>
+              <a:rPr sz="1800" dirty="0" smtClean="0">
+                <a:solidFill>
+                  <a:srgbClr val="141414"/>
+                </a:solidFill>
+                <a:latin typeface="Arial"/>
+              </a:rPr>
+              <a:t>System</a:t>
+            </a:r>
+            <a:endParaRPr lang="en-US" sz="1800" dirty="0" smtClean="0">
               <a:solidFill>
                 <a:srgbClr val="141414"/>
               </a:solidFill>
@@ -16455,15 +16589,75 @@
           </a:p>
           <a:p>
             <a:pPr algn="ctr"/>
-            <a:r>
-              <a:rPr sz="1800" b="0">
+            <a:endParaRPr lang="en-US" sz="1800" b="0" dirty="0" smtClean="0">
+              <a:solidFill>
+                <a:srgbClr val="141414"/>
+              </a:solidFill>
+              <a:latin typeface="Arial"/>
+            </a:endParaRPr>
+          </a:p>
+          <a:p>
+            <a:pPr algn="ctr"/>
+            <a:endParaRPr sz="1800" b="0" dirty="0">
+              <a:solidFill>
+                <a:srgbClr val="141414"/>
+              </a:solidFill>
+              <a:latin typeface="Arial"/>
+            </a:endParaRPr>
+          </a:p>
+          <a:p>
+            <a:pPr algn="ctr"/>
+            <a:r>
+              <a:rPr sz="1800" b="1" dirty="0">
                 <a:solidFill>
                   <a:srgbClr val="141414"/>
                 </a:solidFill>
                 <a:latin typeface="Arial"/>
               </a:rPr>
-              <a:t>Supervised By: Tabassum Javed</a:t>
-            </a:r>
+              <a:t>Supervised By:</a:t>
+            </a:r>
+            <a:r>
+              <a:rPr sz="1800" b="0" dirty="0">
+                <a:solidFill>
+                  <a:srgbClr val="141414"/>
+                </a:solidFill>
+                <a:latin typeface="Arial"/>
+              </a:rPr>
+              <a:t> </a:t>
+            </a:r>
+            <a:r>
+              <a:rPr sz="1800" b="0" dirty="0" err="1">
+                <a:solidFill>
+                  <a:srgbClr val="141414"/>
+                </a:solidFill>
+                <a:latin typeface="Arial"/>
+              </a:rPr>
+              <a:t>Tabassum</a:t>
+            </a:r>
+            <a:r>
+              <a:rPr sz="1800" b="0" dirty="0">
+                <a:solidFill>
+                  <a:srgbClr val="141414"/>
+                </a:solidFill>
+                <a:latin typeface="Arial"/>
+              </a:rPr>
+              <a:t> </a:t>
+            </a:r>
+            <a:r>
+              <a:rPr sz="1800" b="0" dirty="0" err="1">
+                <a:solidFill>
+                  <a:srgbClr val="141414"/>
+                </a:solidFill>
+                <a:latin typeface="Arial"/>
+              </a:rPr>
+              <a:t>Javed</a:t>
+            </a:r>
+            <a:endParaRPr sz="1800" b="0" dirty="0">
+              <a:solidFill>
+                <a:srgbClr val="141414"/>
+              </a:solidFill>
+              <a:latin typeface="Arial"/>
+            </a:endParaRPr>
           </a:p>
         </p:txBody>
       </p:sp>
@@ -16526,6 +16720,673 @@
   <p:cSld>
     <p:spTree>
       <p:nvGrpSpPr>
+        <p:cNvPr id="1" name="Shape 132"/>
+        <p:cNvGrpSpPr/>
+        <p:nvPr/>
+      </p:nvGrpSpPr>
+      <p:grpSpPr>
+        <a:xfrm>
+          <a:off x="0" y="0"/>
+          <a:ext cx="0" cy="0"/>
+          <a:chOff x="0" y="0"/>
+          <a:chExt cx="0" cy="0"/>
+        </a:xfrm>
+      </p:grpSpPr>
+      <p:sp>
+        <p:nvSpPr>
+          <p:cNvPr id="133" name="Google Shape;133;g2039867fdc9_0_16"/>
+          <p:cNvSpPr txBox="1">
+            <a:spLocks noGrp="1"/>
+          </p:cNvSpPr>
+          <p:nvPr>
+            <p:ph type="title"/>
+          </p:nvPr>
+        </p:nvSpPr>
+        <p:spPr>
+          <a:xfrm>
+            <a:off x="457200" y="274638"/>
+            <a:ext cx="8229600" cy="1143000"/>
+          </a:xfrm>
+          <a:prstGeom prst="rect">
+            <a:avLst/>
+          </a:prstGeom>
+          <a:noFill/>
+          <a:ln>
+            <a:noFill/>
+          </a:ln>
+        </p:spPr>
+        <p:txBody>
+          <a:bodyPr spcFirstLastPara="1" wrap="square" lIns="45720" tIns="18288" rIns="45720" bIns="18288" anchor="ctr" anchorCtr="0">
+            <a:noAutofit/>
+          </a:bodyPr>
+          <a:lstStyle/>
+          <a:p>
+            <a:r>
+              <a:rPr sz="2600" b="1">
+                <a:solidFill>
+                  <a:srgbClr val="1F497D"/>
+                </a:solidFill>
+                <a:latin typeface="Arial"/>
+              </a:rPr>
+              <a:t>Research Gap and Novelty</a:t>
+            </a:r>
+          </a:p>
+        </p:txBody>
+      </p:sp>
+      <p:sp>
+        <p:nvSpPr>
+          <p:cNvPr id="135" name="Rounded Rectangle 134"/>
+          <p:cNvSpPr/>
+          <p:nvPr/>
+        </p:nvSpPr>
+        <p:spPr>
+          <a:xfrm>
+            <a:off x="594360" y="1417320"/>
+            <a:ext cx="3703320" cy="1920240"/>
+          </a:xfrm>
+          <a:prstGeom prst="roundRect">
+            <a:avLst/>
+          </a:prstGeom>
+          <a:solidFill>
+            <a:srgbClr val="FFFFFF"/>
+          </a:solidFill>
+          <a:ln w="12700">
+            <a:solidFill>
+              <a:srgbClr val="CDD4DC"/>
+            </a:solidFill>
+          </a:ln>
+        </p:spPr>
+        <p:style>
+          <a:lnRef idx="1">
+            <a:schemeClr val="accent1"/>
+          </a:lnRef>
+          <a:fillRef idx="3">
+            <a:schemeClr val="accent1"/>
+          </a:fillRef>
+          <a:effectRef idx="2">
+            <a:schemeClr val="accent1"/>
+          </a:effectRef>
+          <a:fontRef idx="minor">
+            <a:schemeClr val="lt1"/>
+          </a:fontRef>
+        </p:style>
+        <p:txBody>
+          <a:bodyPr wrap="square" rtlCol="0" anchor="ctr"/>
+          <a:lstStyle/>
+          <a:p>
+            <a:pPr algn="ctr"/>
+            <a:endParaRPr/>
+          </a:p>
+        </p:txBody>
+      </p:sp>
+      <p:sp>
+        <p:nvSpPr>
+          <p:cNvPr id="136" name="Rectangle 135"/>
+          <p:cNvSpPr/>
+          <p:nvPr/>
+        </p:nvSpPr>
+        <p:spPr>
+          <a:xfrm>
+            <a:off x="594360" y="1417320"/>
+            <a:ext cx="64008" cy="1920240"/>
+          </a:xfrm>
+          <a:prstGeom prst="rect">
+            <a:avLst/>
+          </a:prstGeom>
+          <a:solidFill>
+            <a:srgbClr val="1F497D"/>
+          </a:solidFill>
+          <a:ln>
+            <a:noFill/>
+          </a:ln>
+        </p:spPr>
+        <p:style>
+          <a:lnRef idx="1">
+            <a:schemeClr val="accent1"/>
+          </a:lnRef>
+          <a:fillRef idx="3">
+            <a:schemeClr val="accent1"/>
+          </a:fillRef>
+          <a:effectRef idx="2">
+            <a:schemeClr val="accent1"/>
+          </a:effectRef>
+          <a:fontRef idx="minor">
+            <a:schemeClr val="lt1"/>
+          </a:fontRef>
+        </p:style>
+        <p:txBody>
+          <a:bodyPr wrap="square" rtlCol="0" anchor="ctr"/>
+          <a:lstStyle/>
+          <a:p>
+            <a:pPr algn="ctr"/>
+            <a:endParaRPr/>
+          </a:p>
+        </p:txBody>
+      </p:sp>
+      <p:sp>
+        <p:nvSpPr>
+          <p:cNvPr id="137" name="TextBox 136"/>
+          <p:cNvSpPr txBox="1"/>
+          <p:nvPr/>
+        </p:nvSpPr>
+        <p:spPr>
+          <a:xfrm>
+            <a:off x="749808" y="1527048"/>
+            <a:ext cx="3474720" cy="332399"/>
+          </a:xfrm>
+          <a:prstGeom prst="rect">
+            <a:avLst/>
+          </a:prstGeom>
+          <a:noFill/>
+        </p:spPr>
+        <p:txBody>
+          <a:bodyPr wrap="square" lIns="36576" tIns="27432" rIns="36576" bIns="27432">
+            <a:spAutoFit/>
+          </a:bodyPr>
+          <a:lstStyle/>
+          <a:p>
+            <a:pPr algn="l"/>
+            <a:r>
+              <a:rPr sz="1800" b="1" dirty="0">
+                <a:solidFill>
+                  <a:srgbClr val="1F497D"/>
+                </a:solidFill>
+                <a:latin typeface="Arial"/>
+              </a:rPr>
+              <a:t>Existing capability</a:t>
+            </a:r>
+          </a:p>
+        </p:txBody>
+      </p:sp>
+      <p:sp>
+        <p:nvSpPr>
+          <p:cNvPr id="138" name="TextBox 137"/>
+          <p:cNvSpPr txBox="1"/>
+          <p:nvPr/>
+        </p:nvSpPr>
+        <p:spPr>
+          <a:xfrm>
+            <a:off x="749808" y="2003364"/>
+            <a:ext cx="3474720" cy="794064"/>
+          </a:xfrm>
+          <a:prstGeom prst="rect">
+            <a:avLst/>
+          </a:prstGeom>
+          <a:noFill/>
+        </p:spPr>
+        <p:txBody>
+          <a:bodyPr wrap="square" lIns="36576" tIns="27432" rIns="36576" bIns="27432">
+            <a:spAutoFit/>
+          </a:bodyPr>
+          <a:lstStyle/>
+          <a:p>
+            <a:pPr algn="l"/>
+            <a:r>
+              <a:rPr sz="1600" b="0" dirty="0">
+                <a:solidFill>
+                  <a:srgbClr val="141414"/>
+                </a:solidFill>
+                <a:latin typeface="Arial"/>
+              </a:rPr>
+              <a:t>Digital complaints, FIR records, tracking, </a:t>
+            </a:r>
+            <a:r>
+              <a:rPr sz="1600" b="0" dirty="0" smtClean="0">
+                <a:solidFill>
+                  <a:srgbClr val="141414"/>
+                </a:solidFill>
+                <a:latin typeface="Arial"/>
+              </a:rPr>
+              <a:t>assignment</a:t>
+            </a:r>
+            <a:r>
+              <a:rPr lang="en-US" sz="1600" b="0" dirty="0" smtClean="0">
+                <a:solidFill>
+                  <a:srgbClr val="141414"/>
+                </a:solidFill>
+                <a:latin typeface="Arial"/>
+              </a:rPr>
+              <a:t> and</a:t>
+            </a:r>
+            <a:r>
+              <a:rPr sz="1600" b="0" dirty="0" smtClean="0">
+                <a:solidFill>
+                  <a:srgbClr val="141414"/>
+                </a:solidFill>
+                <a:latin typeface="Arial"/>
+              </a:rPr>
+              <a:t> </a:t>
+            </a:r>
+            <a:r>
+              <a:rPr sz="1600" b="0" dirty="0">
+                <a:solidFill>
+                  <a:srgbClr val="141414"/>
+                </a:solidFill>
+                <a:latin typeface="Arial"/>
+              </a:rPr>
+              <a:t>supervisory monitoring already exist.</a:t>
+            </a:r>
+          </a:p>
+        </p:txBody>
+      </p:sp>
+      <p:sp>
+        <p:nvSpPr>
+          <p:cNvPr id="139" name="Rounded Rectangle 138"/>
+          <p:cNvSpPr/>
+          <p:nvPr/>
+        </p:nvSpPr>
+        <p:spPr>
+          <a:xfrm>
+            <a:off x="4572000" y="1417320"/>
+            <a:ext cx="3703320" cy="1920240"/>
+          </a:xfrm>
+          <a:prstGeom prst="roundRect">
+            <a:avLst/>
+          </a:prstGeom>
+          <a:solidFill>
+            <a:srgbClr val="FFFFFF"/>
+          </a:solidFill>
+          <a:ln w="12700">
+            <a:solidFill>
+              <a:srgbClr val="CDD4DC"/>
+            </a:solidFill>
+          </a:ln>
+        </p:spPr>
+        <p:style>
+          <a:lnRef idx="1">
+            <a:schemeClr val="accent1"/>
+          </a:lnRef>
+          <a:fillRef idx="3">
+            <a:schemeClr val="accent1"/>
+          </a:fillRef>
+          <a:effectRef idx="2">
+            <a:schemeClr val="accent1"/>
+          </a:effectRef>
+          <a:fontRef idx="minor">
+            <a:schemeClr val="lt1"/>
+          </a:fontRef>
+        </p:style>
+        <p:txBody>
+          <a:bodyPr wrap="square" rtlCol="0" anchor="ctr"/>
+          <a:lstStyle/>
+          <a:p>
+            <a:pPr algn="ctr"/>
+            <a:endParaRPr/>
+          </a:p>
+        </p:txBody>
+      </p:sp>
+      <p:sp>
+        <p:nvSpPr>
+          <p:cNvPr id="140" name="Rectangle 139"/>
+          <p:cNvSpPr/>
+          <p:nvPr/>
+        </p:nvSpPr>
+        <p:spPr>
+          <a:xfrm>
+            <a:off x="4572000" y="1417320"/>
+            <a:ext cx="64008" cy="1920240"/>
+          </a:xfrm>
+          <a:prstGeom prst="rect">
+            <a:avLst/>
+          </a:prstGeom>
+          <a:solidFill>
+            <a:srgbClr val="DAA520"/>
+          </a:solidFill>
+          <a:ln>
+            <a:noFill/>
+          </a:ln>
+        </p:spPr>
+        <p:style>
+          <a:lnRef idx="1">
+            <a:schemeClr val="accent1"/>
+          </a:lnRef>
+          <a:fillRef idx="3">
+            <a:schemeClr val="accent1"/>
+          </a:fillRef>
+          <a:effectRef idx="2">
+            <a:schemeClr val="accent1"/>
+          </a:effectRef>
+          <a:fontRef idx="minor">
+            <a:schemeClr val="lt1"/>
+          </a:fontRef>
+        </p:style>
+        <p:txBody>
+          <a:bodyPr wrap="square" rtlCol="0" anchor="ctr"/>
+          <a:lstStyle/>
+          <a:p>
+            <a:pPr algn="ctr"/>
+            <a:endParaRPr/>
+          </a:p>
+        </p:txBody>
+      </p:sp>
+      <p:sp>
+        <p:nvSpPr>
+          <p:cNvPr id="141" name="TextBox 140"/>
+          <p:cNvSpPr txBox="1"/>
+          <p:nvPr/>
+        </p:nvSpPr>
+        <p:spPr>
+          <a:xfrm>
+            <a:off x="4727448" y="1527048"/>
+            <a:ext cx="3474720" cy="332399"/>
+          </a:xfrm>
+          <a:prstGeom prst="rect">
+            <a:avLst/>
+          </a:prstGeom>
+          <a:noFill/>
+        </p:spPr>
+        <p:txBody>
+          <a:bodyPr wrap="square" lIns="36576" tIns="27432" rIns="36576" bIns="27432">
+            <a:spAutoFit/>
+          </a:bodyPr>
+          <a:lstStyle/>
+          <a:p>
+            <a:pPr algn="l"/>
+            <a:r>
+              <a:rPr sz="1800" b="1" dirty="0">
+                <a:solidFill>
+                  <a:srgbClr val="DAA520"/>
+                </a:solidFill>
+                <a:latin typeface="Arial"/>
+              </a:rPr>
+              <a:t>Identified gap</a:t>
+            </a:r>
+          </a:p>
+        </p:txBody>
+      </p:sp>
+      <p:sp>
+        <p:nvSpPr>
+          <p:cNvPr id="142" name="TextBox 141"/>
+          <p:cNvSpPr txBox="1"/>
+          <p:nvPr/>
+        </p:nvSpPr>
+        <p:spPr>
+          <a:xfrm>
+            <a:off x="4727448" y="2012603"/>
+            <a:ext cx="3474720" cy="794064"/>
+          </a:xfrm>
+          <a:prstGeom prst="rect">
+            <a:avLst/>
+          </a:prstGeom>
+          <a:noFill/>
+        </p:spPr>
+        <p:txBody>
+          <a:bodyPr wrap="square" lIns="36576" tIns="27432" rIns="36576" bIns="27432">
+            <a:spAutoFit/>
+          </a:bodyPr>
+          <a:lstStyle/>
+          <a:p>
+            <a:pPr algn="l"/>
+            <a:r>
+              <a:rPr sz="1600" b="0" dirty="0">
+                <a:solidFill>
+                  <a:srgbClr val="141414"/>
+                </a:solidFill>
+                <a:latin typeface="Arial"/>
+              </a:rPr>
+              <a:t>Publicly documented systems do not identify permissioned blockchain integrity as a core feature.</a:t>
+            </a:r>
+          </a:p>
+        </p:txBody>
+      </p:sp>
+      <p:sp>
+        <p:nvSpPr>
+          <p:cNvPr id="143" name="Rounded Rectangle 142"/>
+          <p:cNvSpPr/>
+          <p:nvPr/>
+        </p:nvSpPr>
+        <p:spPr>
+          <a:xfrm>
+            <a:off x="594360" y="3566160"/>
+            <a:ext cx="7680960" cy="1965960"/>
+          </a:xfrm>
+          <a:prstGeom prst="roundRect">
+            <a:avLst/>
+          </a:prstGeom>
+          <a:solidFill>
+            <a:srgbClr val="FFFFFF"/>
+          </a:solidFill>
+          <a:ln w="12700">
+            <a:solidFill>
+              <a:srgbClr val="CDD4DC"/>
+            </a:solidFill>
+          </a:ln>
+        </p:spPr>
+        <p:style>
+          <a:lnRef idx="1">
+            <a:schemeClr val="accent1"/>
+          </a:lnRef>
+          <a:fillRef idx="3">
+            <a:schemeClr val="accent1"/>
+          </a:fillRef>
+          <a:effectRef idx="2">
+            <a:schemeClr val="accent1"/>
+          </a:effectRef>
+          <a:fontRef idx="minor">
+            <a:schemeClr val="lt1"/>
+          </a:fontRef>
+        </p:style>
+        <p:txBody>
+          <a:bodyPr wrap="square" rtlCol="0" anchor="ctr"/>
+          <a:lstStyle/>
+          <a:p>
+            <a:pPr algn="ctr"/>
+            <a:endParaRPr/>
+          </a:p>
+        </p:txBody>
+      </p:sp>
+      <p:sp>
+        <p:nvSpPr>
+          <p:cNvPr id="144" name="Rectangle 143"/>
+          <p:cNvSpPr/>
+          <p:nvPr/>
+        </p:nvSpPr>
+        <p:spPr>
+          <a:xfrm>
+            <a:off x="594360" y="3566160"/>
+            <a:ext cx="64008" cy="1965960"/>
+          </a:xfrm>
+          <a:prstGeom prst="rect">
+            <a:avLst/>
+          </a:prstGeom>
+          <a:solidFill>
+            <a:srgbClr val="1F497D"/>
+          </a:solidFill>
+          <a:ln>
+            <a:noFill/>
+          </a:ln>
+        </p:spPr>
+        <p:style>
+          <a:lnRef idx="1">
+            <a:schemeClr val="accent1"/>
+          </a:lnRef>
+          <a:fillRef idx="3">
+            <a:schemeClr val="accent1"/>
+          </a:fillRef>
+          <a:effectRef idx="2">
+            <a:schemeClr val="accent1"/>
+          </a:effectRef>
+          <a:fontRef idx="minor">
+            <a:schemeClr val="lt1"/>
+          </a:fontRef>
+        </p:style>
+        <p:txBody>
+          <a:bodyPr wrap="square" rtlCol="0" anchor="ctr"/>
+          <a:lstStyle/>
+          <a:p>
+            <a:pPr algn="ctr"/>
+            <a:endParaRPr/>
+          </a:p>
+        </p:txBody>
+      </p:sp>
+      <p:sp>
+        <p:nvSpPr>
+          <p:cNvPr id="145" name="TextBox 144"/>
+          <p:cNvSpPr txBox="1"/>
+          <p:nvPr/>
+        </p:nvSpPr>
+        <p:spPr>
+          <a:xfrm>
+            <a:off x="749808" y="3675887"/>
+            <a:ext cx="7452360" cy="332399"/>
+          </a:xfrm>
+          <a:prstGeom prst="rect">
+            <a:avLst/>
+          </a:prstGeom>
+          <a:noFill/>
+        </p:spPr>
+        <p:txBody>
+          <a:bodyPr wrap="square" lIns="36576" tIns="27432" rIns="36576" bIns="27432">
+            <a:spAutoFit/>
+          </a:bodyPr>
+          <a:lstStyle/>
+          <a:p>
+            <a:pPr algn="l"/>
+            <a:r>
+              <a:rPr sz="1800" b="1" dirty="0">
+                <a:solidFill>
+                  <a:srgbClr val="1F497D"/>
+                </a:solidFill>
+                <a:latin typeface="Arial"/>
+              </a:rPr>
+              <a:t>Project novelty</a:t>
+            </a:r>
+          </a:p>
+        </p:txBody>
+      </p:sp>
+      <p:sp>
+        <p:nvSpPr>
+          <p:cNvPr id="146" name="TextBox 145"/>
+          <p:cNvSpPr txBox="1"/>
+          <p:nvPr/>
+        </p:nvSpPr>
+        <p:spPr>
+          <a:xfrm>
+            <a:off x="749808" y="4170677"/>
+            <a:ext cx="7452360" cy="794064"/>
+          </a:xfrm>
+          <a:prstGeom prst="rect">
+            <a:avLst/>
+          </a:prstGeom>
+          <a:noFill/>
+        </p:spPr>
+        <p:txBody>
+          <a:bodyPr wrap="square" lIns="36576" tIns="27432" rIns="36576" bIns="27432">
+            <a:spAutoFit/>
+          </a:bodyPr>
+          <a:lstStyle/>
+          <a:p>
+            <a:pPr algn="l">
+              <a:lnSpc>
+                <a:spcPct val="150000"/>
+              </a:lnSpc>
+            </a:pPr>
+            <a:r>
+              <a:rPr sz="1600" b="0" dirty="0">
+                <a:solidFill>
+                  <a:srgbClr val="141414"/>
+                </a:solidFill>
+                <a:latin typeface="Arial"/>
+              </a:rPr>
+              <a:t>Integration of FIR workflow + permissioned blockchain + SHA 256 integrity checks + role based authorization + auditable evidence metadata.</a:t>
+            </a:r>
+          </a:p>
+        </p:txBody>
+      </p:sp>
+      <p:sp>
+        <p:nvSpPr>
+          <p:cNvPr id="147" name="TextBox 146"/>
+          <p:cNvSpPr txBox="1"/>
+          <p:nvPr/>
+        </p:nvSpPr>
+        <p:spPr>
+          <a:xfrm>
+            <a:off x="350982" y="5595667"/>
+            <a:ext cx="8100291" cy="270843"/>
+          </a:xfrm>
+          <a:prstGeom prst="rect">
+            <a:avLst/>
+          </a:prstGeom>
+          <a:noFill/>
+        </p:spPr>
+        <p:txBody>
+          <a:bodyPr wrap="square" lIns="36576" tIns="27432" rIns="36576" bIns="27432">
+            <a:spAutoFit/>
+          </a:bodyPr>
+          <a:lstStyle/>
+          <a:p>
+            <a:pPr algn="ctr"/>
+            <a:r>
+              <a:rPr sz="1400" b="1" dirty="0">
+                <a:solidFill>
+                  <a:srgbClr val="1F497D"/>
+                </a:solidFill>
+                <a:latin typeface="Arial"/>
+              </a:rPr>
+              <a:t>Research focus: strengthen integrity verification, </a:t>
+            </a:r>
+            <a:r>
+              <a:rPr sz="1400" b="1" dirty="0" smtClean="0">
+                <a:solidFill>
+                  <a:srgbClr val="1F497D"/>
+                </a:solidFill>
+                <a:latin typeface="Arial"/>
+              </a:rPr>
+              <a:t>traceability</a:t>
+            </a:r>
+            <a:r>
+              <a:rPr lang="en-US" sz="1400" b="1" dirty="0" smtClean="0">
+                <a:solidFill>
+                  <a:srgbClr val="1F497D"/>
+                </a:solidFill>
+                <a:latin typeface="Arial"/>
+              </a:rPr>
+              <a:t> and</a:t>
+            </a:r>
+            <a:r>
+              <a:rPr sz="1400" b="1" dirty="0" smtClean="0">
+                <a:solidFill>
+                  <a:srgbClr val="1F497D"/>
+                </a:solidFill>
+                <a:latin typeface="Arial"/>
+              </a:rPr>
+              <a:t> </a:t>
+            </a:r>
+            <a:r>
+              <a:rPr sz="1400" b="1" dirty="0">
+                <a:solidFill>
+                  <a:srgbClr val="1F497D"/>
+                </a:solidFill>
+                <a:latin typeface="Arial"/>
+              </a:rPr>
+              <a:t>tamper evident auditing.</a:t>
+            </a:r>
+          </a:p>
+        </p:txBody>
+      </p:sp>
+    </p:spTree>
+  </p:cSld>
+  <p:clrMapOvr>
+    <a:masterClrMapping/>
+  </p:clrMapOvr>
+  <p:transition spd="slow">
+    <p:randomBar dir="vert"/>
+  </p:transition>
+  <p:timing>
+    <p:tnLst>
+      <p:par>
+        <p:cTn id="1" dur="indefinite" restart="never" nodeType="tmRoot"/>
+      </p:par>
+    </p:tnLst>
+  </p:timing>
+</p:sld>
+</file>
+
+<file path=ppt/slides/slide11.xml><?xml version="1.0" encoding="utf-8"?>
+<p:sld xmlns:a="http://schemas.openxmlformats.org/drawingml/2006/main" xmlns:r="http://schemas.openxmlformats.org/officeDocument/2006/relationships" xmlns:p="http://schemas.openxmlformats.org/presentationml/2006/main">
+  <p:cSld>
+    <p:spTree>
+      <p:nvGrpSpPr>
         <p:cNvPr id="1" name="Shape 138"/>
         <p:cNvGrpSpPr/>
         <p:nvPr/>
@@ -16606,7 +17467,7 @@
 </p:sld>
 </file>
 
-<file path=ppt/slides/slide11.xml><?xml version="1.0" encoding="utf-8"?>
+<file path=ppt/slides/slide12.xml><?xml version="1.0" encoding="utf-8"?>
 <p:sld xmlns:a="http://schemas.openxmlformats.org/drawingml/2006/main" xmlns:r="http://schemas.openxmlformats.org/officeDocument/2006/relationships" xmlns:p="http://schemas.openxmlformats.org/presentationml/2006/main">
   <p:cSld>
     <p:spTree>
@@ -16653,7 +17514,7 @@
           <a:lstStyle/>
           <a:p>
             <a:r>
-              <a:rPr sz="2600" b="1">
+              <a:rPr sz="2600" b="1" dirty="0">
                 <a:solidFill>
                   <a:srgbClr val="1F497D"/>
                 </a:solidFill>
@@ -16672,8 +17533,8 @@
         </p:nvSpPr>
         <p:spPr>
           <a:xfrm>
-            <a:off x="594360" y="1417320"/>
-            <a:ext cx="7726679" cy="886397"/>
+            <a:off x="594360" y="1269542"/>
+            <a:ext cx="7726679" cy="1250599"/>
           </a:xfrm>
           <a:prstGeom prst="rect">
             <a:avLst/>
@@ -16686,7 +17547,11 @@
           </a:bodyPr>
           <a:lstStyle/>
           <a:p>
-            <a:pPr algn="l"/>
+            <a:pPr algn="l">
+              <a:lnSpc>
+                <a:spcPct val="150000"/>
+              </a:lnSpc>
+            </a:pPr>
             <a:r>
               <a:rPr sz="1800" b="0" dirty="0">
                 <a:solidFill>
@@ -16779,7 +17644,7 @@
         <p:spPr>
           <a:xfrm>
             <a:off x="594360" y="3154680"/>
-            <a:ext cx="3703320" cy="2423160"/>
+            <a:ext cx="3703320" cy="2722797"/>
           </a:xfrm>
           <a:prstGeom prst="rect">
             <a:avLst/>
@@ -16792,10 +17657,12 @@
           </a:bodyPr>
           <a:lstStyle/>
           <a:p>
-            <a:pPr>
+            <a:pPr marL="285750" indent="-285750">
               <a:spcAft>
                 <a:spcPts val="400"/>
               </a:spcAft>
+              <a:buFont typeface="Wingdings" panose="05000000000000000000" pitchFamily="2" charset="2"/>
+              <a:buChar char="v"/>
               <a:defRPr sz="1500">
                 <a:solidFill>
                   <a:srgbClr val="141414"/>
@@ -16804,17 +17671,25 @@
               </a:defRPr>
             </a:pPr>
             <a:r>
-              <a:rPr>
-                <a:latin typeface="Arial"/>
-              </a:rPr>
-              <a:t>• Create a role based digital FIR interface</a:t>
-            </a:r>
-          </a:p>
-          <a:p>
-            <a:pPr>
+              <a:rPr sz="1600" dirty="0" smtClean="0">
+                <a:latin typeface="Arial"/>
+              </a:rPr>
+              <a:t>Create </a:t>
+            </a:r>
+            <a:r>
+              <a:rPr sz="1600" dirty="0">
+                <a:latin typeface="Arial"/>
+              </a:rPr>
+              <a:t>a role based digital FIR interface</a:t>
+            </a:r>
+          </a:p>
+          <a:p>
+            <a:pPr marL="285750" indent="-285750">
               <a:spcAft>
                 <a:spcPts val="400"/>
               </a:spcAft>
+              <a:buFont typeface="Wingdings" panose="05000000000000000000" pitchFamily="2" charset="2"/>
+              <a:buChar char="v"/>
               <a:defRPr sz="1500">
                 <a:solidFill>
                   <a:srgbClr val="141414"/>
@@ -16823,17 +17698,25 @@
               </a:defRPr>
             </a:pPr>
             <a:r>
-              <a:rPr>
-                <a:latin typeface="Arial"/>
-              </a:rPr>
-              <a:t>• Secure authentication and backend authorization</a:t>
-            </a:r>
-          </a:p>
-          <a:p>
-            <a:pPr>
+              <a:rPr sz="1600" dirty="0" smtClean="0">
+                <a:latin typeface="Arial"/>
+              </a:rPr>
+              <a:t>Secure </a:t>
+            </a:r>
+            <a:r>
+              <a:rPr sz="1600" dirty="0">
+                <a:latin typeface="Arial"/>
+              </a:rPr>
+              <a:t>authentication and backend authorization</a:t>
+            </a:r>
+          </a:p>
+          <a:p>
+            <a:pPr marL="285750" indent="-285750">
               <a:spcAft>
                 <a:spcPts val="400"/>
               </a:spcAft>
+              <a:buFont typeface="Wingdings" panose="05000000000000000000" pitchFamily="2" charset="2"/>
+              <a:buChar char="v"/>
               <a:defRPr sz="1500">
                 <a:solidFill>
                   <a:srgbClr val="141414"/>
@@ -16842,17 +17725,40 @@
               </a:defRPr>
             </a:pPr>
             <a:r>
-              <a:rPr>
-                <a:latin typeface="Arial"/>
-              </a:rPr>
-              <a:t>• Integrate Hyperledger Fabric and chaincode</a:t>
-            </a:r>
-          </a:p>
-          <a:p>
-            <a:pPr>
+              <a:rPr sz="1600" dirty="0" smtClean="0">
+                <a:latin typeface="Arial"/>
+              </a:rPr>
+              <a:t>Integrate </a:t>
+            </a:r>
+            <a:r>
+              <a:rPr sz="1600" dirty="0" err="1">
+                <a:latin typeface="Arial"/>
+              </a:rPr>
+              <a:t>Hyperledger</a:t>
+            </a:r>
+            <a:r>
+              <a:rPr sz="1600" dirty="0">
+                <a:latin typeface="Arial"/>
+              </a:rPr>
+              <a:t> Fabric and </a:t>
+            </a:r>
+            <a:r>
+              <a:rPr sz="1600" dirty="0" err="1">
+                <a:latin typeface="Arial"/>
+              </a:rPr>
+              <a:t>chaincode</a:t>
+            </a:r>
+            <a:endParaRPr sz="1600" dirty="0">
+              <a:latin typeface="Arial"/>
+            </a:endParaRPr>
+          </a:p>
+          <a:p>
+            <a:pPr marL="285750" indent="-285750">
               <a:spcAft>
                 <a:spcPts val="400"/>
               </a:spcAft>
+              <a:buFont typeface="Wingdings" panose="05000000000000000000" pitchFamily="2" charset="2"/>
+              <a:buChar char="v"/>
               <a:defRPr sz="1500">
                 <a:solidFill>
                   <a:srgbClr val="141414"/>
@@ -16861,17 +17767,25 @@
               </a:defRPr>
             </a:pPr>
             <a:r>
-              <a:rPr>
-                <a:latin typeface="Arial"/>
-              </a:rPr>
-              <a:t>• Use SHA 256 for record and document integrity</a:t>
-            </a:r>
-          </a:p>
-          <a:p>
-            <a:pPr>
+              <a:rPr sz="1600" dirty="0" smtClean="0">
+                <a:latin typeface="Arial"/>
+              </a:rPr>
+              <a:t>Use </a:t>
+            </a:r>
+            <a:r>
+              <a:rPr sz="1600" dirty="0">
+                <a:latin typeface="Arial"/>
+              </a:rPr>
+              <a:t>SHA 256 for record and document integrity</a:t>
+            </a:r>
+          </a:p>
+          <a:p>
+            <a:pPr marL="285750" indent="-285750">
               <a:spcAft>
                 <a:spcPts val="400"/>
               </a:spcAft>
+              <a:buFont typeface="Wingdings" panose="05000000000000000000" pitchFamily="2" charset="2"/>
+              <a:buChar char="v"/>
               <a:defRPr sz="1500">
                 <a:solidFill>
                   <a:srgbClr val="141414"/>
@@ -16880,10 +17794,16 @@
               </a:defRPr>
             </a:pPr>
             <a:r>
-              <a:rPr>
-                <a:latin typeface="Arial"/>
-              </a:rPr>
-              <a:t>• Track FIRs from registration to closure</a:t>
+              <a:rPr sz="1600" dirty="0" smtClean="0">
+                <a:latin typeface="Arial"/>
+              </a:rPr>
+              <a:t>Track </a:t>
+            </a:r>
+            <a:r>
+              <a:rPr sz="1600" dirty="0">
+                <a:latin typeface="Arial"/>
+              </a:rPr>
+              <a:t>FIRs from registration to closure</a:t>
             </a:r>
           </a:p>
         </p:txBody>
@@ -16897,7 +17817,7 @@
         <p:spPr>
           <a:xfrm>
             <a:off x="4526280" y="3154680"/>
-            <a:ext cx="3749039" cy="2423160"/>
+            <a:ext cx="3749039" cy="2230354"/>
           </a:xfrm>
           <a:prstGeom prst="rect">
             <a:avLst/>
@@ -16910,10 +17830,12 @@
           </a:bodyPr>
           <a:lstStyle/>
           <a:p>
-            <a:pPr>
+            <a:pPr marL="285750" indent="-285750">
               <a:spcAft>
                 <a:spcPts val="400"/>
               </a:spcAft>
+              <a:buFont typeface="Wingdings" panose="05000000000000000000" pitchFamily="2" charset="2"/>
+              <a:buChar char="v"/>
               <a:defRPr sz="1500">
                 <a:solidFill>
                   <a:srgbClr val="141414"/>
@@ -16922,17 +17844,25 @@
               </a:defRPr>
             </a:pPr>
             <a:r>
-              <a:rPr>
-                <a:latin typeface="Arial"/>
-              </a:rPr>
-              <a:t>• Maintain a chronological audit history</a:t>
-            </a:r>
-          </a:p>
-          <a:p>
-            <a:pPr>
+              <a:rPr sz="1600" dirty="0" smtClean="0">
+                <a:latin typeface="Arial"/>
+              </a:rPr>
+              <a:t>Maintain </a:t>
+            </a:r>
+            <a:r>
+              <a:rPr sz="1600" dirty="0">
+                <a:latin typeface="Arial"/>
+              </a:rPr>
+              <a:t>a chronological audit history</a:t>
+            </a:r>
+          </a:p>
+          <a:p>
+            <a:pPr marL="285750" indent="-285750">
               <a:spcAft>
                 <a:spcPts val="400"/>
               </a:spcAft>
+              <a:buFont typeface="Wingdings" panose="05000000000000000000" pitchFamily="2" charset="2"/>
+              <a:buChar char="v"/>
               <a:defRPr sz="1500">
                 <a:solidFill>
                   <a:srgbClr val="141414"/>
@@ -16941,17 +17871,25 @@
               </a:defRPr>
             </a:pPr>
             <a:r>
-              <a:rPr>
-                <a:latin typeface="Arial"/>
-              </a:rPr>
-              <a:t>• Register evidence metadata and hashes</a:t>
-            </a:r>
-          </a:p>
-          <a:p>
-            <a:pPr>
+              <a:rPr sz="1600" dirty="0" smtClean="0">
+                <a:latin typeface="Arial"/>
+              </a:rPr>
+              <a:t>Register </a:t>
+            </a:r>
+            <a:r>
+              <a:rPr sz="1600" dirty="0">
+                <a:latin typeface="Arial"/>
+              </a:rPr>
+              <a:t>evidence metadata and hashes</a:t>
+            </a:r>
+          </a:p>
+          <a:p>
+            <a:pPr marL="285750" indent="-285750">
               <a:spcAft>
                 <a:spcPts val="400"/>
               </a:spcAft>
+              <a:buFont typeface="Wingdings" panose="05000000000000000000" pitchFamily="2" charset="2"/>
+              <a:buChar char="v"/>
               <a:defRPr sz="1500">
                 <a:solidFill>
                   <a:srgbClr val="141414"/>
@@ -16960,17 +17898,25 @@
               </a:defRPr>
             </a:pPr>
             <a:r>
-              <a:rPr>
-                <a:latin typeface="Arial"/>
-              </a:rPr>
-              <a:t>• Provide dashboards and reports</a:t>
-            </a:r>
-          </a:p>
-          <a:p>
-            <a:pPr>
+              <a:rPr sz="1600" dirty="0" smtClean="0">
+                <a:latin typeface="Arial"/>
+              </a:rPr>
+              <a:t>Provide </a:t>
+            </a:r>
+            <a:r>
+              <a:rPr sz="1600" dirty="0">
+                <a:latin typeface="Arial"/>
+              </a:rPr>
+              <a:t>dashboards and reports</a:t>
+            </a:r>
+          </a:p>
+          <a:p>
+            <a:pPr marL="285750" indent="-285750">
               <a:spcAft>
                 <a:spcPts val="400"/>
               </a:spcAft>
+              <a:buFont typeface="Wingdings" panose="05000000000000000000" pitchFamily="2" charset="2"/>
+              <a:buChar char="v"/>
               <a:defRPr sz="1500">
                 <a:solidFill>
                   <a:srgbClr val="141414"/>
@@ -16979,17 +17925,25 @@
               </a:defRPr>
             </a:pPr>
             <a:r>
-              <a:rPr>
-                <a:latin typeface="Arial"/>
-              </a:rPr>
-              <a:t>• Notify users about important workflow events</a:t>
-            </a:r>
-          </a:p>
-          <a:p>
-            <a:pPr>
+              <a:rPr sz="1600" dirty="0" smtClean="0">
+                <a:latin typeface="Arial"/>
+              </a:rPr>
+              <a:t>Notify </a:t>
+            </a:r>
+            <a:r>
+              <a:rPr sz="1600" dirty="0">
+                <a:latin typeface="Arial"/>
+              </a:rPr>
+              <a:t>users about important workflow events</a:t>
+            </a:r>
+          </a:p>
+          <a:p>
+            <a:pPr marL="285750" indent="-285750">
               <a:spcAft>
                 <a:spcPts val="400"/>
               </a:spcAft>
+              <a:buFont typeface="Wingdings" panose="05000000000000000000" pitchFamily="2" charset="2"/>
+              <a:buChar char="v"/>
               <a:defRPr sz="1500">
                 <a:solidFill>
                   <a:srgbClr val="141414"/>
@@ -16998,10 +17952,16 @@
               </a:defRPr>
             </a:pPr>
             <a:r>
-              <a:rPr>
-                <a:latin typeface="Arial"/>
-              </a:rPr>
-              <a:t>• Protect confidential information with controlled access</a:t>
+              <a:rPr sz="1600" dirty="0" smtClean="0">
+                <a:latin typeface="Arial"/>
+              </a:rPr>
+              <a:t>Protect </a:t>
+            </a:r>
+            <a:r>
+              <a:rPr sz="1600" dirty="0">
+                <a:latin typeface="Arial"/>
+              </a:rPr>
+              <a:t>confidential information with controlled access</a:t>
             </a:r>
           </a:p>
         </p:txBody>
@@ -17033,7 +17993,7 @@
 </p:sld>
 </file>
 
-<file path=ppt/slides/slide12.xml><?xml version="1.0" encoding="utf-8"?>
+<file path=ppt/slides/slide13.xml><?xml version="1.0" encoding="utf-8"?>
 <p:sld xmlns:a="http://schemas.openxmlformats.org/drawingml/2006/main" xmlns:r="http://schemas.openxmlformats.org/officeDocument/2006/relationships" xmlns:p="http://schemas.openxmlformats.org/presentationml/2006/main">
   <p:cSld>
     <p:spTree>
@@ -17118,7 +18078,7 @@
 </p:sld>
 </file>
 
-<file path=ppt/slides/slide13.xml><?xml version="1.0" encoding="utf-8"?>
+<file path=ppt/slides/slide14.xml><?xml version="1.0" encoding="utf-8"?>
 <p:sld xmlns:a="http://schemas.openxmlformats.org/drawingml/2006/main" xmlns:r="http://schemas.openxmlformats.org/officeDocument/2006/relationships" xmlns:p="http://schemas.openxmlformats.org/presentationml/2006/main">
   <p:cSld>
     <p:spTree>
@@ -17184,7 +18144,7 @@
         </p:nvSpPr>
         <p:spPr>
           <a:xfrm>
-            <a:off x="502920" y="1325880"/>
+            <a:off x="502920" y="1224284"/>
             <a:ext cx="3566160" cy="4343400"/>
           </a:xfrm>
           <a:prstGeom prst="roundRect">
@@ -17230,7 +18190,7 @@
         </p:nvSpPr>
         <p:spPr>
           <a:xfrm>
-            <a:off x="502920" y="1325880"/>
+            <a:off x="502920" y="1261228"/>
             <a:ext cx="64008" cy="4343400"/>
           </a:xfrm>
           <a:prstGeom prst="rect">
@@ -17310,7 +18270,7 @@
         <p:spPr>
           <a:xfrm>
             <a:off x="658368" y="1828800"/>
-            <a:ext cx="3337560" cy="1871282"/>
+            <a:ext cx="3337560" cy="3379387"/>
           </a:xfrm>
           <a:prstGeom prst="rect">
             <a:avLst/>
@@ -17323,154 +18283,228 @@
           </a:bodyPr>
           <a:lstStyle/>
           <a:p>
-            <a:pPr algn="l"/>
-            <a:r>
-              <a:rPr sz="1300" b="0" dirty="0">
+            <a:pPr marL="285750" indent="-285750" algn="l">
+              <a:lnSpc>
+                <a:spcPct val="150000"/>
+              </a:lnSpc>
+              <a:buFont typeface="Arial" panose="020B0604020202020204" pitchFamily="34" charset="0"/>
+              <a:buChar char="•"/>
+            </a:pPr>
+            <a:r>
+              <a:rPr sz="1600" b="0" dirty="0" smtClean="0">
                 <a:solidFill>
                   <a:srgbClr val="141414"/>
                 </a:solidFill>
-                <a:latin typeface="Arial"/>
-              </a:rPr>
-              <a:t>• Complainant personal data</a:t>
-            </a:r>
-            <a:r>
-              <a:rPr dirty="0"/>
+              </a:rPr>
+              <a:t>Complainant </a:t>
+            </a:r>
+            <a:r>
+              <a:rPr sz="1600" b="0" dirty="0">
+                <a:solidFill>
+                  <a:srgbClr val="141414"/>
+                </a:solidFill>
+              </a:rPr>
+              <a:t>personal </a:t>
+            </a:r>
+            <a:r>
+              <a:rPr sz="1600" b="0" dirty="0" smtClean="0">
+                <a:solidFill>
+                  <a:srgbClr val="141414"/>
+                </a:solidFill>
+              </a:rPr>
+              <a:t>data</a:t>
+            </a:r>
+            <a:endParaRPr lang="en-US" sz="1600" dirty="0"/>
+          </a:p>
+          <a:p>
+            <a:pPr marL="285750" indent="-285750" algn="l">
+              <a:lnSpc>
+                <a:spcPct val="150000"/>
+              </a:lnSpc>
+              <a:buFont typeface="Arial" panose="020B0604020202020204" pitchFamily="34" charset="0"/>
+              <a:buChar char="•"/>
+            </a:pPr>
+            <a:r>
+              <a:rPr sz="1600" b="0" dirty="0" smtClean="0">
+                <a:solidFill>
+                  <a:srgbClr val="141414"/>
+                </a:solidFill>
+              </a:rPr>
+              <a:t>CNIC </a:t>
+            </a:r>
+            <a:r>
+              <a:rPr sz="1600" b="0" dirty="0">
+                <a:solidFill>
+                  <a:srgbClr val="141414"/>
+                </a:solidFill>
+              </a:rPr>
+              <a:t>and contact </a:t>
+            </a:r>
+            <a:r>
+              <a:rPr sz="1600" b="0" dirty="0" smtClean="0">
+                <a:solidFill>
+                  <a:srgbClr val="141414"/>
+                </a:solidFill>
+              </a:rPr>
+              <a:t>information</a:t>
+            </a:r>
+            <a:endParaRPr lang="en-US" sz="1600" dirty="0"/>
+          </a:p>
+          <a:p>
+            <a:pPr marL="285750" indent="-285750" algn="l">
+              <a:lnSpc>
+                <a:spcPct val="150000"/>
+              </a:lnSpc>
+              <a:buFont typeface="Arial" panose="020B0604020202020204" pitchFamily="34" charset="0"/>
+              <a:buChar char="•"/>
+            </a:pPr>
+            <a:r>
+              <a:rPr sz="1600" b="0" dirty="0" smtClean="0">
+                <a:solidFill>
+                  <a:srgbClr val="141414"/>
+                </a:solidFill>
+              </a:rPr>
+              <a:t>FIR narrative</a:t>
+            </a:r>
+            <a:endParaRPr lang="en-US" sz="1600" dirty="0"/>
+          </a:p>
+          <a:p>
+            <a:pPr marL="285750" indent="-285750" algn="l">
+              <a:lnSpc>
+                <a:spcPct val="150000"/>
+              </a:lnSpc>
+              <a:buFont typeface="Arial" panose="020B0604020202020204" pitchFamily="34" charset="0"/>
+              <a:buChar char="•"/>
+            </a:pPr>
+            <a:r>
+              <a:rPr sz="1600" b="0" dirty="0" smtClean="0">
+                <a:solidFill>
+                  <a:srgbClr val="141414"/>
+                </a:solidFill>
+              </a:rPr>
+              <a:t>Suspect </a:t>
+            </a:r>
+            <a:r>
+              <a:rPr sz="1600" b="0" dirty="0">
+                <a:solidFill>
+                  <a:srgbClr val="141414"/>
+                </a:solidFill>
+              </a:rPr>
+              <a:t>and witness </a:t>
+            </a:r>
+            <a:r>
+              <a:rPr sz="1600" b="0" dirty="0" smtClean="0">
+                <a:solidFill>
+                  <a:srgbClr val="141414"/>
+                </a:solidFill>
+              </a:rPr>
+              <a:t>information</a:t>
+            </a:r>
+            <a:endParaRPr lang="en-US" sz="1600" dirty="0"/>
+          </a:p>
+          <a:p>
+            <a:pPr marL="285750" indent="-285750" algn="l">
+              <a:lnSpc>
+                <a:spcPct val="150000"/>
+              </a:lnSpc>
+              <a:buFont typeface="Arial" panose="020B0604020202020204" pitchFamily="34" charset="0"/>
+              <a:buChar char="•"/>
+            </a:pPr>
+            <a:r>
+              <a:rPr sz="1600" b="0" dirty="0" smtClean="0">
+                <a:solidFill>
+                  <a:srgbClr val="141414"/>
+                </a:solidFill>
+              </a:rPr>
+              <a:t>Investigation notes</a:t>
+            </a:r>
+            <a:endParaRPr lang="en-US" sz="1600" dirty="0"/>
+          </a:p>
+          <a:p>
+            <a:pPr marL="285750" indent="-285750" algn="l">
+              <a:lnSpc>
+                <a:spcPct val="150000"/>
+              </a:lnSpc>
+              <a:buFont typeface="Arial" panose="020B0604020202020204" pitchFamily="34" charset="0"/>
+              <a:buChar char="•"/>
+            </a:pPr>
+            <a:r>
+              <a:rPr sz="1600" b="0" dirty="0" smtClean="0">
+                <a:solidFill>
+                  <a:srgbClr val="141414"/>
+                </a:solidFill>
+              </a:rPr>
+              <a:t>Documents</a:t>
+            </a:r>
+            <a:r>
+              <a:rPr sz="1600" b="0" dirty="0">
+                <a:solidFill>
+                  <a:srgbClr val="141414"/>
+                </a:solidFill>
+              </a:rPr>
+              <a:t>, </a:t>
+            </a:r>
+            <a:r>
+              <a:rPr sz="1600" b="0" dirty="0" smtClean="0">
+                <a:solidFill>
+                  <a:srgbClr val="141414"/>
+                </a:solidFill>
+              </a:rPr>
+              <a:t>images</a:t>
+            </a:r>
+            <a:r>
+              <a:rPr lang="en-US" sz="1600" b="0" dirty="0" smtClean="0">
+                <a:solidFill>
+                  <a:srgbClr val="141414"/>
+                </a:solidFill>
+              </a:rPr>
+              <a:t> and</a:t>
+            </a:r>
+            <a:r>
+              <a:rPr sz="1600" b="0" dirty="0" smtClean="0">
+                <a:solidFill>
+                  <a:srgbClr val="141414"/>
+                </a:solidFill>
+              </a:rPr>
+              <a:t> </a:t>
+            </a:r>
+            <a:r>
+              <a:rPr sz="1600" b="0" dirty="0">
+                <a:solidFill>
+                  <a:srgbClr val="141414"/>
+                </a:solidFill>
+              </a:rPr>
+              <a:t>PDFs</a:t>
+            </a:r>
+            <a:r>
+              <a:rPr sz="1600" dirty="0"/>
               <a:t/>
             </a:r>
             <a:br>
-              <a:rPr dirty="0"/>
+              <a:rPr sz="1600" dirty="0"/>
             </a:br>
             <a:r>
-              <a:rPr sz="1300" b="0" dirty="0">
+              <a:rPr sz="1600" dirty="0"/>
+              <a:t/>
+            </a:r>
+            <a:br>
+              <a:rPr sz="1600" dirty="0"/>
+            </a:br>
+            <a:r>
+              <a:rPr sz="1600" b="1" dirty="0">
                 <a:solidFill>
                   <a:srgbClr val="141414"/>
                 </a:solidFill>
-                <a:latin typeface="Arial"/>
-              </a:rPr>
-              <a:t>• CNIC and contact information</a:t>
-            </a:r>
-            <a:r>
-              <a:rPr dirty="0"/>
-              <a:t/>
-            </a:r>
-            <a:br>
-              <a:rPr dirty="0"/>
-            </a:br>
-            <a:r>
-              <a:rPr sz="1300" b="0" dirty="0">
+              </a:rPr>
+              <a:t>Storage:</a:t>
+            </a:r>
+            <a:r>
+              <a:rPr sz="1600" b="0" dirty="0">
                 <a:solidFill>
                   <a:srgbClr val="141414"/>
                 </a:solidFill>
-                <a:latin typeface="Arial"/>
-              </a:rPr>
-              <a:t>• FIR narrative</a:t>
-            </a:r>
-            <a:r>
-              <a:rPr dirty="0"/>
-              <a:t/>
-            </a:r>
-            <a:br>
-              <a:rPr dirty="0"/>
-            </a:br>
-            <a:r>
-              <a:rPr sz="1300" b="0" dirty="0">
-                <a:solidFill>
-                  <a:srgbClr val="141414"/>
-                </a:solidFill>
-                <a:latin typeface="Arial"/>
-              </a:rPr>
-              <a:t>• Suspect and witness information</a:t>
-            </a:r>
-            <a:r>
-              <a:rPr dirty="0"/>
-              <a:t/>
-            </a:r>
-            <a:br>
-              <a:rPr dirty="0"/>
-            </a:br>
-            <a:r>
-              <a:rPr sz="1300" b="0" dirty="0">
-                <a:solidFill>
-                  <a:srgbClr val="141414"/>
-                </a:solidFill>
-                <a:latin typeface="Arial"/>
-              </a:rPr>
-              <a:t>• Investigation notes</a:t>
-            </a:r>
-            <a:r>
-              <a:rPr dirty="0"/>
-              <a:t/>
-            </a:r>
-            <a:br>
-              <a:rPr dirty="0"/>
-            </a:br>
-            <a:r>
-              <a:rPr sz="1300" b="0" dirty="0">
-                <a:solidFill>
-                  <a:srgbClr val="141414"/>
-                </a:solidFill>
-                <a:latin typeface="Arial"/>
-              </a:rPr>
-              <a:t>• Documents, </a:t>
-            </a:r>
-            <a:r>
-              <a:rPr sz="1300" b="0" dirty="0" smtClean="0">
-                <a:solidFill>
-                  <a:srgbClr val="141414"/>
-                </a:solidFill>
-                <a:latin typeface="Arial"/>
-              </a:rPr>
-              <a:t>images</a:t>
-            </a:r>
-            <a:r>
-              <a:rPr lang="en-US" sz="1300" b="0" dirty="0" smtClean="0">
-                <a:solidFill>
-                  <a:srgbClr val="141414"/>
-                </a:solidFill>
-                <a:latin typeface="Arial"/>
-              </a:rPr>
-              <a:t> and</a:t>
-            </a:r>
-            <a:r>
-              <a:rPr sz="1300" b="0" dirty="0" smtClean="0">
-                <a:solidFill>
-                  <a:srgbClr val="141414"/>
-                </a:solidFill>
-                <a:latin typeface="Arial"/>
-              </a:rPr>
-              <a:t> </a:t>
-            </a:r>
-            <a:r>
-              <a:rPr sz="1300" b="0" dirty="0">
-                <a:solidFill>
-                  <a:srgbClr val="141414"/>
-                </a:solidFill>
-                <a:latin typeface="Arial"/>
-              </a:rPr>
-              <a:t>PDFs</a:t>
-            </a:r>
-            <a:r>
-              <a:rPr dirty="0"/>
-              <a:t/>
-            </a:r>
-            <a:br>
-              <a:rPr dirty="0"/>
-            </a:br>
-            <a:r>
-              <a:rPr dirty="0"/>
-              <a:t/>
-            </a:r>
-            <a:br>
-              <a:rPr dirty="0"/>
-            </a:br>
-            <a:r>
-              <a:rPr sz="1300" b="0" dirty="0">
-                <a:solidFill>
-                  <a:srgbClr val="141414"/>
-                </a:solidFill>
-                <a:latin typeface="Arial"/>
-              </a:rPr>
-              <a:t>Storage: PostgreSQL + protected file storage</a:t>
+              </a:rPr>
+              <a:t> PostgreSQL + protected file storage</a:t>
             </a:r>
           </a:p>
         </p:txBody>
@@ -17562,7 +18596,7 @@
         </p:nvSpPr>
         <p:spPr>
           <a:xfrm>
-            <a:off x="5074920" y="1325880"/>
+            <a:off x="5074920" y="1178104"/>
             <a:ext cx="3566160" cy="4343400"/>
           </a:xfrm>
           <a:prstGeom prst="roundRect">
@@ -17608,7 +18642,7 @@
         </p:nvSpPr>
         <p:spPr>
           <a:xfrm>
-            <a:off x="5074920" y="1325880"/>
+            <a:off x="5074920" y="1196576"/>
             <a:ext cx="64008" cy="4343400"/>
           </a:xfrm>
           <a:prstGeom prst="rect">
@@ -17688,7 +18722,7 @@
         <p:spPr>
           <a:xfrm>
             <a:off x="5230368" y="1828800"/>
-            <a:ext cx="3337560" cy="3749039"/>
+            <a:ext cx="3337560" cy="3379387"/>
           </a:xfrm>
           <a:prstGeom prst="rect">
             <a:avLst/>
@@ -17701,110 +18735,246 @@
           </a:bodyPr>
           <a:lstStyle/>
           <a:p>
-            <a:pPr algn="l"/>
-            <a:r>
-              <a:rPr sz="1300" b="0">
+            <a:pPr marL="285750" indent="-285750" algn="l">
+              <a:lnSpc>
+                <a:spcPct val="150000"/>
+              </a:lnSpc>
+              <a:buFont typeface="Arial" panose="020B0604020202020204" pitchFamily="34" charset="0"/>
+              <a:buChar char="•"/>
+            </a:pPr>
+            <a:r>
+              <a:rPr sz="1600" b="0" dirty="0" smtClean="0">
                 <a:solidFill>
                   <a:srgbClr val="141414"/>
                 </a:solidFill>
-                <a:latin typeface="Arial"/>
-              </a:rPr>
-              <a:t>• FIR identifier</a:t>
-            </a:r>
-            <a:r>
+              </a:rPr>
+              <a:t>FIR identifier</a:t>
+            </a:r>
+            <a:endParaRPr lang="en-US" sz="1600" dirty="0" smtClean="0"/>
+          </a:p>
+          <a:p>
+            <a:pPr marL="285750" indent="-285750" algn="l">
+              <a:lnSpc>
+                <a:spcPct val="150000"/>
+              </a:lnSpc>
+              <a:buFont typeface="Arial" panose="020B0604020202020204" pitchFamily="34" charset="0"/>
+              <a:buChar char="•"/>
+            </a:pPr>
+            <a:r>
+              <a:rPr sz="1600" b="0" dirty="0" smtClean="0">
+                <a:solidFill>
+                  <a:srgbClr val="141414"/>
+                </a:solidFill>
+              </a:rPr>
+              <a:t>Transaction identifier</a:t>
+            </a:r>
+            <a:endParaRPr lang="en-US" sz="1600" dirty="0" smtClean="0"/>
+          </a:p>
+          <a:p>
+            <a:pPr marL="285750" indent="-285750" algn="l">
+              <a:lnSpc>
+                <a:spcPct val="150000"/>
+              </a:lnSpc>
+              <a:buFont typeface="Arial" panose="020B0604020202020204" pitchFamily="34" charset="0"/>
+              <a:buChar char="•"/>
+            </a:pPr>
+            <a:r>
+              <a:rPr sz="1600" b="0" dirty="0" smtClean="0">
+                <a:solidFill>
+                  <a:srgbClr val="141414"/>
+                </a:solidFill>
+              </a:rPr>
+              <a:t>Record </a:t>
+            </a:r>
+            <a:r>
+              <a:rPr sz="1600" b="0" dirty="0">
+                <a:solidFill>
+                  <a:srgbClr val="141414"/>
+                </a:solidFill>
+              </a:rPr>
+              <a:t>and document </a:t>
+            </a:r>
+            <a:r>
+              <a:rPr sz="1600" b="0" dirty="0" smtClean="0">
+                <a:solidFill>
+                  <a:srgbClr val="141414"/>
+                </a:solidFill>
+              </a:rPr>
+              <a:t>hashes</a:t>
+            </a:r>
+            <a:endParaRPr lang="en-US" sz="1600" dirty="0" smtClean="0"/>
+          </a:p>
+          <a:p>
+            <a:pPr marL="285750" indent="-285750" algn="l">
+              <a:lnSpc>
+                <a:spcPct val="150000"/>
+              </a:lnSpc>
+              <a:buFont typeface="Arial" panose="020B0604020202020204" pitchFamily="34" charset="0"/>
+              <a:buChar char="•"/>
+            </a:pPr>
+            <a:r>
+              <a:rPr sz="1600" b="0" dirty="0" smtClean="0">
+                <a:solidFill>
+                  <a:srgbClr val="141414"/>
+                </a:solidFill>
+              </a:rPr>
+              <a:t>Operation </a:t>
+            </a:r>
+            <a:r>
+              <a:rPr sz="1600" b="0" dirty="0">
+                <a:solidFill>
+                  <a:srgbClr val="141414"/>
+                </a:solidFill>
+              </a:rPr>
+              <a:t>type and </a:t>
+            </a:r>
+            <a:r>
+              <a:rPr sz="1600" b="0" dirty="0" smtClean="0">
+                <a:solidFill>
+                  <a:srgbClr val="141414"/>
+                </a:solidFill>
+              </a:rPr>
+              <a:t>status</a:t>
+            </a:r>
+            <a:endParaRPr lang="en-US" sz="1600" dirty="0" smtClean="0"/>
+          </a:p>
+          <a:p>
+            <a:pPr marL="285750" indent="-285750" algn="l">
+              <a:lnSpc>
+                <a:spcPct val="150000"/>
+              </a:lnSpc>
+              <a:buFont typeface="Arial" panose="020B0604020202020204" pitchFamily="34" charset="0"/>
+              <a:buChar char="•"/>
+            </a:pPr>
+            <a:r>
+              <a:rPr sz="1600" b="0" dirty="0" smtClean="0">
+                <a:solidFill>
+                  <a:srgbClr val="141414"/>
+                </a:solidFill>
+              </a:rPr>
+              <a:t>Officer </a:t>
+            </a:r>
+            <a:r>
+              <a:rPr sz="1600" b="0" dirty="0">
+                <a:solidFill>
+                  <a:srgbClr val="141414"/>
+                </a:solidFill>
+              </a:rPr>
+              <a:t>/ organization </a:t>
+            </a:r>
+            <a:r>
+              <a:rPr sz="1600" b="0" dirty="0" smtClean="0">
+                <a:solidFill>
+                  <a:srgbClr val="141414"/>
+                </a:solidFill>
+              </a:rPr>
+              <a:t>identifier</a:t>
+            </a:r>
+            <a:endParaRPr lang="en-US" sz="1600" dirty="0" smtClean="0"/>
+          </a:p>
+          <a:p>
+            <a:pPr marL="285750" indent="-285750" algn="l">
+              <a:lnSpc>
+                <a:spcPct val="150000"/>
+              </a:lnSpc>
+              <a:buFont typeface="Arial" panose="020B0604020202020204" pitchFamily="34" charset="0"/>
+              <a:buChar char="•"/>
+            </a:pPr>
+            <a:r>
+              <a:rPr sz="1600" b="0" dirty="0" smtClean="0">
+                <a:solidFill>
+                  <a:srgbClr val="141414"/>
+                </a:solidFill>
+              </a:rPr>
+              <a:t>Timestamp </a:t>
+            </a:r>
+            <a:r>
+              <a:rPr sz="1600" b="0" dirty="0">
+                <a:solidFill>
+                  <a:srgbClr val="141414"/>
+                </a:solidFill>
+              </a:rPr>
+              <a:t>and workflow </a:t>
+            </a:r>
+            <a:r>
+              <a:rPr sz="1600" b="0" dirty="0" smtClean="0">
+                <a:solidFill>
+                  <a:srgbClr val="141414"/>
+                </a:solidFill>
+              </a:rPr>
+              <a:t>state</a:t>
+            </a:r>
+            <a:endParaRPr lang="en-US" sz="1600" dirty="0" smtClean="0"/>
+          </a:p>
+          <a:p>
+            <a:pPr marL="285750" indent="-285750" algn="l">
+              <a:lnSpc>
+                <a:spcPct val="150000"/>
+              </a:lnSpc>
+              <a:buFont typeface="Arial" panose="020B0604020202020204" pitchFamily="34" charset="0"/>
+              <a:buChar char="•"/>
+            </a:pPr>
+            <a:r>
+              <a:rPr sz="1600" b="0" dirty="0" smtClean="0">
+                <a:solidFill>
+                  <a:srgbClr val="141414"/>
+                </a:solidFill>
+              </a:rPr>
+              <a:t>Approval </a:t>
+            </a:r>
+            <a:r>
+              <a:rPr sz="1600" b="0" dirty="0">
+                <a:solidFill>
+                  <a:srgbClr val="141414"/>
+                </a:solidFill>
+              </a:rPr>
+              <a:t>and audit events</a:t>
+            </a:r>
+            <a:r>
+              <a:rPr sz="1600" dirty="0"/>
               <a:t/>
             </a:r>
-            <a:br/>
-            <a:r>
-              <a:rPr sz="1300" b="0">
+            <a:br>
+              <a:rPr sz="1600" dirty="0"/>
+            </a:br>
+            <a:r>
+              <a:rPr sz="1600" dirty="0"/>
+              <a:t/>
+            </a:r>
+            <a:br>
+              <a:rPr sz="1600" dirty="0"/>
+            </a:br>
+            <a:r>
+              <a:rPr sz="1600" b="1" dirty="0">
                 <a:solidFill>
                   <a:srgbClr val="141414"/>
                 </a:solidFill>
-                <a:latin typeface="Arial"/>
-              </a:rPr>
-              <a:t>• Transaction identifier</a:t>
-            </a:r>
-            <a:r>
-              <a:t/>
-            </a:r>
-            <a:br/>
-            <a:r>
-              <a:rPr sz="1300" b="0">
+              </a:rPr>
+              <a:t>Platform:</a:t>
+            </a:r>
+            <a:r>
+              <a:rPr sz="1600" b="0" dirty="0">
                 <a:solidFill>
                   <a:srgbClr val="141414"/>
                 </a:solidFill>
-                <a:latin typeface="Arial"/>
-              </a:rPr>
-              <a:t>• Record and document hashes</a:t>
-            </a:r>
-            <a:r>
-              <a:t/>
-            </a:r>
-            <a:br/>
-            <a:r>
-              <a:rPr sz="1300" b="0">
+              </a:rPr>
+              <a:t> </a:t>
+            </a:r>
+            <a:r>
+              <a:rPr sz="1600" b="0" dirty="0" err="1">
                 <a:solidFill>
                   <a:srgbClr val="141414"/>
                 </a:solidFill>
-                <a:latin typeface="Arial"/>
-              </a:rPr>
-              <a:t>• Operation type and status</a:t>
-            </a:r>
-            <a:r>
-              <a:t/>
-            </a:r>
-            <a:br/>
-            <a:r>
-              <a:rPr sz="1300" b="0">
+              </a:rPr>
+              <a:t>Hyperledger</a:t>
+            </a:r>
+            <a:r>
+              <a:rPr sz="1600" b="0" dirty="0">
                 <a:solidFill>
                   <a:srgbClr val="141414"/>
                 </a:solidFill>
-                <a:latin typeface="Arial"/>
-              </a:rPr>
-              <a:t>• Officer / organization identifier</a:t>
-            </a:r>
-            <a:r>
-              <a:t/>
-            </a:r>
-            <a:br/>
-            <a:r>
-              <a:rPr sz="1300" b="0">
-                <a:solidFill>
-                  <a:srgbClr val="141414"/>
-                </a:solidFill>
-                <a:latin typeface="Arial"/>
-              </a:rPr>
-              <a:t>• Timestamp and workflow state</a:t>
-            </a:r>
-            <a:r>
-              <a:t/>
-            </a:r>
-            <a:br/>
-            <a:r>
-              <a:rPr sz="1300" b="0">
-                <a:solidFill>
-                  <a:srgbClr val="141414"/>
-                </a:solidFill>
-                <a:latin typeface="Arial"/>
-              </a:rPr>
-              <a:t>• Approval and audit events</a:t>
-            </a:r>
-            <a:r>
-              <a:t/>
-            </a:r>
-            <a:br/>
-            <a:r>
-              <a:t/>
-            </a:r>
-            <a:br/>
-            <a:r>
-              <a:rPr sz="1300" b="0">
-                <a:solidFill>
-                  <a:srgbClr val="141414"/>
-                </a:solidFill>
-                <a:latin typeface="Arial"/>
-              </a:rPr>
-              <a:t>Platform: Hyperledger Fabric</a:t>
+              </a:rPr>
+              <a:t> Fabric</a:t>
             </a:r>
           </a:p>
         </p:txBody>
@@ -17817,8 +18987,8 @@
         </p:nvSpPr>
         <p:spPr>
           <a:xfrm>
-            <a:off x="212436" y="5715000"/>
-            <a:ext cx="8017163" cy="270843"/>
+            <a:off x="212437" y="5678056"/>
+            <a:ext cx="6742546" cy="270843"/>
           </a:xfrm>
           <a:prstGeom prst="rect">
             <a:avLst/>
@@ -17871,7 +19041,7 @@
 </p:sld>
 </file>
 
-<file path=ppt/slides/slide14.xml><?xml version="1.0" encoding="utf-8"?>
+<file path=ppt/slides/slide15.xml><?xml version="1.0" encoding="utf-8"?>
 <p:sld xmlns:a="http://schemas.openxmlformats.org/drawingml/2006/main" xmlns:r="http://schemas.openxmlformats.org/officeDocument/2006/relationships" xmlns:p="http://schemas.openxmlformats.org/presentationml/2006/main">
   <p:cSld>
     <p:spTree>
@@ -18068,8 +19238,8 @@
         </p:nvSpPr>
         <p:spPr>
           <a:xfrm>
-            <a:off x="886968" y="1737360"/>
-            <a:ext cx="6903720" cy="155447"/>
+            <a:off x="914676" y="1654236"/>
+            <a:ext cx="6903720" cy="270843"/>
           </a:xfrm>
           <a:prstGeom prst="rect">
             <a:avLst/>
@@ -18084,14 +19254,47 @@
           <a:p>
             <a:pPr algn="l"/>
             <a:r>
-              <a:rPr sz="1150" b="0">
+              <a:rPr b="0" dirty="0">
                 <a:solidFill>
                   <a:srgbClr val="141414"/>
                 </a:solidFill>
                 <a:latin typeface="Arial"/>
               </a:rPr>
-              <a:t>React, TypeScript, Tailwind CSS, Axios</a:t>
-            </a:r>
+              <a:t>React, </a:t>
+            </a:r>
+            <a:r>
+              <a:rPr b="0" dirty="0" err="1">
+                <a:solidFill>
+                  <a:srgbClr val="141414"/>
+                </a:solidFill>
+                <a:latin typeface="Arial"/>
+              </a:rPr>
+              <a:t>TypeScript</a:t>
+            </a:r>
+            <a:r>
+              <a:rPr b="0" dirty="0">
+                <a:solidFill>
+                  <a:srgbClr val="141414"/>
+                </a:solidFill>
+                <a:latin typeface="Arial"/>
+              </a:rPr>
+              <a:t>, Tailwind CSS, </a:t>
+            </a:r>
+            <a:r>
+              <a:rPr b="0" dirty="0" err="1">
+                <a:solidFill>
+                  <a:srgbClr val="141414"/>
+                </a:solidFill>
+                <a:latin typeface="Arial"/>
+              </a:rPr>
+              <a:t>Axios</a:t>
+            </a:r>
+            <a:endParaRPr b="0" dirty="0">
+              <a:solidFill>
+                <a:srgbClr val="141414"/>
+              </a:solidFill>
+              <a:latin typeface="Arial"/>
+            </a:endParaRPr>
           </a:p>
         </p:txBody>
       </p:sp>
@@ -18228,8 +19431,8 @@
         </p:nvSpPr>
         <p:spPr>
           <a:xfrm>
-            <a:off x="886968" y="2587752"/>
-            <a:ext cx="6903720" cy="155447"/>
+            <a:off x="914676" y="2504628"/>
+            <a:ext cx="6903720" cy="270843"/>
           </a:xfrm>
           <a:prstGeom prst="rect">
             <a:avLst/>
@@ -18244,13 +19447,31 @@
           <a:p>
             <a:pPr algn="l"/>
             <a:r>
-              <a:rPr sz="1150" b="0">
+              <a:rPr b="0" dirty="0">
                 <a:solidFill>
                   <a:srgbClr val="141414"/>
                 </a:solidFill>
                 <a:latin typeface="Arial"/>
               </a:rPr>
-              <a:t>Python, FastAPI, validation, notifications</a:t>
+              <a:t>Python, </a:t>
+            </a:r>
+            <a:r>
+              <a:rPr b="0" dirty="0" err="1">
+                <a:solidFill>
+                  <a:srgbClr val="141414"/>
+                </a:solidFill>
+                <a:latin typeface="Arial"/>
+              </a:rPr>
+              <a:t>FastAPI</a:t>
+            </a:r>
+            <a:r>
+              <a:rPr b="0" dirty="0">
+                <a:solidFill>
+                  <a:srgbClr val="141414"/>
+                </a:solidFill>
+                <a:latin typeface="Arial"/>
+              </a:rPr>
+              <a:t>, validation, notifications</a:t>
             </a:r>
           </a:p>
         </p:txBody>
@@ -18388,8 +19609,8 @@
         </p:nvSpPr>
         <p:spPr>
           <a:xfrm>
-            <a:off x="886968" y="3438144"/>
-            <a:ext cx="6903720" cy="155447"/>
+            <a:off x="914676" y="3355020"/>
+            <a:ext cx="6903720" cy="270843"/>
           </a:xfrm>
           <a:prstGeom prst="rect">
             <a:avLst/>
@@ -18404,7 +19625,7 @@
           <a:p>
             <a:pPr algn="l"/>
             <a:r>
-              <a:rPr sz="1150" b="0">
+              <a:rPr b="0" dirty="0">
                 <a:solidFill>
                   <a:srgbClr val="141414"/>
                 </a:solidFill>
@@ -18548,8 +19769,8 @@
         </p:nvSpPr>
         <p:spPr>
           <a:xfrm>
-            <a:off x="886968" y="4288536"/>
-            <a:ext cx="6903720" cy="155447"/>
+            <a:off x="933148" y="4214648"/>
+            <a:ext cx="6903720" cy="270843"/>
           </a:xfrm>
           <a:prstGeom prst="rect">
             <a:avLst/>
@@ -18564,14 +19785,38 @@
           <a:p>
             <a:pPr algn="l"/>
             <a:r>
-              <a:rPr sz="1150" b="0">
+              <a:rPr b="0" dirty="0" err="1">
                 <a:solidFill>
                   <a:srgbClr val="141414"/>
                 </a:solidFill>
                 <a:latin typeface="Arial"/>
               </a:rPr>
-              <a:t>Hyperledger Fabric, peers, CA, MSP, channels, chaincode</a:t>
-            </a:r>
+              <a:t>Hyperledger</a:t>
+            </a:r>
+            <a:r>
+              <a:rPr b="0" dirty="0">
+                <a:solidFill>
+                  <a:srgbClr val="141414"/>
+                </a:solidFill>
+                <a:latin typeface="Arial"/>
+              </a:rPr>
+              <a:t> Fabric, peers, CA, MSP, channels, </a:t>
+            </a:r>
+            <a:r>
+              <a:rPr b="0" dirty="0" err="1">
+                <a:solidFill>
+                  <a:srgbClr val="141414"/>
+                </a:solidFill>
+                <a:latin typeface="Arial"/>
+              </a:rPr>
+              <a:t>chaincode</a:t>
+            </a:r>
+            <a:endParaRPr b="0" dirty="0">
+              <a:solidFill>
+                <a:srgbClr val="141414"/>
+              </a:solidFill>
+              <a:latin typeface="Arial"/>
+            </a:endParaRPr>
           </a:p>
         </p:txBody>
       </p:sp>
@@ -18708,8 +19953,8 @@
         </p:nvSpPr>
         <p:spPr>
           <a:xfrm>
-            <a:off x="886968" y="5138928"/>
-            <a:ext cx="6903720" cy="155447"/>
+            <a:off x="886968" y="5065040"/>
+            <a:ext cx="6903720" cy="270843"/>
           </a:xfrm>
           <a:prstGeom prst="rect">
             <a:avLst/>
@@ -18724,7 +19969,7 @@
           <a:p>
             <a:pPr algn="l"/>
             <a:r>
-              <a:rPr sz="1150" b="0">
+              <a:rPr b="0" dirty="0">
                 <a:solidFill>
                   <a:srgbClr val="141414"/>
                 </a:solidFill>
@@ -18797,7 +20042,7 @@
 </p:sld>
 </file>
 
-<file path=ppt/slides/slide15.xml><?xml version="1.0" encoding="utf-8"?>
+<file path=ppt/slides/slide16.xml><?xml version="1.0" encoding="utf-8"?>
 <p:sld xmlns:a="http://schemas.openxmlformats.org/drawingml/2006/main" xmlns:r="http://schemas.openxmlformats.org/officeDocument/2006/relationships" xmlns:p="http://schemas.openxmlformats.org/presentationml/2006/main">
   <p:cSld>
     <p:spTree>
@@ -18882,7 +20127,7 @@
 </p:sld>
 </file>
 
-<file path=ppt/slides/slide16.xml><?xml version="1.0" encoding="utf-8"?>
+<file path=ppt/slides/slide17.xml><?xml version="1.0" encoding="utf-8"?>
 <p:sld xmlns:a="http://schemas.openxmlformats.org/drawingml/2006/main" xmlns:r="http://schemas.openxmlformats.org/officeDocument/2006/relationships" xmlns:p="http://schemas.openxmlformats.org/presentationml/2006/main">
   <p:cSld>
     <p:spTree>
@@ -19074,7 +20319,7 @@
         <p:spPr>
           <a:xfrm>
             <a:off x="658368" y="1828800"/>
-            <a:ext cx="3520439" cy="3886200"/>
+            <a:ext cx="3520439" cy="3602396"/>
           </a:xfrm>
           <a:prstGeom prst="rect">
             <a:avLst/>
@@ -19087,119 +20332,308 @@
           </a:bodyPr>
           <a:lstStyle/>
           <a:p>
-            <a:pPr algn="l"/>
-            <a:r>
-              <a:rPr sz="1300" b="0">
+            <a:pPr marL="285750" indent="-285750" algn="l">
+              <a:lnSpc>
+                <a:spcPct val="150000"/>
+              </a:lnSpc>
+              <a:buFont typeface="Arial" panose="020B0604020202020204" pitchFamily="34" charset="0"/>
+              <a:buChar char="•"/>
+            </a:pPr>
+            <a:r>
+              <a:rPr sz="1550" b="0" dirty="0" smtClean="0">
                 <a:solidFill>
                   <a:srgbClr val="141414"/>
                 </a:solidFill>
-                <a:latin typeface="Arial"/>
-              </a:rPr>
-              <a:t>• Authentication and identity</a:t>
-            </a:r>
-            <a:r>
-              <a:t/>
-            </a:r>
-            <a:br/>
-            <a:r>
-              <a:rPr sz="1300" b="0">
+              </a:rPr>
+              <a:t>Authentication </a:t>
+            </a:r>
+            <a:r>
+              <a:rPr sz="1550" b="0" dirty="0">
                 <a:solidFill>
                   <a:srgbClr val="141414"/>
                 </a:solidFill>
-                <a:latin typeface="Arial"/>
-              </a:rPr>
-              <a:t>• Citizen complaint portal</a:t>
-            </a:r>
-            <a:r>
-              <a:t/>
-            </a:r>
-            <a:br/>
-            <a:r>
-              <a:rPr sz="1300" b="0">
+              </a:rPr>
+              <a:t>and </a:t>
+            </a:r>
+            <a:r>
+              <a:rPr sz="1550" b="0" dirty="0" smtClean="0">
                 <a:solidFill>
                   <a:srgbClr val="141414"/>
                 </a:solidFill>
-                <a:latin typeface="Arial"/>
-              </a:rPr>
-              <a:t>• FIR creation, approval, tracking</a:t>
-            </a:r>
-            <a:r>
-              <a:t/>
-            </a:r>
-            <a:br/>
-            <a:r>
-              <a:rPr sz="1300" b="0">
+              </a:rPr>
+              <a:t>identity</a:t>
+            </a:r>
+            <a:endParaRPr lang="en-US" sz="1550" dirty="0" smtClean="0"/>
+          </a:p>
+          <a:p>
+            <a:pPr marL="285750" indent="-285750" algn="l">
+              <a:lnSpc>
+                <a:spcPct val="150000"/>
+              </a:lnSpc>
+              <a:buFont typeface="Arial" panose="020B0604020202020204" pitchFamily="34" charset="0"/>
+              <a:buChar char="•"/>
+            </a:pPr>
+            <a:r>
+              <a:rPr sz="1550" b="0" dirty="0" smtClean="0">
                 <a:solidFill>
                   <a:srgbClr val="141414"/>
                 </a:solidFill>
-                <a:latin typeface="Arial"/>
-              </a:rPr>
-              <a:t>• Police station management</a:t>
-            </a:r>
-            <a:r>
-              <a:t/>
-            </a:r>
-            <a:br/>
-            <a:r>
-              <a:rPr sz="1300" b="0">
+              </a:rPr>
+              <a:t>Citizen </a:t>
+            </a:r>
+            <a:r>
+              <a:rPr sz="1550" b="0" dirty="0">
                 <a:solidFill>
                   <a:srgbClr val="141414"/>
                 </a:solidFill>
-                <a:latin typeface="Arial"/>
-              </a:rPr>
-              <a:t>• Investigation and officer assignment</a:t>
-            </a:r>
-            <a:r>
-              <a:t/>
-            </a:r>
-            <a:br/>
-            <a:r>
-              <a:rPr sz="1300" b="0">
+              </a:rPr>
+              <a:t>complaint </a:t>
+            </a:r>
+            <a:r>
+              <a:rPr sz="1550" b="0" dirty="0" smtClean="0">
                 <a:solidFill>
                   <a:srgbClr val="141414"/>
                 </a:solidFill>
-                <a:latin typeface="Arial"/>
-              </a:rPr>
-              <a:t>• Evidence and SHA 256 hashing</a:t>
-            </a:r>
-            <a:r>
-              <a:t/>
-            </a:r>
-            <a:br/>
-            <a:r>
-              <a:rPr sz="1300" b="0">
+              </a:rPr>
+              <a:t>portal</a:t>
+            </a:r>
+            <a:endParaRPr lang="en-US" sz="1550" dirty="0" smtClean="0"/>
+          </a:p>
+          <a:p>
+            <a:pPr marL="285750" indent="-285750" algn="l">
+              <a:lnSpc>
+                <a:spcPct val="150000"/>
+              </a:lnSpc>
+              <a:buFont typeface="Arial" panose="020B0604020202020204" pitchFamily="34" charset="0"/>
+              <a:buChar char="•"/>
+            </a:pPr>
+            <a:r>
+              <a:rPr sz="1550" b="0" dirty="0" smtClean="0">
                 <a:solidFill>
                   <a:srgbClr val="141414"/>
                 </a:solidFill>
-                <a:latin typeface="Arial"/>
-              </a:rPr>
-              <a:t>• Hyperledger Fabric transactions</a:t>
-            </a:r>
-            <a:r>
-              <a:t/>
-            </a:r>
-            <a:br/>
-            <a:r>
-              <a:rPr sz="1300" b="0">
+              </a:rPr>
+              <a:t>FIR </a:t>
+            </a:r>
+            <a:r>
+              <a:rPr sz="1550" b="0" dirty="0">
                 <a:solidFill>
                   <a:srgbClr val="141414"/>
                 </a:solidFill>
-                <a:latin typeface="Arial"/>
-              </a:rPr>
-              <a:t>• Audit trail and history</a:t>
-            </a:r>
-            <a:r>
-              <a:t/>
-            </a:r>
-            <a:br/>
-            <a:r>
-              <a:rPr sz="1300" b="0">
+              </a:rPr>
+              <a:t>creation, approval, </a:t>
+            </a:r>
+            <a:r>
+              <a:rPr sz="1550" b="0" dirty="0" smtClean="0">
                 <a:solidFill>
                   <a:srgbClr val="141414"/>
                 </a:solidFill>
-                <a:latin typeface="Arial"/>
-              </a:rPr>
-              <a:t>• Notifications, analytics, administration</a:t>
+              </a:rPr>
+              <a:t>tracking</a:t>
+            </a:r>
+            <a:endParaRPr lang="en-US" sz="1550" dirty="0" smtClean="0"/>
+          </a:p>
+          <a:p>
+            <a:pPr marL="285750" indent="-285750" algn="l">
+              <a:lnSpc>
+                <a:spcPct val="150000"/>
+              </a:lnSpc>
+              <a:buFont typeface="Arial" panose="020B0604020202020204" pitchFamily="34" charset="0"/>
+              <a:buChar char="•"/>
+            </a:pPr>
+            <a:r>
+              <a:rPr sz="1550" b="0" dirty="0" smtClean="0">
+                <a:solidFill>
+                  <a:srgbClr val="141414"/>
+                </a:solidFill>
+              </a:rPr>
+              <a:t>Police </a:t>
+            </a:r>
+            <a:r>
+              <a:rPr sz="1550" b="0" dirty="0">
+                <a:solidFill>
+                  <a:srgbClr val="141414"/>
+                </a:solidFill>
+              </a:rPr>
+              <a:t>station </a:t>
+            </a:r>
+            <a:r>
+              <a:rPr sz="1550" b="0" dirty="0" smtClean="0">
+                <a:solidFill>
+                  <a:srgbClr val="141414"/>
+                </a:solidFill>
+              </a:rPr>
+              <a:t>management</a:t>
+            </a:r>
+            <a:endParaRPr lang="en-US" sz="1550" dirty="0" smtClean="0"/>
+          </a:p>
+          <a:p>
+            <a:pPr marL="285750" indent="-285750" algn="l">
+              <a:lnSpc>
+                <a:spcPct val="150000"/>
+              </a:lnSpc>
+              <a:buFont typeface="Arial" panose="020B0604020202020204" pitchFamily="34" charset="0"/>
+              <a:buChar char="•"/>
+            </a:pPr>
+            <a:r>
+              <a:rPr sz="1550" b="0" dirty="0" smtClean="0">
+                <a:solidFill>
+                  <a:srgbClr val="141414"/>
+                </a:solidFill>
+              </a:rPr>
+              <a:t>Investigation </a:t>
+            </a:r>
+            <a:r>
+              <a:rPr sz="1550" b="0" dirty="0">
+                <a:solidFill>
+                  <a:srgbClr val="141414"/>
+                </a:solidFill>
+              </a:rPr>
+              <a:t>and officer </a:t>
+            </a:r>
+            <a:r>
+              <a:rPr sz="1550" b="0" dirty="0" smtClean="0">
+                <a:solidFill>
+                  <a:srgbClr val="141414"/>
+                </a:solidFill>
+              </a:rPr>
+              <a:t>assignment</a:t>
+            </a:r>
+            <a:endParaRPr lang="en-US" sz="1550" dirty="0" smtClean="0"/>
+          </a:p>
+          <a:p>
+            <a:pPr marL="285750" indent="-285750" algn="l">
+              <a:lnSpc>
+                <a:spcPct val="150000"/>
+              </a:lnSpc>
+              <a:buFont typeface="Arial" panose="020B0604020202020204" pitchFamily="34" charset="0"/>
+              <a:buChar char="•"/>
+            </a:pPr>
+            <a:r>
+              <a:rPr sz="1550" b="0" dirty="0" smtClean="0">
+                <a:solidFill>
+                  <a:srgbClr val="141414"/>
+                </a:solidFill>
+              </a:rPr>
+              <a:t>Evidence </a:t>
+            </a:r>
+            <a:r>
+              <a:rPr sz="1550" b="0" dirty="0">
+                <a:solidFill>
+                  <a:srgbClr val="141414"/>
+                </a:solidFill>
+              </a:rPr>
+              <a:t>and SHA 256 </a:t>
+            </a:r>
+            <a:r>
+              <a:rPr sz="1550" b="0" dirty="0" smtClean="0">
+                <a:solidFill>
+                  <a:srgbClr val="141414"/>
+                </a:solidFill>
+              </a:rPr>
+              <a:t>hashing</a:t>
+            </a:r>
+            <a:endParaRPr lang="en-US" sz="1550" dirty="0" smtClean="0"/>
+          </a:p>
+          <a:p>
+            <a:pPr marL="285750" indent="-285750" algn="l">
+              <a:lnSpc>
+                <a:spcPct val="150000"/>
+              </a:lnSpc>
+              <a:buFont typeface="Arial" panose="020B0604020202020204" pitchFamily="34" charset="0"/>
+              <a:buChar char="•"/>
+            </a:pPr>
+            <a:r>
+              <a:rPr sz="1550" b="0" dirty="0" err="1" smtClean="0">
+                <a:solidFill>
+                  <a:srgbClr val="141414"/>
+                </a:solidFill>
+              </a:rPr>
+              <a:t>Hyperledger</a:t>
+            </a:r>
+            <a:r>
+              <a:rPr sz="1550" b="0" dirty="0" smtClean="0">
+                <a:solidFill>
+                  <a:srgbClr val="141414"/>
+                </a:solidFill>
+              </a:rPr>
+              <a:t> </a:t>
+            </a:r>
+            <a:r>
+              <a:rPr sz="1550" b="0" dirty="0">
+                <a:solidFill>
+                  <a:srgbClr val="141414"/>
+                </a:solidFill>
+              </a:rPr>
+              <a:t>Fabric </a:t>
+            </a:r>
+            <a:r>
+              <a:rPr sz="1550" b="0" dirty="0" smtClean="0">
+                <a:solidFill>
+                  <a:srgbClr val="141414"/>
+                </a:solidFill>
+              </a:rPr>
+              <a:t>transactions</a:t>
+            </a:r>
+            <a:endParaRPr lang="en-US" sz="1550" dirty="0" smtClean="0"/>
+          </a:p>
+          <a:p>
+            <a:pPr marL="285750" indent="-285750" algn="l">
+              <a:lnSpc>
+                <a:spcPct val="150000"/>
+              </a:lnSpc>
+              <a:buFont typeface="Arial" panose="020B0604020202020204" pitchFamily="34" charset="0"/>
+              <a:buChar char="•"/>
+            </a:pPr>
+            <a:r>
+              <a:rPr sz="1550" b="0" dirty="0" smtClean="0">
+                <a:solidFill>
+                  <a:srgbClr val="141414"/>
+                </a:solidFill>
+              </a:rPr>
+              <a:t>Audit </a:t>
+            </a:r>
+            <a:r>
+              <a:rPr sz="1550" b="0" dirty="0">
+                <a:solidFill>
+                  <a:srgbClr val="141414"/>
+                </a:solidFill>
+              </a:rPr>
+              <a:t>trail and </a:t>
+            </a:r>
+            <a:r>
+              <a:rPr sz="1550" b="0" dirty="0" smtClean="0">
+                <a:solidFill>
+                  <a:srgbClr val="141414"/>
+                </a:solidFill>
+              </a:rPr>
+              <a:t>history</a:t>
+            </a:r>
+            <a:endParaRPr lang="en-US" sz="1550" dirty="0" smtClean="0"/>
+          </a:p>
+          <a:p>
+            <a:pPr marL="285750" indent="-285750" algn="l">
+              <a:lnSpc>
+                <a:spcPct val="150000"/>
+              </a:lnSpc>
+              <a:buFont typeface="Arial" panose="020B0604020202020204" pitchFamily="34" charset="0"/>
+              <a:buChar char="•"/>
+            </a:pPr>
+            <a:r>
+              <a:rPr sz="1550" b="0" dirty="0" smtClean="0">
+                <a:solidFill>
+                  <a:srgbClr val="141414"/>
+                </a:solidFill>
+              </a:rPr>
+              <a:t>Notifications</a:t>
+            </a:r>
+            <a:r>
+              <a:rPr sz="1550" b="0" dirty="0">
+                <a:solidFill>
+                  <a:srgbClr val="141414"/>
+                </a:solidFill>
+              </a:rPr>
+              <a:t>, analytics, administration</a:t>
             </a:r>
           </a:p>
         </p:txBody>
@@ -19212,7 +20646,7 @@
         </p:nvSpPr>
         <p:spPr>
           <a:xfrm>
-            <a:off x="4526280" y="1325880"/>
+            <a:off x="4526280" y="1335116"/>
             <a:ext cx="3749039" cy="4480560"/>
           </a:xfrm>
           <a:prstGeom prst="roundRect">
@@ -19338,7 +20772,7 @@
         <p:spPr>
           <a:xfrm>
             <a:off x="4681728" y="1828800"/>
-            <a:ext cx="3520439" cy="3886200"/>
+            <a:ext cx="3520439" cy="2798458"/>
           </a:xfrm>
           <a:prstGeom prst="rect">
             <a:avLst/>
@@ -19351,95 +20785,199 @@
           </a:bodyPr>
           <a:lstStyle/>
           <a:p>
-            <a:pPr algn="l"/>
-            <a:r>
-              <a:rPr sz="1300" b="0">
+            <a:pPr marL="285750" indent="-285750" algn="l">
+              <a:lnSpc>
+                <a:spcPct val="150000"/>
+              </a:lnSpc>
+              <a:buFont typeface="Arial" panose="020B0604020202020204" pitchFamily="34" charset="0"/>
+              <a:buChar char="•"/>
+            </a:pPr>
+            <a:r>
+              <a:rPr sz="1550" b="0" dirty="0" smtClean="0">
                 <a:solidFill>
                   <a:srgbClr val="141414"/>
                 </a:solidFill>
-                <a:latin typeface="Arial"/>
-              </a:rPr>
-              <a:t>• Live Pakistan Police integration</a:t>
-            </a:r>
-            <a:r>
+              </a:rPr>
+              <a:t>Live </a:t>
+            </a:r>
+            <a:r>
+              <a:rPr sz="1550" b="0" dirty="0">
+                <a:solidFill>
+                  <a:srgbClr val="141414"/>
+                </a:solidFill>
+              </a:rPr>
+              <a:t>Pakistan Police </a:t>
+            </a:r>
+            <a:r>
+              <a:rPr sz="1550" b="0" dirty="0" smtClean="0">
+                <a:solidFill>
+                  <a:srgbClr val="141414"/>
+                </a:solidFill>
+              </a:rPr>
+              <a:t>integration</a:t>
+            </a:r>
+            <a:endParaRPr lang="en-US" sz="1550" dirty="0" smtClean="0"/>
+          </a:p>
+          <a:p>
+            <a:pPr marL="285750" indent="-285750" algn="l">
+              <a:lnSpc>
+                <a:spcPct val="150000"/>
+              </a:lnSpc>
+              <a:buFont typeface="Arial" panose="020B0604020202020204" pitchFamily="34" charset="0"/>
+              <a:buChar char="•"/>
+            </a:pPr>
+            <a:r>
+              <a:rPr sz="1550" b="0" dirty="0" smtClean="0">
+                <a:solidFill>
+                  <a:srgbClr val="141414"/>
+                </a:solidFill>
+              </a:rPr>
+              <a:t>Real </a:t>
+            </a:r>
+            <a:r>
+              <a:rPr sz="1550" b="0" dirty="0">
+                <a:solidFill>
+                  <a:srgbClr val="141414"/>
+                </a:solidFill>
+              </a:rPr>
+              <a:t>NADRA </a:t>
+            </a:r>
+            <a:r>
+              <a:rPr sz="1550" b="0" dirty="0" smtClean="0">
+                <a:solidFill>
+                  <a:srgbClr val="141414"/>
+                </a:solidFill>
+              </a:rPr>
+              <a:t>verification</a:t>
+            </a:r>
+            <a:endParaRPr lang="en-US" sz="1550" dirty="0" smtClean="0"/>
+          </a:p>
+          <a:p>
+            <a:pPr marL="285750" indent="-285750" algn="l">
+              <a:lnSpc>
+                <a:spcPct val="150000"/>
+              </a:lnSpc>
+              <a:buFont typeface="Arial" panose="020B0604020202020204" pitchFamily="34" charset="0"/>
+              <a:buChar char="•"/>
+            </a:pPr>
+            <a:r>
+              <a:rPr sz="1550" b="0" dirty="0" smtClean="0">
+                <a:solidFill>
+                  <a:srgbClr val="141414"/>
+                </a:solidFill>
+              </a:rPr>
+              <a:t>Real </a:t>
+            </a:r>
+            <a:r>
+              <a:rPr sz="1550" b="0" dirty="0">
+                <a:solidFill>
+                  <a:srgbClr val="141414"/>
+                </a:solidFill>
+              </a:rPr>
+              <a:t>criminal history </a:t>
+            </a:r>
+            <a:r>
+              <a:rPr sz="1550" b="0" dirty="0" smtClean="0">
+                <a:solidFill>
+                  <a:srgbClr val="141414"/>
+                </a:solidFill>
+              </a:rPr>
+              <a:t>data</a:t>
+            </a:r>
+            <a:endParaRPr lang="en-US" sz="1550" dirty="0" smtClean="0"/>
+          </a:p>
+          <a:p>
+            <a:pPr marL="285750" indent="-285750" algn="l">
+              <a:lnSpc>
+                <a:spcPct val="150000"/>
+              </a:lnSpc>
+              <a:buFont typeface="Arial" panose="020B0604020202020204" pitchFamily="34" charset="0"/>
+              <a:buChar char="•"/>
+            </a:pPr>
+            <a:r>
+              <a:rPr sz="1550" b="0" dirty="0" smtClean="0">
+                <a:solidFill>
+                  <a:srgbClr val="141414"/>
+                </a:solidFill>
+              </a:rPr>
+              <a:t>AI </a:t>
+            </a:r>
+            <a:r>
+              <a:rPr sz="1550" b="0" dirty="0">
+                <a:solidFill>
+                  <a:srgbClr val="141414"/>
+                </a:solidFill>
+              </a:rPr>
+              <a:t>based profiling or </a:t>
+            </a:r>
+            <a:r>
+              <a:rPr sz="1550" b="0" dirty="0" smtClean="0">
+                <a:solidFill>
+                  <a:srgbClr val="141414"/>
+                </a:solidFill>
+              </a:rPr>
+              <a:t>prediction</a:t>
+            </a:r>
+            <a:endParaRPr lang="en-US" sz="1550" dirty="0" smtClean="0"/>
+          </a:p>
+          <a:p>
+            <a:pPr marL="285750" indent="-285750" algn="l">
+              <a:lnSpc>
+                <a:spcPct val="150000"/>
+              </a:lnSpc>
+              <a:buFont typeface="Arial" panose="020B0604020202020204" pitchFamily="34" charset="0"/>
+              <a:buChar char="•"/>
+            </a:pPr>
+            <a:r>
+              <a:rPr sz="1550" b="0" dirty="0" smtClean="0">
+                <a:solidFill>
+                  <a:srgbClr val="141414"/>
+                </a:solidFill>
+              </a:rPr>
+              <a:t>Production deployment</a:t>
+            </a:r>
+            <a:endParaRPr lang="en-US" sz="1550" dirty="0" smtClean="0"/>
+          </a:p>
+          <a:p>
+            <a:pPr marL="285750" indent="-285750" algn="l">
+              <a:buFont typeface="Arial" panose="020B0604020202020204" pitchFamily="34" charset="0"/>
+              <a:buChar char="•"/>
+            </a:pPr>
+            <a:r>
+              <a:rPr sz="1550" b="0" dirty="0" smtClean="0">
+                <a:solidFill>
+                  <a:srgbClr val="141414"/>
+                </a:solidFill>
+              </a:rPr>
+              <a:t>Legal </a:t>
+            </a:r>
+            <a:r>
+              <a:rPr sz="1550" b="0" dirty="0">
+                <a:solidFill>
+                  <a:srgbClr val="141414"/>
+                </a:solidFill>
+              </a:rPr>
+              <a:t>authorization of real FIRs</a:t>
+            </a:r>
+            <a:r>
+              <a:rPr sz="1550" dirty="0"/>
               <a:t/>
             </a:r>
-            <a:br/>
-            <a:r>
-              <a:rPr sz="1300" b="0">
+            <a:br>
+              <a:rPr sz="1550" dirty="0"/>
+            </a:br>
+            <a:r>
+              <a:rPr sz="1550" dirty="0"/>
+              <a:t/>
+            </a:r>
+            <a:br>
+              <a:rPr sz="1550" dirty="0"/>
+            </a:br>
+            <a:r>
+              <a:rPr sz="1550" b="1" dirty="0">
                 <a:solidFill>
                   <a:srgbClr val="141414"/>
                 </a:solidFill>
-                <a:latin typeface="Arial"/>
-              </a:rPr>
-              <a:t>• Real NADRA verification</a:t>
-            </a:r>
-            <a:r>
-              <a:t/>
-            </a:r>
-            <a:br/>
-            <a:r>
-              <a:rPr sz="1300" b="0">
-                <a:solidFill>
-                  <a:srgbClr val="141414"/>
-                </a:solidFill>
-                <a:latin typeface="Arial"/>
-              </a:rPr>
-              <a:t>• Real criminal history data</a:t>
-            </a:r>
-            <a:r>
-              <a:t/>
-            </a:r>
-            <a:br/>
-            <a:r>
-              <a:rPr sz="1300" b="0">
-                <a:solidFill>
-                  <a:srgbClr val="141414"/>
-                </a:solidFill>
-                <a:latin typeface="Arial"/>
-              </a:rPr>
-              <a:t>• AI based profiling or prediction</a:t>
-            </a:r>
-            <a:r>
-              <a:t/>
-            </a:r>
-            <a:br/>
-            <a:r>
-              <a:rPr sz="1300" b="0">
-                <a:solidFill>
-                  <a:srgbClr val="141414"/>
-                </a:solidFill>
-                <a:latin typeface="Arial"/>
-              </a:rPr>
-              <a:t>• Production deployment</a:t>
-            </a:r>
-            <a:r>
-              <a:t/>
-            </a:r>
-            <a:br/>
-            <a:r>
-              <a:rPr sz="1300" b="0">
-                <a:solidFill>
-                  <a:srgbClr val="141414"/>
-                </a:solidFill>
-                <a:latin typeface="Arial"/>
-              </a:rPr>
-              <a:t>• Legal authorization of real FIRs</a:t>
-            </a:r>
-            <a:r>
-              <a:t/>
-            </a:r>
-            <a:br/>
-            <a:r>
-              <a:t/>
-            </a:r>
-            <a:br/>
-            <a:r>
-              <a:rPr sz="1300" b="0">
-                <a:solidFill>
-                  <a:srgbClr val="141414"/>
-                </a:solidFill>
-                <a:latin typeface="Arial"/>
               </a:rPr>
               <a:t>All testing uses synthetic or demonstration data.</a:t>
             </a:r>
@@ -19473,7 +21011,7 @@
 </p:sld>
 </file>
 
-<file path=ppt/slides/slide17.xml><?xml version="1.0" encoding="utf-8"?>
+<file path=ppt/slides/slide18.xml><?xml version="1.0" encoding="utf-8"?>
 <p:sld xmlns:a="http://schemas.openxmlformats.org/drawingml/2006/main" xmlns:r="http://schemas.openxmlformats.org/officeDocument/2006/relationships" xmlns:p="http://schemas.openxmlformats.org/presentationml/2006/main">
   <p:cSld>
     <p:spTree>
@@ -19630,7 +21168,7 @@
         <p:spPr>
           <a:xfrm>
             <a:off x="658368" y="1344168"/>
-            <a:ext cx="2286000" cy="347472"/>
+            <a:ext cx="2286000" cy="301621"/>
           </a:xfrm>
           <a:prstGeom prst="rect">
             <a:avLst/>
@@ -19645,7 +21183,7 @@
           <a:p>
             <a:pPr algn="l"/>
             <a:r>
-              <a:rPr sz="1400" b="1">
+              <a:rPr sz="1600" b="1" dirty="0">
                 <a:solidFill>
                   <a:srgbClr val="1F497D"/>
                 </a:solidFill>
@@ -19665,7 +21203,7 @@
         <p:spPr>
           <a:xfrm>
             <a:off x="658368" y="1737360"/>
-            <a:ext cx="2286000" cy="1234440"/>
+            <a:ext cx="2286000" cy="486287"/>
           </a:xfrm>
           <a:prstGeom prst="rect">
             <a:avLst/>
@@ -19680,7 +21218,7 @@
           <a:p>
             <a:pPr algn="l"/>
             <a:r>
-              <a:rPr sz="1150" b="0">
+              <a:rPr b="0" dirty="0">
                 <a:solidFill>
                   <a:srgbClr val="141414"/>
                 </a:solidFill>
@@ -19790,7 +21328,7 @@
         <p:spPr>
           <a:xfrm>
             <a:off x="3310128" y="1344168"/>
-            <a:ext cx="2286000" cy="347472"/>
+            <a:ext cx="2286000" cy="301621"/>
           </a:xfrm>
           <a:prstGeom prst="rect">
             <a:avLst/>
@@ -19805,7 +21343,7 @@
           <a:p>
             <a:pPr algn="l"/>
             <a:r>
-              <a:rPr sz="1400" b="1">
+              <a:rPr sz="1600" b="1" dirty="0">
                 <a:solidFill>
                   <a:srgbClr val="DAA520"/>
                 </a:solidFill>
@@ -19825,7 +21363,7 @@
         <p:spPr>
           <a:xfrm>
             <a:off x="3310128" y="1737360"/>
-            <a:ext cx="2286000" cy="1234440"/>
+            <a:ext cx="2286000" cy="701731"/>
           </a:xfrm>
           <a:prstGeom prst="rect">
             <a:avLst/>
@@ -19840,7 +21378,7 @@
           <a:p>
             <a:pPr algn="l"/>
             <a:r>
-              <a:rPr sz="1150" b="0">
+              <a:rPr b="0" dirty="0">
                 <a:solidFill>
                   <a:srgbClr val="141414"/>
                 </a:solidFill>
@@ -19950,7 +21488,7 @@
         <p:spPr>
           <a:xfrm>
             <a:off x="5961888" y="1344168"/>
-            <a:ext cx="2286000" cy="347472"/>
+            <a:ext cx="2286000" cy="301621"/>
           </a:xfrm>
           <a:prstGeom prst="rect">
             <a:avLst/>
@@ -19965,7 +21503,7 @@
           <a:p>
             <a:pPr algn="l"/>
             <a:r>
-              <a:rPr sz="1400" b="1">
+              <a:rPr sz="1600" b="1" dirty="0">
                 <a:solidFill>
                   <a:srgbClr val="1F497D"/>
                 </a:solidFill>
@@ -19985,7 +21523,7 @@
         <p:spPr>
           <a:xfrm>
             <a:off x="5961888" y="1737360"/>
-            <a:ext cx="2286000" cy="1234440"/>
+            <a:ext cx="2286000" cy="486287"/>
           </a:xfrm>
           <a:prstGeom prst="rect">
             <a:avLst/>
@@ -20000,14 +21538,38 @@
           <a:p>
             <a:pPr algn="l"/>
             <a:r>
-              <a:rPr sz="1150" b="0">
+              <a:rPr b="0" dirty="0" smtClean="0">
                 <a:solidFill>
                   <a:srgbClr val="141414"/>
                 </a:solidFill>
                 <a:latin typeface="Arial"/>
               </a:rPr>
-              <a:t>Frontend, FastAPI backend, authentication, FIR modules</a:t>
-            </a:r>
+              <a:t>Frontend, </a:t>
+            </a:r>
+            <a:r>
+              <a:rPr b="0" dirty="0" err="1" smtClean="0">
+                <a:solidFill>
+                  <a:srgbClr val="141414"/>
+                </a:solidFill>
+                <a:latin typeface="Arial"/>
+              </a:rPr>
+              <a:t>FastAPI</a:t>
+            </a:r>
+            <a:r>
+              <a:rPr b="0" dirty="0" smtClean="0">
+                <a:solidFill>
+                  <a:srgbClr val="141414"/>
+                </a:solidFill>
+                <a:latin typeface="Arial"/>
+              </a:rPr>
+              <a:t> backend, authentication, FIR modules</a:t>
+            </a:r>
+            <a:endParaRPr b="0" dirty="0">
+              <a:solidFill>
+                <a:srgbClr val="141414"/>
+              </a:solidFill>
+              <a:latin typeface="Arial"/>
+            </a:endParaRPr>
           </a:p>
         </p:txBody>
       </p:sp>
@@ -20110,7 +21672,7 @@
         <p:spPr>
           <a:xfrm>
             <a:off x="658368" y="3447288"/>
-            <a:ext cx="2286000" cy="347472"/>
+            <a:ext cx="2286000" cy="301621"/>
           </a:xfrm>
           <a:prstGeom prst="rect">
             <a:avLst/>
@@ -20125,7 +21687,7 @@
           <a:p>
             <a:pPr algn="l"/>
             <a:r>
-              <a:rPr sz="1400" b="1">
+              <a:rPr sz="1600" b="1" dirty="0">
                 <a:solidFill>
                   <a:srgbClr val="DAA520"/>
                 </a:solidFill>
@@ -20145,7 +21707,7 @@
         <p:spPr>
           <a:xfrm>
             <a:off x="658368" y="3840480"/>
-            <a:ext cx="2286000" cy="1234440"/>
+            <a:ext cx="2286000" cy="486287"/>
           </a:xfrm>
           <a:prstGeom prst="rect">
             <a:avLst/>
@@ -20160,13 +21722,31 @@
           <a:p>
             <a:pPr algn="l"/>
             <a:r>
-              <a:rPr sz="1150" b="0">
+              <a:rPr b="0" dirty="0">
                 <a:solidFill>
                   <a:srgbClr val="141414"/>
                 </a:solidFill>
                 <a:latin typeface="Arial"/>
               </a:rPr>
-              <a:t>Fabric network, chaincode, transactions, integration</a:t>
+              <a:t>Fabric network, </a:t>
+            </a:r>
+            <a:r>
+              <a:rPr b="0" dirty="0" err="1">
+                <a:solidFill>
+                  <a:srgbClr val="141414"/>
+                </a:solidFill>
+                <a:latin typeface="Arial"/>
+              </a:rPr>
+              <a:t>chaincode</a:t>
+            </a:r>
+            <a:r>
+              <a:rPr b="0" dirty="0">
+                <a:solidFill>
+                  <a:srgbClr val="141414"/>
+                </a:solidFill>
+                <a:latin typeface="Arial"/>
+              </a:rPr>
+              <a:t>, transactions, integration</a:t>
             </a:r>
           </a:p>
         </p:txBody>
@@ -20270,7 +21850,7 @@
         <p:spPr>
           <a:xfrm>
             <a:off x="3310128" y="3447288"/>
-            <a:ext cx="2286000" cy="347472"/>
+            <a:ext cx="2286000" cy="301621"/>
           </a:xfrm>
           <a:prstGeom prst="rect">
             <a:avLst/>
@@ -20285,7 +21865,7 @@
           <a:p>
             <a:pPr algn="l"/>
             <a:r>
-              <a:rPr sz="1400" b="1">
+              <a:rPr sz="1600" b="1" dirty="0">
                 <a:solidFill>
                   <a:srgbClr val="1F497D"/>
                 </a:solidFill>
@@ -20305,7 +21885,7 @@
         <p:spPr>
           <a:xfrm>
             <a:off x="3310128" y="3840480"/>
-            <a:ext cx="2286000" cy="1234440"/>
+            <a:ext cx="2286000" cy="486287"/>
           </a:xfrm>
           <a:prstGeom prst="rect">
             <a:avLst/>
@@ -20320,7 +21900,7 @@
           <a:p>
             <a:pPr algn="l"/>
             <a:r>
-              <a:rPr sz="1150" b="0">
+              <a:rPr b="0" dirty="0">
                 <a:solidFill>
                   <a:srgbClr val="141414"/>
                 </a:solidFill>
@@ -20430,7 +22010,7 @@
         <p:spPr>
           <a:xfrm>
             <a:off x="5961888" y="3447288"/>
-            <a:ext cx="2286000" cy="347472"/>
+            <a:ext cx="2286000" cy="301621"/>
           </a:xfrm>
           <a:prstGeom prst="rect">
             <a:avLst/>
@@ -20445,7 +22025,7 @@
           <a:p>
             <a:pPr algn="l"/>
             <a:r>
-              <a:rPr sz="1400" b="1">
+              <a:rPr sz="1600" b="1" dirty="0">
                 <a:solidFill>
                   <a:srgbClr val="DAA520"/>
                 </a:solidFill>
@@ -20465,7 +22045,7 @@
         <p:spPr>
           <a:xfrm>
             <a:off x="5961888" y="3840480"/>
-            <a:ext cx="2286000" cy="1234440"/>
+            <a:ext cx="2286000" cy="701731"/>
           </a:xfrm>
           <a:prstGeom prst="rect">
             <a:avLst/>
@@ -20480,7 +22060,7 @@
           <a:p>
             <a:pPr algn="l"/>
             <a:r>
-              <a:rPr sz="1150" b="0">
+              <a:rPr b="0" dirty="0">
                 <a:solidFill>
                   <a:srgbClr val="141414"/>
                 </a:solidFill>
@@ -20540,835 +22120,6 @@
     <mc:Fallback xmlns="">
       <p:transition spd="slow">
         <p:checker/>
-      </p:transition>
-    </mc:Fallback>
-  </mc:AlternateContent>
-  <p:timing>
-    <p:tnLst>
-      <p:par>
-        <p:cTn id="1" dur="indefinite" restart="never" nodeType="tmRoot"/>
-      </p:par>
-    </p:tnLst>
-  </p:timing>
-</p:sld>
-</file>
-
-<file path=ppt/slides/slide18.xml><?xml version="1.0" encoding="utf-8"?>
-<p:sld xmlns:a="http://schemas.openxmlformats.org/drawingml/2006/main" xmlns:r="http://schemas.openxmlformats.org/officeDocument/2006/relationships" xmlns:p="http://schemas.openxmlformats.org/presentationml/2006/main">
-  <p:cSld>
-    <p:spTree>
-      <p:nvGrpSpPr>
-        <p:cNvPr id="1" name=""/>
-        <p:cNvGrpSpPr/>
-        <p:nvPr/>
-      </p:nvGrpSpPr>
-      <p:grpSpPr>
-        <a:xfrm>
-          <a:off x="0" y="0"/>
-          <a:ext cx="0" cy="0"/>
-          <a:chOff x="0" y="0"/>
-          <a:chExt cx="0" cy="0"/>
-        </a:xfrm>
-      </p:grpSpPr>
-      <p:sp>
-        <p:nvSpPr>
-          <p:cNvPr id="2" name="Title 1"/>
-          <p:cNvSpPr>
-            <a:spLocks noGrp="1"/>
-          </p:cNvSpPr>
-          <p:nvPr>
-            <p:ph type="title"/>
-          </p:nvPr>
-        </p:nvSpPr>
-        <p:spPr/>
-        <p:txBody>
-          <a:bodyPr wrap="square" lIns="45720" tIns="18288" rIns="45720" bIns="18288"/>
-          <a:lstStyle/>
-          <a:p>
-            <a:r>
-              <a:rPr sz="2600" b="1">
-                <a:solidFill>
-                  <a:srgbClr val="1F497D"/>
-                </a:solidFill>
-                <a:latin typeface="Arial"/>
-              </a:rPr>
-              <a:t>Roles and Responsibilities</a:t>
-            </a:r>
-          </a:p>
-        </p:txBody>
-      </p:sp>
-      <p:sp>
-        <p:nvSpPr>
-          <p:cNvPr id="4" name="Rounded Rectangle 3"/>
-          <p:cNvSpPr/>
-          <p:nvPr/>
-        </p:nvSpPr>
-        <p:spPr>
-          <a:xfrm>
-            <a:off x="502920" y="1234440"/>
-            <a:ext cx="2514600" cy="3520440"/>
-          </a:xfrm>
-          <a:prstGeom prst="roundRect">
-            <a:avLst/>
-          </a:prstGeom>
-          <a:solidFill>
-            <a:srgbClr val="FFFFFF"/>
-          </a:solidFill>
-          <a:ln w="12700">
-            <a:solidFill>
-              <a:srgbClr val="CDD4DC"/>
-            </a:solidFill>
-          </a:ln>
-        </p:spPr>
-        <p:style>
-          <a:lnRef idx="1">
-            <a:schemeClr val="accent1"/>
-          </a:lnRef>
-          <a:fillRef idx="3">
-            <a:schemeClr val="accent1"/>
-          </a:fillRef>
-          <a:effectRef idx="2">
-            <a:schemeClr val="accent1"/>
-          </a:effectRef>
-          <a:fontRef idx="minor">
-            <a:schemeClr val="lt1"/>
-          </a:fontRef>
-        </p:style>
-        <p:txBody>
-          <a:bodyPr wrap="square" rtlCol="0" anchor="ctr"/>
-          <a:lstStyle/>
-          <a:p>
-            <a:pPr algn="ctr"/>
-            <a:endParaRPr/>
-          </a:p>
-        </p:txBody>
-      </p:sp>
-      <p:sp>
-        <p:nvSpPr>
-          <p:cNvPr id="5" name="Rectangle 4"/>
-          <p:cNvSpPr/>
-          <p:nvPr/>
-        </p:nvSpPr>
-        <p:spPr>
-          <a:xfrm>
-            <a:off x="502920" y="1234440"/>
-            <a:ext cx="64008" cy="3520440"/>
-          </a:xfrm>
-          <a:prstGeom prst="rect">
-            <a:avLst/>
-          </a:prstGeom>
-          <a:solidFill>
-            <a:srgbClr val="1F497D"/>
-          </a:solidFill>
-          <a:ln>
-            <a:noFill/>
-          </a:ln>
-        </p:spPr>
-        <p:style>
-          <a:lnRef idx="1">
-            <a:schemeClr val="accent1"/>
-          </a:lnRef>
-          <a:fillRef idx="3">
-            <a:schemeClr val="accent1"/>
-          </a:fillRef>
-          <a:effectRef idx="2">
-            <a:schemeClr val="accent1"/>
-          </a:effectRef>
-          <a:fontRef idx="minor">
-            <a:schemeClr val="lt1"/>
-          </a:fontRef>
-        </p:style>
-        <p:txBody>
-          <a:bodyPr wrap="square" rtlCol="0" anchor="ctr"/>
-          <a:lstStyle/>
-          <a:p>
-            <a:pPr algn="ctr"/>
-            <a:endParaRPr/>
-          </a:p>
-        </p:txBody>
-      </p:sp>
-      <p:sp>
-        <p:nvSpPr>
-          <p:cNvPr id="6" name="TextBox 5"/>
-          <p:cNvSpPr txBox="1"/>
-          <p:nvPr/>
-        </p:nvSpPr>
-        <p:spPr>
-          <a:xfrm>
-            <a:off x="658368" y="1344168"/>
-            <a:ext cx="2286000" cy="347472"/>
-          </a:xfrm>
-          <a:prstGeom prst="rect">
-            <a:avLst/>
-          </a:prstGeom>
-          <a:noFill/>
-        </p:spPr>
-        <p:txBody>
-          <a:bodyPr wrap="square" lIns="36576" tIns="27432" rIns="36576" bIns="27432">
-            <a:spAutoFit/>
-          </a:bodyPr>
-          <a:lstStyle/>
-          <a:p>
-            <a:pPr algn="l"/>
-            <a:r>
-              <a:rPr sz="1500" b="1">
-                <a:solidFill>
-                  <a:srgbClr val="1F497D"/>
-                </a:solidFill>
-                <a:latin typeface="Arial"/>
-              </a:rPr>
-              <a:t>Sharaiz Ahmed | 57288</a:t>
-            </a:r>
-          </a:p>
-        </p:txBody>
-      </p:sp>
-      <p:sp>
-        <p:nvSpPr>
-          <p:cNvPr id="7" name="TextBox 6"/>
-          <p:cNvSpPr txBox="1"/>
-          <p:nvPr/>
-        </p:nvSpPr>
-        <p:spPr>
-          <a:xfrm>
-            <a:off x="658368" y="1737360"/>
-            <a:ext cx="2286000" cy="2926080"/>
-          </a:xfrm>
-          <a:prstGeom prst="rect">
-            <a:avLst/>
-          </a:prstGeom>
-          <a:noFill/>
-        </p:spPr>
-        <p:txBody>
-          <a:bodyPr wrap="square" lIns="36576" tIns="27432" rIns="36576" bIns="27432">
-            <a:spAutoFit/>
-          </a:bodyPr>
-          <a:lstStyle/>
-          <a:p>
-            <a:pPr algn="l"/>
-            <a:r>
-              <a:rPr sz="1150" b="0">
-                <a:solidFill>
-                  <a:srgbClr val="141414"/>
-                </a:solidFill>
-                <a:latin typeface="Arial"/>
-              </a:rPr>
-              <a:t>System Architecture and Blockchain Lead</a:t>
-            </a:r>
-            <a:r>
-              <a:t/>
-            </a:r>
-            <a:br/>
-            <a:r>
-              <a:t/>
-            </a:r>
-            <a:br/>
-            <a:r>
-              <a:rPr sz="1150" b="0">
-                <a:solidFill>
-                  <a:srgbClr val="141414"/>
-                </a:solidFill>
-                <a:latin typeface="Arial"/>
-              </a:rPr>
-              <a:t>• Architecture and requirements coordination</a:t>
-            </a:r>
-            <a:r>
-              <a:t/>
-            </a:r>
-            <a:br/>
-            <a:r>
-              <a:rPr sz="1150" b="0">
-                <a:solidFill>
-                  <a:srgbClr val="141414"/>
-                </a:solidFill>
-                <a:latin typeface="Arial"/>
-              </a:rPr>
-              <a:t>• Hyperledger Fabric and chaincode coordination</a:t>
-            </a:r>
-            <a:r>
-              <a:t/>
-            </a:r>
-            <a:br/>
-            <a:r>
-              <a:rPr sz="1150" b="0">
-                <a:solidFill>
-                  <a:srgbClr val="141414"/>
-                </a:solidFill>
-                <a:latin typeface="Arial"/>
-              </a:rPr>
-              <a:t>• Hash and integrity architecture</a:t>
-            </a:r>
-            <a:r>
-              <a:t/>
-            </a:r>
-            <a:br/>
-            <a:r>
-              <a:rPr sz="1150" b="0">
-                <a:solidFill>
-                  <a:srgbClr val="141414"/>
-                </a:solidFill>
-                <a:latin typeface="Arial"/>
-              </a:rPr>
-              <a:t>• Security architecture and integration</a:t>
-            </a:r>
-            <a:r>
-              <a:t/>
-            </a:r>
-            <a:br/>
-            <a:r>
-              <a:rPr sz="1150" b="0">
-                <a:solidFill>
-                  <a:srgbClr val="141414"/>
-                </a:solidFill>
-                <a:latin typeface="Arial"/>
-              </a:rPr>
-              <a:t>• GitHub and deployment coordination</a:t>
-            </a:r>
-          </a:p>
-        </p:txBody>
-      </p:sp>
-      <p:sp>
-        <p:nvSpPr>
-          <p:cNvPr id="8" name="Rounded Rectangle 7"/>
-          <p:cNvSpPr/>
-          <p:nvPr/>
-        </p:nvSpPr>
-        <p:spPr>
-          <a:xfrm>
-            <a:off x="3154680" y="1234440"/>
-            <a:ext cx="2514600" cy="3520440"/>
-          </a:xfrm>
-          <a:prstGeom prst="roundRect">
-            <a:avLst/>
-          </a:prstGeom>
-          <a:solidFill>
-            <a:srgbClr val="FFFFFF"/>
-          </a:solidFill>
-          <a:ln w="12700">
-            <a:solidFill>
-              <a:srgbClr val="CDD4DC"/>
-            </a:solidFill>
-          </a:ln>
-        </p:spPr>
-        <p:style>
-          <a:lnRef idx="1">
-            <a:schemeClr val="accent1"/>
-          </a:lnRef>
-          <a:fillRef idx="3">
-            <a:schemeClr val="accent1"/>
-          </a:fillRef>
-          <a:effectRef idx="2">
-            <a:schemeClr val="accent1"/>
-          </a:effectRef>
-          <a:fontRef idx="minor">
-            <a:schemeClr val="lt1"/>
-          </a:fontRef>
-        </p:style>
-        <p:txBody>
-          <a:bodyPr wrap="square" rtlCol="0" anchor="ctr"/>
-          <a:lstStyle/>
-          <a:p>
-            <a:pPr algn="ctr"/>
-            <a:endParaRPr/>
-          </a:p>
-        </p:txBody>
-      </p:sp>
-      <p:sp>
-        <p:nvSpPr>
-          <p:cNvPr id="9" name="Rectangle 8"/>
-          <p:cNvSpPr/>
-          <p:nvPr/>
-        </p:nvSpPr>
-        <p:spPr>
-          <a:xfrm>
-            <a:off x="3154680" y="1234440"/>
-            <a:ext cx="64008" cy="3520440"/>
-          </a:xfrm>
-          <a:prstGeom prst="rect">
-            <a:avLst/>
-          </a:prstGeom>
-          <a:solidFill>
-            <a:srgbClr val="DAA520"/>
-          </a:solidFill>
-          <a:ln>
-            <a:noFill/>
-          </a:ln>
-        </p:spPr>
-        <p:style>
-          <a:lnRef idx="1">
-            <a:schemeClr val="accent1"/>
-          </a:lnRef>
-          <a:fillRef idx="3">
-            <a:schemeClr val="accent1"/>
-          </a:fillRef>
-          <a:effectRef idx="2">
-            <a:schemeClr val="accent1"/>
-          </a:effectRef>
-          <a:fontRef idx="minor">
-            <a:schemeClr val="lt1"/>
-          </a:fontRef>
-        </p:style>
-        <p:txBody>
-          <a:bodyPr wrap="square" rtlCol="0" anchor="ctr"/>
-          <a:lstStyle/>
-          <a:p>
-            <a:pPr algn="ctr"/>
-            <a:endParaRPr/>
-          </a:p>
-        </p:txBody>
-      </p:sp>
-      <p:sp>
-        <p:nvSpPr>
-          <p:cNvPr id="10" name="TextBox 9"/>
-          <p:cNvSpPr txBox="1"/>
-          <p:nvPr/>
-        </p:nvSpPr>
-        <p:spPr>
-          <a:xfrm>
-            <a:off x="3310128" y="1344168"/>
-            <a:ext cx="2286000" cy="347472"/>
-          </a:xfrm>
-          <a:prstGeom prst="rect">
-            <a:avLst/>
-          </a:prstGeom>
-          <a:noFill/>
-        </p:spPr>
-        <p:txBody>
-          <a:bodyPr wrap="square" lIns="36576" tIns="27432" rIns="36576" bIns="27432">
-            <a:spAutoFit/>
-          </a:bodyPr>
-          <a:lstStyle/>
-          <a:p>
-            <a:pPr algn="l"/>
-            <a:r>
-              <a:rPr sz="1500" b="1">
-                <a:solidFill>
-                  <a:srgbClr val="DAA520"/>
-                </a:solidFill>
-                <a:latin typeface="Arial"/>
-              </a:rPr>
-              <a:t>Abdul Moiz | 54482</a:t>
-            </a:r>
-          </a:p>
-        </p:txBody>
-      </p:sp>
-      <p:sp>
-        <p:nvSpPr>
-          <p:cNvPr id="11" name="TextBox 10"/>
-          <p:cNvSpPr txBox="1"/>
-          <p:nvPr/>
-        </p:nvSpPr>
-        <p:spPr>
-          <a:xfrm>
-            <a:off x="3310128" y="1737360"/>
-            <a:ext cx="2286000" cy="2926080"/>
-          </a:xfrm>
-          <a:prstGeom prst="rect">
-            <a:avLst/>
-          </a:prstGeom>
-          <a:noFill/>
-        </p:spPr>
-        <p:txBody>
-          <a:bodyPr wrap="square" lIns="36576" tIns="27432" rIns="36576" bIns="27432">
-            <a:spAutoFit/>
-          </a:bodyPr>
-          <a:lstStyle/>
-          <a:p>
-            <a:pPr algn="l"/>
-            <a:r>
-              <a:rPr sz="1150" b="0">
-                <a:solidFill>
-                  <a:srgbClr val="141414"/>
-                </a:solidFill>
-                <a:latin typeface="Arial"/>
-              </a:rPr>
-              <a:t>Backend and Database Lead</a:t>
-            </a:r>
-            <a:r>
-              <a:t/>
-            </a:r>
-            <a:br/>
-            <a:r>
-              <a:t/>
-            </a:r>
-            <a:br/>
-            <a:r>
-              <a:rPr sz="1150" b="0">
-                <a:solidFill>
-                  <a:srgbClr val="141414"/>
-                </a:solidFill>
-                <a:latin typeface="Arial"/>
-              </a:rPr>
-              <a:t>• Python and FastAPI</a:t>
-            </a:r>
-            <a:r>
-              <a:t/>
-            </a:r>
-            <a:br/>
-            <a:r>
-              <a:rPr sz="1150" b="0">
-                <a:solidFill>
-                  <a:srgbClr val="141414"/>
-                </a:solidFill>
-                <a:latin typeface="Arial"/>
-              </a:rPr>
-              <a:t>• REST APIs and PostgreSQL</a:t>
-            </a:r>
-            <a:r>
-              <a:t/>
-            </a:r>
-            <a:br/>
-            <a:r>
-              <a:rPr sz="1150" b="0">
-                <a:solidFill>
-                  <a:srgbClr val="141414"/>
-                </a:solidFill>
-                <a:latin typeface="Arial"/>
-              </a:rPr>
-              <a:t>• Authentication and RBAC</a:t>
-            </a:r>
-            <a:r>
-              <a:t/>
-            </a:r>
-            <a:br/>
-            <a:r>
-              <a:rPr sz="1150" b="0">
-                <a:solidFill>
-                  <a:srgbClr val="141414"/>
-                </a:solidFill>
-                <a:latin typeface="Arial"/>
-              </a:rPr>
-              <a:t>• FIR, investigation, evidence APIs</a:t>
-            </a:r>
-            <a:r>
-              <a:t/>
-            </a:r>
-            <a:br/>
-            <a:r>
-              <a:rPr sz="1150" b="0">
-                <a:solidFill>
-                  <a:srgbClr val="141414"/>
-                </a:solidFill>
-                <a:latin typeface="Arial"/>
-              </a:rPr>
-              <a:t>• Backend testing</a:t>
-            </a:r>
-          </a:p>
-        </p:txBody>
-      </p:sp>
-      <p:sp>
-        <p:nvSpPr>
-          <p:cNvPr id="12" name="Rounded Rectangle 11"/>
-          <p:cNvSpPr/>
-          <p:nvPr/>
-        </p:nvSpPr>
-        <p:spPr>
-          <a:xfrm>
-            <a:off x="5806440" y="1234440"/>
-            <a:ext cx="2514600" cy="3520440"/>
-          </a:xfrm>
-          <a:prstGeom prst="roundRect">
-            <a:avLst/>
-          </a:prstGeom>
-          <a:solidFill>
-            <a:srgbClr val="FFFFFF"/>
-          </a:solidFill>
-          <a:ln w="12700">
-            <a:solidFill>
-              <a:srgbClr val="CDD4DC"/>
-            </a:solidFill>
-          </a:ln>
-        </p:spPr>
-        <p:style>
-          <a:lnRef idx="1">
-            <a:schemeClr val="accent1"/>
-          </a:lnRef>
-          <a:fillRef idx="3">
-            <a:schemeClr val="accent1"/>
-          </a:fillRef>
-          <a:effectRef idx="2">
-            <a:schemeClr val="accent1"/>
-          </a:effectRef>
-          <a:fontRef idx="minor">
-            <a:schemeClr val="lt1"/>
-          </a:fontRef>
-        </p:style>
-        <p:txBody>
-          <a:bodyPr wrap="square" rtlCol="0" anchor="ctr"/>
-          <a:lstStyle/>
-          <a:p>
-            <a:pPr algn="ctr"/>
-            <a:endParaRPr/>
-          </a:p>
-        </p:txBody>
-      </p:sp>
-      <p:sp>
-        <p:nvSpPr>
-          <p:cNvPr id="13" name="Rectangle 12"/>
-          <p:cNvSpPr/>
-          <p:nvPr/>
-        </p:nvSpPr>
-        <p:spPr>
-          <a:xfrm>
-            <a:off x="5806440" y="1234440"/>
-            <a:ext cx="64008" cy="3520440"/>
-          </a:xfrm>
-          <a:prstGeom prst="rect">
-            <a:avLst/>
-          </a:prstGeom>
-          <a:solidFill>
-            <a:srgbClr val="1F497D"/>
-          </a:solidFill>
-          <a:ln>
-            <a:noFill/>
-          </a:ln>
-        </p:spPr>
-        <p:style>
-          <a:lnRef idx="1">
-            <a:schemeClr val="accent1"/>
-          </a:lnRef>
-          <a:fillRef idx="3">
-            <a:schemeClr val="accent1"/>
-          </a:fillRef>
-          <a:effectRef idx="2">
-            <a:schemeClr val="accent1"/>
-          </a:effectRef>
-          <a:fontRef idx="minor">
-            <a:schemeClr val="lt1"/>
-          </a:fontRef>
-        </p:style>
-        <p:txBody>
-          <a:bodyPr wrap="square" rtlCol="0" anchor="ctr"/>
-          <a:lstStyle/>
-          <a:p>
-            <a:pPr algn="ctr"/>
-            <a:endParaRPr/>
-          </a:p>
-        </p:txBody>
-      </p:sp>
-      <p:sp>
-        <p:nvSpPr>
-          <p:cNvPr id="14" name="TextBox 13"/>
-          <p:cNvSpPr txBox="1"/>
-          <p:nvPr/>
-        </p:nvSpPr>
-        <p:spPr>
-          <a:xfrm>
-            <a:off x="5961888" y="1344168"/>
-            <a:ext cx="2286000" cy="347472"/>
-          </a:xfrm>
-          <a:prstGeom prst="rect">
-            <a:avLst/>
-          </a:prstGeom>
-          <a:noFill/>
-        </p:spPr>
-        <p:txBody>
-          <a:bodyPr wrap="square" lIns="36576" tIns="27432" rIns="36576" bIns="27432">
-            <a:spAutoFit/>
-          </a:bodyPr>
-          <a:lstStyle/>
-          <a:p>
-            <a:pPr algn="l"/>
-            <a:r>
-              <a:rPr sz="1500" b="1">
-                <a:solidFill>
-                  <a:srgbClr val="1F497D"/>
-                </a:solidFill>
-                <a:latin typeface="Arial"/>
-              </a:rPr>
-              <a:t>Basit Ali | 54596</a:t>
-            </a:r>
-          </a:p>
-        </p:txBody>
-      </p:sp>
-      <p:sp>
-        <p:nvSpPr>
-          <p:cNvPr id="15" name="TextBox 14"/>
-          <p:cNvSpPr txBox="1"/>
-          <p:nvPr/>
-        </p:nvSpPr>
-        <p:spPr>
-          <a:xfrm>
-            <a:off x="5961888" y="1737360"/>
-            <a:ext cx="2286000" cy="2926080"/>
-          </a:xfrm>
-          <a:prstGeom prst="rect">
-            <a:avLst/>
-          </a:prstGeom>
-          <a:noFill/>
-        </p:spPr>
-        <p:txBody>
-          <a:bodyPr wrap="square" lIns="36576" tIns="27432" rIns="36576" bIns="27432">
-            <a:spAutoFit/>
-          </a:bodyPr>
-          <a:lstStyle/>
-          <a:p>
-            <a:pPr algn="l"/>
-            <a:r>
-              <a:rPr sz="1150" b="0">
-                <a:solidFill>
-                  <a:srgbClr val="141414"/>
-                </a:solidFill>
-                <a:latin typeface="Arial"/>
-              </a:rPr>
-              <a:t>Frontend and Testing Lead</a:t>
-            </a:r>
-            <a:r>
-              <a:t/>
-            </a:r>
-            <a:br/>
-            <a:r>
-              <a:t/>
-            </a:r>
-            <a:br/>
-            <a:r>
-              <a:rPr sz="1150" b="0">
-                <a:solidFill>
-                  <a:srgbClr val="141414"/>
-                </a:solidFill>
-                <a:latin typeface="Arial"/>
-              </a:rPr>
-              <a:t>• React and TypeScript</a:t>
-            </a:r>
-            <a:r>
-              <a:t/>
-            </a:r>
-            <a:br/>
-            <a:r>
-              <a:rPr sz="1150" b="0">
-                <a:solidFill>
-                  <a:srgbClr val="141414"/>
-                </a:solidFill>
-                <a:latin typeface="Arial"/>
-              </a:rPr>
-              <a:t>• UI and UX</a:t>
-            </a:r>
-            <a:r>
-              <a:t/>
-            </a:r>
-            <a:br/>
-            <a:r>
-              <a:rPr sz="1150" b="0">
-                <a:solidFill>
-                  <a:srgbClr val="141414"/>
-                </a:solidFill>
-                <a:latin typeface="Arial"/>
-              </a:rPr>
-              <a:t>• Dashboards and forms</a:t>
-            </a:r>
-            <a:r>
-              <a:t/>
-            </a:r>
-            <a:br/>
-            <a:r>
-              <a:rPr sz="1150" b="0">
-                <a:solidFill>
-                  <a:srgbClr val="141414"/>
-                </a:solidFill>
-                <a:latin typeface="Arial"/>
-              </a:rPr>
-              <a:t>• Audit and charts interface</a:t>
-            </a:r>
-            <a:r>
-              <a:t/>
-            </a:r>
-            <a:br/>
-            <a:r>
-              <a:rPr sz="1150" b="0">
-                <a:solidFill>
-                  <a:srgbClr val="141414"/>
-                </a:solidFill>
-                <a:latin typeface="Arial"/>
-              </a:rPr>
-              <a:t>• UI and usability testing</a:t>
-            </a:r>
-          </a:p>
-        </p:txBody>
-      </p:sp>
-      <p:sp>
-        <p:nvSpPr>
-          <p:cNvPr id="16" name="TextBox 15"/>
-          <p:cNvSpPr txBox="1"/>
-          <p:nvPr/>
-        </p:nvSpPr>
-        <p:spPr>
-          <a:xfrm>
-            <a:off x="731520" y="5074920"/>
-            <a:ext cx="7498079" cy="486287"/>
-          </a:xfrm>
-          <a:prstGeom prst="rect">
-            <a:avLst/>
-          </a:prstGeom>
-          <a:noFill/>
-        </p:spPr>
-        <p:txBody>
-          <a:bodyPr wrap="square" lIns="36576" tIns="27432" rIns="36576" bIns="27432">
-            <a:spAutoFit/>
-          </a:bodyPr>
-          <a:lstStyle/>
-          <a:p>
-            <a:pPr algn="ctr"/>
-            <a:r>
-              <a:rPr sz="1400" b="1" dirty="0">
-                <a:solidFill>
-                  <a:srgbClr val="1F497D"/>
-                </a:solidFill>
-                <a:latin typeface="Arial"/>
-              </a:rPr>
-              <a:t>Shared: research, documentation, GitHub, code review, integration, security testing, final report, </a:t>
-            </a:r>
-            <a:r>
-              <a:rPr sz="1400" b="1" dirty="0" smtClean="0">
-                <a:solidFill>
-                  <a:srgbClr val="1F497D"/>
-                </a:solidFill>
-                <a:latin typeface="Arial"/>
-              </a:rPr>
-              <a:t>presentation</a:t>
-            </a:r>
-            <a:r>
-              <a:rPr lang="en-US" sz="1400" b="1" dirty="0" smtClean="0">
-                <a:solidFill>
-                  <a:srgbClr val="1F497D"/>
-                </a:solidFill>
-                <a:latin typeface="Arial"/>
-              </a:rPr>
-              <a:t> and</a:t>
-            </a:r>
-            <a:r>
-              <a:rPr sz="1400" b="1" dirty="0" smtClean="0">
-                <a:solidFill>
-                  <a:srgbClr val="1F497D"/>
-                </a:solidFill>
-                <a:latin typeface="Arial"/>
-              </a:rPr>
-              <a:t> </a:t>
-            </a:r>
-            <a:r>
-              <a:rPr sz="1400" b="1" dirty="0">
-                <a:solidFill>
-                  <a:srgbClr val="1F497D"/>
-                </a:solidFill>
-                <a:latin typeface="Arial"/>
-              </a:rPr>
-              <a:t>viva preparation.</a:t>
-            </a:r>
-          </a:p>
-        </p:txBody>
-      </p:sp>
-    </p:spTree>
-  </p:cSld>
-  <p:clrMapOvr>
-    <a:masterClrMapping/>
-  </p:clrMapOvr>
-  <mc:AlternateContent xmlns:mc="http://schemas.openxmlformats.org/markup-compatibility/2006" xmlns:p15="http://schemas.microsoft.com/office/powerpoint/2012/main">
-    <mc:Choice Requires="p15">
-      <p:transition xmlns:p14="http://schemas.microsoft.com/office/powerpoint/2010/main" spd="slow" p14:dur="2000">
-        <p15:prstTrans prst="fallOver"/>
-      </p:transition>
-    </mc:Choice>
-    <mc:Fallback xmlns="">
-      <p:transition spd="slow">
-        <p:fade/>
       </p:transition>
     </mc:Fallback>
   </mc:AlternateContent>
@@ -21421,7 +22172,1091 @@
                 </a:solidFill>
                 <a:latin typeface="Arial"/>
               </a:rPr>
-              <a:t>CONSTRAINTS AND LIMITATIONS</a:t>
+              <a:t>Roles and Responsibilities</a:t>
+            </a:r>
+          </a:p>
+        </p:txBody>
+      </p:sp>
+      <p:sp>
+        <p:nvSpPr>
+          <p:cNvPr id="4" name="Rounded Rectangle 3"/>
+          <p:cNvSpPr/>
+          <p:nvPr/>
+        </p:nvSpPr>
+        <p:spPr>
+          <a:xfrm>
+            <a:off x="502920" y="1234440"/>
+            <a:ext cx="2514600" cy="3520440"/>
+          </a:xfrm>
+          <a:prstGeom prst="roundRect">
+            <a:avLst/>
+          </a:prstGeom>
+          <a:solidFill>
+            <a:srgbClr val="FFFFFF"/>
+          </a:solidFill>
+          <a:ln w="12700">
+            <a:solidFill>
+              <a:srgbClr val="CDD4DC"/>
+            </a:solidFill>
+          </a:ln>
+        </p:spPr>
+        <p:style>
+          <a:lnRef idx="1">
+            <a:schemeClr val="accent1"/>
+          </a:lnRef>
+          <a:fillRef idx="3">
+            <a:schemeClr val="accent1"/>
+          </a:fillRef>
+          <a:effectRef idx="2">
+            <a:schemeClr val="accent1"/>
+          </a:effectRef>
+          <a:fontRef idx="minor">
+            <a:schemeClr val="lt1"/>
+          </a:fontRef>
+        </p:style>
+        <p:txBody>
+          <a:bodyPr wrap="square" rtlCol="0" anchor="ctr"/>
+          <a:lstStyle/>
+          <a:p>
+            <a:pPr algn="ctr"/>
+            <a:endParaRPr/>
+          </a:p>
+        </p:txBody>
+      </p:sp>
+      <p:sp>
+        <p:nvSpPr>
+          <p:cNvPr id="5" name="Rectangle 4"/>
+          <p:cNvSpPr/>
+          <p:nvPr/>
+        </p:nvSpPr>
+        <p:spPr>
+          <a:xfrm>
+            <a:off x="502920" y="1234440"/>
+            <a:ext cx="64008" cy="3520440"/>
+          </a:xfrm>
+          <a:prstGeom prst="rect">
+            <a:avLst/>
+          </a:prstGeom>
+          <a:solidFill>
+            <a:srgbClr val="1F497D"/>
+          </a:solidFill>
+          <a:ln>
+            <a:noFill/>
+          </a:ln>
+        </p:spPr>
+        <p:style>
+          <a:lnRef idx="1">
+            <a:schemeClr val="accent1"/>
+          </a:lnRef>
+          <a:fillRef idx="3">
+            <a:schemeClr val="accent1"/>
+          </a:fillRef>
+          <a:effectRef idx="2">
+            <a:schemeClr val="accent1"/>
+          </a:effectRef>
+          <a:fontRef idx="minor">
+            <a:schemeClr val="lt1"/>
+          </a:fontRef>
+        </p:style>
+        <p:txBody>
+          <a:bodyPr wrap="square" rtlCol="0" anchor="ctr"/>
+          <a:lstStyle/>
+          <a:p>
+            <a:pPr algn="ctr"/>
+            <a:endParaRPr/>
+          </a:p>
+        </p:txBody>
+      </p:sp>
+      <p:sp>
+        <p:nvSpPr>
+          <p:cNvPr id="6" name="TextBox 5"/>
+          <p:cNvSpPr txBox="1"/>
+          <p:nvPr/>
+        </p:nvSpPr>
+        <p:spPr>
+          <a:xfrm>
+            <a:off x="658368" y="1344168"/>
+            <a:ext cx="2286000" cy="347472"/>
+          </a:xfrm>
+          <a:prstGeom prst="rect">
+            <a:avLst/>
+          </a:prstGeom>
+          <a:noFill/>
+        </p:spPr>
+        <p:txBody>
+          <a:bodyPr wrap="square" lIns="36576" tIns="27432" rIns="36576" bIns="27432">
+            <a:spAutoFit/>
+          </a:bodyPr>
+          <a:lstStyle/>
+          <a:p>
+            <a:pPr algn="l"/>
+            <a:r>
+              <a:rPr sz="1500" b="1">
+                <a:solidFill>
+                  <a:srgbClr val="1F497D"/>
+                </a:solidFill>
+                <a:latin typeface="Arial"/>
+              </a:rPr>
+              <a:t>Sharaiz Ahmed | 57288</a:t>
+            </a:r>
+          </a:p>
+        </p:txBody>
+      </p:sp>
+      <p:sp>
+        <p:nvSpPr>
+          <p:cNvPr id="7" name="TextBox 6"/>
+          <p:cNvSpPr txBox="1"/>
+          <p:nvPr/>
+        </p:nvSpPr>
+        <p:spPr>
+          <a:xfrm>
+            <a:off x="658368" y="1737360"/>
+            <a:ext cx="2286000" cy="2825389"/>
+          </a:xfrm>
+          <a:prstGeom prst="rect">
+            <a:avLst/>
+          </a:prstGeom>
+          <a:noFill/>
+        </p:spPr>
+        <p:txBody>
+          <a:bodyPr wrap="square" lIns="36576" tIns="27432" rIns="36576" bIns="27432">
+            <a:spAutoFit/>
+          </a:bodyPr>
+          <a:lstStyle/>
+          <a:p>
+            <a:pPr algn="l"/>
+            <a:r>
+              <a:rPr sz="1300" b="1" dirty="0">
+                <a:solidFill>
+                  <a:srgbClr val="141414"/>
+                </a:solidFill>
+              </a:rPr>
+              <a:t>System Architecture and Blockchain </a:t>
+            </a:r>
+            <a:r>
+              <a:rPr sz="1300" b="1" dirty="0" smtClean="0">
+                <a:solidFill>
+                  <a:srgbClr val="141414"/>
+                </a:solidFill>
+              </a:rPr>
+              <a:t>Lead</a:t>
+            </a:r>
+            <a:endParaRPr lang="en-US" sz="1600" b="0" dirty="0">
+              <a:solidFill>
+                <a:srgbClr val="141414"/>
+              </a:solidFill>
+              <a:latin typeface="Arial"/>
+            </a:endParaRPr>
+          </a:p>
+          <a:p>
+            <a:pPr marL="171450" indent="-171450" algn="l">
+              <a:buFont typeface="Arial" panose="020B0604020202020204" pitchFamily="34" charset="0"/>
+              <a:buChar char="•"/>
+            </a:pPr>
+            <a:r>
+              <a:rPr b="0" dirty="0" smtClean="0">
+                <a:solidFill>
+                  <a:srgbClr val="141414"/>
+                </a:solidFill>
+              </a:rPr>
+              <a:t>Architecture </a:t>
+            </a:r>
+            <a:r>
+              <a:rPr b="0" dirty="0">
+                <a:solidFill>
+                  <a:srgbClr val="141414"/>
+                </a:solidFill>
+              </a:rPr>
+              <a:t>and requirements </a:t>
+            </a:r>
+            <a:r>
+              <a:rPr b="0" dirty="0" smtClean="0">
+                <a:solidFill>
+                  <a:srgbClr val="141414"/>
+                </a:solidFill>
+              </a:rPr>
+              <a:t>coordination</a:t>
+            </a:r>
+            <a:endParaRPr lang="en-US" dirty="0" smtClean="0"/>
+          </a:p>
+          <a:p>
+            <a:pPr marL="171450" indent="-171450" algn="l">
+              <a:buFont typeface="Arial" panose="020B0604020202020204" pitchFamily="34" charset="0"/>
+              <a:buChar char="•"/>
+            </a:pPr>
+            <a:r>
+              <a:rPr b="0" dirty="0" err="1" smtClean="0">
+                <a:solidFill>
+                  <a:srgbClr val="141414"/>
+                </a:solidFill>
+              </a:rPr>
+              <a:t>Hyperledger</a:t>
+            </a:r>
+            <a:r>
+              <a:rPr b="0" dirty="0" smtClean="0">
+                <a:solidFill>
+                  <a:srgbClr val="141414"/>
+                </a:solidFill>
+              </a:rPr>
+              <a:t> </a:t>
+            </a:r>
+            <a:r>
+              <a:rPr b="0" dirty="0">
+                <a:solidFill>
+                  <a:srgbClr val="141414"/>
+                </a:solidFill>
+              </a:rPr>
+              <a:t>Fabric and </a:t>
+            </a:r>
+            <a:r>
+              <a:rPr b="0" dirty="0" err="1">
+                <a:solidFill>
+                  <a:srgbClr val="141414"/>
+                </a:solidFill>
+              </a:rPr>
+              <a:t>chaincode</a:t>
+            </a:r>
+            <a:r>
+              <a:rPr b="0" dirty="0">
+                <a:solidFill>
+                  <a:srgbClr val="141414"/>
+                </a:solidFill>
+              </a:rPr>
+              <a:t> </a:t>
+            </a:r>
+            <a:r>
+              <a:rPr b="0" dirty="0" smtClean="0">
+                <a:solidFill>
+                  <a:srgbClr val="141414"/>
+                </a:solidFill>
+              </a:rPr>
+              <a:t>coordination</a:t>
+            </a:r>
+            <a:endParaRPr lang="en-US" dirty="0" smtClean="0"/>
+          </a:p>
+          <a:p>
+            <a:pPr marL="171450" indent="-171450" algn="l">
+              <a:buFont typeface="Arial" panose="020B0604020202020204" pitchFamily="34" charset="0"/>
+              <a:buChar char="•"/>
+            </a:pPr>
+            <a:r>
+              <a:rPr b="0" dirty="0" smtClean="0">
+                <a:solidFill>
+                  <a:srgbClr val="141414"/>
+                </a:solidFill>
+              </a:rPr>
+              <a:t>Hash </a:t>
+            </a:r>
+            <a:r>
+              <a:rPr b="0" dirty="0">
+                <a:solidFill>
+                  <a:srgbClr val="141414"/>
+                </a:solidFill>
+              </a:rPr>
+              <a:t>and integrity </a:t>
+            </a:r>
+            <a:r>
+              <a:rPr b="0" dirty="0" smtClean="0">
+                <a:solidFill>
+                  <a:srgbClr val="141414"/>
+                </a:solidFill>
+              </a:rPr>
+              <a:t>architecture</a:t>
+            </a:r>
+            <a:endParaRPr lang="en-US" dirty="0" smtClean="0"/>
+          </a:p>
+          <a:p>
+            <a:pPr marL="171450" indent="-171450" algn="l">
+              <a:buFont typeface="Arial" panose="020B0604020202020204" pitchFamily="34" charset="0"/>
+              <a:buChar char="•"/>
+            </a:pPr>
+            <a:r>
+              <a:rPr b="0" dirty="0" smtClean="0">
+                <a:solidFill>
+                  <a:srgbClr val="141414"/>
+                </a:solidFill>
+              </a:rPr>
+              <a:t>Security </a:t>
+            </a:r>
+            <a:r>
+              <a:rPr b="0" dirty="0">
+                <a:solidFill>
+                  <a:srgbClr val="141414"/>
+                </a:solidFill>
+              </a:rPr>
+              <a:t>architecture and </a:t>
+            </a:r>
+            <a:r>
+              <a:rPr b="0" dirty="0" smtClean="0">
+                <a:solidFill>
+                  <a:srgbClr val="141414"/>
+                </a:solidFill>
+              </a:rPr>
+              <a:t>integration</a:t>
+            </a:r>
+            <a:endParaRPr lang="en-US" dirty="0" smtClean="0"/>
+          </a:p>
+          <a:p>
+            <a:pPr marL="171450" indent="-171450" algn="l">
+              <a:buFont typeface="Arial" panose="020B0604020202020204" pitchFamily="34" charset="0"/>
+              <a:buChar char="•"/>
+            </a:pPr>
+            <a:r>
+              <a:rPr b="0" dirty="0" smtClean="0">
+                <a:solidFill>
+                  <a:srgbClr val="141414"/>
+                </a:solidFill>
+              </a:rPr>
+              <a:t>GitHub </a:t>
+            </a:r>
+            <a:r>
+              <a:rPr b="0" dirty="0">
+                <a:solidFill>
+                  <a:srgbClr val="141414"/>
+                </a:solidFill>
+              </a:rPr>
+              <a:t>and deployment coordination</a:t>
+            </a:r>
+          </a:p>
+        </p:txBody>
+      </p:sp>
+      <p:sp>
+        <p:nvSpPr>
+          <p:cNvPr id="8" name="Rounded Rectangle 7"/>
+          <p:cNvSpPr/>
+          <p:nvPr/>
+        </p:nvSpPr>
+        <p:spPr>
+          <a:xfrm>
+            <a:off x="3154680" y="1234440"/>
+            <a:ext cx="2514600" cy="3520440"/>
+          </a:xfrm>
+          <a:prstGeom prst="roundRect">
+            <a:avLst/>
+          </a:prstGeom>
+          <a:solidFill>
+            <a:srgbClr val="FFFFFF"/>
+          </a:solidFill>
+          <a:ln w="12700">
+            <a:solidFill>
+              <a:srgbClr val="CDD4DC"/>
+            </a:solidFill>
+          </a:ln>
+        </p:spPr>
+        <p:style>
+          <a:lnRef idx="1">
+            <a:schemeClr val="accent1"/>
+          </a:lnRef>
+          <a:fillRef idx="3">
+            <a:schemeClr val="accent1"/>
+          </a:fillRef>
+          <a:effectRef idx="2">
+            <a:schemeClr val="accent1"/>
+          </a:effectRef>
+          <a:fontRef idx="minor">
+            <a:schemeClr val="lt1"/>
+          </a:fontRef>
+        </p:style>
+        <p:txBody>
+          <a:bodyPr wrap="square" rtlCol="0" anchor="ctr"/>
+          <a:lstStyle/>
+          <a:p>
+            <a:pPr algn="ctr"/>
+            <a:endParaRPr/>
+          </a:p>
+        </p:txBody>
+      </p:sp>
+      <p:sp>
+        <p:nvSpPr>
+          <p:cNvPr id="9" name="Rectangle 8"/>
+          <p:cNvSpPr/>
+          <p:nvPr/>
+        </p:nvSpPr>
+        <p:spPr>
+          <a:xfrm>
+            <a:off x="3154680" y="1234440"/>
+            <a:ext cx="64008" cy="3520440"/>
+          </a:xfrm>
+          <a:prstGeom prst="rect">
+            <a:avLst/>
+          </a:prstGeom>
+          <a:solidFill>
+            <a:srgbClr val="DAA520"/>
+          </a:solidFill>
+          <a:ln>
+            <a:noFill/>
+          </a:ln>
+        </p:spPr>
+        <p:style>
+          <a:lnRef idx="1">
+            <a:schemeClr val="accent1"/>
+          </a:lnRef>
+          <a:fillRef idx="3">
+            <a:schemeClr val="accent1"/>
+          </a:fillRef>
+          <a:effectRef idx="2">
+            <a:schemeClr val="accent1"/>
+          </a:effectRef>
+          <a:fontRef idx="minor">
+            <a:schemeClr val="lt1"/>
+          </a:fontRef>
+        </p:style>
+        <p:txBody>
+          <a:bodyPr wrap="square" rtlCol="0" anchor="ctr"/>
+          <a:lstStyle/>
+          <a:p>
+            <a:pPr algn="ctr"/>
+            <a:endParaRPr/>
+          </a:p>
+        </p:txBody>
+      </p:sp>
+      <p:sp>
+        <p:nvSpPr>
+          <p:cNvPr id="10" name="TextBox 9"/>
+          <p:cNvSpPr txBox="1"/>
+          <p:nvPr/>
+        </p:nvSpPr>
+        <p:spPr>
+          <a:xfrm>
+            <a:off x="3310128" y="1344168"/>
+            <a:ext cx="2286000" cy="347472"/>
+          </a:xfrm>
+          <a:prstGeom prst="rect">
+            <a:avLst/>
+          </a:prstGeom>
+          <a:noFill/>
+        </p:spPr>
+        <p:txBody>
+          <a:bodyPr wrap="square" lIns="36576" tIns="27432" rIns="36576" bIns="27432">
+            <a:spAutoFit/>
+          </a:bodyPr>
+          <a:lstStyle/>
+          <a:p>
+            <a:pPr algn="l"/>
+            <a:r>
+              <a:rPr sz="1500" b="1">
+                <a:solidFill>
+                  <a:srgbClr val="DAA520"/>
+                </a:solidFill>
+                <a:latin typeface="Arial"/>
+              </a:rPr>
+              <a:t>Abdul Moiz | 54482</a:t>
+            </a:r>
+          </a:p>
+        </p:txBody>
+      </p:sp>
+      <p:sp>
+        <p:nvSpPr>
+          <p:cNvPr id="11" name="TextBox 10"/>
+          <p:cNvSpPr txBox="1"/>
+          <p:nvPr/>
+        </p:nvSpPr>
+        <p:spPr>
+          <a:xfrm>
+            <a:off x="3310128" y="1737360"/>
+            <a:ext cx="2286000" cy="2771528"/>
+          </a:xfrm>
+          <a:prstGeom prst="rect">
+            <a:avLst/>
+          </a:prstGeom>
+          <a:noFill/>
+        </p:spPr>
+        <p:txBody>
+          <a:bodyPr wrap="square" lIns="36576" tIns="27432" rIns="36576" bIns="27432">
+            <a:spAutoFit/>
+          </a:bodyPr>
+          <a:lstStyle/>
+          <a:p>
+            <a:pPr algn="l"/>
+            <a:r>
+              <a:rPr sz="1300" b="1" dirty="0">
+                <a:solidFill>
+                  <a:srgbClr val="141414"/>
+                </a:solidFill>
+              </a:rPr>
+              <a:t>Backend and Database </a:t>
+            </a:r>
+            <a:r>
+              <a:rPr sz="1300" b="1" dirty="0" smtClean="0">
+                <a:solidFill>
+                  <a:srgbClr val="141414"/>
+                </a:solidFill>
+              </a:rPr>
+              <a:t>Lead</a:t>
+            </a:r>
+            <a:endParaRPr lang="en-US" sz="1300" b="1" dirty="0" smtClean="0"/>
+          </a:p>
+          <a:p>
+            <a:pPr algn="l"/>
+            <a:endParaRPr lang="en-US" dirty="0" smtClean="0"/>
+          </a:p>
+          <a:p>
+            <a:pPr marL="285750" indent="-285750" algn="l">
+              <a:lnSpc>
+                <a:spcPct val="150000"/>
+              </a:lnSpc>
+              <a:buFont typeface="Arial" panose="020B0604020202020204" pitchFamily="34" charset="0"/>
+              <a:buChar char="•"/>
+            </a:pPr>
+            <a:r>
+              <a:rPr sz="1300" b="0" dirty="0" smtClean="0">
+                <a:solidFill>
+                  <a:srgbClr val="141414"/>
+                </a:solidFill>
+              </a:rPr>
+              <a:t>Python </a:t>
+            </a:r>
+            <a:r>
+              <a:rPr sz="1300" b="0" dirty="0">
+                <a:solidFill>
+                  <a:srgbClr val="141414"/>
+                </a:solidFill>
+              </a:rPr>
+              <a:t>and </a:t>
+            </a:r>
+            <a:r>
+              <a:rPr sz="1300" b="0" dirty="0" err="1" smtClean="0">
+                <a:solidFill>
+                  <a:srgbClr val="141414"/>
+                </a:solidFill>
+              </a:rPr>
+              <a:t>FastAPI</a:t>
+            </a:r>
+            <a:endParaRPr lang="en-US" sz="1300" dirty="0" smtClean="0"/>
+          </a:p>
+          <a:p>
+            <a:pPr marL="285750" indent="-285750" algn="l">
+              <a:lnSpc>
+                <a:spcPct val="150000"/>
+              </a:lnSpc>
+              <a:buFont typeface="Arial" panose="020B0604020202020204" pitchFamily="34" charset="0"/>
+              <a:buChar char="•"/>
+            </a:pPr>
+            <a:r>
+              <a:rPr sz="1300" b="0" dirty="0" smtClean="0">
+                <a:solidFill>
+                  <a:srgbClr val="141414"/>
+                </a:solidFill>
+              </a:rPr>
+              <a:t>REST </a:t>
+            </a:r>
+            <a:r>
+              <a:rPr sz="1300" b="0" dirty="0">
+                <a:solidFill>
+                  <a:srgbClr val="141414"/>
+                </a:solidFill>
+              </a:rPr>
+              <a:t>APIs and </a:t>
+            </a:r>
+            <a:r>
+              <a:rPr sz="1300" b="0" dirty="0" smtClean="0">
+                <a:solidFill>
+                  <a:srgbClr val="141414"/>
+                </a:solidFill>
+              </a:rPr>
+              <a:t>PostgreSQL</a:t>
+            </a:r>
+            <a:endParaRPr lang="en-US" sz="1300" dirty="0" smtClean="0"/>
+          </a:p>
+          <a:p>
+            <a:pPr marL="285750" indent="-285750" algn="l">
+              <a:lnSpc>
+                <a:spcPct val="150000"/>
+              </a:lnSpc>
+              <a:buFont typeface="Arial" panose="020B0604020202020204" pitchFamily="34" charset="0"/>
+              <a:buChar char="•"/>
+            </a:pPr>
+            <a:r>
+              <a:rPr sz="1300" b="0" dirty="0" smtClean="0">
+                <a:solidFill>
+                  <a:srgbClr val="141414"/>
+                </a:solidFill>
+              </a:rPr>
+              <a:t>Authentication </a:t>
+            </a:r>
+            <a:r>
+              <a:rPr sz="1300" b="0" dirty="0">
+                <a:solidFill>
+                  <a:srgbClr val="141414"/>
+                </a:solidFill>
+              </a:rPr>
+              <a:t>and </a:t>
+            </a:r>
+            <a:r>
+              <a:rPr sz="1300" b="0" dirty="0" smtClean="0">
+                <a:solidFill>
+                  <a:srgbClr val="141414"/>
+                </a:solidFill>
+              </a:rPr>
+              <a:t>RBAC</a:t>
+            </a:r>
+            <a:endParaRPr lang="en-US" sz="1300" dirty="0" smtClean="0"/>
+          </a:p>
+          <a:p>
+            <a:pPr marL="285750" indent="-285750" algn="l">
+              <a:lnSpc>
+                <a:spcPct val="150000"/>
+              </a:lnSpc>
+              <a:buFont typeface="Arial" panose="020B0604020202020204" pitchFamily="34" charset="0"/>
+              <a:buChar char="•"/>
+            </a:pPr>
+            <a:r>
+              <a:rPr sz="1300" b="0" dirty="0" smtClean="0">
+                <a:solidFill>
+                  <a:srgbClr val="141414"/>
+                </a:solidFill>
+              </a:rPr>
+              <a:t>FIR</a:t>
+            </a:r>
+            <a:r>
+              <a:rPr sz="1300" b="0" dirty="0">
+                <a:solidFill>
+                  <a:srgbClr val="141414"/>
+                </a:solidFill>
+              </a:rPr>
+              <a:t>, investigation, evidence </a:t>
+            </a:r>
+            <a:r>
+              <a:rPr sz="1300" b="0" dirty="0" smtClean="0">
+                <a:solidFill>
+                  <a:srgbClr val="141414"/>
+                </a:solidFill>
+              </a:rPr>
+              <a:t>APIs</a:t>
+            </a:r>
+            <a:endParaRPr lang="en-US" sz="1300" dirty="0" smtClean="0"/>
+          </a:p>
+          <a:p>
+            <a:pPr marL="285750" indent="-285750" algn="l">
+              <a:lnSpc>
+                <a:spcPct val="150000"/>
+              </a:lnSpc>
+              <a:buFont typeface="Arial" panose="020B0604020202020204" pitchFamily="34" charset="0"/>
+              <a:buChar char="•"/>
+            </a:pPr>
+            <a:r>
+              <a:rPr sz="1300" b="0" dirty="0" smtClean="0">
+                <a:solidFill>
+                  <a:srgbClr val="141414"/>
+                </a:solidFill>
+              </a:rPr>
+              <a:t>Backend </a:t>
+            </a:r>
+            <a:r>
+              <a:rPr sz="1300" b="0" dirty="0">
+                <a:solidFill>
+                  <a:srgbClr val="141414"/>
+                </a:solidFill>
+              </a:rPr>
+              <a:t>testing</a:t>
+            </a:r>
+          </a:p>
+        </p:txBody>
+      </p:sp>
+      <p:sp>
+        <p:nvSpPr>
+          <p:cNvPr id="12" name="Rounded Rectangle 11"/>
+          <p:cNvSpPr/>
+          <p:nvPr/>
+        </p:nvSpPr>
+        <p:spPr>
+          <a:xfrm>
+            <a:off x="5806440" y="1234440"/>
+            <a:ext cx="2514600" cy="3520440"/>
+          </a:xfrm>
+          <a:prstGeom prst="roundRect">
+            <a:avLst/>
+          </a:prstGeom>
+          <a:solidFill>
+            <a:srgbClr val="FFFFFF"/>
+          </a:solidFill>
+          <a:ln w="12700">
+            <a:solidFill>
+              <a:srgbClr val="CDD4DC"/>
+            </a:solidFill>
+          </a:ln>
+        </p:spPr>
+        <p:style>
+          <a:lnRef idx="1">
+            <a:schemeClr val="accent1"/>
+          </a:lnRef>
+          <a:fillRef idx="3">
+            <a:schemeClr val="accent1"/>
+          </a:fillRef>
+          <a:effectRef idx="2">
+            <a:schemeClr val="accent1"/>
+          </a:effectRef>
+          <a:fontRef idx="minor">
+            <a:schemeClr val="lt1"/>
+          </a:fontRef>
+        </p:style>
+        <p:txBody>
+          <a:bodyPr wrap="square" rtlCol="0" anchor="ctr"/>
+          <a:lstStyle/>
+          <a:p>
+            <a:pPr algn="ctr"/>
+            <a:endParaRPr/>
+          </a:p>
+        </p:txBody>
+      </p:sp>
+      <p:sp>
+        <p:nvSpPr>
+          <p:cNvPr id="13" name="Rectangle 12"/>
+          <p:cNvSpPr/>
+          <p:nvPr/>
+        </p:nvSpPr>
+        <p:spPr>
+          <a:xfrm>
+            <a:off x="5806440" y="1234440"/>
+            <a:ext cx="64008" cy="3520440"/>
+          </a:xfrm>
+          <a:prstGeom prst="rect">
+            <a:avLst/>
+          </a:prstGeom>
+          <a:solidFill>
+            <a:srgbClr val="1F497D"/>
+          </a:solidFill>
+          <a:ln>
+            <a:noFill/>
+          </a:ln>
+        </p:spPr>
+        <p:style>
+          <a:lnRef idx="1">
+            <a:schemeClr val="accent1"/>
+          </a:lnRef>
+          <a:fillRef idx="3">
+            <a:schemeClr val="accent1"/>
+          </a:fillRef>
+          <a:effectRef idx="2">
+            <a:schemeClr val="accent1"/>
+          </a:effectRef>
+          <a:fontRef idx="minor">
+            <a:schemeClr val="lt1"/>
+          </a:fontRef>
+        </p:style>
+        <p:txBody>
+          <a:bodyPr wrap="square" rtlCol="0" anchor="ctr"/>
+          <a:lstStyle/>
+          <a:p>
+            <a:pPr algn="ctr"/>
+            <a:endParaRPr/>
+          </a:p>
+        </p:txBody>
+      </p:sp>
+      <p:sp>
+        <p:nvSpPr>
+          <p:cNvPr id="14" name="TextBox 13"/>
+          <p:cNvSpPr txBox="1"/>
+          <p:nvPr/>
+        </p:nvSpPr>
+        <p:spPr>
+          <a:xfrm>
+            <a:off x="5961888" y="1344168"/>
+            <a:ext cx="2286000" cy="347472"/>
+          </a:xfrm>
+          <a:prstGeom prst="rect">
+            <a:avLst/>
+          </a:prstGeom>
+          <a:noFill/>
+        </p:spPr>
+        <p:txBody>
+          <a:bodyPr wrap="square" lIns="36576" tIns="27432" rIns="36576" bIns="27432">
+            <a:spAutoFit/>
+          </a:bodyPr>
+          <a:lstStyle/>
+          <a:p>
+            <a:pPr algn="l"/>
+            <a:r>
+              <a:rPr sz="1500" b="1">
+                <a:solidFill>
+                  <a:srgbClr val="1F497D"/>
+                </a:solidFill>
+                <a:latin typeface="Arial"/>
+              </a:rPr>
+              <a:t>Basit Ali | 54596</a:t>
+            </a:r>
+          </a:p>
+        </p:txBody>
+      </p:sp>
+      <p:sp>
+        <p:nvSpPr>
+          <p:cNvPr id="15" name="TextBox 14"/>
+          <p:cNvSpPr txBox="1"/>
+          <p:nvPr/>
+        </p:nvSpPr>
+        <p:spPr>
+          <a:xfrm>
+            <a:off x="5961888" y="1765068"/>
+            <a:ext cx="2286000" cy="1955920"/>
+          </a:xfrm>
+          <a:prstGeom prst="rect">
+            <a:avLst/>
+          </a:prstGeom>
+          <a:noFill/>
+        </p:spPr>
+        <p:txBody>
+          <a:bodyPr wrap="square" lIns="36576" tIns="27432" rIns="36576" bIns="27432">
+            <a:spAutoFit/>
+          </a:bodyPr>
+          <a:lstStyle/>
+          <a:p>
+            <a:pPr algn="l"/>
+            <a:r>
+              <a:rPr sz="1300" b="1" dirty="0">
+                <a:solidFill>
+                  <a:srgbClr val="141414"/>
+                </a:solidFill>
+              </a:rPr>
+              <a:t>Frontend and Testing </a:t>
+            </a:r>
+            <a:r>
+              <a:rPr sz="1300" b="1" dirty="0" smtClean="0">
+                <a:solidFill>
+                  <a:srgbClr val="141414"/>
+                </a:solidFill>
+              </a:rPr>
+              <a:t>Lead</a:t>
+            </a:r>
+            <a:endParaRPr lang="en-US" sz="1300" b="1" dirty="0" smtClean="0"/>
+          </a:p>
+          <a:p>
+            <a:pPr algn="l"/>
+            <a:endParaRPr lang="en-US" sz="1300" b="0" dirty="0" smtClean="0">
+              <a:solidFill>
+                <a:srgbClr val="141414"/>
+              </a:solidFill>
+            </a:endParaRPr>
+          </a:p>
+          <a:p>
+            <a:pPr marL="285750" indent="-285750" algn="l">
+              <a:lnSpc>
+                <a:spcPct val="150000"/>
+              </a:lnSpc>
+              <a:buFont typeface="Arial" panose="020B0604020202020204" pitchFamily="34" charset="0"/>
+              <a:buChar char="•"/>
+            </a:pPr>
+            <a:r>
+              <a:rPr sz="1300" b="0" dirty="0" smtClean="0">
+                <a:solidFill>
+                  <a:srgbClr val="141414"/>
+                </a:solidFill>
+              </a:rPr>
+              <a:t>React </a:t>
+            </a:r>
+            <a:r>
+              <a:rPr sz="1300" b="0" dirty="0">
+                <a:solidFill>
+                  <a:srgbClr val="141414"/>
+                </a:solidFill>
+              </a:rPr>
+              <a:t>and </a:t>
+            </a:r>
+            <a:r>
+              <a:rPr sz="1300" b="0" dirty="0" err="1" smtClean="0">
+                <a:solidFill>
+                  <a:srgbClr val="141414"/>
+                </a:solidFill>
+              </a:rPr>
+              <a:t>TypeScript</a:t>
+            </a:r>
+            <a:endParaRPr lang="en-US" sz="1300" dirty="0" smtClean="0"/>
+          </a:p>
+          <a:p>
+            <a:pPr marL="285750" indent="-285750" algn="l">
+              <a:lnSpc>
+                <a:spcPct val="150000"/>
+              </a:lnSpc>
+              <a:buFont typeface="Arial" panose="020B0604020202020204" pitchFamily="34" charset="0"/>
+              <a:buChar char="•"/>
+            </a:pPr>
+            <a:r>
+              <a:rPr sz="1300" b="0" dirty="0" smtClean="0">
+                <a:solidFill>
+                  <a:srgbClr val="141414"/>
+                </a:solidFill>
+              </a:rPr>
+              <a:t>UI </a:t>
+            </a:r>
+            <a:r>
+              <a:rPr sz="1300" b="0" dirty="0">
+                <a:solidFill>
+                  <a:srgbClr val="141414"/>
+                </a:solidFill>
+              </a:rPr>
+              <a:t>and </a:t>
+            </a:r>
+            <a:r>
+              <a:rPr sz="1300" b="0" dirty="0" smtClean="0">
+                <a:solidFill>
+                  <a:srgbClr val="141414"/>
+                </a:solidFill>
+              </a:rPr>
+              <a:t>UX</a:t>
+            </a:r>
+            <a:endParaRPr lang="en-US" sz="1300" dirty="0" smtClean="0"/>
+          </a:p>
+          <a:p>
+            <a:pPr marL="285750" indent="-285750" algn="l">
+              <a:lnSpc>
+                <a:spcPct val="150000"/>
+              </a:lnSpc>
+              <a:buFont typeface="Arial" panose="020B0604020202020204" pitchFamily="34" charset="0"/>
+              <a:buChar char="•"/>
+            </a:pPr>
+            <a:r>
+              <a:rPr sz="1300" b="0" dirty="0" smtClean="0">
+                <a:solidFill>
+                  <a:srgbClr val="141414"/>
+                </a:solidFill>
+              </a:rPr>
+              <a:t>Dashboards </a:t>
+            </a:r>
+            <a:r>
+              <a:rPr sz="1300" b="0" dirty="0">
+                <a:solidFill>
+                  <a:srgbClr val="141414"/>
+                </a:solidFill>
+              </a:rPr>
+              <a:t>and </a:t>
+            </a:r>
+            <a:r>
+              <a:rPr sz="1300" b="0" dirty="0" smtClean="0">
+                <a:solidFill>
+                  <a:srgbClr val="141414"/>
+                </a:solidFill>
+              </a:rPr>
+              <a:t>forms</a:t>
+            </a:r>
+            <a:endParaRPr lang="en-US" sz="1300" dirty="0" smtClean="0"/>
+          </a:p>
+          <a:p>
+            <a:pPr marL="285750" indent="-285750" algn="l">
+              <a:lnSpc>
+                <a:spcPct val="150000"/>
+              </a:lnSpc>
+              <a:buFont typeface="Arial" panose="020B0604020202020204" pitchFamily="34" charset="0"/>
+              <a:buChar char="•"/>
+            </a:pPr>
+            <a:r>
+              <a:rPr sz="1300" b="0" dirty="0" smtClean="0">
+                <a:solidFill>
+                  <a:srgbClr val="141414"/>
+                </a:solidFill>
+              </a:rPr>
+              <a:t>Audit </a:t>
+            </a:r>
+            <a:r>
+              <a:rPr sz="1300" b="0" dirty="0">
+                <a:solidFill>
+                  <a:srgbClr val="141414"/>
+                </a:solidFill>
+              </a:rPr>
+              <a:t>and charts </a:t>
+            </a:r>
+            <a:r>
+              <a:rPr sz="1300" b="0" dirty="0" smtClean="0">
+                <a:solidFill>
+                  <a:srgbClr val="141414"/>
+                </a:solidFill>
+              </a:rPr>
+              <a:t>interface</a:t>
+            </a:r>
+            <a:endParaRPr lang="en-US" sz="1300" dirty="0" smtClean="0"/>
+          </a:p>
+          <a:p>
+            <a:pPr marL="285750" indent="-285750" algn="l">
+              <a:lnSpc>
+                <a:spcPct val="150000"/>
+              </a:lnSpc>
+              <a:buFont typeface="Arial" panose="020B0604020202020204" pitchFamily="34" charset="0"/>
+              <a:buChar char="•"/>
+            </a:pPr>
+            <a:r>
+              <a:rPr sz="1300" b="0" dirty="0" smtClean="0">
+                <a:solidFill>
+                  <a:srgbClr val="141414"/>
+                </a:solidFill>
+              </a:rPr>
+              <a:t>UI </a:t>
+            </a:r>
+            <a:r>
+              <a:rPr sz="1300" b="0" dirty="0">
+                <a:solidFill>
+                  <a:srgbClr val="141414"/>
+                </a:solidFill>
+              </a:rPr>
+              <a:t>and usability testing</a:t>
+            </a:r>
+          </a:p>
+        </p:txBody>
+      </p:sp>
+      <p:sp>
+        <p:nvSpPr>
+          <p:cNvPr id="16" name="TextBox 15"/>
+          <p:cNvSpPr txBox="1"/>
+          <p:nvPr/>
+        </p:nvSpPr>
+        <p:spPr>
+          <a:xfrm>
+            <a:off x="731520" y="5074920"/>
+            <a:ext cx="7498079" cy="486287"/>
+          </a:xfrm>
+          <a:prstGeom prst="rect">
+            <a:avLst/>
+          </a:prstGeom>
+          <a:noFill/>
+        </p:spPr>
+        <p:txBody>
+          <a:bodyPr wrap="square" lIns="36576" tIns="27432" rIns="36576" bIns="27432">
+            <a:spAutoFit/>
+          </a:bodyPr>
+          <a:lstStyle/>
+          <a:p>
+            <a:pPr algn="ctr"/>
+            <a:r>
+              <a:rPr sz="1400" b="1" dirty="0">
+                <a:solidFill>
+                  <a:srgbClr val="1F497D"/>
+                </a:solidFill>
+                <a:latin typeface="Arial"/>
+              </a:rPr>
+              <a:t>Shared: research, documentation, GitHub, code review, integration, security testing, final report, </a:t>
+            </a:r>
+            <a:r>
+              <a:rPr sz="1400" b="1" dirty="0" smtClean="0">
+                <a:solidFill>
+                  <a:srgbClr val="1F497D"/>
+                </a:solidFill>
+                <a:latin typeface="Arial"/>
+              </a:rPr>
+              <a:t>presentation</a:t>
+            </a:r>
+            <a:r>
+              <a:rPr lang="en-US" sz="1400" b="1" dirty="0" smtClean="0">
+                <a:solidFill>
+                  <a:srgbClr val="1F497D"/>
+                </a:solidFill>
+                <a:latin typeface="Arial"/>
+              </a:rPr>
+              <a:t> and</a:t>
+            </a:r>
+            <a:r>
+              <a:rPr sz="1400" b="1" dirty="0" smtClean="0">
+                <a:solidFill>
+                  <a:srgbClr val="1F497D"/>
+                </a:solidFill>
+                <a:latin typeface="Arial"/>
+              </a:rPr>
+              <a:t> </a:t>
+            </a:r>
+            <a:r>
+              <a:rPr sz="1400" b="1" dirty="0">
+                <a:solidFill>
+                  <a:srgbClr val="1F497D"/>
+                </a:solidFill>
+                <a:latin typeface="Arial"/>
+              </a:rPr>
+              <a:t>viva preparation.</a:t>
             </a:r>
           </a:p>
         </p:txBody>
@@ -21431,9 +23266,18 @@
   <p:clrMapOvr>
     <a:masterClrMapping/>
   </p:clrMapOvr>
-  <p:transition spd="slow">
-    <p:cover/>
-  </p:transition>
+  <mc:AlternateContent xmlns:mc="http://schemas.openxmlformats.org/markup-compatibility/2006" xmlns:p15="http://schemas.microsoft.com/office/powerpoint/2012/main">
+    <mc:Choice Requires="p15">
+      <p:transition xmlns:p14="http://schemas.microsoft.com/office/powerpoint/2010/main" spd="slow" p14:dur="2000">
+        <p15:prstTrans prst="fallOver"/>
+      </p:transition>
+    </mc:Choice>
+    <mc:Fallback xmlns="">
+      <p:transition spd="slow">
+        <p:fade/>
+      </p:transition>
+    </mc:Fallback>
+  </mc:AlternateContent>
   <p:timing>
     <p:tnLst>
       <p:par>
@@ -21543,7 +23387,7 @@
               </a:defRPr>
             </a:pPr>
             <a:r>
-              <a:rPr>
+              <a:rPr dirty="0">
                 <a:latin typeface="Arial"/>
               </a:rPr>
               <a:t>Sharaiz Ahmed (57288)</a:t>
@@ -21562,10 +23406,22 @@
               </a:defRPr>
             </a:pPr>
             <a:r>
-              <a:rPr>
-                <a:latin typeface="Arial"/>
-              </a:rPr>
-              <a:t>Abdul Moiz (54482)</a:t>
+              <a:rPr dirty="0">
+                <a:latin typeface="Arial"/>
+              </a:rPr>
+              <a:t>Abdul </a:t>
+            </a:r>
+            <a:r>
+              <a:rPr dirty="0" err="1">
+                <a:latin typeface="Arial"/>
+              </a:rPr>
+              <a:t>Moiz</a:t>
+            </a:r>
+            <a:r>
+              <a:rPr dirty="0">
+                <a:latin typeface="Arial"/>
+              </a:rPr>
+              <a:t> (54482)</a:t>
             </a:r>
           </a:p>
           <a:p>
@@ -21581,10 +23437,16 @@
               </a:defRPr>
             </a:pPr>
             <a:r>
-              <a:rPr>
-                <a:latin typeface="Arial"/>
-              </a:rPr>
-              <a:t>Basit Ali (54596)</a:t>
+              <a:rPr dirty="0" err="1">
+                <a:latin typeface="Arial"/>
+              </a:rPr>
+              <a:t>Basit</a:t>
+            </a:r>
+            <a:r>
+              <a:rPr dirty="0">
+                <a:latin typeface="Arial"/>
+              </a:rPr>
+              <a:t> Ali (54596)</a:t>
             </a:r>
           </a:p>
         </p:txBody>
@@ -21655,6 +23517,68 @@
                 </a:solidFill>
                 <a:latin typeface="Arial"/>
               </a:rPr>
+              <a:t>CONSTRAINTS AND LIMITATIONS</a:t>
+            </a:r>
+          </a:p>
+        </p:txBody>
+      </p:sp>
+    </p:spTree>
+  </p:cSld>
+  <p:clrMapOvr>
+    <a:masterClrMapping/>
+  </p:clrMapOvr>
+  <p:transition spd="slow">
+    <p:cover/>
+  </p:transition>
+  <p:timing>
+    <p:tnLst>
+      <p:par>
+        <p:cTn id="1" dur="indefinite" restart="never" nodeType="tmRoot"/>
+      </p:par>
+    </p:tnLst>
+  </p:timing>
+</p:sld>
+</file>
+
+<file path=ppt/slides/slide21.xml><?xml version="1.0" encoding="utf-8"?>
+<p:sld xmlns:a="http://schemas.openxmlformats.org/drawingml/2006/main" xmlns:r="http://schemas.openxmlformats.org/officeDocument/2006/relationships" xmlns:p="http://schemas.openxmlformats.org/presentationml/2006/main">
+  <p:cSld>
+    <p:spTree>
+      <p:nvGrpSpPr>
+        <p:cNvPr id="1" name=""/>
+        <p:cNvGrpSpPr/>
+        <p:nvPr/>
+      </p:nvGrpSpPr>
+      <p:grpSpPr>
+        <a:xfrm>
+          <a:off x="0" y="0"/>
+          <a:ext cx="0" cy="0"/>
+          <a:chOff x="0" y="0"/>
+          <a:chExt cx="0" cy="0"/>
+        </a:xfrm>
+      </p:grpSpPr>
+      <p:sp>
+        <p:nvSpPr>
+          <p:cNvPr id="2" name="Title 1"/>
+          <p:cNvSpPr>
+            <a:spLocks noGrp="1"/>
+          </p:cNvSpPr>
+          <p:nvPr>
+            <p:ph type="title"/>
+          </p:nvPr>
+        </p:nvSpPr>
+        <p:spPr/>
+        <p:txBody>
+          <a:bodyPr wrap="square" lIns="45720" tIns="18288" rIns="45720" bIns="18288"/>
+          <a:lstStyle/>
+          <a:p>
+            <a:r>
+              <a:rPr sz="2600" b="1">
+                <a:solidFill>
+                  <a:srgbClr val="1F497D"/>
+                </a:solidFill>
+                <a:latin typeface="Arial"/>
+              </a:rPr>
               <a:t>Constraints and Limitations</a:t>
             </a:r>
           </a:p>
@@ -21669,7 +23593,7 @@
         <p:spPr>
           <a:xfrm>
             <a:off x="640080" y="1325880"/>
-            <a:ext cx="7680960" cy="2926080"/>
+            <a:ext cx="7680960" cy="2997231"/>
           </a:xfrm>
           <a:prstGeom prst="rect">
             <a:avLst/>
@@ -21682,10 +23606,15 @@
           </a:bodyPr>
           <a:lstStyle/>
           <a:p>
-            <a:pPr>
+            <a:pPr marL="285750" indent="-285750">
+              <a:lnSpc>
+                <a:spcPct val="150000"/>
+              </a:lnSpc>
               <a:spcAft>
                 <a:spcPts val="700"/>
               </a:spcAft>
+              <a:buFont typeface="Arial" panose="020B0604020202020204" pitchFamily="34" charset="0"/>
+              <a:buChar char="•"/>
               <a:defRPr sz="1800">
                 <a:solidFill>
                   <a:srgbClr val="141414"/>
@@ -21694,17 +23623,28 @@
               </a:defRPr>
             </a:pPr>
             <a:r>
-              <a:rPr>
-                <a:latin typeface="Arial"/>
-              </a:rPr>
-              <a:t>• Academic prototype only, not a production police system</a:t>
-            </a:r>
-          </a:p>
-          <a:p>
-            <a:pPr>
+              <a:rPr dirty="0" smtClean="0">
+                <a:latin typeface="Arial"/>
+              </a:rPr>
+              <a:t>Academic </a:t>
+            </a:r>
+            <a:r>
+              <a:rPr dirty="0">
+                <a:latin typeface="Arial"/>
+              </a:rPr>
+              <a:t>prototype only, not a production police system</a:t>
+            </a:r>
+          </a:p>
+          <a:p>
+            <a:pPr marL="285750" indent="-285750">
+              <a:lnSpc>
+                <a:spcPct val="150000"/>
+              </a:lnSpc>
               <a:spcAft>
                 <a:spcPts val="700"/>
               </a:spcAft>
+              <a:buFont typeface="Arial" panose="020B0604020202020204" pitchFamily="34" charset="0"/>
+              <a:buChar char="•"/>
               <a:defRPr sz="1800">
                 <a:solidFill>
                   <a:srgbClr val="141414"/>
@@ -21713,17 +23653,28 @@
               </a:defRPr>
             </a:pPr>
             <a:r>
-              <a:rPr>
-                <a:latin typeface="Arial"/>
-              </a:rPr>
-              <a:t>• Synthetic or demonstration data only</a:t>
-            </a:r>
-          </a:p>
-          <a:p>
-            <a:pPr>
+              <a:rPr dirty="0" smtClean="0">
+                <a:latin typeface="Arial"/>
+              </a:rPr>
+              <a:t>Synthetic </a:t>
+            </a:r>
+            <a:r>
+              <a:rPr dirty="0">
+                <a:latin typeface="Arial"/>
+              </a:rPr>
+              <a:t>or demonstration data only</a:t>
+            </a:r>
+          </a:p>
+          <a:p>
+            <a:pPr marL="285750" indent="-285750">
+              <a:lnSpc>
+                <a:spcPct val="150000"/>
+              </a:lnSpc>
               <a:spcAft>
                 <a:spcPts val="700"/>
               </a:spcAft>
+              <a:buFont typeface="Arial" panose="020B0604020202020204" pitchFamily="34" charset="0"/>
+              <a:buChar char="•"/>
               <a:defRPr sz="1800">
                 <a:solidFill>
                   <a:srgbClr val="141414"/>
@@ -21732,17 +23683,28 @@
               </a:defRPr>
             </a:pPr>
             <a:r>
-              <a:rPr>
-                <a:latin typeface="Arial"/>
-              </a:rPr>
-              <a:t>• No NADRA, live police, or government system integration</a:t>
-            </a:r>
-          </a:p>
-          <a:p>
-            <a:pPr>
+              <a:rPr dirty="0" smtClean="0">
+                <a:latin typeface="Arial"/>
+              </a:rPr>
+              <a:t>No </a:t>
+            </a:r>
+            <a:r>
+              <a:rPr dirty="0">
+                <a:latin typeface="Arial"/>
+              </a:rPr>
+              <a:t>NADRA, live police, or government system integration</a:t>
+            </a:r>
+          </a:p>
+          <a:p>
+            <a:pPr marL="285750" indent="-285750">
+              <a:lnSpc>
+                <a:spcPct val="150000"/>
+              </a:lnSpc>
               <a:spcAft>
                 <a:spcPts val="700"/>
               </a:spcAft>
+              <a:buFont typeface="Arial" panose="020B0604020202020204" pitchFamily="34" charset="0"/>
+              <a:buChar char="•"/>
               <a:defRPr sz="1800">
                 <a:solidFill>
                   <a:srgbClr val="141414"/>
@@ -21751,17 +23713,28 @@
               </a:defRPr>
             </a:pPr>
             <a:r>
-              <a:rPr>
-                <a:latin typeface="Arial"/>
-              </a:rPr>
-              <a:t>• Small controlled blockchain network for demonstration</a:t>
-            </a:r>
-          </a:p>
-          <a:p>
-            <a:pPr>
+              <a:rPr dirty="0" smtClean="0">
+                <a:latin typeface="Arial"/>
+              </a:rPr>
+              <a:t>Small </a:t>
+            </a:r>
+            <a:r>
+              <a:rPr dirty="0">
+                <a:latin typeface="Arial"/>
+              </a:rPr>
+              <a:t>controlled blockchain network for demonstration</a:t>
+            </a:r>
+          </a:p>
+          <a:p>
+            <a:pPr marL="285750" indent="-285750">
+              <a:lnSpc>
+                <a:spcPct val="150000"/>
+              </a:lnSpc>
               <a:spcAft>
                 <a:spcPts val="700"/>
               </a:spcAft>
+              <a:buFont typeface="Arial" panose="020B0604020202020204" pitchFamily="34" charset="0"/>
+              <a:buChar char="•"/>
               <a:defRPr sz="1800">
                 <a:solidFill>
                   <a:srgbClr val="141414"/>
@@ -21770,17 +23743,28 @@
               </a:defRPr>
             </a:pPr>
             <a:r>
-              <a:rPr>
-                <a:latin typeface="Arial"/>
-              </a:rPr>
-              <a:t>• Performance and scale testing limited by available student infrastructure</a:t>
-            </a:r>
-          </a:p>
-          <a:p>
-            <a:pPr>
+              <a:rPr dirty="0" smtClean="0">
+                <a:latin typeface="Arial"/>
+              </a:rPr>
+              <a:t>Performance </a:t>
+            </a:r>
+            <a:r>
+              <a:rPr dirty="0">
+                <a:latin typeface="Arial"/>
+              </a:rPr>
+              <a:t>and scale testing limited by available student infrastructure</a:t>
+            </a:r>
+          </a:p>
+          <a:p>
+            <a:pPr marL="285750" indent="-285750">
+              <a:lnSpc>
+                <a:spcPct val="150000"/>
+              </a:lnSpc>
               <a:spcAft>
                 <a:spcPts val="700"/>
               </a:spcAft>
+              <a:buFont typeface="Arial" panose="020B0604020202020204" pitchFamily="34" charset="0"/>
+              <a:buChar char="•"/>
               <a:defRPr sz="1800">
                 <a:solidFill>
                   <a:srgbClr val="141414"/>
@@ -21789,10 +23773,16 @@
               </a:defRPr>
             </a:pPr>
             <a:r>
-              <a:rPr>
-                <a:latin typeface="Arial"/>
-              </a:rPr>
-              <a:t>• No legally binding digital FIR functionality</a:t>
+              <a:rPr dirty="0" smtClean="0">
+                <a:latin typeface="Arial"/>
+              </a:rPr>
+              <a:t>No </a:t>
+            </a:r>
+            <a:r>
+              <a:rPr dirty="0">
+                <a:latin typeface="Arial"/>
+              </a:rPr>
+              <a:t>legally binding digital FIR functionality</a:t>
             </a:r>
           </a:p>
         </p:txBody>
@@ -21895,8 +23885,8 @@
         </p:nvSpPr>
         <p:spPr>
           <a:xfrm>
-            <a:off x="841248" y="4681728"/>
-            <a:ext cx="7269479" cy="347472"/>
+            <a:off x="832012" y="4626312"/>
+            <a:ext cx="7269479" cy="332399"/>
           </a:xfrm>
           <a:prstGeom prst="rect">
             <a:avLst/>
@@ -21911,7 +23901,7 @@
           <a:p>
             <a:pPr algn="l"/>
             <a:r>
-              <a:rPr sz="1500" b="1">
+              <a:rPr sz="1800" b="1" dirty="0">
                 <a:solidFill>
                   <a:srgbClr val="1F497D"/>
                 </a:solidFill>
@@ -21930,8 +23920,8 @@
         </p:nvSpPr>
         <p:spPr>
           <a:xfrm>
-            <a:off x="841248" y="5074920"/>
-            <a:ext cx="7269479" cy="411480"/>
+            <a:off x="822776" y="5001031"/>
+            <a:ext cx="7269479" cy="547842"/>
           </a:xfrm>
           <a:prstGeom prst="rect">
             <a:avLst/>
@@ -21946,7 +23936,7 @@
           <a:p>
             <a:pPr algn="l"/>
             <a:r>
-              <a:rPr sz="1200" b="0">
+              <a:rPr sz="1600" b="0" dirty="0">
                 <a:solidFill>
                   <a:srgbClr val="141414"/>
                 </a:solidFill>
@@ -21971,527 +23961,6 @@
     <mc:Fallback xmlns="">
       <p:transition spd="slow">
         <p:fade/>
-      </p:transition>
-    </mc:Fallback>
-  </mc:AlternateContent>
-  <p:timing>
-    <p:tnLst>
-      <p:par>
-        <p:cTn id="1" dur="indefinite" restart="never" nodeType="tmRoot"/>
-      </p:par>
-    </p:tnLst>
-  </p:timing>
-</p:sld>
-</file>
-
-<file path=ppt/slides/slide21.xml><?xml version="1.0" encoding="utf-8"?>
-<p:sld xmlns:a="http://schemas.openxmlformats.org/drawingml/2006/main" xmlns:r="http://schemas.openxmlformats.org/officeDocument/2006/relationships" xmlns:p="http://schemas.openxmlformats.org/presentationml/2006/main">
-  <p:cSld>
-    <p:spTree>
-      <p:nvGrpSpPr>
-        <p:cNvPr id="1" name=""/>
-        <p:cNvGrpSpPr/>
-        <p:nvPr/>
-      </p:nvGrpSpPr>
-      <p:grpSpPr>
-        <a:xfrm>
-          <a:off x="0" y="0"/>
-          <a:ext cx="0" cy="0"/>
-          <a:chOff x="0" y="0"/>
-          <a:chExt cx="0" cy="0"/>
-        </a:xfrm>
-      </p:grpSpPr>
-      <p:sp>
-        <p:nvSpPr>
-          <p:cNvPr id="2" name="Title 1"/>
-          <p:cNvSpPr>
-            <a:spLocks noGrp="1"/>
-          </p:cNvSpPr>
-          <p:nvPr>
-            <p:ph type="title"/>
-          </p:nvPr>
-        </p:nvSpPr>
-        <p:spPr/>
-        <p:txBody>
-          <a:bodyPr wrap="square" lIns="45720" tIns="18288" rIns="45720" bIns="18288"/>
-          <a:lstStyle/>
-          <a:p>
-            <a:r>
-              <a:rPr sz="2600" b="1">
-                <a:solidFill>
-                  <a:srgbClr val="1F497D"/>
-                </a:solidFill>
-                <a:latin typeface="Arial"/>
-              </a:rPr>
-              <a:t>Expected Benefits and Success Criteria</a:t>
-            </a:r>
-          </a:p>
-        </p:txBody>
-      </p:sp>
-      <p:sp>
-        <p:nvSpPr>
-          <p:cNvPr id="4" name="Rounded Rectangle 3"/>
-          <p:cNvSpPr/>
-          <p:nvPr/>
-        </p:nvSpPr>
-        <p:spPr>
-          <a:xfrm>
-            <a:off x="502920" y="1234440"/>
-            <a:ext cx="3749039" cy="4343400"/>
-          </a:xfrm>
-          <a:prstGeom prst="roundRect">
-            <a:avLst/>
-          </a:prstGeom>
-          <a:solidFill>
-            <a:srgbClr val="FFFFFF"/>
-          </a:solidFill>
-          <a:ln w="12700">
-            <a:solidFill>
-              <a:srgbClr val="CDD4DC"/>
-            </a:solidFill>
-          </a:ln>
-        </p:spPr>
-        <p:style>
-          <a:lnRef idx="1">
-            <a:schemeClr val="accent1"/>
-          </a:lnRef>
-          <a:fillRef idx="3">
-            <a:schemeClr val="accent1"/>
-          </a:fillRef>
-          <a:effectRef idx="2">
-            <a:schemeClr val="accent1"/>
-          </a:effectRef>
-          <a:fontRef idx="minor">
-            <a:schemeClr val="lt1"/>
-          </a:fontRef>
-        </p:style>
-        <p:txBody>
-          <a:bodyPr wrap="square" rtlCol="0" anchor="ctr"/>
-          <a:lstStyle/>
-          <a:p>
-            <a:pPr algn="ctr"/>
-            <a:endParaRPr/>
-          </a:p>
-        </p:txBody>
-      </p:sp>
-      <p:sp>
-        <p:nvSpPr>
-          <p:cNvPr id="5" name="Rectangle 4"/>
-          <p:cNvSpPr/>
-          <p:nvPr/>
-        </p:nvSpPr>
-        <p:spPr>
-          <a:xfrm>
-            <a:off x="502920" y="1234440"/>
-            <a:ext cx="64008" cy="4343400"/>
-          </a:xfrm>
-          <a:prstGeom prst="rect">
-            <a:avLst/>
-          </a:prstGeom>
-          <a:solidFill>
-            <a:srgbClr val="1F497D"/>
-          </a:solidFill>
-          <a:ln>
-            <a:noFill/>
-          </a:ln>
-        </p:spPr>
-        <p:style>
-          <a:lnRef idx="1">
-            <a:schemeClr val="accent1"/>
-          </a:lnRef>
-          <a:fillRef idx="3">
-            <a:schemeClr val="accent1"/>
-          </a:fillRef>
-          <a:effectRef idx="2">
-            <a:schemeClr val="accent1"/>
-          </a:effectRef>
-          <a:fontRef idx="minor">
-            <a:schemeClr val="lt1"/>
-          </a:fontRef>
-        </p:style>
-        <p:txBody>
-          <a:bodyPr wrap="square" rtlCol="0" anchor="ctr"/>
-          <a:lstStyle/>
-          <a:p>
-            <a:pPr algn="ctr"/>
-            <a:endParaRPr/>
-          </a:p>
-        </p:txBody>
-      </p:sp>
-      <p:sp>
-        <p:nvSpPr>
-          <p:cNvPr id="6" name="TextBox 5"/>
-          <p:cNvSpPr txBox="1"/>
-          <p:nvPr/>
-        </p:nvSpPr>
-        <p:spPr>
-          <a:xfrm>
-            <a:off x="960582" y="1344168"/>
-            <a:ext cx="3218225" cy="317010"/>
-          </a:xfrm>
-          <a:prstGeom prst="rect">
-            <a:avLst/>
-          </a:prstGeom>
-          <a:noFill/>
-        </p:spPr>
-        <p:txBody>
-          <a:bodyPr wrap="square" lIns="36576" tIns="27432" rIns="36576" bIns="27432">
-            <a:spAutoFit/>
-          </a:bodyPr>
-          <a:lstStyle/>
-          <a:p>
-            <a:pPr algn="l"/>
-            <a:r>
-              <a:rPr sz="1700" b="1" dirty="0">
-                <a:solidFill>
-                  <a:srgbClr val="1F497D"/>
-                </a:solidFill>
-                <a:latin typeface="Arial"/>
-              </a:rPr>
-              <a:t>Expected benefits</a:t>
-            </a:r>
-          </a:p>
-        </p:txBody>
-      </p:sp>
-      <p:sp>
-        <p:nvSpPr>
-          <p:cNvPr id="7" name="TextBox 6"/>
-          <p:cNvSpPr txBox="1"/>
-          <p:nvPr/>
-        </p:nvSpPr>
-        <p:spPr>
-          <a:xfrm>
-            <a:off x="658368" y="1737360"/>
-            <a:ext cx="3520439" cy="3749039"/>
-          </a:xfrm>
-          <a:prstGeom prst="rect">
-            <a:avLst/>
-          </a:prstGeom>
-          <a:noFill/>
-        </p:spPr>
-        <p:txBody>
-          <a:bodyPr wrap="square" lIns="36576" tIns="27432" rIns="36576" bIns="27432">
-            <a:spAutoFit/>
-          </a:bodyPr>
-          <a:lstStyle/>
-          <a:p>
-            <a:pPr algn="l"/>
-            <a:r>
-              <a:rPr sz="1300" b="0">
-                <a:solidFill>
-                  <a:srgbClr val="141414"/>
-                </a:solidFill>
-                <a:latin typeface="Arial"/>
-              </a:rPr>
-              <a:t>• Improved record integrity through cryptographic verification</a:t>
-            </a:r>
-            <a:r>
-              <a:t/>
-            </a:r>
-            <a:br/>
-            <a:r>
-              <a:rPr sz="1300" b="0">
-                <a:solidFill>
-                  <a:srgbClr val="141414"/>
-                </a:solidFill>
-                <a:latin typeface="Arial"/>
-              </a:rPr>
-              <a:t>• Stronger accountability through RBAC and blockchain audit trails</a:t>
-            </a:r>
-            <a:r>
-              <a:t/>
-            </a:r>
-            <a:br/>
-            <a:r>
-              <a:rPr sz="1300" b="0">
-                <a:solidFill>
-                  <a:srgbClr val="141414"/>
-                </a:solidFill>
-                <a:latin typeface="Arial"/>
-              </a:rPr>
-              <a:t>• Clearer visibility into the FIR lifecycle</a:t>
-            </a:r>
-            <a:r>
-              <a:t/>
-            </a:r>
-            <a:br/>
-            <a:r>
-              <a:rPr sz="1300" b="0">
-                <a:solidFill>
-                  <a:srgbClr val="141414"/>
-                </a:solidFill>
-                <a:latin typeface="Arial"/>
-              </a:rPr>
-              <a:t>• Tamper evident evidence and document history</a:t>
-            </a:r>
-            <a:r>
-              <a:t/>
-            </a:r>
-            <a:br/>
-            <a:r>
-              <a:rPr sz="1300" b="0">
-                <a:solidFill>
-                  <a:srgbClr val="141414"/>
-                </a:solidFill>
-                <a:latin typeface="Arial"/>
-              </a:rPr>
-              <a:t>• Practical demonstration of permissioned blockchain in a public sector workflow</a:t>
-            </a:r>
-          </a:p>
-        </p:txBody>
-      </p:sp>
-      <p:sp>
-        <p:nvSpPr>
-          <p:cNvPr id="8" name="Rounded Rectangle 7"/>
-          <p:cNvSpPr/>
-          <p:nvPr/>
-        </p:nvSpPr>
-        <p:spPr>
-          <a:xfrm>
-            <a:off x="4526280" y="1234440"/>
-            <a:ext cx="3749039" cy="4343400"/>
-          </a:xfrm>
-          <a:prstGeom prst="roundRect">
-            <a:avLst/>
-          </a:prstGeom>
-          <a:solidFill>
-            <a:srgbClr val="FFFFFF"/>
-          </a:solidFill>
-          <a:ln w="12700">
-            <a:solidFill>
-              <a:srgbClr val="CDD4DC"/>
-            </a:solidFill>
-          </a:ln>
-        </p:spPr>
-        <p:style>
-          <a:lnRef idx="1">
-            <a:schemeClr val="accent1"/>
-          </a:lnRef>
-          <a:fillRef idx="3">
-            <a:schemeClr val="accent1"/>
-          </a:fillRef>
-          <a:effectRef idx="2">
-            <a:schemeClr val="accent1"/>
-          </a:effectRef>
-          <a:fontRef idx="minor">
-            <a:schemeClr val="lt1"/>
-          </a:fontRef>
-        </p:style>
-        <p:txBody>
-          <a:bodyPr wrap="square" rtlCol="0" anchor="ctr"/>
-          <a:lstStyle/>
-          <a:p>
-            <a:pPr algn="ctr"/>
-            <a:endParaRPr/>
-          </a:p>
-        </p:txBody>
-      </p:sp>
-      <p:sp>
-        <p:nvSpPr>
-          <p:cNvPr id="9" name="Rectangle 8"/>
-          <p:cNvSpPr/>
-          <p:nvPr/>
-        </p:nvSpPr>
-        <p:spPr>
-          <a:xfrm>
-            <a:off x="4526280" y="1234440"/>
-            <a:ext cx="64008" cy="4343400"/>
-          </a:xfrm>
-          <a:prstGeom prst="rect">
-            <a:avLst/>
-          </a:prstGeom>
-          <a:solidFill>
-            <a:srgbClr val="DAA520"/>
-          </a:solidFill>
-          <a:ln>
-            <a:noFill/>
-          </a:ln>
-        </p:spPr>
-        <p:style>
-          <a:lnRef idx="1">
-            <a:schemeClr val="accent1"/>
-          </a:lnRef>
-          <a:fillRef idx="3">
-            <a:schemeClr val="accent1"/>
-          </a:fillRef>
-          <a:effectRef idx="2">
-            <a:schemeClr val="accent1"/>
-          </a:effectRef>
-          <a:fontRef idx="minor">
-            <a:schemeClr val="lt1"/>
-          </a:fontRef>
-        </p:style>
-        <p:txBody>
-          <a:bodyPr wrap="square" rtlCol="0" anchor="ctr"/>
-          <a:lstStyle/>
-          <a:p>
-            <a:pPr algn="ctr"/>
-            <a:endParaRPr/>
-          </a:p>
-        </p:txBody>
-      </p:sp>
-      <p:sp>
-        <p:nvSpPr>
-          <p:cNvPr id="10" name="TextBox 9"/>
-          <p:cNvSpPr txBox="1"/>
-          <p:nvPr/>
-        </p:nvSpPr>
-        <p:spPr>
-          <a:xfrm>
-            <a:off x="4950691" y="1353404"/>
-            <a:ext cx="3251476" cy="317010"/>
-          </a:xfrm>
-          <a:prstGeom prst="rect">
-            <a:avLst/>
-          </a:prstGeom>
-          <a:noFill/>
-        </p:spPr>
-        <p:txBody>
-          <a:bodyPr wrap="square" lIns="36576" tIns="27432" rIns="36576" bIns="27432">
-            <a:spAutoFit/>
-          </a:bodyPr>
-          <a:lstStyle/>
-          <a:p>
-            <a:pPr algn="l"/>
-            <a:r>
-              <a:rPr sz="1700" b="1" dirty="0">
-                <a:solidFill>
-                  <a:srgbClr val="DAA520"/>
-                </a:solidFill>
-                <a:latin typeface="Arial"/>
-              </a:rPr>
-              <a:t>Success criteria</a:t>
-            </a:r>
-          </a:p>
-        </p:txBody>
-      </p:sp>
-      <p:sp>
-        <p:nvSpPr>
-          <p:cNvPr id="11" name="TextBox 10"/>
-          <p:cNvSpPr txBox="1"/>
-          <p:nvPr/>
-        </p:nvSpPr>
-        <p:spPr>
-          <a:xfrm>
-            <a:off x="4681728" y="1737360"/>
-            <a:ext cx="3520439" cy="3749039"/>
-          </a:xfrm>
-          <a:prstGeom prst="rect">
-            <a:avLst/>
-          </a:prstGeom>
-          <a:noFill/>
-        </p:spPr>
-        <p:txBody>
-          <a:bodyPr wrap="square" lIns="36576" tIns="27432" rIns="36576" bIns="27432">
-            <a:spAutoFit/>
-          </a:bodyPr>
-          <a:lstStyle/>
-          <a:p>
-            <a:pPr algn="l"/>
-            <a:r>
-              <a:rPr sz="1300" b="0">
-                <a:solidFill>
-                  <a:srgbClr val="141414"/>
-                </a:solidFill>
-                <a:latin typeface="Arial"/>
-              </a:rPr>
-              <a:t>• Authorized users authenticate and roles are enforced</a:t>
-            </a:r>
-            <a:r>
-              <a:t/>
-            </a:r>
-            <a:br/>
-            <a:r>
-              <a:rPr sz="1300" b="0">
-                <a:solidFill>
-                  <a:srgbClr val="141414"/>
-                </a:solidFill>
-                <a:latin typeface="Arial"/>
-              </a:rPr>
-              <a:t>• FIRs move through defined workflow states</a:t>
-            </a:r>
-            <a:r>
-              <a:t/>
-            </a:r>
-            <a:br/>
-            <a:r>
-              <a:rPr sz="1300" b="0">
-                <a:solidFill>
-                  <a:srgbClr val="141414"/>
-                </a:solidFill>
-                <a:latin typeface="Arial"/>
-              </a:rPr>
-              <a:t>• Evidence hashes are generated and verified</a:t>
-            </a:r>
-            <a:r>
-              <a:t/>
-            </a:r>
-            <a:br/>
-            <a:r>
-              <a:rPr sz="1300" b="0">
-                <a:solidFill>
-                  <a:srgbClr val="141414"/>
-                </a:solidFill>
-                <a:latin typeface="Arial"/>
-              </a:rPr>
-              <a:t>• Key operations produce blockchain transactions</a:t>
-            </a:r>
-            <a:r>
-              <a:t/>
-            </a:r>
-            <a:br/>
-            <a:r>
-              <a:rPr sz="1300" b="0">
-                <a:solidFill>
-                  <a:srgbClr val="141414"/>
-                </a:solidFill>
-                <a:latin typeface="Arial"/>
-              </a:rPr>
-              <a:t>• History can be retrieved and reconstructed</a:t>
-            </a:r>
-            <a:r>
-              <a:t/>
-            </a:r>
-            <a:br/>
-            <a:r>
-              <a:rPr sz="1300" b="0">
-                <a:solidFill>
-                  <a:srgbClr val="141414"/>
-                </a:solidFill>
-                <a:latin typeface="Arial"/>
-              </a:rPr>
-              <a:t>• Unauthorized actions are rejected</a:t>
-            </a:r>
-            <a:r>
-              <a:t/>
-            </a:r>
-            <a:br/>
-            <a:r>
-              <a:rPr sz="1300" b="0">
-                <a:solidFill>
-                  <a:srgbClr val="141414"/>
-                </a:solidFill>
-                <a:latin typeface="Arial"/>
-              </a:rPr>
-              <a:t>• End to end prototype works with synthetic data</a:t>
-            </a:r>
-          </a:p>
-        </p:txBody>
-      </p:sp>
-    </p:spTree>
-  </p:cSld>
-  <p:clrMapOvr>
-    <a:masterClrMapping/>
-  </p:clrMapOvr>
-  <mc:AlternateContent xmlns:mc="http://schemas.openxmlformats.org/markup-compatibility/2006" xmlns:p14="http://schemas.microsoft.com/office/powerpoint/2010/main">
-    <mc:Choice Requires="p14">
-      <p:transition spd="slow" p14:dur="1500">
-        <p:split orient="vert"/>
-      </p:transition>
-    </mc:Choice>
-    <mc:Fallback xmlns="">
-      <p:transition spd="slow">
-        <p:split orient="vert"/>
       </p:transition>
     </mc:Fallback>
   </mc:AlternateContent>
@@ -22544,7 +24013,672 @@
                 </a:solidFill>
                 <a:latin typeface="Arial"/>
               </a:rPr>
-              <a:t>CONCLUSION</a:t>
+              <a:t>Expected Benefits and Success Criteria</a:t>
+            </a:r>
+          </a:p>
+        </p:txBody>
+      </p:sp>
+      <p:sp>
+        <p:nvSpPr>
+          <p:cNvPr id="4" name="Rounded Rectangle 3"/>
+          <p:cNvSpPr/>
+          <p:nvPr/>
+        </p:nvSpPr>
+        <p:spPr>
+          <a:xfrm>
+            <a:off x="502920" y="1234440"/>
+            <a:ext cx="3749039" cy="4343400"/>
+          </a:xfrm>
+          <a:prstGeom prst="roundRect">
+            <a:avLst/>
+          </a:prstGeom>
+          <a:solidFill>
+            <a:srgbClr val="FFFFFF"/>
+          </a:solidFill>
+          <a:ln w="12700">
+            <a:solidFill>
+              <a:srgbClr val="CDD4DC"/>
+            </a:solidFill>
+          </a:ln>
+        </p:spPr>
+        <p:style>
+          <a:lnRef idx="1">
+            <a:schemeClr val="accent1"/>
+          </a:lnRef>
+          <a:fillRef idx="3">
+            <a:schemeClr val="accent1"/>
+          </a:fillRef>
+          <a:effectRef idx="2">
+            <a:schemeClr val="accent1"/>
+          </a:effectRef>
+          <a:fontRef idx="minor">
+            <a:schemeClr val="lt1"/>
+          </a:fontRef>
+        </p:style>
+        <p:txBody>
+          <a:bodyPr wrap="square" rtlCol="0" anchor="ctr"/>
+          <a:lstStyle/>
+          <a:p>
+            <a:pPr algn="ctr"/>
+            <a:endParaRPr/>
+          </a:p>
+        </p:txBody>
+      </p:sp>
+      <p:sp>
+        <p:nvSpPr>
+          <p:cNvPr id="5" name="Rectangle 4"/>
+          <p:cNvSpPr/>
+          <p:nvPr/>
+        </p:nvSpPr>
+        <p:spPr>
+          <a:xfrm>
+            <a:off x="502920" y="1234440"/>
+            <a:ext cx="64008" cy="4343400"/>
+          </a:xfrm>
+          <a:prstGeom prst="rect">
+            <a:avLst/>
+          </a:prstGeom>
+          <a:solidFill>
+            <a:srgbClr val="1F497D"/>
+          </a:solidFill>
+          <a:ln>
+            <a:noFill/>
+          </a:ln>
+        </p:spPr>
+        <p:style>
+          <a:lnRef idx="1">
+            <a:schemeClr val="accent1"/>
+          </a:lnRef>
+          <a:fillRef idx="3">
+            <a:schemeClr val="accent1"/>
+          </a:fillRef>
+          <a:effectRef idx="2">
+            <a:schemeClr val="accent1"/>
+          </a:effectRef>
+          <a:fontRef idx="minor">
+            <a:schemeClr val="lt1"/>
+          </a:fontRef>
+        </p:style>
+        <p:txBody>
+          <a:bodyPr wrap="square" rtlCol="0" anchor="ctr"/>
+          <a:lstStyle/>
+          <a:p>
+            <a:pPr algn="ctr"/>
+            <a:endParaRPr/>
+          </a:p>
+        </p:txBody>
+      </p:sp>
+      <p:sp>
+        <p:nvSpPr>
+          <p:cNvPr id="6" name="TextBox 5"/>
+          <p:cNvSpPr txBox="1"/>
+          <p:nvPr/>
+        </p:nvSpPr>
+        <p:spPr>
+          <a:xfrm>
+            <a:off x="960582" y="1344168"/>
+            <a:ext cx="3218225" cy="317010"/>
+          </a:xfrm>
+          <a:prstGeom prst="rect">
+            <a:avLst/>
+          </a:prstGeom>
+          <a:noFill/>
+        </p:spPr>
+        <p:txBody>
+          <a:bodyPr wrap="square" lIns="36576" tIns="27432" rIns="36576" bIns="27432">
+            <a:spAutoFit/>
+          </a:bodyPr>
+          <a:lstStyle/>
+          <a:p>
+            <a:pPr algn="l"/>
+            <a:r>
+              <a:rPr sz="1700" b="1" dirty="0">
+                <a:solidFill>
+                  <a:srgbClr val="1F497D"/>
+                </a:solidFill>
+                <a:latin typeface="Arial"/>
+              </a:rPr>
+              <a:t>Expected benefits</a:t>
+            </a:r>
+          </a:p>
+        </p:txBody>
+      </p:sp>
+      <p:sp>
+        <p:nvSpPr>
+          <p:cNvPr id="7" name="TextBox 6"/>
+          <p:cNvSpPr txBox="1"/>
+          <p:nvPr/>
+        </p:nvSpPr>
+        <p:spPr>
+          <a:xfrm>
+            <a:off x="658368" y="1737360"/>
+            <a:ext cx="3520439" cy="3517886"/>
+          </a:xfrm>
+          <a:prstGeom prst="rect">
+            <a:avLst/>
+          </a:prstGeom>
+          <a:noFill/>
+        </p:spPr>
+        <p:txBody>
+          <a:bodyPr wrap="square" lIns="36576" tIns="27432" rIns="36576" bIns="27432">
+            <a:spAutoFit/>
+          </a:bodyPr>
+          <a:lstStyle/>
+          <a:p>
+            <a:pPr marL="285750" indent="-285750" algn="l">
+              <a:lnSpc>
+                <a:spcPct val="150000"/>
+              </a:lnSpc>
+              <a:buFont typeface="Arial" panose="020B0604020202020204" pitchFamily="34" charset="0"/>
+              <a:buChar char="•"/>
+            </a:pPr>
+            <a:r>
+              <a:rPr sz="1500" b="0" dirty="0" smtClean="0">
+                <a:solidFill>
+                  <a:srgbClr val="141414"/>
+                </a:solidFill>
+              </a:rPr>
+              <a:t>Improved </a:t>
+            </a:r>
+            <a:r>
+              <a:rPr sz="1500" b="0" dirty="0">
+                <a:solidFill>
+                  <a:srgbClr val="141414"/>
+                </a:solidFill>
+              </a:rPr>
+              <a:t>record integrity through cryptographic </a:t>
+            </a:r>
+            <a:r>
+              <a:rPr sz="1500" b="0" dirty="0" smtClean="0">
+                <a:solidFill>
+                  <a:srgbClr val="141414"/>
+                </a:solidFill>
+              </a:rPr>
+              <a:t>verification</a:t>
+            </a:r>
+            <a:endParaRPr lang="en-US" sz="1500" dirty="0" smtClean="0"/>
+          </a:p>
+          <a:p>
+            <a:pPr marL="285750" indent="-285750" algn="l">
+              <a:lnSpc>
+                <a:spcPct val="150000"/>
+              </a:lnSpc>
+              <a:buFont typeface="Arial" panose="020B0604020202020204" pitchFamily="34" charset="0"/>
+              <a:buChar char="•"/>
+            </a:pPr>
+            <a:r>
+              <a:rPr sz="1500" b="0" dirty="0" smtClean="0">
+                <a:solidFill>
+                  <a:srgbClr val="141414"/>
+                </a:solidFill>
+              </a:rPr>
+              <a:t>Stronger </a:t>
+            </a:r>
+            <a:r>
+              <a:rPr sz="1500" b="0" dirty="0">
+                <a:solidFill>
+                  <a:srgbClr val="141414"/>
+                </a:solidFill>
+              </a:rPr>
+              <a:t>accountability through RBAC and blockchain audit </a:t>
+            </a:r>
+            <a:r>
+              <a:rPr sz="1500" b="0" dirty="0" smtClean="0">
+                <a:solidFill>
+                  <a:srgbClr val="141414"/>
+                </a:solidFill>
+              </a:rPr>
+              <a:t>trails</a:t>
+            </a:r>
+            <a:endParaRPr lang="en-US" sz="1500" dirty="0" smtClean="0"/>
+          </a:p>
+          <a:p>
+            <a:pPr marL="285750" indent="-285750" algn="l">
+              <a:lnSpc>
+                <a:spcPct val="150000"/>
+              </a:lnSpc>
+              <a:buFont typeface="Arial" panose="020B0604020202020204" pitchFamily="34" charset="0"/>
+              <a:buChar char="•"/>
+            </a:pPr>
+            <a:r>
+              <a:rPr sz="1500" b="0" dirty="0" smtClean="0">
+                <a:solidFill>
+                  <a:srgbClr val="141414"/>
+                </a:solidFill>
+              </a:rPr>
+              <a:t>Clearer </a:t>
+            </a:r>
+            <a:r>
+              <a:rPr sz="1500" b="0" dirty="0">
+                <a:solidFill>
+                  <a:srgbClr val="141414"/>
+                </a:solidFill>
+              </a:rPr>
+              <a:t>visibility into the FIR </a:t>
+            </a:r>
+            <a:r>
+              <a:rPr sz="1500" b="0" dirty="0" smtClean="0">
+                <a:solidFill>
+                  <a:srgbClr val="141414"/>
+                </a:solidFill>
+              </a:rPr>
+              <a:t>lifecycle</a:t>
+            </a:r>
+            <a:endParaRPr lang="en-US" sz="1500" dirty="0" smtClean="0"/>
+          </a:p>
+          <a:p>
+            <a:pPr marL="285750" indent="-285750" algn="l">
+              <a:lnSpc>
+                <a:spcPct val="150000"/>
+              </a:lnSpc>
+              <a:buFont typeface="Arial" panose="020B0604020202020204" pitchFamily="34" charset="0"/>
+              <a:buChar char="•"/>
+            </a:pPr>
+            <a:r>
+              <a:rPr sz="1500" b="0" dirty="0" smtClean="0">
+                <a:solidFill>
+                  <a:srgbClr val="141414"/>
+                </a:solidFill>
+              </a:rPr>
+              <a:t>Tamper </a:t>
+            </a:r>
+            <a:r>
+              <a:rPr sz="1500" b="0" dirty="0">
+                <a:solidFill>
+                  <a:srgbClr val="141414"/>
+                </a:solidFill>
+              </a:rPr>
+              <a:t>evident evidence and document </a:t>
+            </a:r>
+            <a:r>
+              <a:rPr sz="1500" b="0" dirty="0" smtClean="0">
+                <a:solidFill>
+                  <a:srgbClr val="141414"/>
+                </a:solidFill>
+              </a:rPr>
+              <a:t>history</a:t>
+            </a:r>
+            <a:endParaRPr lang="en-US" sz="1500" dirty="0" smtClean="0"/>
+          </a:p>
+          <a:p>
+            <a:pPr marL="285750" indent="-285750" algn="l">
+              <a:lnSpc>
+                <a:spcPct val="150000"/>
+              </a:lnSpc>
+              <a:buFont typeface="Arial" panose="020B0604020202020204" pitchFamily="34" charset="0"/>
+              <a:buChar char="•"/>
+            </a:pPr>
+            <a:r>
+              <a:rPr sz="1500" b="0" dirty="0" smtClean="0">
+                <a:solidFill>
+                  <a:srgbClr val="141414"/>
+                </a:solidFill>
+              </a:rPr>
+              <a:t>Practical </a:t>
+            </a:r>
+            <a:r>
+              <a:rPr sz="1500" b="0" dirty="0">
+                <a:solidFill>
+                  <a:srgbClr val="141414"/>
+                </a:solidFill>
+              </a:rPr>
+              <a:t>demonstration of permissioned blockchain in a public sector workflow</a:t>
+            </a:r>
+          </a:p>
+        </p:txBody>
+      </p:sp>
+      <p:sp>
+        <p:nvSpPr>
+          <p:cNvPr id="8" name="Rounded Rectangle 7"/>
+          <p:cNvSpPr/>
+          <p:nvPr/>
+        </p:nvSpPr>
+        <p:spPr>
+          <a:xfrm>
+            <a:off x="4526280" y="1234440"/>
+            <a:ext cx="3749039" cy="4343400"/>
+          </a:xfrm>
+          <a:prstGeom prst="roundRect">
+            <a:avLst/>
+          </a:prstGeom>
+          <a:solidFill>
+            <a:srgbClr val="FFFFFF"/>
+          </a:solidFill>
+          <a:ln w="12700">
+            <a:solidFill>
+              <a:srgbClr val="CDD4DC"/>
+            </a:solidFill>
+          </a:ln>
+        </p:spPr>
+        <p:style>
+          <a:lnRef idx="1">
+            <a:schemeClr val="accent1"/>
+          </a:lnRef>
+          <a:fillRef idx="3">
+            <a:schemeClr val="accent1"/>
+          </a:fillRef>
+          <a:effectRef idx="2">
+            <a:schemeClr val="accent1"/>
+          </a:effectRef>
+          <a:fontRef idx="minor">
+            <a:schemeClr val="lt1"/>
+          </a:fontRef>
+        </p:style>
+        <p:txBody>
+          <a:bodyPr wrap="square" rtlCol="0" anchor="ctr"/>
+          <a:lstStyle/>
+          <a:p>
+            <a:pPr algn="ctr"/>
+            <a:endParaRPr/>
+          </a:p>
+        </p:txBody>
+      </p:sp>
+      <p:sp>
+        <p:nvSpPr>
+          <p:cNvPr id="9" name="Rectangle 8"/>
+          <p:cNvSpPr/>
+          <p:nvPr/>
+        </p:nvSpPr>
+        <p:spPr>
+          <a:xfrm>
+            <a:off x="4526280" y="1234440"/>
+            <a:ext cx="64008" cy="4343400"/>
+          </a:xfrm>
+          <a:prstGeom prst="rect">
+            <a:avLst/>
+          </a:prstGeom>
+          <a:solidFill>
+            <a:srgbClr val="DAA520"/>
+          </a:solidFill>
+          <a:ln>
+            <a:noFill/>
+          </a:ln>
+        </p:spPr>
+        <p:style>
+          <a:lnRef idx="1">
+            <a:schemeClr val="accent1"/>
+          </a:lnRef>
+          <a:fillRef idx="3">
+            <a:schemeClr val="accent1"/>
+          </a:fillRef>
+          <a:effectRef idx="2">
+            <a:schemeClr val="accent1"/>
+          </a:effectRef>
+          <a:fontRef idx="minor">
+            <a:schemeClr val="lt1"/>
+          </a:fontRef>
+        </p:style>
+        <p:txBody>
+          <a:bodyPr wrap="square" rtlCol="0" anchor="ctr"/>
+          <a:lstStyle/>
+          <a:p>
+            <a:pPr algn="ctr"/>
+            <a:endParaRPr/>
+          </a:p>
+        </p:txBody>
+      </p:sp>
+      <p:sp>
+        <p:nvSpPr>
+          <p:cNvPr id="10" name="TextBox 9"/>
+          <p:cNvSpPr txBox="1"/>
+          <p:nvPr/>
+        </p:nvSpPr>
+        <p:spPr>
+          <a:xfrm>
+            <a:off x="4950691" y="1353404"/>
+            <a:ext cx="3251476" cy="317010"/>
+          </a:xfrm>
+          <a:prstGeom prst="rect">
+            <a:avLst/>
+          </a:prstGeom>
+          <a:noFill/>
+        </p:spPr>
+        <p:txBody>
+          <a:bodyPr wrap="square" lIns="36576" tIns="27432" rIns="36576" bIns="27432">
+            <a:spAutoFit/>
+          </a:bodyPr>
+          <a:lstStyle/>
+          <a:p>
+            <a:pPr algn="l"/>
+            <a:r>
+              <a:rPr sz="1700" b="1" dirty="0">
+                <a:solidFill>
+                  <a:srgbClr val="DAA520"/>
+                </a:solidFill>
+                <a:latin typeface="Arial"/>
+              </a:rPr>
+              <a:t>Success criteria</a:t>
+            </a:r>
+          </a:p>
+        </p:txBody>
+      </p:sp>
+      <p:sp>
+        <p:nvSpPr>
+          <p:cNvPr id="11" name="TextBox 10"/>
+          <p:cNvSpPr txBox="1"/>
+          <p:nvPr/>
+        </p:nvSpPr>
+        <p:spPr>
+          <a:xfrm>
+            <a:off x="4681728" y="1737360"/>
+            <a:ext cx="3520439" cy="3056221"/>
+          </a:xfrm>
+          <a:prstGeom prst="rect">
+            <a:avLst/>
+          </a:prstGeom>
+          <a:noFill/>
+        </p:spPr>
+        <p:txBody>
+          <a:bodyPr wrap="square" lIns="36576" tIns="27432" rIns="36576" bIns="27432">
+            <a:spAutoFit/>
+          </a:bodyPr>
+          <a:lstStyle/>
+          <a:p>
+            <a:pPr marL="285750" indent="-285750" algn="l">
+              <a:buFont typeface="Arial" panose="020B0604020202020204" pitchFamily="34" charset="0"/>
+              <a:buChar char="•"/>
+            </a:pPr>
+            <a:r>
+              <a:rPr sz="1500" b="0" dirty="0" smtClean="0">
+                <a:solidFill>
+                  <a:srgbClr val="141414"/>
+                </a:solidFill>
+              </a:rPr>
+              <a:t>Authorized </a:t>
+            </a:r>
+            <a:r>
+              <a:rPr sz="1500" b="0" dirty="0">
+                <a:solidFill>
+                  <a:srgbClr val="141414"/>
+                </a:solidFill>
+              </a:rPr>
+              <a:t>users authenticate and roles are </a:t>
+            </a:r>
+            <a:r>
+              <a:rPr sz="1500" b="0" dirty="0" smtClean="0">
+                <a:solidFill>
+                  <a:srgbClr val="141414"/>
+                </a:solidFill>
+              </a:rPr>
+              <a:t>enforced</a:t>
+            </a:r>
+            <a:endParaRPr lang="en-US" sz="1500" dirty="0" smtClean="0"/>
+          </a:p>
+          <a:p>
+            <a:pPr marL="285750" indent="-285750" algn="l">
+              <a:buFont typeface="Arial" panose="020B0604020202020204" pitchFamily="34" charset="0"/>
+              <a:buChar char="•"/>
+            </a:pPr>
+            <a:r>
+              <a:rPr sz="1500" b="0" dirty="0" smtClean="0">
+                <a:solidFill>
+                  <a:srgbClr val="141414"/>
+                </a:solidFill>
+              </a:rPr>
+              <a:t>FIRs </a:t>
+            </a:r>
+            <a:r>
+              <a:rPr sz="1500" b="0" dirty="0">
+                <a:solidFill>
+                  <a:srgbClr val="141414"/>
+                </a:solidFill>
+              </a:rPr>
+              <a:t>move through defined workflow </a:t>
+            </a:r>
+            <a:r>
+              <a:rPr sz="1500" b="0" dirty="0" smtClean="0">
+                <a:solidFill>
+                  <a:srgbClr val="141414"/>
+                </a:solidFill>
+              </a:rPr>
+              <a:t>states</a:t>
+            </a:r>
+            <a:endParaRPr lang="en-US" sz="1500" dirty="0" smtClean="0"/>
+          </a:p>
+          <a:p>
+            <a:pPr marL="285750" indent="-285750" algn="l">
+              <a:buFont typeface="Arial" panose="020B0604020202020204" pitchFamily="34" charset="0"/>
+              <a:buChar char="•"/>
+            </a:pPr>
+            <a:r>
+              <a:rPr sz="1500" b="0" dirty="0" smtClean="0">
+                <a:solidFill>
+                  <a:srgbClr val="141414"/>
+                </a:solidFill>
+              </a:rPr>
+              <a:t>Evidence </a:t>
+            </a:r>
+            <a:r>
+              <a:rPr sz="1500" b="0" dirty="0">
+                <a:solidFill>
+                  <a:srgbClr val="141414"/>
+                </a:solidFill>
+              </a:rPr>
+              <a:t>hashes are generated and </a:t>
+            </a:r>
+            <a:r>
+              <a:rPr sz="1500" b="0" dirty="0" smtClean="0">
+                <a:solidFill>
+                  <a:srgbClr val="141414"/>
+                </a:solidFill>
+              </a:rPr>
+              <a:t>verified</a:t>
+            </a:r>
+            <a:endParaRPr lang="en-US" sz="1500" dirty="0" smtClean="0"/>
+          </a:p>
+          <a:p>
+            <a:pPr marL="285750" indent="-285750" algn="l">
+              <a:buFont typeface="Arial" panose="020B0604020202020204" pitchFamily="34" charset="0"/>
+              <a:buChar char="•"/>
+            </a:pPr>
+            <a:r>
+              <a:rPr sz="1500" b="0" dirty="0" smtClean="0">
+                <a:solidFill>
+                  <a:srgbClr val="141414"/>
+                </a:solidFill>
+              </a:rPr>
+              <a:t>Key </a:t>
+            </a:r>
+            <a:r>
+              <a:rPr sz="1500" b="0" dirty="0">
+                <a:solidFill>
+                  <a:srgbClr val="141414"/>
+                </a:solidFill>
+              </a:rPr>
+              <a:t>operations produce blockchain </a:t>
+            </a:r>
+            <a:r>
+              <a:rPr sz="1500" b="0" dirty="0" smtClean="0">
+                <a:solidFill>
+                  <a:srgbClr val="141414"/>
+                </a:solidFill>
+              </a:rPr>
+              <a:t>transactions</a:t>
+            </a:r>
+            <a:endParaRPr lang="en-US" sz="1500" dirty="0" smtClean="0"/>
+          </a:p>
+          <a:p>
+            <a:pPr marL="285750" indent="-285750" algn="l">
+              <a:buFont typeface="Arial" panose="020B0604020202020204" pitchFamily="34" charset="0"/>
+              <a:buChar char="•"/>
+            </a:pPr>
+            <a:r>
+              <a:rPr sz="1500" b="0" dirty="0" smtClean="0">
+                <a:solidFill>
+                  <a:srgbClr val="141414"/>
+                </a:solidFill>
+              </a:rPr>
+              <a:t>History </a:t>
+            </a:r>
+            <a:r>
+              <a:rPr sz="1500" b="0" dirty="0">
+                <a:solidFill>
+                  <a:srgbClr val="141414"/>
+                </a:solidFill>
+              </a:rPr>
+              <a:t>can be retrieved and </a:t>
+            </a:r>
+            <a:r>
+              <a:rPr sz="1500" b="0" dirty="0" smtClean="0">
+                <a:solidFill>
+                  <a:srgbClr val="141414"/>
+                </a:solidFill>
+              </a:rPr>
+              <a:t>reconstructed</a:t>
+            </a:r>
+            <a:endParaRPr lang="en-US" sz="1500" dirty="0" smtClean="0"/>
+          </a:p>
+          <a:p>
+            <a:pPr marL="285750" indent="-285750" algn="l">
+              <a:buFont typeface="Arial" panose="020B0604020202020204" pitchFamily="34" charset="0"/>
+              <a:buChar char="•"/>
+            </a:pPr>
+            <a:r>
+              <a:rPr sz="1500" b="0" dirty="0" smtClean="0">
+                <a:solidFill>
+                  <a:srgbClr val="141414"/>
+                </a:solidFill>
+              </a:rPr>
+              <a:t>Unauthorized </a:t>
+            </a:r>
+            <a:r>
+              <a:rPr sz="1500" b="0" dirty="0">
+                <a:solidFill>
+                  <a:srgbClr val="141414"/>
+                </a:solidFill>
+              </a:rPr>
+              <a:t>actions are </a:t>
+            </a:r>
+            <a:r>
+              <a:rPr sz="1500" b="0" dirty="0" smtClean="0">
+                <a:solidFill>
+                  <a:srgbClr val="141414"/>
+                </a:solidFill>
+              </a:rPr>
+              <a:t>rejected</a:t>
+            </a:r>
+            <a:endParaRPr lang="en-US" sz="1500" dirty="0" smtClean="0"/>
+          </a:p>
+          <a:p>
+            <a:pPr marL="285750" indent="-285750" algn="l">
+              <a:buFont typeface="Arial" panose="020B0604020202020204" pitchFamily="34" charset="0"/>
+              <a:buChar char="•"/>
+            </a:pPr>
+            <a:r>
+              <a:rPr sz="1500" b="0" dirty="0" smtClean="0">
+                <a:solidFill>
+                  <a:srgbClr val="141414"/>
+                </a:solidFill>
+              </a:rPr>
+              <a:t>End </a:t>
+            </a:r>
+            <a:r>
+              <a:rPr sz="1500" b="0" dirty="0">
+                <a:solidFill>
+                  <a:srgbClr val="141414"/>
+                </a:solidFill>
+              </a:rPr>
+              <a:t>to end prototype works with synthetic data</a:t>
             </a:r>
           </a:p>
         </p:txBody>
@@ -22556,13 +24690,13 @@
   </p:clrMapOvr>
   <mc:AlternateContent xmlns:mc="http://schemas.openxmlformats.org/markup-compatibility/2006" xmlns:p14="http://schemas.microsoft.com/office/powerpoint/2010/main">
     <mc:Choice Requires="p14">
-      <p:transition spd="med" p14:dur="700">
-        <p:fade/>
+      <p:transition spd="slow" p14:dur="1500">
+        <p:split orient="vert"/>
       </p:transition>
     </mc:Choice>
     <mc:Fallback xmlns="">
-      <p:transition spd="med">
-        <p:fade/>
+      <p:transition spd="slow">
+        <p:split orient="vert"/>
       </p:transition>
     </mc:Fallback>
   </mc:AlternateContent>
@@ -22595,6 +24729,77 @@
       </p:grpSpPr>
       <p:sp>
         <p:nvSpPr>
+          <p:cNvPr id="2" name="Title 1"/>
+          <p:cNvSpPr>
+            <a:spLocks noGrp="1"/>
+          </p:cNvSpPr>
+          <p:nvPr>
+            <p:ph type="title"/>
+          </p:nvPr>
+        </p:nvSpPr>
+        <p:spPr/>
+        <p:txBody>
+          <a:bodyPr wrap="square" lIns="45720" tIns="18288" rIns="45720" bIns="18288"/>
+          <a:lstStyle/>
+          <a:p>
+            <a:r>
+              <a:rPr sz="2600" b="1">
+                <a:solidFill>
+                  <a:srgbClr val="1F497D"/>
+                </a:solidFill>
+                <a:latin typeface="Arial"/>
+              </a:rPr>
+              <a:t>CONCLUSION</a:t>
+            </a:r>
+          </a:p>
+        </p:txBody>
+      </p:sp>
+    </p:spTree>
+  </p:cSld>
+  <p:clrMapOvr>
+    <a:masterClrMapping/>
+  </p:clrMapOvr>
+  <mc:AlternateContent xmlns:mc="http://schemas.openxmlformats.org/markup-compatibility/2006" xmlns:p14="http://schemas.microsoft.com/office/powerpoint/2010/main">
+    <mc:Choice Requires="p14">
+      <p:transition spd="med" p14:dur="700">
+        <p:fade/>
+      </p:transition>
+    </mc:Choice>
+    <mc:Fallback xmlns="">
+      <p:transition spd="med">
+        <p:fade/>
+      </p:transition>
+    </mc:Fallback>
+  </mc:AlternateContent>
+  <p:timing>
+    <p:tnLst>
+      <p:par>
+        <p:cTn id="1" dur="indefinite" restart="never" nodeType="tmRoot"/>
+      </p:par>
+    </p:tnLst>
+  </p:timing>
+</p:sld>
+</file>
+
+<file path=ppt/slides/slide24.xml><?xml version="1.0" encoding="utf-8"?>
+<p:sld xmlns:a="http://schemas.openxmlformats.org/drawingml/2006/main" xmlns:r="http://schemas.openxmlformats.org/officeDocument/2006/relationships" xmlns:p="http://schemas.openxmlformats.org/presentationml/2006/main">
+  <p:cSld>
+    <p:spTree>
+      <p:nvGrpSpPr>
+        <p:cNvPr id="1" name=""/>
+        <p:cNvGrpSpPr/>
+        <p:nvPr/>
+      </p:nvGrpSpPr>
+      <p:grpSpPr>
+        <a:xfrm>
+          <a:off x="0" y="0"/>
+          <a:ext cx="0" cy="0"/>
+          <a:chOff x="0" y="0"/>
+          <a:chExt cx="0" cy="0"/>
+        </a:xfrm>
+      </p:grpSpPr>
+      <p:sp>
+        <p:nvSpPr>
           <p:cNvPr id="4" name="TextBox 3"/>
           <p:cNvSpPr txBox="1"/>
           <p:nvPr/>
@@ -22602,7 +24807,7 @@
         <p:spPr>
           <a:xfrm>
             <a:off x="777240" y="304800"/>
-            <a:ext cx="7701742" cy="2086725"/>
+            <a:ext cx="7701742" cy="2271391"/>
           </a:xfrm>
           <a:prstGeom prst="rect">
             <a:avLst/>
@@ -22615,52 +24820,40 @@
           </a:bodyPr>
           <a:lstStyle/>
           <a:p>
-            <a:pPr algn="ctr"/>
-            <a:endParaRPr lang="en-US" sz="2200" b="1" dirty="0" smtClean="0">
-              <a:solidFill>
-                <a:srgbClr val="1F497D"/>
-              </a:solidFill>
-              <a:latin typeface="Arial"/>
-            </a:endParaRPr>
-          </a:p>
-          <a:p>
-            <a:pPr algn="ctr"/>
-            <a:endParaRPr lang="en-US" sz="2200" b="1" dirty="0">
-              <a:solidFill>
-                <a:srgbClr val="1F497D"/>
-              </a:solidFill>
-            </a:endParaRPr>
-          </a:p>
-          <a:p>
-            <a:pPr algn="ctr"/>
-            <a:endParaRPr lang="en-US" sz="2200" b="1" dirty="0">
-              <a:solidFill>
-                <a:srgbClr val="1F497D"/>
-              </a:solidFill>
-            </a:endParaRPr>
-          </a:p>
-          <a:p>
-            <a:pPr algn="ctr"/>
-            <a:r>
-              <a:rPr sz="2200" b="1" dirty="0" smtClean="0">
+            <a:pPr algn="ctr">
+              <a:lnSpc>
+                <a:spcPct val="150000"/>
+              </a:lnSpc>
+            </a:pPr>
+            <a:r>
+              <a:rPr sz="2400" b="1" dirty="0" smtClean="0">
                 <a:solidFill>
                   <a:srgbClr val="1F497D"/>
                 </a:solidFill>
                 <a:latin typeface="Arial"/>
               </a:rPr>
-              <a:t>Digital FIR combines a conventional secure database with a permissioned </a:t>
-            </a:r>
-            <a:r>
-              <a:rPr sz="2200" b="1" dirty="0" err="1" smtClean="0">
+              <a:t>Digital </a:t>
+            </a:r>
+            <a:r>
+              <a:rPr sz="2400" b="1" dirty="0" smtClean="0">
                 <a:solidFill>
                   <a:srgbClr val="1F497D"/>
                 </a:solidFill>
                 <a:latin typeface="Arial"/>
               </a:rPr>
+              <a:t>FIR combines a conventional secure database with a permissioned </a:t>
+            </a:r>
+            <a:r>
+              <a:rPr sz="2400" b="1" dirty="0" err="1" smtClean="0">
+                <a:solidFill>
+                  <a:srgbClr val="1F497D"/>
+                </a:solidFill>
+                <a:latin typeface="Arial"/>
+              </a:rPr>
               <a:t>Hyperledger</a:t>
             </a:r>
             <a:r>
-              <a:rPr sz="2200" b="1" dirty="0" smtClean="0">
+              <a:rPr sz="2400" b="1" dirty="0" smtClean="0">
                 <a:solidFill>
                   <a:srgbClr val="1F497D"/>
                 </a:solidFill>
@@ -22668,7 +24861,7 @@
               </a:rPr>
               <a:t> Fabric layer to improve integrity, traceability and auditability of FIR workflows.</a:t>
             </a:r>
-            <a:endParaRPr sz="2200" b="1" dirty="0">
+            <a:endParaRPr sz="2400" b="1" dirty="0">
               <a:solidFill>
                 <a:srgbClr val="1F497D"/>
               </a:solidFill>
@@ -22685,7 +24878,7 @@
         </p:nvSpPr>
         <p:spPr>
           <a:xfrm>
-            <a:off x="914400" y="3163732"/>
+            <a:off x="914400" y="3172968"/>
             <a:ext cx="6949440" cy="1143000"/>
           </a:xfrm>
           <a:prstGeom prst="roundRect">
@@ -22775,8 +24968,8 @@
         </p:nvSpPr>
         <p:spPr>
           <a:xfrm>
-            <a:off x="1023668" y="3189310"/>
-            <a:ext cx="6720840" cy="347472"/>
+            <a:off x="1023668" y="3235490"/>
+            <a:ext cx="6720840" cy="332399"/>
           </a:xfrm>
           <a:prstGeom prst="rect">
             <a:avLst/>
@@ -22791,7 +24984,7 @@
           <a:p>
             <a:pPr algn="l"/>
             <a:r>
-              <a:rPr sz="1600" b="1" dirty="0">
+              <a:rPr sz="1800" b="1" dirty="0">
                 <a:solidFill>
                   <a:srgbClr val="DAA520"/>
                 </a:solidFill>
@@ -22811,7 +25004,7 @@
         <p:spPr>
           <a:xfrm>
             <a:off x="1069848" y="3634038"/>
-            <a:ext cx="6720840" cy="455509"/>
+            <a:ext cx="6720840" cy="547842"/>
           </a:xfrm>
           <a:prstGeom prst="rect">
             <a:avLst/>
@@ -22826,7 +25019,7 @@
           <a:p>
             <a:pPr algn="l"/>
             <a:r>
-              <a:rPr sz="1300" b="0" dirty="0">
+              <a:rPr sz="1600" b="0" dirty="0">
                 <a:solidFill>
                   <a:srgbClr val="141414"/>
                 </a:solidFill>
@@ -22835,7 +25028,7 @@
               <a:t>Sensitive information stays off chain. Hashes, transactions, workflow </a:t>
             </a:r>
             <a:r>
-              <a:rPr sz="1300" b="0" dirty="0" smtClean="0">
+              <a:rPr sz="1600" b="0" dirty="0" smtClean="0">
                 <a:solidFill>
                   <a:srgbClr val="141414"/>
                 </a:solidFill>
@@ -22844,7 +25037,7 @@
               <a:t>events</a:t>
             </a:r>
             <a:r>
-              <a:rPr lang="en-US" sz="1300" b="0" dirty="0" smtClean="0">
+              <a:rPr lang="en-US" sz="1600" b="0" dirty="0" smtClean="0">
                 <a:solidFill>
                   <a:srgbClr val="141414"/>
                 </a:solidFill>
@@ -22853,7 +25046,7 @@
               <a:t> and</a:t>
             </a:r>
             <a:r>
-              <a:rPr sz="1300" b="0" dirty="0" smtClean="0">
+              <a:rPr sz="1600" b="0" dirty="0" smtClean="0">
                 <a:solidFill>
                   <a:srgbClr val="141414"/>
                 </a:solidFill>
@@ -22862,7 +25055,7 @@
               <a:t> </a:t>
             </a:r>
             <a:r>
-              <a:rPr sz="1300" b="0" dirty="0">
+              <a:rPr sz="1600" b="0" dirty="0">
                 <a:solidFill>
                   <a:srgbClr val="141414"/>
                 </a:solidFill>
@@ -22995,7 +25188,7 @@
           <a:lstStyle/>
           <a:p>
             <a:r>
-              <a:rPr sz="2600" b="1">
+              <a:rPr sz="2600" b="1" dirty="0">
                 <a:solidFill>
                   <a:srgbClr val="1F497D"/>
                 </a:solidFill>
@@ -23015,7 +25208,7 @@
         <p:spPr>
           <a:xfrm>
             <a:off x="640080" y="1508760"/>
-            <a:ext cx="3749039" cy="4206240"/>
+            <a:ext cx="3749039" cy="4210383"/>
           </a:xfrm>
           <a:prstGeom prst="rect">
             <a:avLst/>
@@ -23028,10 +25221,12 @@
           </a:bodyPr>
           <a:lstStyle/>
           <a:p>
-            <a:pPr>
+            <a:pPr marL="342900" indent="-342900">
               <a:spcAft>
                 <a:spcPts val="600"/>
               </a:spcAft>
+              <a:buFont typeface="Arial" panose="020B0604020202020204" pitchFamily="34" charset="0"/>
+              <a:buChar char="•"/>
               <a:defRPr sz="1600">
                 <a:solidFill>
                   <a:srgbClr val="141414"/>
@@ -23040,17 +25235,25 @@
               </a:defRPr>
             </a:pPr>
             <a:r>
-              <a:rPr>
-                <a:latin typeface="Arial"/>
-              </a:rPr>
-              <a:t>• Introduction and Background</a:t>
-            </a:r>
-          </a:p>
-          <a:p>
-            <a:pPr>
+              <a:rPr sz="2400" dirty="0" smtClean="0">
+                <a:latin typeface="Arial"/>
+              </a:rPr>
+              <a:t>Introduction </a:t>
+            </a:r>
+            <a:r>
+              <a:rPr sz="2400" dirty="0">
+                <a:latin typeface="Arial"/>
+              </a:rPr>
+              <a:t>and Background</a:t>
+            </a:r>
+          </a:p>
+          <a:p>
+            <a:pPr marL="342900" indent="-342900">
               <a:spcAft>
                 <a:spcPts val="600"/>
               </a:spcAft>
+              <a:buFont typeface="Arial" panose="020B0604020202020204" pitchFamily="34" charset="0"/>
+              <a:buChar char="•"/>
               <a:defRPr sz="1600">
                 <a:solidFill>
                   <a:srgbClr val="141414"/>
@@ -23059,17 +25262,19 @@
               </a:defRPr>
             </a:pPr>
             <a:r>
-              <a:rPr>
-                <a:latin typeface="Arial"/>
-              </a:rPr>
-              <a:t>• Existing Systems in Pakistan</a:t>
-            </a:r>
-          </a:p>
-          <a:p>
-            <a:pPr>
+              <a:rPr lang="en-US" sz="2400" dirty="0" smtClean="0">
+                <a:latin typeface="Arial"/>
+              </a:rPr>
+              <a:t>Literature Review</a:t>
+            </a:r>
+          </a:p>
+          <a:p>
+            <a:pPr marL="342900" indent="-342900">
               <a:spcAft>
                 <a:spcPts val="600"/>
               </a:spcAft>
+              <a:buFont typeface="Arial" panose="020B0604020202020204" pitchFamily="34" charset="0"/>
+              <a:buChar char="•"/>
               <a:defRPr sz="1600">
                 <a:solidFill>
                   <a:srgbClr val="141414"/>
@@ -23078,17 +25283,25 @@
               </a:defRPr>
             </a:pPr>
             <a:r>
-              <a:rPr>
-                <a:latin typeface="Arial"/>
-              </a:rPr>
-              <a:t>• Gap Analysis</a:t>
-            </a:r>
-          </a:p>
-          <a:p>
-            <a:pPr>
+              <a:rPr sz="2400" dirty="0" smtClean="0">
+                <a:latin typeface="Arial"/>
+              </a:rPr>
+              <a:t>Existing </a:t>
+            </a:r>
+            <a:r>
+              <a:rPr sz="2400" dirty="0">
+                <a:latin typeface="Arial"/>
+              </a:rPr>
+              <a:t>Systems in Pakistan</a:t>
+            </a:r>
+          </a:p>
+          <a:p>
+            <a:pPr marL="342900" indent="-342900">
               <a:spcAft>
                 <a:spcPts val="600"/>
               </a:spcAft>
+              <a:buFont typeface="Arial" panose="020B0604020202020204" pitchFamily="34" charset="0"/>
+              <a:buChar char="•"/>
               <a:defRPr sz="1600">
                 <a:solidFill>
                   <a:srgbClr val="141414"/>
@@ -23097,17 +25310,25 @@
               </a:defRPr>
             </a:pPr>
             <a:r>
-              <a:rPr>
-                <a:latin typeface="Arial"/>
-              </a:rPr>
-              <a:t>• Problem Statement</a:t>
-            </a:r>
-          </a:p>
-          <a:p>
-            <a:pPr>
+              <a:rPr sz="2400" dirty="0" smtClean="0">
+                <a:latin typeface="Arial"/>
+              </a:rPr>
+              <a:t>Gap </a:t>
+            </a:r>
+            <a:r>
+              <a:rPr sz="2400" dirty="0">
+                <a:latin typeface="Arial"/>
+              </a:rPr>
+              <a:t>Analysis</a:t>
+            </a:r>
+          </a:p>
+          <a:p>
+            <a:pPr marL="342900" indent="-342900">
               <a:spcAft>
                 <a:spcPts val="600"/>
               </a:spcAft>
+              <a:buFont typeface="Arial" panose="020B0604020202020204" pitchFamily="34" charset="0"/>
+              <a:buChar char="•"/>
               <a:defRPr sz="1600">
                 <a:solidFill>
                   <a:srgbClr val="141414"/>
@@ -23116,17 +25337,25 @@
               </a:defRPr>
             </a:pPr>
             <a:r>
-              <a:rPr>
-                <a:latin typeface="Arial"/>
-              </a:rPr>
-              <a:t>• Proposed Solution and Methodology</a:t>
-            </a:r>
-          </a:p>
-          <a:p>
-            <a:pPr>
+              <a:rPr sz="2400" dirty="0" smtClean="0">
+                <a:latin typeface="Arial"/>
+              </a:rPr>
+              <a:t>Problem </a:t>
+            </a:r>
+            <a:r>
+              <a:rPr sz="2400" dirty="0">
+                <a:latin typeface="Arial"/>
+              </a:rPr>
+              <a:t>Statement</a:t>
+            </a:r>
+          </a:p>
+          <a:p>
+            <a:pPr marL="342900" indent="-342900">
               <a:spcAft>
                 <a:spcPts val="600"/>
               </a:spcAft>
+              <a:buFont typeface="Arial" panose="020B0604020202020204" pitchFamily="34" charset="0"/>
+              <a:buChar char="•"/>
               <a:defRPr sz="1600">
                 <a:solidFill>
                   <a:srgbClr val="141414"/>
@@ -23135,10 +25364,43 @@
               </a:defRPr>
             </a:pPr>
             <a:r>
-              <a:rPr>
-                <a:latin typeface="Arial"/>
-              </a:rPr>
-              <a:t>• System Architecture</a:t>
+              <a:rPr sz="2400" dirty="0" smtClean="0">
+                <a:latin typeface="Arial"/>
+              </a:rPr>
+              <a:t>Proposed </a:t>
+            </a:r>
+            <a:r>
+              <a:rPr sz="2400" dirty="0">
+                <a:latin typeface="Arial"/>
+              </a:rPr>
+              <a:t>Solution and Methodology</a:t>
+            </a:r>
+          </a:p>
+          <a:p>
+            <a:pPr marL="342900" indent="-342900">
+              <a:spcAft>
+                <a:spcPts val="600"/>
+              </a:spcAft>
+              <a:buFont typeface="Arial" panose="020B0604020202020204" pitchFamily="34" charset="0"/>
+              <a:buChar char="•"/>
+              <a:defRPr sz="1600">
+                <a:solidFill>
+                  <a:srgbClr val="141414"/>
+                </a:solidFill>
+                <a:latin typeface="Arial"/>
+              </a:defRPr>
+            </a:pPr>
+            <a:r>
+              <a:rPr sz="2400" dirty="0" smtClean="0">
+                <a:latin typeface="Arial"/>
+              </a:rPr>
+              <a:t>System </a:t>
+            </a:r>
+            <a:r>
+              <a:rPr sz="2400" dirty="0">
+                <a:latin typeface="Arial"/>
+              </a:rPr>
+              <a:t>Architecture</a:t>
             </a:r>
           </a:p>
         </p:txBody>
@@ -23152,7 +25414,7 @@
         <p:spPr>
           <a:xfrm>
             <a:off x="4434840" y="1508760"/>
-            <a:ext cx="3749039" cy="4206240"/>
+            <a:ext cx="3749039" cy="4133439"/>
           </a:xfrm>
           <a:prstGeom prst="rect">
             <a:avLst/>
@@ -23165,10 +25427,12 @@
           </a:bodyPr>
           <a:lstStyle/>
           <a:p>
-            <a:pPr>
+            <a:pPr marL="342900" indent="-342900">
               <a:spcAft>
                 <a:spcPts val="600"/>
               </a:spcAft>
+              <a:buFont typeface="Arial" panose="020B0604020202020204" pitchFamily="34" charset="0"/>
+              <a:buChar char="•"/>
               <a:defRPr sz="1600">
                 <a:solidFill>
                   <a:srgbClr val="141414"/>
@@ -23177,17 +25441,25 @@
               </a:defRPr>
             </a:pPr>
             <a:r>
-              <a:rPr>
-                <a:latin typeface="Arial"/>
-              </a:rPr>
-              <a:t>• Project Scope</a:t>
-            </a:r>
-          </a:p>
-          <a:p>
-            <a:pPr>
+              <a:rPr sz="2400" dirty="0" smtClean="0">
+                <a:latin typeface="Arial"/>
+              </a:rPr>
+              <a:t>Project </a:t>
+            </a:r>
+            <a:r>
+              <a:rPr sz="2400" dirty="0">
+                <a:latin typeface="Arial"/>
+              </a:rPr>
+              <a:t>Scope</a:t>
+            </a:r>
+          </a:p>
+          <a:p>
+            <a:pPr marL="342900" indent="-342900">
               <a:spcAft>
                 <a:spcPts val="600"/>
               </a:spcAft>
+              <a:buFont typeface="Arial" panose="020B0604020202020204" pitchFamily="34" charset="0"/>
+              <a:buChar char="•"/>
               <a:defRPr sz="1600">
                 <a:solidFill>
                   <a:srgbClr val="141414"/>
@@ -23196,17 +25468,25 @@
               </a:defRPr>
             </a:pPr>
             <a:r>
-              <a:rPr>
-                <a:latin typeface="Arial"/>
-              </a:rPr>
-              <a:t>• Work Breakdown Structure</a:t>
-            </a:r>
-          </a:p>
-          <a:p>
-            <a:pPr>
+              <a:rPr sz="2400" dirty="0" smtClean="0">
+                <a:latin typeface="Arial"/>
+              </a:rPr>
+              <a:t>Work </a:t>
+            </a:r>
+            <a:r>
+              <a:rPr sz="2400" dirty="0">
+                <a:latin typeface="Arial"/>
+              </a:rPr>
+              <a:t>Breakdown Structure</a:t>
+            </a:r>
+          </a:p>
+          <a:p>
+            <a:pPr marL="342900" indent="-342900">
               <a:spcAft>
                 <a:spcPts val="600"/>
               </a:spcAft>
+              <a:buFont typeface="Arial" panose="020B0604020202020204" pitchFamily="34" charset="0"/>
+              <a:buChar char="•"/>
               <a:defRPr sz="1600">
                 <a:solidFill>
                   <a:srgbClr val="141414"/>
@@ -23215,17 +25495,25 @@
               </a:defRPr>
             </a:pPr>
             <a:r>
-              <a:rPr>
-                <a:latin typeface="Arial"/>
-              </a:rPr>
-              <a:t>• Roles and Responsibilities</a:t>
-            </a:r>
-          </a:p>
-          <a:p>
-            <a:pPr>
+              <a:rPr sz="2400" dirty="0" smtClean="0">
+                <a:latin typeface="Arial"/>
+              </a:rPr>
+              <a:t>Roles </a:t>
+            </a:r>
+            <a:r>
+              <a:rPr sz="2400" dirty="0">
+                <a:latin typeface="Arial"/>
+              </a:rPr>
+              <a:t>and Responsibilities</a:t>
+            </a:r>
+          </a:p>
+          <a:p>
+            <a:pPr marL="342900" indent="-342900">
               <a:spcAft>
                 <a:spcPts val="600"/>
               </a:spcAft>
+              <a:buFont typeface="Arial" panose="020B0604020202020204" pitchFamily="34" charset="0"/>
+              <a:buChar char="•"/>
               <a:defRPr sz="1600">
                 <a:solidFill>
                   <a:srgbClr val="141414"/>
@@ -23234,17 +25522,25 @@
               </a:defRPr>
             </a:pPr>
             <a:r>
-              <a:rPr>
-                <a:latin typeface="Arial"/>
-              </a:rPr>
-              <a:t>• Constraints and Limitations</a:t>
-            </a:r>
-          </a:p>
-          <a:p>
-            <a:pPr>
+              <a:rPr sz="2400" dirty="0" smtClean="0">
+                <a:latin typeface="Arial"/>
+              </a:rPr>
+              <a:t>Constraints </a:t>
+            </a:r>
+            <a:r>
+              <a:rPr sz="2400" dirty="0">
+                <a:latin typeface="Arial"/>
+              </a:rPr>
+              <a:t>and Limitations</a:t>
+            </a:r>
+          </a:p>
+          <a:p>
+            <a:pPr marL="342900" indent="-342900">
               <a:spcAft>
                 <a:spcPts val="600"/>
               </a:spcAft>
+              <a:buFont typeface="Arial" panose="020B0604020202020204" pitchFamily="34" charset="0"/>
+              <a:buChar char="•"/>
               <a:defRPr sz="1600">
                 <a:solidFill>
                   <a:srgbClr val="141414"/>
@@ -23253,17 +25549,25 @@
               </a:defRPr>
             </a:pPr>
             <a:r>
-              <a:rPr>
-                <a:latin typeface="Arial"/>
-              </a:rPr>
-              <a:t>• Expected Benefits and Success Criteria</a:t>
-            </a:r>
-          </a:p>
-          <a:p>
-            <a:pPr>
+              <a:rPr sz="2400" dirty="0" smtClean="0">
+                <a:latin typeface="Arial"/>
+              </a:rPr>
+              <a:t>Expected </a:t>
+            </a:r>
+            <a:r>
+              <a:rPr sz="2400" dirty="0">
+                <a:latin typeface="Arial"/>
+              </a:rPr>
+              <a:t>Benefits and Success Criteria</a:t>
+            </a:r>
+          </a:p>
+          <a:p>
+            <a:pPr marL="342900" indent="-342900">
               <a:spcAft>
                 <a:spcPts val="600"/>
               </a:spcAft>
+              <a:buFont typeface="Arial" panose="020B0604020202020204" pitchFamily="34" charset="0"/>
+              <a:buChar char="•"/>
               <a:defRPr sz="1600">
                 <a:solidFill>
                   <a:srgbClr val="141414"/>
@@ -23272,10 +25576,16 @@
               </a:defRPr>
             </a:pPr>
             <a:r>
-              <a:rPr>
-                <a:latin typeface="Arial"/>
-              </a:rPr>
-              <a:t>• Conclusion and Q&amp;A</a:t>
+              <a:rPr sz="2400" dirty="0" smtClean="0">
+                <a:latin typeface="Arial"/>
+              </a:rPr>
+              <a:t>Conclusion </a:t>
+            </a:r>
+            <a:r>
+              <a:rPr sz="2400" dirty="0">
+                <a:latin typeface="Arial"/>
+              </a:rPr>
+              <a:t>and Q&amp;A</a:t>
             </a:r>
           </a:p>
         </p:txBody>
@@ -23452,39 +25762,6 @@
       </p:sp>
       <p:sp>
         <p:nvSpPr>
-          <p:cNvPr id="110" name="Google Shape;110;p5"/>
-          <p:cNvSpPr txBox="1">
-            <a:spLocks noGrp="1"/>
-          </p:cNvSpPr>
-          <p:nvPr>
-            <p:ph type="body" idx="1"/>
-          </p:nvPr>
-        </p:nvSpPr>
-        <p:spPr>
-          <a:xfrm>
-            <a:off x="457200" y="1600200"/>
-            <a:ext cx="8229600" cy="4525963"/>
-          </a:xfrm>
-          <a:prstGeom prst="rect">
-            <a:avLst/>
-          </a:prstGeom>
-          <a:noFill/>
-          <a:ln>
-            <a:noFill/>
-          </a:ln>
-        </p:spPr>
-        <p:txBody>
-          <a:bodyPr spcFirstLastPara="1" wrap="square" lIns="91425" tIns="45700" rIns="91425" bIns="45700" anchor="t" anchorCtr="0">
-            <a:noAutofit/>
-          </a:bodyPr>
-          <a:lstStyle/>
-          <a:p>
-            <a:endParaRPr/>
-          </a:p>
-        </p:txBody>
-      </p:sp>
-      <p:sp>
-        <p:nvSpPr>
           <p:cNvPr id="111" name="Rounded Rectangle 110"/>
           <p:cNvSpPr/>
           <p:nvPr/>
@@ -23582,7 +25859,7 @@
         <p:spPr>
           <a:xfrm>
             <a:off x="749808" y="1618488"/>
-            <a:ext cx="3520439" cy="347472"/>
+            <a:ext cx="3520439" cy="332399"/>
           </a:xfrm>
           <a:prstGeom prst="rect">
             <a:avLst/>
@@ -23597,7 +25874,7 @@
           <a:p>
             <a:pPr algn="l"/>
             <a:r>
-              <a:rPr sz="1700" b="1">
+              <a:rPr sz="1800" b="1" dirty="0">
                 <a:solidFill>
                   <a:srgbClr val="1F497D"/>
                 </a:solidFill>
@@ -23617,7 +25894,7 @@
         <p:spPr>
           <a:xfrm>
             <a:off x="749808" y="2011680"/>
-            <a:ext cx="3520439" cy="917174"/>
+            <a:ext cx="3520439" cy="1040285"/>
           </a:xfrm>
           <a:prstGeom prst="rect">
             <a:avLst/>
@@ -23632,7 +25909,7 @@
           <a:p>
             <a:pPr algn="l"/>
             <a:r>
-              <a:rPr sz="1400" b="0" dirty="0">
+              <a:rPr sz="1600" b="0" dirty="0">
                 <a:solidFill>
                   <a:srgbClr val="141414"/>
                 </a:solidFill>
@@ -23641,7 +25918,7 @@
               <a:t>An FIR formally opens the criminal justice process. It records the reported offence, identifies the </a:t>
             </a:r>
             <a:r>
-              <a:rPr sz="1400" b="0" dirty="0" smtClean="0">
+              <a:rPr sz="1600" b="0" dirty="0" smtClean="0">
                 <a:solidFill>
                   <a:srgbClr val="141414"/>
                 </a:solidFill>
@@ -23650,7 +25927,7 @@
               <a:t>parties</a:t>
             </a:r>
             <a:r>
-              <a:rPr lang="en-US" sz="1400" b="0" dirty="0" smtClean="0">
+              <a:rPr lang="en-US" sz="1600" b="0" dirty="0" smtClean="0">
                 <a:solidFill>
                   <a:srgbClr val="141414"/>
                 </a:solidFill>
@@ -23659,7 +25936,7 @@
               <a:t> and</a:t>
             </a:r>
             <a:r>
-              <a:rPr sz="1400" b="0" dirty="0" smtClean="0">
+              <a:rPr sz="1600" b="0" dirty="0" smtClean="0">
                 <a:solidFill>
                   <a:srgbClr val="141414"/>
                 </a:solidFill>
@@ -23668,7 +25945,7 @@
               <a:t> </a:t>
             </a:r>
             <a:r>
-              <a:rPr sz="1400" b="0" dirty="0">
+              <a:rPr sz="1600" b="0" dirty="0">
                 <a:solidFill>
                   <a:srgbClr val="141414"/>
                 </a:solidFill>
@@ -23778,7 +26055,7 @@
         <p:spPr>
           <a:xfrm>
             <a:off x="4727448" y="1618488"/>
-            <a:ext cx="3520439" cy="347472"/>
+            <a:ext cx="3520439" cy="332399"/>
           </a:xfrm>
           <a:prstGeom prst="rect">
             <a:avLst/>
@@ -23793,7 +26070,7 @@
           <a:p>
             <a:pPr algn="l"/>
             <a:r>
-              <a:rPr sz="1700" b="1">
+              <a:rPr sz="1800" b="1" dirty="0">
                 <a:solidFill>
                   <a:srgbClr val="DAA520"/>
                 </a:solidFill>
@@ -23813,7 +26090,7 @@
         <p:spPr>
           <a:xfrm>
             <a:off x="4727448" y="2011680"/>
-            <a:ext cx="3520439" cy="701731"/>
+            <a:ext cx="3520439" cy="1040285"/>
           </a:xfrm>
           <a:prstGeom prst="rect">
             <a:avLst/>
@@ -23828,7 +26105,7 @@
           <a:p>
             <a:pPr algn="l"/>
             <a:r>
-              <a:rPr sz="1400" b="0" dirty="0">
+              <a:rPr sz="1600" b="0" dirty="0">
                 <a:solidFill>
                   <a:srgbClr val="141414"/>
                 </a:solidFill>
@@ -23837,7 +26114,7 @@
               <a:t>Punjab, </a:t>
             </a:r>
             <a:r>
-              <a:rPr sz="1400" b="0" dirty="0" smtClean="0">
+              <a:rPr sz="1600" b="0" dirty="0" smtClean="0">
                 <a:solidFill>
                   <a:srgbClr val="141414"/>
                 </a:solidFill>
@@ -23846,7 +26123,7 @@
               <a:t>Sindh</a:t>
             </a:r>
             <a:r>
-              <a:rPr lang="en-US" sz="1400" b="0" dirty="0" smtClean="0">
+              <a:rPr lang="en-US" sz="1600" b="0" dirty="0" smtClean="0">
                 <a:solidFill>
                   <a:srgbClr val="141414"/>
                 </a:solidFill>
@@ -23855,7 +26132,7 @@
               <a:t> and</a:t>
             </a:r>
             <a:r>
-              <a:rPr sz="1400" b="0" dirty="0" smtClean="0">
+              <a:rPr sz="1600" b="0" dirty="0" smtClean="0">
                 <a:solidFill>
                   <a:srgbClr val="141414"/>
                 </a:solidFill>
@@ -23864,7 +26141,7 @@
               <a:t> </a:t>
             </a:r>
             <a:r>
-              <a:rPr sz="1400" b="0" dirty="0">
+              <a:rPr sz="1600" b="0" dirty="0">
                 <a:solidFill>
                   <a:srgbClr val="141414"/>
                 </a:solidFill>
@@ -23974,7 +26251,7 @@
         <p:spPr>
           <a:xfrm>
             <a:off x="749808" y="3721608"/>
-            <a:ext cx="7498079" cy="347472"/>
+            <a:ext cx="7498079" cy="332399"/>
           </a:xfrm>
           <a:prstGeom prst="rect">
             <a:avLst/>
@@ -23989,7 +26266,7 @@
           <a:p>
             <a:pPr algn="l"/>
             <a:r>
-              <a:rPr sz="1700" b="1">
+              <a:rPr sz="1800" b="1" dirty="0">
                 <a:solidFill>
                   <a:srgbClr val="1F497D"/>
                 </a:solidFill>
@@ -24009,7 +26286,7 @@
         <p:spPr>
           <a:xfrm>
             <a:off x="749808" y="4114800"/>
-            <a:ext cx="7498079" cy="486287"/>
+            <a:ext cx="7498079" cy="547842"/>
           </a:xfrm>
           <a:prstGeom prst="rect">
             <a:avLst/>
@@ -24024,7 +26301,7 @@
           <a:p>
             <a:pPr algn="l"/>
             <a:r>
-              <a:rPr sz="1400" b="0" dirty="0">
+              <a:rPr sz="1600" b="0" dirty="0">
                 <a:solidFill>
                   <a:srgbClr val="141414"/>
                 </a:solidFill>
@@ -24033,7 +26310,7 @@
               <a:t>A permissioned </a:t>
             </a:r>
             <a:r>
-              <a:rPr sz="1400" b="0" dirty="0" err="1">
+              <a:rPr sz="1600" b="0" dirty="0" err="1">
                 <a:solidFill>
                   <a:srgbClr val="141414"/>
                 </a:solidFill>
@@ -24042,7 +26319,7 @@
               <a:t>Hyperledger</a:t>
             </a:r>
             <a:r>
-              <a:rPr sz="1400" b="0" dirty="0">
+              <a:rPr sz="1600" b="0" dirty="0">
                 <a:solidFill>
                   <a:srgbClr val="141414"/>
                 </a:solidFill>
@@ -24051,7 +26328,7 @@
               <a:t> Fabric layer for integrity, </a:t>
             </a:r>
             <a:r>
-              <a:rPr sz="1400" b="0" dirty="0" smtClean="0">
+              <a:rPr sz="1600" b="0" dirty="0" smtClean="0">
                 <a:solidFill>
                   <a:srgbClr val="141414"/>
                 </a:solidFill>
@@ -24060,7 +26337,7 @@
               <a:t>traceability</a:t>
             </a:r>
             <a:r>
-              <a:rPr lang="en-US" sz="1400" b="0" dirty="0" smtClean="0">
+              <a:rPr lang="en-US" sz="1600" b="0" dirty="0" smtClean="0">
                 <a:solidFill>
                   <a:srgbClr val="141414"/>
                 </a:solidFill>
@@ -24069,7 +26346,7 @@
               <a:t> and</a:t>
             </a:r>
             <a:r>
-              <a:rPr sz="1400" b="0" dirty="0" smtClean="0">
+              <a:rPr sz="1600" b="0" dirty="0" smtClean="0">
                 <a:solidFill>
                   <a:srgbClr val="141414"/>
                 </a:solidFill>
@@ -24078,7 +26355,7 @@
               <a:t> </a:t>
             </a:r>
             <a:r>
-              <a:rPr sz="1400" b="0" dirty="0">
+              <a:rPr sz="1600" b="0" dirty="0">
                 <a:solidFill>
                   <a:srgbClr val="141414"/>
                 </a:solidFill>
@@ -24166,6 +26443,11 @@
         </p:txBody>
       </p:sp>
     </p:spTree>
+    <p:extLst>
+      <p:ext uri="{BB962C8B-B14F-4D97-AF65-F5344CB8AC3E}">
+        <p14:creationId xmlns:p14="http://schemas.microsoft.com/office/powerpoint/2010/main" val="1337815342"/>
+      </p:ext>
+    </p:extLst>
   </p:cSld>
   <p:clrMapOvr>
     <a:masterClrMapping/>
@@ -24241,46 +26523,19 @@
           </a:p>
         </p:txBody>
       </p:sp>
-      <p:sp>
-        <p:nvSpPr>
-          <p:cNvPr id="122" name="Google Shape;122;p7"/>
-          <p:cNvSpPr txBox="1">
-            <a:spLocks noGrp="1"/>
-          </p:cNvSpPr>
-          <p:nvPr>
-            <p:ph type="body" idx="1"/>
-          </p:nvPr>
-        </p:nvSpPr>
-        <p:spPr>
-          <a:xfrm>
-            <a:off x="457200" y="1600200"/>
-            <a:ext cx="8229600" cy="4525963"/>
-          </a:xfrm>
-          <a:prstGeom prst="rect">
-            <a:avLst/>
-          </a:prstGeom>
-          <a:noFill/>
-          <a:ln>
-            <a:noFill/>
-          </a:ln>
-        </p:spPr>
-        <p:txBody>
-          <a:bodyPr spcFirstLastPara="1" wrap="square" lIns="91425" tIns="45700" rIns="91425" bIns="45700" anchor="t" anchorCtr="0">
-            <a:noAutofit/>
-          </a:bodyPr>
-          <a:lstStyle/>
-          <a:p>
-            <a:endParaRPr/>
-          </a:p>
-        </p:txBody>
-      </p:sp>
       <p:graphicFrame>
         <p:nvGraphicFramePr>
           <p:cNvPr id="123" name="Table 122"/>
           <p:cNvGraphicFramePr>
             <a:graphicFrameLocks noGrp="1"/>
           </p:cNvGraphicFramePr>
-          <p:nvPr/>
+          <p:nvPr>
+            <p:extLst>
+              <p:ext uri="{D42A27DB-BD31-4B8C-83A1-F6EECF244321}">
+                <p14:modId xmlns:p14="http://schemas.microsoft.com/office/powerpoint/2010/main" val="3833976616"/>
+              </p:ext>
+            </p:extLst>
+          </p:nvPr>
         </p:nvGraphicFramePr>
         <p:xfrm>
           <a:off x="411480" y="1417320"/>
@@ -24305,8 +26560,9 @@
                     <a:bodyPr/>
                     <a:lstStyle/>
                     <a:p>
+                      <a:pPr algn="ctr"/>
                       <a:r>
-                        <a:rPr sz="1200" b="1">
+                        <a:rPr sz="1600" b="1" dirty="0">
                           <a:solidFill>
                             <a:srgbClr val="FFFFFF"/>
                           </a:solidFill>
@@ -24327,8 +26583,9 @@
                     <a:bodyPr/>
                     <a:lstStyle/>
                     <a:p>
+                      <a:pPr algn="ctr"/>
                       <a:r>
-                        <a:rPr sz="1200" b="1">
+                        <a:rPr sz="1600" b="1" dirty="0">
                           <a:solidFill>
                             <a:srgbClr val="FFFFFF"/>
                           </a:solidFill>
@@ -24349,8 +26606,9 @@
                     <a:bodyPr/>
                     <a:lstStyle/>
                     <a:p>
+                      <a:pPr algn="ctr"/>
                       <a:r>
-                        <a:rPr sz="1200" b="1">
+                        <a:rPr sz="1600" b="1" dirty="0">
                           <a:solidFill>
                             <a:srgbClr val="FFFFFF"/>
                           </a:solidFill>
@@ -24371,8 +26629,9 @@
                     <a:bodyPr/>
                     <a:lstStyle/>
                     <a:p>
+                      <a:pPr algn="ctr"/>
                       <a:r>
-                        <a:rPr sz="1200" b="1">
+                        <a:rPr sz="1600" b="1" dirty="0">
                           <a:solidFill>
                             <a:srgbClr val="FFFFFF"/>
                           </a:solidFill>
@@ -24393,8 +26652,9 @@
                     <a:bodyPr/>
                     <a:lstStyle/>
                     <a:p>
+                      <a:pPr algn="ctr"/>
                       <a:r>
-                        <a:rPr sz="1200" b="1">
+                        <a:rPr sz="1600" b="1" dirty="0">
                           <a:solidFill>
                             <a:srgbClr val="FFFFFF"/>
                           </a:solidFill>
@@ -24419,7 +26679,7 @@
                     <a:p>
                       <a:pPr algn="l"/>
                       <a:r>
-                        <a:rPr sz="1050">
+                        <a:rPr sz="1200" dirty="0">
                           <a:solidFill>
                             <a:srgbClr val="141414"/>
                           </a:solidFill>
@@ -24442,7 +26702,7 @@
                     <a:p>
                       <a:pPr algn="ctr"/>
                       <a:r>
-                        <a:rPr sz="1050">
+                        <a:rPr sz="1200">
                           <a:solidFill>
                             <a:srgbClr val="141414"/>
                           </a:solidFill>
@@ -24465,7 +26725,7 @@
                     <a:p>
                       <a:pPr algn="ctr"/>
                       <a:r>
-                        <a:rPr sz="1050">
+                        <a:rPr sz="1200">
                           <a:solidFill>
                             <a:srgbClr val="141414"/>
                           </a:solidFill>
@@ -24488,7 +26748,7 @@
                     <a:p>
                       <a:pPr algn="ctr"/>
                       <a:r>
-                        <a:rPr sz="1050">
+                        <a:rPr sz="1200">
                           <a:solidFill>
                             <a:srgbClr val="141414"/>
                           </a:solidFill>
@@ -24511,7 +26771,7 @@
                     <a:p>
                       <a:pPr algn="ctr"/>
                       <a:r>
-                        <a:rPr sz="1050">
+                        <a:rPr sz="1200">
                           <a:solidFill>
                             <a:srgbClr val="141414"/>
                           </a:solidFill>
@@ -24536,7 +26796,7 @@
                     <a:p>
                       <a:pPr algn="l"/>
                       <a:r>
-                        <a:rPr sz="1050">
+                        <a:rPr sz="1200" dirty="0">
                           <a:solidFill>
                             <a:srgbClr val="141414"/>
                           </a:solidFill>
@@ -24559,7 +26819,7 @@
                     <a:p>
                       <a:pPr algn="ctr"/>
                       <a:r>
-                        <a:rPr sz="1050">
+                        <a:rPr sz="1200">
                           <a:solidFill>
                             <a:srgbClr val="141414"/>
                           </a:solidFill>
@@ -24582,7 +26842,7 @@
                     <a:p>
                       <a:pPr algn="ctr"/>
                       <a:r>
-                        <a:rPr sz="1050">
+                        <a:rPr sz="1200">
                           <a:solidFill>
                             <a:srgbClr val="141414"/>
                           </a:solidFill>
@@ -24605,7 +26865,7 @@
                     <a:p>
                       <a:pPr algn="ctr"/>
                       <a:r>
-                        <a:rPr sz="1050">
+                        <a:rPr sz="1200">
                           <a:solidFill>
                             <a:srgbClr val="141414"/>
                           </a:solidFill>
@@ -24628,7 +26888,7 @@
                     <a:p>
                       <a:pPr algn="ctr"/>
                       <a:r>
-                        <a:rPr sz="1050">
+                        <a:rPr sz="1200">
                           <a:solidFill>
                             <a:srgbClr val="141414"/>
                           </a:solidFill>
@@ -24653,7 +26913,7 @@
                     <a:p>
                       <a:pPr algn="l"/>
                       <a:r>
-                        <a:rPr sz="1050">
+                        <a:rPr sz="1200">
                           <a:solidFill>
                             <a:srgbClr val="141414"/>
                           </a:solidFill>
@@ -24676,7 +26936,7 @@
                     <a:p>
                       <a:pPr algn="ctr"/>
                       <a:r>
-                        <a:rPr sz="1050">
+                        <a:rPr sz="1200">
                           <a:solidFill>
                             <a:srgbClr val="141414"/>
                           </a:solidFill>
@@ -24699,7 +26959,7 @@
                     <a:p>
                       <a:pPr algn="ctr"/>
                       <a:r>
-                        <a:rPr sz="1050">
+                        <a:rPr sz="1200">
                           <a:solidFill>
                             <a:srgbClr val="141414"/>
                           </a:solidFill>
@@ -24722,7 +26982,7 @@
                     <a:p>
                       <a:pPr algn="ctr"/>
                       <a:r>
-                        <a:rPr sz="1050">
+                        <a:rPr sz="1200">
                           <a:solidFill>
                             <a:srgbClr val="141414"/>
                           </a:solidFill>
@@ -24745,7 +27005,7 @@
                     <a:p>
                       <a:pPr algn="ctr"/>
                       <a:r>
-                        <a:rPr sz="1050">
+                        <a:rPr sz="1200">
                           <a:solidFill>
                             <a:srgbClr val="141414"/>
                           </a:solidFill>
@@ -24770,7 +27030,7 @@
                     <a:p>
                       <a:pPr algn="l"/>
                       <a:r>
-                        <a:rPr sz="1050">
+                        <a:rPr sz="1200">
                           <a:solidFill>
                             <a:srgbClr val="141414"/>
                           </a:solidFill>
@@ -24793,7 +27053,7 @@
                     <a:p>
                       <a:pPr algn="ctr"/>
                       <a:r>
-                        <a:rPr sz="1050">
+                        <a:rPr sz="1200">
                           <a:solidFill>
                             <a:srgbClr val="141414"/>
                           </a:solidFill>
@@ -24816,7 +27076,7 @@
                     <a:p>
                       <a:pPr algn="ctr"/>
                       <a:r>
-                        <a:rPr sz="1050">
+                        <a:rPr sz="1200">
                           <a:solidFill>
                             <a:srgbClr val="141414"/>
                           </a:solidFill>
@@ -24839,7 +27099,7 @@
                     <a:p>
                       <a:pPr algn="ctr"/>
                       <a:r>
-                        <a:rPr sz="1050">
+                        <a:rPr sz="1200">
                           <a:solidFill>
                             <a:srgbClr val="141414"/>
                           </a:solidFill>
@@ -24862,7 +27122,7 @@
                     <a:p>
                       <a:pPr algn="ctr"/>
                       <a:r>
-                        <a:rPr sz="1050">
+                        <a:rPr sz="1200">
                           <a:solidFill>
                             <a:srgbClr val="141414"/>
                           </a:solidFill>
@@ -24887,7 +27147,7 @@
                     <a:p>
                       <a:pPr algn="l"/>
                       <a:r>
-                        <a:rPr sz="1050">
+                        <a:rPr sz="1200">
                           <a:solidFill>
                             <a:srgbClr val="141414"/>
                           </a:solidFill>
@@ -24910,7 +27170,7 @@
                     <a:p>
                       <a:pPr algn="ctr"/>
                       <a:r>
-                        <a:rPr sz="1050">
+                        <a:rPr sz="1200">
                           <a:solidFill>
                             <a:srgbClr val="141414"/>
                           </a:solidFill>
@@ -24933,7 +27193,7 @@
                     <a:p>
                       <a:pPr algn="ctr"/>
                       <a:r>
-                        <a:rPr sz="1050">
+                        <a:rPr sz="1200">
                           <a:solidFill>
                             <a:srgbClr val="141414"/>
                           </a:solidFill>
@@ -24956,7 +27216,7 @@
                     <a:p>
                       <a:pPr algn="ctr"/>
                       <a:r>
-                        <a:rPr sz="1050">
+                        <a:rPr sz="1200">
                           <a:solidFill>
                             <a:srgbClr val="141414"/>
                           </a:solidFill>
@@ -24979,7 +27239,7 @@
                     <a:p>
                       <a:pPr algn="ctr"/>
                       <a:r>
-                        <a:rPr sz="1050">
+                        <a:rPr sz="1200">
                           <a:solidFill>
                             <a:srgbClr val="141414"/>
                           </a:solidFill>
@@ -25004,7 +27264,7 @@
                     <a:p>
                       <a:pPr algn="l"/>
                       <a:r>
-                        <a:rPr sz="1050">
+                        <a:rPr sz="1200">
                           <a:solidFill>
                             <a:srgbClr val="141414"/>
                           </a:solidFill>
@@ -25027,7 +27287,7 @@
                     <a:p>
                       <a:pPr algn="ctr"/>
                       <a:r>
-                        <a:rPr sz="1050">
+                        <a:rPr sz="1200">
                           <a:solidFill>
                             <a:srgbClr val="141414"/>
                           </a:solidFill>
@@ -25050,7 +27310,7 @@
                     <a:p>
                       <a:pPr algn="ctr"/>
                       <a:r>
-                        <a:rPr sz="1050">
+                        <a:rPr sz="1200">
                           <a:solidFill>
                             <a:srgbClr val="141414"/>
                           </a:solidFill>
@@ -25073,7 +27333,7 @@
                     <a:p>
                       <a:pPr algn="ctr"/>
                       <a:r>
-                        <a:rPr sz="1050">
+                        <a:rPr sz="1200">
                           <a:solidFill>
                             <a:srgbClr val="141414"/>
                           </a:solidFill>
@@ -25096,7 +27356,7 @@
                     <a:p>
                       <a:pPr algn="ctr"/>
                       <a:r>
-                        <a:rPr sz="1050">
+                        <a:rPr sz="1200">
                           <a:solidFill>
                             <a:srgbClr val="141414"/>
                           </a:solidFill>
@@ -25121,7 +27381,7 @@
                     <a:p>
                       <a:pPr algn="l"/>
                       <a:r>
-                        <a:rPr sz="1050">
+                        <a:rPr sz="1200">
                           <a:solidFill>
                             <a:srgbClr val="141414"/>
                           </a:solidFill>
@@ -25144,7 +27404,7 @@
                     <a:p>
                       <a:pPr algn="ctr"/>
                       <a:r>
-                        <a:rPr sz="1050">
+                        <a:rPr sz="1200">
                           <a:solidFill>
                             <a:srgbClr val="141414"/>
                           </a:solidFill>
@@ -25167,7 +27427,7 @@
                     <a:p>
                       <a:pPr algn="ctr"/>
                       <a:r>
-                        <a:rPr sz="1050">
+                        <a:rPr sz="1200">
                           <a:solidFill>
                             <a:srgbClr val="141414"/>
                           </a:solidFill>
@@ -25190,7 +27450,7 @@
                     <a:p>
                       <a:pPr algn="ctr"/>
                       <a:r>
-                        <a:rPr sz="1050">
+                        <a:rPr sz="1200">
                           <a:solidFill>
                             <a:srgbClr val="141414"/>
                           </a:solidFill>
@@ -25213,7 +27473,7 @@
                     <a:p>
                       <a:pPr algn="ctr"/>
                       <a:r>
-                        <a:rPr sz="1050">
+                        <a:rPr sz="1200" dirty="0">
                           <a:solidFill>
                             <a:srgbClr val="141414"/>
                           </a:solidFill>
@@ -25253,6 +27513,265 @@
 </file>
 
 <file path=ppt/slides/slide8.xml><?xml version="1.0" encoding="utf-8"?>
+<p:sld xmlns:a="http://schemas.openxmlformats.org/drawingml/2006/main" xmlns:r="http://schemas.openxmlformats.org/officeDocument/2006/relationships" xmlns:p="http://schemas.openxmlformats.org/presentationml/2006/main">
+  <p:cSld>
+    <p:spTree>
+      <p:nvGrpSpPr>
+        <p:cNvPr id="1" name="Shape 144"/>
+        <p:cNvGrpSpPr/>
+        <p:nvPr/>
+      </p:nvGrpSpPr>
+      <p:grpSpPr>
+        <a:xfrm>
+          <a:off x="0" y="0"/>
+          <a:ext cx="0" cy="0"/>
+          <a:chOff x="0" y="0"/>
+          <a:chExt cx="0" cy="0"/>
+        </a:xfrm>
+      </p:grpSpPr>
+      <p:sp>
+        <p:nvSpPr>
+          <p:cNvPr id="149" name="TextBox 148"/>
+          <p:cNvSpPr txBox="1"/>
+          <p:nvPr/>
+        </p:nvSpPr>
+        <p:spPr>
+          <a:xfrm>
+            <a:off x="457200" y="254470"/>
+            <a:ext cx="8335818" cy="5488169"/>
+          </a:xfrm>
+          <a:prstGeom prst="rect">
+            <a:avLst/>
+          </a:prstGeom>
+          <a:noFill/>
+        </p:spPr>
+        <p:txBody>
+          <a:bodyPr wrap="square" lIns="45720" tIns="27432" rIns="45720" bIns="27432">
+            <a:spAutoFit/>
+          </a:bodyPr>
+          <a:lstStyle/>
+          <a:p>
+            <a:pPr marL="285750" indent="-285750">
+              <a:lnSpc>
+                <a:spcPct val="150000"/>
+              </a:lnSpc>
+              <a:spcAft>
+                <a:spcPts val="400"/>
+              </a:spcAft>
+              <a:buFont typeface="Wingdings" panose="05000000000000000000" pitchFamily="2" charset="2"/>
+              <a:buChar char="v"/>
+              <a:defRPr sz="1500">
+                <a:solidFill>
+                  <a:srgbClr val="141414"/>
+                </a:solidFill>
+                <a:latin typeface="Arial"/>
+              </a:defRPr>
+            </a:pPr>
+            <a:r>
+              <a:rPr lang="en-US" sz="1600" dirty="0"/>
+              <a:t>Digital police systems are already being used in Punjab, </a:t>
+            </a:r>
+            <a:r>
+              <a:rPr lang="en-US" sz="1600" dirty="0" smtClean="0"/>
+              <a:t>Sindh and </a:t>
+            </a:r>
+            <a:r>
+              <a:rPr lang="en-US" sz="1600" dirty="0"/>
+              <a:t>Khyber Pakhtunkhwa for complaints, FIR records, case </a:t>
+            </a:r>
+            <a:r>
+              <a:rPr lang="en-US" sz="1600" dirty="0" smtClean="0"/>
+              <a:t>tracking </a:t>
+            </a:r>
+            <a:r>
+              <a:rPr lang="en-US" sz="1600" dirty="0"/>
+              <a:t>and officer management.</a:t>
+            </a:r>
+          </a:p>
+          <a:p>
+            <a:pPr marL="285750" indent="-285750">
+              <a:lnSpc>
+                <a:spcPct val="150000"/>
+              </a:lnSpc>
+              <a:spcAft>
+                <a:spcPts val="400"/>
+              </a:spcAft>
+              <a:buFont typeface="Wingdings" panose="05000000000000000000" pitchFamily="2" charset="2"/>
+              <a:buChar char="v"/>
+              <a:defRPr sz="1500">
+                <a:solidFill>
+                  <a:srgbClr val="141414"/>
+                </a:solidFill>
+                <a:latin typeface="Arial"/>
+              </a:defRPr>
+            </a:pPr>
+            <a:r>
+              <a:rPr lang="en-US" sz="1600" dirty="0"/>
+              <a:t>These systems have improved the way police records are created, </a:t>
+            </a:r>
+            <a:r>
+              <a:rPr lang="en-US" sz="1600" dirty="0" smtClean="0"/>
+              <a:t>stored and </a:t>
+            </a:r>
+            <a:r>
+              <a:rPr lang="en-US" sz="1600" dirty="0"/>
+              <a:t>accessed.</a:t>
+            </a:r>
+          </a:p>
+          <a:p>
+            <a:pPr marL="285750" indent="-285750">
+              <a:lnSpc>
+                <a:spcPct val="150000"/>
+              </a:lnSpc>
+              <a:spcAft>
+                <a:spcPts val="400"/>
+              </a:spcAft>
+              <a:buFont typeface="Wingdings" panose="05000000000000000000" pitchFamily="2" charset="2"/>
+              <a:buChar char="v"/>
+              <a:defRPr sz="1500">
+                <a:solidFill>
+                  <a:srgbClr val="141414"/>
+                </a:solidFill>
+                <a:latin typeface="Arial"/>
+              </a:defRPr>
+            </a:pPr>
+            <a:r>
+              <a:rPr lang="en-US" sz="1600" dirty="0"/>
+              <a:t>However, most existing systems mainly depend on centralized databases and conventional audit logs.</a:t>
+            </a:r>
+          </a:p>
+          <a:p>
+            <a:pPr marL="285750" indent="-285750">
+              <a:lnSpc>
+                <a:spcPct val="150000"/>
+              </a:lnSpc>
+              <a:spcAft>
+                <a:spcPts val="400"/>
+              </a:spcAft>
+              <a:buFont typeface="Wingdings" panose="05000000000000000000" pitchFamily="2" charset="2"/>
+              <a:buChar char="v"/>
+              <a:defRPr sz="1500">
+                <a:solidFill>
+                  <a:srgbClr val="141414"/>
+                </a:solidFill>
+                <a:latin typeface="Arial"/>
+              </a:defRPr>
+            </a:pPr>
+            <a:r>
+              <a:rPr lang="en-US" sz="1600" dirty="0"/>
+              <a:t>Blockchain can provide a more reliable way to maintain a tamper-evident history of important FIR activities.</a:t>
+            </a:r>
+          </a:p>
+          <a:p>
+            <a:pPr marL="285750" indent="-285750">
+              <a:lnSpc>
+                <a:spcPct val="150000"/>
+              </a:lnSpc>
+              <a:spcAft>
+                <a:spcPts val="400"/>
+              </a:spcAft>
+              <a:buFont typeface="Wingdings" panose="05000000000000000000" pitchFamily="2" charset="2"/>
+              <a:buChar char="v"/>
+              <a:defRPr sz="1500">
+                <a:solidFill>
+                  <a:srgbClr val="141414"/>
+                </a:solidFill>
+                <a:latin typeface="Arial"/>
+              </a:defRPr>
+            </a:pPr>
+            <a:r>
+              <a:rPr lang="en-US" sz="1600" dirty="0"/>
+              <a:t>SHA-256 hashing can be used to check whether FIR documents or evidence have been changed.</a:t>
+            </a:r>
+          </a:p>
+          <a:p>
+            <a:pPr marL="285750" indent="-285750">
+              <a:lnSpc>
+                <a:spcPct val="150000"/>
+              </a:lnSpc>
+              <a:spcAft>
+                <a:spcPts val="400"/>
+              </a:spcAft>
+              <a:buFont typeface="Wingdings" panose="05000000000000000000" pitchFamily="2" charset="2"/>
+              <a:buChar char="v"/>
+              <a:defRPr sz="1500">
+                <a:solidFill>
+                  <a:srgbClr val="141414"/>
+                </a:solidFill>
+                <a:latin typeface="Arial"/>
+              </a:defRPr>
+            </a:pPr>
+            <a:r>
+              <a:rPr lang="en-US" sz="1600" dirty="0"/>
+              <a:t>A permissioned blockchain is more suitable for police data because access can be restricted to authorized organizations and officers.</a:t>
+            </a:r>
+          </a:p>
+          <a:p>
+            <a:pPr marL="285750" indent="-285750">
+              <a:lnSpc>
+                <a:spcPct val="150000"/>
+              </a:lnSpc>
+              <a:spcAft>
+                <a:spcPts val="400"/>
+              </a:spcAft>
+              <a:buFont typeface="Wingdings" panose="05000000000000000000" pitchFamily="2" charset="2"/>
+              <a:buChar char="v"/>
+              <a:defRPr sz="1500">
+                <a:solidFill>
+                  <a:srgbClr val="141414"/>
+                </a:solidFill>
+                <a:latin typeface="Arial"/>
+              </a:defRPr>
+            </a:pPr>
+            <a:r>
+              <a:rPr lang="en-US" sz="1600" dirty="0"/>
+              <a:t>Based on the reviewed systems, there is an opportunity to combine digital FIR management, blockchain, hashing, </a:t>
+            </a:r>
+            <a:r>
+              <a:rPr lang="en-US" sz="1600" dirty="0" smtClean="0"/>
+              <a:t>RBAC and </a:t>
+            </a:r>
+            <a:r>
+              <a:rPr lang="en-US" sz="1600" dirty="0"/>
+              <a:t>audit tracking in one system.</a:t>
+            </a:r>
+            <a:endParaRPr sz="1600" dirty="0"/>
+          </a:p>
+        </p:txBody>
+      </p:sp>
+    </p:spTree>
+    <p:extLst>
+      <p:ext uri="{BB962C8B-B14F-4D97-AF65-F5344CB8AC3E}">
+        <p14:creationId xmlns:p14="http://schemas.microsoft.com/office/powerpoint/2010/main" val="149852172"/>
+      </p:ext>
+    </p:extLst>
+  </p:cSld>
+  <p:clrMapOvr>
+    <a:masterClrMapping/>
+  </p:clrMapOvr>
+  <mc:AlternateContent xmlns:mc="http://schemas.openxmlformats.org/markup-compatibility/2006" xmlns:p15="http://schemas.microsoft.com/office/powerpoint/2012/main">
+    <mc:Choice Requires="p15">
+      <p:transition xmlns:p14="http://schemas.microsoft.com/office/powerpoint/2010/main" spd="slow" p14:dur="2000">
+        <p15:prstTrans prst="prestige"/>
+      </p:transition>
+    </mc:Choice>
+    <mc:Fallback xmlns="">
+      <p:transition spd="slow">
+        <p:fade/>
+      </p:transition>
+    </mc:Fallback>
+  </mc:AlternateContent>
+  <p:timing>
+    <p:tnLst>
+      <p:par>
+        <p:cTn id="1" dur="indefinite" restart="never" nodeType="tmRoot"/>
+      </p:par>
+    </p:tnLst>
+  </p:timing>
+</p:sld>
+</file>
+
+<file path=ppt/slides/slide9.xml><?xml version="1.0" encoding="utf-8"?>
 <p:sld xmlns:a="http://schemas.openxmlformats.org/drawingml/2006/main" xmlns:r="http://schemas.openxmlformats.org/officeDocument/2006/relationships" xmlns:p="http://schemas.openxmlformats.org/presentationml/2006/main">
   <p:cSld>
     <p:spTree>
@@ -25327,669 +27846,6 @@
       </p:transition>
     </mc:Fallback>
   </mc:AlternateContent>
-  <p:timing>
-    <p:tnLst>
-      <p:par>
-        <p:cTn id="1" dur="indefinite" restart="never" nodeType="tmRoot"/>
-      </p:par>
-    </p:tnLst>
-  </p:timing>
-</p:sld>
-</file>
-
-<file path=ppt/slides/slide9.xml><?xml version="1.0" encoding="utf-8"?>
-<p:sld xmlns:a="http://schemas.openxmlformats.org/drawingml/2006/main" xmlns:r="http://schemas.openxmlformats.org/officeDocument/2006/relationships" xmlns:p="http://schemas.openxmlformats.org/presentationml/2006/main">
-  <p:cSld>
-    <p:spTree>
-      <p:nvGrpSpPr>
-        <p:cNvPr id="1" name="Shape 132"/>
-        <p:cNvGrpSpPr/>
-        <p:nvPr/>
-      </p:nvGrpSpPr>
-      <p:grpSpPr>
-        <a:xfrm>
-          <a:off x="0" y="0"/>
-          <a:ext cx="0" cy="0"/>
-          <a:chOff x="0" y="0"/>
-          <a:chExt cx="0" cy="0"/>
-        </a:xfrm>
-      </p:grpSpPr>
-      <p:sp>
-        <p:nvSpPr>
-          <p:cNvPr id="133" name="Google Shape;133;g2039867fdc9_0_16"/>
-          <p:cNvSpPr txBox="1">
-            <a:spLocks noGrp="1"/>
-          </p:cNvSpPr>
-          <p:nvPr>
-            <p:ph type="title"/>
-          </p:nvPr>
-        </p:nvSpPr>
-        <p:spPr>
-          <a:xfrm>
-            <a:off x="457200" y="274638"/>
-            <a:ext cx="8229600" cy="1143000"/>
-          </a:xfrm>
-          <a:prstGeom prst="rect">
-            <a:avLst/>
-          </a:prstGeom>
-          <a:noFill/>
-          <a:ln>
-            <a:noFill/>
-          </a:ln>
-        </p:spPr>
-        <p:txBody>
-          <a:bodyPr spcFirstLastPara="1" wrap="square" lIns="45720" tIns="18288" rIns="45720" bIns="18288" anchor="ctr" anchorCtr="0">
-            <a:noAutofit/>
-          </a:bodyPr>
-          <a:lstStyle/>
-          <a:p>
-            <a:r>
-              <a:rPr sz="2600" b="1">
-                <a:solidFill>
-                  <a:srgbClr val="1F497D"/>
-                </a:solidFill>
-                <a:latin typeface="Arial"/>
-              </a:rPr>
-              <a:t>Research Gap and Novelty</a:t>
-            </a:r>
-          </a:p>
-        </p:txBody>
-      </p:sp>
-      <p:sp>
-        <p:nvSpPr>
-          <p:cNvPr id="135" name="Rounded Rectangle 134"/>
-          <p:cNvSpPr/>
-          <p:nvPr/>
-        </p:nvSpPr>
-        <p:spPr>
-          <a:xfrm>
-            <a:off x="594360" y="1417320"/>
-            <a:ext cx="3703320" cy="1920240"/>
-          </a:xfrm>
-          <a:prstGeom prst="roundRect">
-            <a:avLst/>
-          </a:prstGeom>
-          <a:solidFill>
-            <a:srgbClr val="FFFFFF"/>
-          </a:solidFill>
-          <a:ln w="12700">
-            <a:solidFill>
-              <a:srgbClr val="CDD4DC"/>
-            </a:solidFill>
-          </a:ln>
-        </p:spPr>
-        <p:style>
-          <a:lnRef idx="1">
-            <a:schemeClr val="accent1"/>
-          </a:lnRef>
-          <a:fillRef idx="3">
-            <a:schemeClr val="accent1"/>
-          </a:fillRef>
-          <a:effectRef idx="2">
-            <a:schemeClr val="accent1"/>
-          </a:effectRef>
-          <a:fontRef idx="minor">
-            <a:schemeClr val="lt1"/>
-          </a:fontRef>
-        </p:style>
-        <p:txBody>
-          <a:bodyPr wrap="square" rtlCol="0" anchor="ctr"/>
-          <a:lstStyle/>
-          <a:p>
-            <a:pPr algn="ctr"/>
-            <a:endParaRPr/>
-          </a:p>
-        </p:txBody>
-      </p:sp>
-      <p:sp>
-        <p:nvSpPr>
-          <p:cNvPr id="136" name="Rectangle 135"/>
-          <p:cNvSpPr/>
-          <p:nvPr/>
-        </p:nvSpPr>
-        <p:spPr>
-          <a:xfrm>
-            <a:off x="594360" y="1417320"/>
-            <a:ext cx="64008" cy="1920240"/>
-          </a:xfrm>
-          <a:prstGeom prst="rect">
-            <a:avLst/>
-          </a:prstGeom>
-          <a:solidFill>
-            <a:srgbClr val="1F497D"/>
-          </a:solidFill>
-          <a:ln>
-            <a:noFill/>
-          </a:ln>
-        </p:spPr>
-        <p:style>
-          <a:lnRef idx="1">
-            <a:schemeClr val="accent1"/>
-          </a:lnRef>
-          <a:fillRef idx="3">
-            <a:schemeClr val="accent1"/>
-          </a:fillRef>
-          <a:effectRef idx="2">
-            <a:schemeClr val="accent1"/>
-          </a:effectRef>
-          <a:fontRef idx="minor">
-            <a:schemeClr val="lt1"/>
-          </a:fontRef>
-        </p:style>
-        <p:txBody>
-          <a:bodyPr wrap="square" rtlCol="0" anchor="ctr"/>
-          <a:lstStyle/>
-          <a:p>
-            <a:pPr algn="ctr"/>
-            <a:endParaRPr/>
-          </a:p>
-        </p:txBody>
-      </p:sp>
-      <p:sp>
-        <p:nvSpPr>
-          <p:cNvPr id="137" name="TextBox 136"/>
-          <p:cNvSpPr txBox="1"/>
-          <p:nvPr/>
-        </p:nvSpPr>
-        <p:spPr>
-          <a:xfrm>
-            <a:off x="749808" y="1527048"/>
-            <a:ext cx="3474720" cy="347472"/>
-          </a:xfrm>
-          <a:prstGeom prst="rect">
-            <a:avLst/>
-          </a:prstGeom>
-          <a:noFill/>
-        </p:spPr>
-        <p:txBody>
-          <a:bodyPr wrap="square" lIns="36576" tIns="27432" rIns="36576" bIns="27432">
-            <a:spAutoFit/>
-          </a:bodyPr>
-          <a:lstStyle/>
-          <a:p>
-            <a:pPr algn="l"/>
-            <a:r>
-              <a:rPr sz="1600" b="1">
-                <a:solidFill>
-                  <a:srgbClr val="1F497D"/>
-                </a:solidFill>
-                <a:latin typeface="Arial"/>
-              </a:rPr>
-              <a:t>Existing capability</a:t>
-            </a:r>
-          </a:p>
-        </p:txBody>
-      </p:sp>
-      <p:sp>
-        <p:nvSpPr>
-          <p:cNvPr id="138" name="TextBox 137"/>
-          <p:cNvSpPr txBox="1"/>
-          <p:nvPr/>
-        </p:nvSpPr>
-        <p:spPr>
-          <a:xfrm>
-            <a:off x="749808" y="1920240"/>
-            <a:ext cx="3474720" cy="655564"/>
-          </a:xfrm>
-          <a:prstGeom prst="rect">
-            <a:avLst/>
-          </a:prstGeom>
-          <a:noFill/>
-        </p:spPr>
-        <p:txBody>
-          <a:bodyPr wrap="square" lIns="36576" tIns="27432" rIns="36576" bIns="27432">
-            <a:spAutoFit/>
-          </a:bodyPr>
-          <a:lstStyle/>
-          <a:p>
-            <a:pPr algn="l"/>
-            <a:r>
-              <a:rPr sz="1300" b="0" dirty="0">
-                <a:solidFill>
-                  <a:srgbClr val="141414"/>
-                </a:solidFill>
-                <a:latin typeface="Arial"/>
-              </a:rPr>
-              <a:t>Digital complaints, FIR records, tracking, </a:t>
-            </a:r>
-            <a:r>
-              <a:rPr sz="1300" b="0" dirty="0" smtClean="0">
-                <a:solidFill>
-                  <a:srgbClr val="141414"/>
-                </a:solidFill>
-                <a:latin typeface="Arial"/>
-              </a:rPr>
-              <a:t>assignment</a:t>
-            </a:r>
-            <a:r>
-              <a:rPr lang="en-US" sz="1300" b="0" dirty="0" smtClean="0">
-                <a:solidFill>
-                  <a:srgbClr val="141414"/>
-                </a:solidFill>
-                <a:latin typeface="Arial"/>
-              </a:rPr>
-              <a:t> and</a:t>
-            </a:r>
-            <a:r>
-              <a:rPr sz="1300" b="0" dirty="0" smtClean="0">
-                <a:solidFill>
-                  <a:srgbClr val="141414"/>
-                </a:solidFill>
-                <a:latin typeface="Arial"/>
-              </a:rPr>
-              <a:t> </a:t>
-            </a:r>
-            <a:r>
-              <a:rPr sz="1300" b="0" dirty="0">
-                <a:solidFill>
-                  <a:srgbClr val="141414"/>
-                </a:solidFill>
-                <a:latin typeface="Arial"/>
-              </a:rPr>
-              <a:t>supervisory monitoring already exist.</a:t>
-            </a:r>
-          </a:p>
-        </p:txBody>
-      </p:sp>
-      <p:sp>
-        <p:nvSpPr>
-          <p:cNvPr id="139" name="Rounded Rectangle 138"/>
-          <p:cNvSpPr/>
-          <p:nvPr/>
-        </p:nvSpPr>
-        <p:spPr>
-          <a:xfrm>
-            <a:off x="4572000" y="1417320"/>
-            <a:ext cx="3703320" cy="1920240"/>
-          </a:xfrm>
-          <a:prstGeom prst="roundRect">
-            <a:avLst/>
-          </a:prstGeom>
-          <a:solidFill>
-            <a:srgbClr val="FFFFFF"/>
-          </a:solidFill>
-          <a:ln w="12700">
-            <a:solidFill>
-              <a:srgbClr val="CDD4DC"/>
-            </a:solidFill>
-          </a:ln>
-        </p:spPr>
-        <p:style>
-          <a:lnRef idx="1">
-            <a:schemeClr val="accent1"/>
-          </a:lnRef>
-          <a:fillRef idx="3">
-            <a:schemeClr val="accent1"/>
-          </a:fillRef>
-          <a:effectRef idx="2">
-            <a:schemeClr val="accent1"/>
-          </a:effectRef>
-          <a:fontRef idx="minor">
-            <a:schemeClr val="lt1"/>
-          </a:fontRef>
-        </p:style>
-        <p:txBody>
-          <a:bodyPr wrap="square" rtlCol="0" anchor="ctr"/>
-          <a:lstStyle/>
-          <a:p>
-            <a:pPr algn="ctr"/>
-            <a:endParaRPr/>
-          </a:p>
-        </p:txBody>
-      </p:sp>
-      <p:sp>
-        <p:nvSpPr>
-          <p:cNvPr id="140" name="Rectangle 139"/>
-          <p:cNvSpPr/>
-          <p:nvPr/>
-        </p:nvSpPr>
-        <p:spPr>
-          <a:xfrm>
-            <a:off x="4572000" y="1417320"/>
-            <a:ext cx="64008" cy="1920240"/>
-          </a:xfrm>
-          <a:prstGeom prst="rect">
-            <a:avLst/>
-          </a:prstGeom>
-          <a:solidFill>
-            <a:srgbClr val="DAA520"/>
-          </a:solidFill>
-          <a:ln>
-            <a:noFill/>
-          </a:ln>
-        </p:spPr>
-        <p:style>
-          <a:lnRef idx="1">
-            <a:schemeClr val="accent1"/>
-          </a:lnRef>
-          <a:fillRef idx="3">
-            <a:schemeClr val="accent1"/>
-          </a:fillRef>
-          <a:effectRef idx="2">
-            <a:schemeClr val="accent1"/>
-          </a:effectRef>
-          <a:fontRef idx="minor">
-            <a:schemeClr val="lt1"/>
-          </a:fontRef>
-        </p:style>
-        <p:txBody>
-          <a:bodyPr wrap="square" rtlCol="0" anchor="ctr"/>
-          <a:lstStyle/>
-          <a:p>
-            <a:pPr algn="ctr"/>
-            <a:endParaRPr/>
-          </a:p>
-        </p:txBody>
-      </p:sp>
-      <p:sp>
-        <p:nvSpPr>
-          <p:cNvPr id="141" name="TextBox 140"/>
-          <p:cNvSpPr txBox="1"/>
-          <p:nvPr/>
-        </p:nvSpPr>
-        <p:spPr>
-          <a:xfrm>
-            <a:off x="4727448" y="1527048"/>
-            <a:ext cx="3474720" cy="347472"/>
-          </a:xfrm>
-          <a:prstGeom prst="rect">
-            <a:avLst/>
-          </a:prstGeom>
-          <a:noFill/>
-        </p:spPr>
-        <p:txBody>
-          <a:bodyPr wrap="square" lIns="36576" tIns="27432" rIns="36576" bIns="27432">
-            <a:spAutoFit/>
-          </a:bodyPr>
-          <a:lstStyle/>
-          <a:p>
-            <a:pPr algn="l"/>
-            <a:r>
-              <a:rPr sz="1600" b="1">
-                <a:solidFill>
-                  <a:srgbClr val="DAA520"/>
-                </a:solidFill>
-                <a:latin typeface="Arial"/>
-              </a:rPr>
-              <a:t>Identified gap</a:t>
-            </a:r>
-          </a:p>
-        </p:txBody>
-      </p:sp>
-      <p:sp>
-        <p:nvSpPr>
-          <p:cNvPr id="142" name="TextBox 141"/>
-          <p:cNvSpPr txBox="1"/>
-          <p:nvPr/>
-        </p:nvSpPr>
-        <p:spPr>
-          <a:xfrm>
-            <a:off x="4727448" y="1920240"/>
-            <a:ext cx="3474720" cy="1325880"/>
-          </a:xfrm>
-          <a:prstGeom prst="rect">
-            <a:avLst/>
-          </a:prstGeom>
-          <a:noFill/>
-        </p:spPr>
-        <p:txBody>
-          <a:bodyPr wrap="square" lIns="36576" tIns="27432" rIns="36576" bIns="27432">
-            <a:spAutoFit/>
-          </a:bodyPr>
-          <a:lstStyle/>
-          <a:p>
-            <a:pPr algn="l"/>
-            <a:r>
-              <a:rPr sz="1300" b="0">
-                <a:solidFill>
-                  <a:srgbClr val="141414"/>
-                </a:solidFill>
-                <a:latin typeface="Arial"/>
-              </a:rPr>
-              <a:t>Publicly documented systems do not identify permissioned blockchain integrity as a core feature.</a:t>
-            </a:r>
-          </a:p>
-        </p:txBody>
-      </p:sp>
-      <p:sp>
-        <p:nvSpPr>
-          <p:cNvPr id="143" name="Rounded Rectangle 142"/>
-          <p:cNvSpPr/>
-          <p:nvPr/>
-        </p:nvSpPr>
-        <p:spPr>
-          <a:xfrm>
-            <a:off x="594360" y="3566160"/>
-            <a:ext cx="7680960" cy="1965960"/>
-          </a:xfrm>
-          <a:prstGeom prst="roundRect">
-            <a:avLst/>
-          </a:prstGeom>
-          <a:solidFill>
-            <a:srgbClr val="FFFFFF"/>
-          </a:solidFill>
-          <a:ln w="12700">
-            <a:solidFill>
-              <a:srgbClr val="CDD4DC"/>
-            </a:solidFill>
-          </a:ln>
-        </p:spPr>
-        <p:style>
-          <a:lnRef idx="1">
-            <a:schemeClr val="accent1"/>
-          </a:lnRef>
-          <a:fillRef idx="3">
-            <a:schemeClr val="accent1"/>
-          </a:fillRef>
-          <a:effectRef idx="2">
-            <a:schemeClr val="accent1"/>
-          </a:effectRef>
-          <a:fontRef idx="minor">
-            <a:schemeClr val="lt1"/>
-          </a:fontRef>
-        </p:style>
-        <p:txBody>
-          <a:bodyPr wrap="square" rtlCol="0" anchor="ctr"/>
-          <a:lstStyle/>
-          <a:p>
-            <a:pPr algn="ctr"/>
-            <a:endParaRPr/>
-          </a:p>
-        </p:txBody>
-      </p:sp>
-      <p:sp>
-        <p:nvSpPr>
-          <p:cNvPr id="144" name="Rectangle 143"/>
-          <p:cNvSpPr/>
-          <p:nvPr/>
-        </p:nvSpPr>
-        <p:spPr>
-          <a:xfrm>
-            <a:off x="594360" y="3566160"/>
-            <a:ext cx="64008" cy="1965960"/>
-          </a:xfrm>
-          <a:prstGeom prst="rect">
-            <a:avLst/>
-          </a:prstGeom>
-          <a:solidFill>
-            <a:srgbClr val="1F497D"/>
-          </a:solidFill>
-          <a:ln>
-            <a:noFill/>
-          </a:ln>
-        </p:spPr>
-        <p:style>
-          <a:lnRef idx="1">
-            <a:schemeClr val="accent1"/>
-          </a:lnRef>
-          <a:fillRef idx="3">
-            <a:schemeClr val="accent1"/>
-          </a:fillRef>
-          <a:effectRef idx="2">
-            <a:schemeClr val="accent1"/>
-          </a:effectRef>
-          <a:fontRef idx="minor">
-            <a:schemeClr val="lt1"/>
-          </a:fontRef>
-        </p:style>
-        <p:txBody>
-          <a:bodyPr wrap="square" rtlCol="0" anchor="ctr"/>
-          <a:lstStyle/>
-          <a:p>
-            <a:pPr algn="ctr"/>
-            <a:endParaRPr/>
-          </a:p>
-        </p:txBody>
-      </p:sp>
-      <p:sp>
-        <p:nvSpPr>
-          <p:cNvPr id="145" name="TextBox 144"/>
-          <p:cNvSpPr txBox="1"/>
-          <p:nvPr/>
-        </p:nvSpPr>
-        <p:spPr>
-          <a:xfrm>
-            <a:off x="749808" y="3675887"/>
-            <a:ext cx="7452360" cy="347472"/>
-          </a:xfrm>
-          <a:prstGeom prst="rect">
-            <a:avLst/>
-          </a:prstGeom>
-          <a:noFill/>
-        </p:spPr>
-        <p:txBody>
-          <a:bodyPr wrap="square" lIns="36576" tIns="27432" rIns="36576" bIns="27432">
-            <a:spAutoFit/>
-          </a:bodyPr>
-          <a:lstStyle/>
-          <a:p>
-            <a:pPr algn="l"/>
-            <a:r>
-              <a:rPr sz="1600" b="1">
-                <a:solidFill>
-                  <a:srgbClr val="1F497D"/>
-                </a:solidFill>
-                <a:latin typeface="Arial"/>
-              </a:rPr>
-              <a:t>Project novelty</a:t>
-            </a:r>
-          </a:p>
-        </p:txBody>
-      </p:sp>
-      <p:sp>
-        <p:nvSpPr>
-          <p:cNvPr id="146" name="TextBox 145"/>
-          <p:cNvSpPr txBox="1"/>
-          <p:nvPr/>
-        </p:nvSpPr>
-        <p:spPr>
-          <a:xfrm>
-            <a:off x="749808" y="4069080"/>
-            <a:ext cx="7452360" cy="1371600"/>
-          </a:xfrm>
-          <a:prstGeom prst="rect">
-            <a:avLst/>
-          </a:prstGeom>
-          <a:noFill/>
-        </p:spPr>
-        <p:txBody>
-          <a:bodyPr wrap="square" lIns="36576" tIns="27432" rIns="36576" bIns="27432">
-            <a:spAutoFit/>
-          </a:bodyPr>
-          <a:lstStyle/>
-          <a:p>
-            <a:pPr algn="l"/>
-            <a:r>
-              <a:rPr sz="1300" b="0">
-                <a:solidFill>
-                  <a:srgbClr val="141414"/>
-                </a:solidFill>
-                <a:latin typeface="Arial"/>
-              </a:rPr>
-              <a:t>Integration of FIR workflow + permissioned blockchain + SHA 256 integrity checks + role based authorization + auditable evidence metadata.</a:t>
-            </a:r>
-          </a:p>
-        </p:txBody>
-      </p:sp>
-      <p:sp>
-        <p:nvSpPr>
-          <p:cNvPr id="147" name="TextBox 146"/>
-          <p:cNvSpPr txBox="1"/>
-          <p:nvPr/>
-        </p:nvSpPr>
-        <p:spPr>
-          <a:xfrm>
-            <a:off x="350982" y="5641847"/>
-            <a:ext cx="8100291" cy="270843"/>
-          </a:xfrm>
-          <a:prstGeom prst="rect">
-            <a:avLst/>
-          </a:prstGeom>
-          <a:noFill/>
-        </p:spPr>
-        <p:txBody>
-          <a:bodyPr wrap="square" lIns="36576" tIns="27432" rIns="36576" bIns="27432">
-            <a:spAutoFit/>
-          </a:bodyPr>
-          <a:lstStyle/>
-          <a:p>
-            <a:pPr algn="ctr"/>
-            <a:r>
-              <a:rPr sz="1400" b="1" dirty="0">
-                <a:solidFill>
-                  <a:srgbClr val="1F497D"/>
-                </a:solidFill>
-                <a:latin typeface="Arial"/>
-              </a:rPr>
-              <a:t>Research focus: strengthen integrity verification, </a:t>
-            </a:r>
-            <a:r>
-              <a:rPr sz="1400" b="1" dirty="0" smtClean="0">
-                <a:solidFill>
-                  <a:srgbClr val="1F497D"/>
-                </a:solidFill>
-                <a:latin typeface="Arial"/>
-              </a:rPr>
-              <a:t>traceability</a:t>
-            </a:r>
-            <a:r>
-              <a:rPr lang="en-US" sz="1400" b="1" dirty="0" smtClean="0">
-                <a:solidFill>
-                  <a:srgbClr val="1F497D"/>
-                </a:solidFill>
-                <a:latin typeface="Arial"/>
-              </a:rPr>
-              <a:t> and</a:t>
-            </a:r>
-            <a:r>
-              <a:rPr sz="1400" b="1" dirty="0" smtClean="0">
-                <a:solidFill>
-                  <a:srgbClr val="1F497D"/>
-                </a:solidFill>
-                <a:latin typeface="Arial"/>
-              </a:rPr>
-              <a:t> </a:t>
-            </a:r>
-            <a:r>
-              <a:rPr sz="1400" b="1" dirty="0">
-                <a:solidFill>
-                  <a:srgbClr val="1F497D"/>
-                </a:solidFill>
-                <a:latin typeface="Arial"/>
-              </a:rPr>
-              <a:t>tamper evident auditing.</a:t>
-            </a:r>
-          </a:p>
-        </p:txBody>
-      </p:sp>
-    </p:spTree>
-  </p:cSld>
-  <p:clrMapOvr>
-    <a:masterClrMapping/>
-  </p:clrMapOvr>
-  <p:transition spd="slow">
-    <p:randomBar dir="vert"/>
-  </p:transition>
   <p:timing>
     <p:tnLst>
       <p:par>

--- a/Final_Digital_FIR_Final_FYP_Presentation.pptx
+++ b/Final_Digital_FIR_Final_FYP_Presentation.pptx
@@ -280,7 +280,7 @@
       </p15:sldGuideLst>
     </p:ext>
     <p:ext uri="http://customooxmlschemas.google.com/">
-      <go:slidesCustomData xmlns="" xmlns:mc="http://schemas.openxmlformats.org/markup-compatibility/2006" xmlns:mv="urn:schemas-microsoft-com:mac:vml" xmlns:c="http://schemas.openxmlformats.org/drawingml/2006/chart" xmlns:dgm="http://schemas.openxmlformats.org/drawingml/2006/diagram" xmlns:o="urn:schemas-microsoft-com:office:office" xmlns:v="urn:schemas-microsoft-com:vml" xmlns:pvml="urn:schemas-microsoft-com:office:powerpoint" xmlns:com="http://schemas.openxmlformats.org/drawingml/2006/compatibility" xmlns:p14="http://schemas.microsoft.com/office/powerpoint/2010/main" xmlns:p15="http://schemas.microsoft.com/office/powerpoint/2012/main" xmlns:ahyp="http://schemas.microsoft.com/office/drawing/2018/hyperlinkcolor" xmlns:go="http://customooxmlschemas.google.com/" r:id="rId27" roundtripDataSignature="AMtx7mgqso+muD7qxSKyk66oXGt+27nMBQ=="/>
+      <go:slidesCustomData xmlns:go="http://customooxmlschemas.google.com/" xmlns:ahyp="http://schemas.microsoft.com/office/drawing/2018/hyperlinkcolor" xmlns:p15="http://schemas.microsoft.com/office/powerpoint/2012/main" xmlns:p14="http://schemas.microsoft.com/office/powerpoint/2010/main" xmlns:com="http://schemas.openxmlformats.org/drawingml/2006/compatibility" xmlns:pvml="urn:schemas-microsoft-com:office:powerpoint" xmlns:v="urn:schemas-microsoft-com:vml" xmlns:o="urn:schemas-microsoft-com:office:office" xmlns:dgm="http://schemas.openxmlformats.org/drawingml/2006/diagram" xmlns:c="http://schemas.openxmlformats.org/drawingml/2006/chart" xmlns:mv="urn:schemas-microsoft-com:mac:vml" xmlns:mc="http://schemas.openxmlformats.org/markup-compatibility/2006" xmlns="" r:id="rId27" roundtripDataSignature="AMtx7mgqso+muD7qxSKyk66oXGt+27nMBQ=="/>
     </p:ext>
   </p:extLst>
 </p:presentation>
@@ -16569,18 +16569,9 @@
                 </a:solidFill>
                 <a:latin typeface="Arial"/>
               </a:rPr>
-              <a:t>A Blockchain Based Secure First Information Report Management </a:t>
+              <a:t>A Blockchain Based Secure First Information Report Management System</a:t>
             </a:r>
-            <a:r>
-              <a:rPr sz="1800" dirty="0" smtClean="0">
-                <a:solidFill>
-                  <a:srgbClr val="141414"/>
-                </a:solidFill>
-                <a:latin typeface="Arial"/>
-              </a:rPr>
-              <a:t>System</a:t>
-            </a:r>
-            <a:endParaRPr lang="en-US" sz="1800" dirty="0" smtClean="0">
+            <a:endParaRPr lang="en-US" sz="1800" dirty="0">
               <a:solidFill>
                 <a:srgbClr val="141414"/>
               </a:solidFill>
@@ -16589,7 +16580,7 @@
           </a:p>
           <a:p>
             <a:pPr algn="ctr"/>
-            <a:endParaRPr lang="en-US" sz="1800" b="0" dirty="0" smtClean="0">
+            <a:endParaRPr lang="en-US" sz="1800" b="0" dirty="0">
               <a:solidFill>
                 <a:srgbClr val="141414"/>
               </a:solidFill>
@@ -16705,13 +16696,6 @@
       </p:transition>
     </mc:Fallback>
   </mc:AlternateContent>
-  <p:timing>
-    <p:tnLst>
-      <p:par>
-        <p:cTn id="1" dur="indefinite" restart="never" nodeType="tmRoot"/>
-      </p:par>
-    </p:tnLst>
-  </p:timing>
 </p:sld>
 </file>
 
@@ -16928,19 +16912,10 @@
                 </a:solidFill>
                 <a:latin typeface="Arial"/>
               </a:rPr>
-              <a:t>Digital complaints, FIR records, tracking, </a:t>
+              <a:t>Digital complaints, FIR records, tracking, assignment</a:t>
             </a:r>
             <a:r>
-              <a:rPr sz="1600" b="0" dirty="0" smtClean="0">
-                <a:solidFill>
-                  <a:srgbClr val="141414"/>
-                </a:solidFill>
-                <a:latin typeface="Arial"/>
-              </a:rPr>
-              <a:t>assignment</a:t>
-            </a:r>
-            <a:r>
-              <a:rPr lang="en-US" sz="1600" b="0" dirty="0" smtClean="0">
+              <a:rPr lang="en-US" sz="1600" b="0" dirty="0">
                 <a:solidFill>
                   <a:srgbClr val="141414"/>
                 </a:solidFill>
@@ -16949,22 +16924,13 @@
               <a:t> and</a:t>
             </a:r>
             <a:r>
-              <a:rPr sz="1600" b="0" dirty="0" smtClean="0">
+              <a:rPr sz="1600" b="0" dirty="0">
                 <a:solidFill>
                   <a:srgbClr val="141414"/>
                 </a:solidFill>
                 <a:latin typeface="Arial"/>
               </a:rPr>
-              <a:t> </a:t>
-            </a:r>
-            <a:r>
-              <a:rPr sz="1600" b="0" dirty="0">
-                <a:solidFill>
-                  <a:srgbClr val="141414"/>
-                </a:solidFill>
-                <a:latin typeface="Arial"/>
-              </a:rPr>
-              <a:t>supervisory monitoring already exist.</a:t>
+              <a:t> supervisory monitoring already exist.</a:t>
             </a:r>
           </a:p>
         </p:txBody>
@@ -17323,19 +17289,10 @@
                 </a:solidFill>
                 <a:latin typeface="Arial"/>
               </a:rPr>
-              <a:t>Research focus: strengthen integrity verification, </a:t>
+              <a:t>Research focus: strengthen integrity verification, traceability</a:t>
             </a:r>
             <a:r>
-              <a:rPr sz="1400" b="1" dirty="0" smtClean="0">
-                <a:solidFill>
-                  <a:srgbClr val="1F497D"/>
-                </a:solidFill>
-                <a:latin typeface="Arial"/>
-              </a:rPr>
-              <a:t>traceability</a:t>
-            </a:r>
-            <a:r>
-              <a:rPr lang="en-US" sz="1400" b="1" dirty="0" smtClean="0">
+              <a:rPr lang="en-US" sz="1400" b="1" dirty="0">
                 <a:solidFill>
                   <a:srgbClr val="1F497D"/>
                 </a:solidFill>
@@ -17344,22 +17301,13 @@
               <a:t> and</a:t>
             </a:r>
             <a:r>
-              <a:rPr sz="1400" b="1" dirty="0" smtClean="0">
+              <a:rPr sz="1400" b="1" dirty="0">
                 <a:solidFill>
                   <a:srgbClr val="1F497D"/>
                 </a:solidFill>
                 <a:latin typeface="Arial"/>
               </a:rPr>
-              <a:t> </a:t>
-            </a:r>
-            <a:r>
-              <a:rPr sz="1400" b="1" dirty="0">
-                <a:solidFill>
-                  <a:srgbClr val="1F497D"/>
-                </a:solidFill>
-                <a:latin typeface="Arial"/>
-              </a:rPr>
-              <a:t>tamper evident auditing.</a:t>
+              <a:t> tamper evident auditing.</a:t>
             </a:r>
           </a:p>
         </p:txBody>
@@ -17372,13 +17320,6 @@
   <p:transition spd="slow">
     <p:randomBar dir="vert"/>
   </p:transition>
-  <p:timing>
-    <p:tnLst>
-      <p:par>
-        <p:cTn id="1" dur="indefinite" restart="never" nodeType="tmRoot"/>
-      </p:par>
-    </p:tnLst>
-  </p:timing>
 </p:sld>
 </file>
 
@@ -17457,13 +17398,6 @@
       </p:transition>
     </mc:Fallback>
   </mc:AlternateContent>
-  <p:timing>
-    <p:tnLst>
-      <p:par>
-        <p:cTn id="1" dur="indefinite" restart="never" nodeType="tmRoot"/>
-      </p:par>
-    </p:tnLst>
-  </p:timing>
 </p:sld>
 </file>
 
@@ -17559,19 +17493,10 @@
                 </a:solidFill>
                 <a:latin typeface="Arial"/>
               </a:rPr>
-              <a:t>Centralized police information systems rely on trusted administrators and application level audit logs. The project needs a way to verify who changed a record, when it </a:t>
+              <a:t>Centralized police information systems rely on trusted administrators and application level audit logs. The project needs a way to verify who changed a record, when it changed</a:t>
             </a:r>
             <a:r>
-              <a:rPr sz="1800" b="0" dirty="0" smtClean="0">
-                <a:solidFill>
-                  <a:srgbClr val="141414"/>
-                </a:solidFill>
-                <a:latin typeface="Arial"/>
-              </a:rPr>
-              <a:t>changed</a:t>
-            </a:r>
-            <a:r>
-              <a:rPr lang="en-US" sz="1800" b="0" dirty="0" smtClean="0">
+              <a:rPr lang="en-US" sz="1800" b="0" dirty="0">
                 <a:solidFill>
                   <a:srgbClr val="141414"/>
                 </a:solidFill>
@@ -17580,22 +17505,13 @@
               <a:t> and</a:t>
             </a:r>
             <a:r>
-              <a:rPr sz="1800" b="0" dirty="0" smtClean="0">
+              <a:rPr sz="1800" b="0" dirty="0">
                 <a:solidFill>
                   <a:srgbClr val="141414"/>
                 </a:solidFill>
                 <a:latin typeface="Arial"/>
               </a:rPr>
-              <a:t> </a:t>
-            </a:r>
-            <a:r>
-              <a:rPr sz="1800" b="0" dirty="0">
-                <a:solidFill>
-                  <a:srgbClr val="141414"/>
-                </a:solidFill>
-                <a:latin typeface="Arial"/>
-              </a:rPr>
-              <a:t>whether related documents were altered.</a:t>
+              <a:t> whether related documents were altered.</a:t>
             </a:r>
           </a:p>
         </p:txBody>
@@ -17671,16 +17587,10 @@
               </a:defRPr>
             </a:pPr>
             <a:r>
-              <a:rPr sz="1600" dirty="0" smtClean="0">
+              <a:rPr sz="1600" dirty="0">
                 <a:latin typeface="Arial"/>
               </a:rPr>
-              <a:t>Create </a:t>
-            </a:r>
-            <a:r>
-              <a:rPr sz="1600" dirty="0">
-                <a:latin typeface="Arial"/>
-              </a:rPr>
-              <a:t>a role based digital FIR interface</a:t>
+              <a:t>Create a role based digital FIR interface</a:t>
             </a:r>
           </a:p>
           <a:p>
@@ -17698,16 +17608,10 @@
               </a:defRPr>
             </a:pPr>
             <a:r>
-              <a:rPr sz="1600" dirty="0" smtClean="0">
+              <a:rPr sz="1600" dirty="0">
                 <a:latin typeface="Arial"/>
               </a:rPr>
-              <a:t>Secure </a:t>
-            </a:r>
-            <a:r>
-              <a:rPr sz="1600" dirty="0">
-                <a:latin typeface="Arial"/>
-              </a:rPr>
-              <a:t>authentication and backend authorization</a:t>
+              <a:t>Secure authentication and backend authorization</a:t>
             </a:r>
           </a:p>
           <a:p>
@@ -17725,7 +17629,7 @@
               </a:defRPr>
             </a:pPr>
             <a:r>
-              <a:rPr sz="1600" dirty="0" smtClean="0">
+              <a:rPr sz="1600" dirty="0">
                 <a:latin typeface="Arial"/>
               </a:rPr>
               <a:t>Integrate </a:t>
@@ -17767,16 +17671,10 @@
               </a:defRPr>
             </a:pPr>
             <a:r>
-              <a:rPr sz="1600" dirty="0" smtClean="0">
+              <a:rPr sz="1600" dirty="0">
                 <a:latin typeface="Arial"/>
               </a:rPr>
-              <a:t>Use </a:t>
-            </a:r>
-            <a:r>
-              <a:rPr sz="1600" dirty="0">
-                <a:latin typeface="Arial"/>
-              </a:rPr>
-              <a:t>SHA 256 for record and document integrity</a:t>
+              <a:t>Use SHA 256 for record and document integrity</a:t>
             </a:r>
           </a:p>
           <a:p>
@@ -17794,16 +17692,10 @@
               </a:defRPr>
             </a:pPr>
             <a:r>
-              <a:rPr sz="1600" dirty="0" smtClean="0">
+              <a:rPr sz="1600" dirty="0">
                 <a:latin typeface="Arial"/>
               </a:rPr>
-              <a:t>Track </a:t>
-            </a:r>
-            <a:r>
-              <a:rPr sz="1600" dirty="0">
-                <a:latin typeface="Arial"/>
-              </a:rPr>
-              <a:t>FIRs from registration to closure</a:t>
+              <a:t>Track FIRs from registration to closure</a:t>
             </a:r>
           </a:p>
         </p:txBody>
@@ -17844,16 +17736,10 @@
               </a:defRPr>
             </a:pPr>
             <a:r>
-              <a:rPr sz="1600" dirty="0" smtClean="0">
+              <a:rPr sz="1600" dirty="0">
                 <a:latin typeface="Arial"/>
               </a:rPr>
-              <a:t>Maintain </a:t>
-            </a:r>
-            <a:r>
-              <a:rPr sz="1600" dirty="0">
-                <a:latin typeface="Arial"/>
-              </a:rPr>
-              <a:t>a chronological audit history</a:t>
+              <a:t>Maintain a chronological audit history</a:t>
             </a:r>
           </a:p>
           <a:p>
@@ -17871,16 +17757,10 @@
               </a:defRPr>
             </a:pPr>
             <a:r>
-              <a:rPr sz="1600" dirty="0" smtClean="0">
+              <a:rPr sz="1600" dirty="0">
                 <a:latin typeface="Arial"/>
               </a:rPr>
-              <a:t>Register </a:t>
-            </a:r>
-            <a:r>
-              <a:rPr sz="1600" dirty="0">
-                <a:latin typeface="Arial"/>
-              </a:rPr>
-              <a:t>evidence metadata and hashes</a:t>
+              <a:t>Register evidence metadata and hashes</a:t>
             </a:r>
           </a:p>
           <a:p>
@@ -17898,16 +17778,10 @@
               </a:defRPr>
             </a:pPr>
             <a:r>
-              <a:rPr sz="1600" dirty="0" smtClean="0">
+              <a:rPr sz="1600" dirty="0">
                 <a:latin typeface="Arial"/>
               </a:rPr>
-              <a:t>Provide </a:t>
-            </a:r>
-            <a:r>
-              <a:rPr sz="1600" dirty="0">
-                <a:latin typeface="Arial"/>
-              </a:rPr>
-              <a:t>dashboards and reports</a:t>
+              <a:t>Provide dashboards and reports</a:t>
             </a:r>
           </a:p>
           <a:p>
@@ -17925,16 +17799,10 @@
               </a:defRPr>
             </a:pPr>
             <a:r>
-              <a:rPr sz="1600" dirty="0" smtClean="0">
+              <a:rPr sz="1600" dirty="0">
                 <a:latin typeface="Arial"/>
               </a:rPr>
-              <a:t>Notify </a:t>
-            </a:r>
-            <a:r>
-              <a:rPr sz="1600" dirty="0">
-                <a:latin typeface="Arial"/>
-              </a:rPr>
-              <a:t>users about important workflow events</a:t>
+              <a:t>Notify users about important workflow events</a:t>
             </a:r>
           </a:p>
           <a:p>
@@ -17952,16 +17820,10 @@
               </a:defRPr>
             </a:pPr>
             <a:r>
-              <a:rPr sz="1600" dirty="0" smtClean="0">
+              <a:rPr sz="1600" dirty="0">
                 <a:latin typeface="Arial"/>
               </a:rPr>
-              <a:t>Protect </a:t>
-            </a:r>
-            <a:r>
-              <a:rPr sz="1600" dirty="0">
-                <a:latin typeface="Arial"/>
-              </a:rPr>
-              <a:t>confidential information with controlled access</a:t>
+              <a:t>Protect confidential information with controlled access</a:t>
             </a:r>
           </a:p>
         </p:txBody>
@@ -17983,13 +17845,6 @@
       </p:transition>
     </mc:Fallback>
   </mc:AlternateContent>
-  <p:timing>
-    <p:tnLst>
-      <p:par>
-        <p:cTn id="1" dur="indefinite" restart="never" nodeType="tmRoot"/>
-      </p:par>
-    </p:tnLst>
-  </p:timing>
 </p:sld>
 </file>
 
@@ -18068,13 +17923,6 @@
       </p:transition>
     </mc:Fallback>
   </mc:AlternateContent>
-  <p:timing>
-    <p:tnLst>
-      <p:par>
-        <p:cTn id="1" dur="indefinite" restart="never" nodeType="tmRoot"/>
-      </p:par>
-    </p:tnLst>
-  </p:timing>
 </p:sld>
 </file>
 
@@ -18291,28 +18139,12 @@
               <a:buChar char="•"/>
             </a:pPr>
             <a:r>
-              <a:rPr sz="1600" b="0" dirty="0" smtClean="0">
+              <a:rPr sz="1600" b="0" dirty="0">
                 <a:solidFill>
                   <a:srgbClr val="141414"/>
                 </a:solidFill>
               </a:rPr>
-              <a:t>Complainant </a:t>
-            </a:r>
-            <a:r>
-              <a:rPr sz="1600" b="0" dirty="0">
-                <a:solidFill>
-                  <a:srgbClr val="141414"/>
-                </a:solidFill>
-              </a:rPr>
-              <a:t>personal </a:t>
-            </a:r>
-            <a:r>
-              <a:rPr sz="1600" b="0" dirty="0" smtClean="0">
-                <a:solidFill>
-                  <a:srgbClr val="141414"/>
-                </a:solidFill>
-              </a:rPr>
-              <a:t>data</a:t>
+              <a:t>Complainant personal data</a:t>
             </a:r>
             <a:endParaRPr lang="en-US" sz="1600" dirty="0"/>
           </a:p>
@@ -18325,28 +18157,12 @@
               <a:buChar char="•"/>
             </a:pPr>
             <a:r>
-              <a:rPr sz="1600" b="0" dirty="0" smtClean="0">
+              <a:rPr sz="1600" b="0" dirty="0">
                 <a:solidFill>
                   <a:srgbClr val="141414"/>
                 </a:solidFill>
               </a:rPr>
-              <a:t>CNIC </a:t>
-            </a:r>
-            <a:r>
-              <a:rPr sz="1600" b="0" dirty="0">
-                <a:solidFill>
-                  <a:srgbClr val="141414"/>
-                </a:solidFill>
-              </a:rPr>
-              <a:t>and contact </a:t>
-            </a:r>
-            <a:r>
-              <a:rPr sz="1600" b="0" dirty="0" smtClean="0">
-                <a:solidFill>
-                  <a:srgbClr val="141414"/>
-                </a:solidFill>
-              </a:rPr>
-              <a:t>information</a:t>
+              <a:t>CNIC and contact information</a:t>
             </a:r>
             <a:endParaRPr lang="en-US" sz="1600" dirty="0"/>
           </a:p>
@@ -18359,7 +18175,7 @@
               <a:buChar char="•"/>
             </a:pPr>
             <a:r>
-              <a:rPr sz="1600" b="0" dirty="0" smtClean="0">
+              <a:rPr sz="1600" b="0" dirty="0">
                 <a:solidFill>
                   <a:srgbClr val="141414"/>
                 </a:solidFill>
@@ -18377,28 +18193,12 @@
               <a:buChar char="•"/>
             </a:pPr>
             <a:r>
-              <a:rPr sz="1600" b="0" dirty="0" smtClean="0">
+              <a:rPr sz="1600" b="0" dirty="0">
                 <a:solidFill>
                   <a:srgbClr val="141414"/>
                 </a:solidFill>
               </a:rPr>
-              <a:t>Suspect </a:t>
-            </a:r>
-            <a:r>
-              <a:rPr sz="1600" b="0" dirty="0">
-                <a:solidFill>
-                  <a:srgbClr val="141414"/>
-                </a:solidFill>
-              </a:rPr>
-              <a:t>and witness </a:t>
-            </a:r>
-            <a:r>
-              <a:rPr sz="1600" b="0" dirty="0" smtClean="0">
-                <a:solidFill>
-                  <a:srgbClr val="141414"/>
-                </a:solidFill>
-              </a:rPr>
-              <a:t>information</a:t>
+              <a:t>Suspect and witness information</a:t>
             </a:r>
             <a:endParaRPr lang="en-US" sz="1600" dirty="0"/>
           </a:p>
@@ -18411,7 +18211,7 @@
               <a:buChar char="•"/>
             </a:pPr>
             <a:r>
-              <a:rPr sz="1600" b="0" dirty="0" smtClean="0">
+              <a:rPr sz="1600" b="0" dirty="0">
                 <a:solidFill>
                   <a:srgbClr val="141414"/>
                 </a:solidFill>
@@ -18429,31 +18229,15 @@
               <a:buChar char="•"/>
             </a:pPr>
             <a:r>
-              <a:rPr sz="1600" b="0" dirty="0" smtClean="0">
+              <a:rPr sz="1600" b="0" dirty="0">
                 <a:solidFill>
                   <a:srgbClr val="141414"/>
                 </a:solidFill>
               </a:rPr>
-              <a:t>Documents</a:t>
+              <a:t>Documents, images</a:t>
             </a:r>
             <a:r>
-              <a:rPr sz="1600" b="0" dirty="0">
-                <a:solidFill>
-                  <a:srgbClr val="141414"/>
-                </a:solidFill>
-              </a:rPr>
-              <a:t>, </a:t>
-            </a:r>
-            <a:r>
-              <a:rPr sz="1600" b="0" dirty="0" smtClean="0">
-                <a:solidFill>
-                  <a:srgbClr val="141414"/>
-                </a:solidFill>
-              </a:rPr>
-              <a:t>images</a:t>
-            </a:r>
-            <a:r>
-              <a:rPr lang="en-US" sz="1600" b="0" dirty="0" smtClean="0">
+              <a:rPr lang="en-US" sz="1600" b="0" dirty="0">
                 <a:solidFill>
                   <a:srgbClr val="141414"/>
                 </a:solidFill>
@@ -18461,32 +18245,16 @@
               <a:t> and</a:t>
             </a:r>
             <a:r>
-              <a:rPr sz="1600" b="0" dirty="0" smtClean="0">
+              <a:rPr sz="1600" b="0" dirty="0">
                 <a:solidFill>
                   <a:srgbClr val="141414"/>
                 </a:solidFill>
               </a:rPr>
-              <a:t> </a:t>
-            </a:r>
-            <a:r>
-              <a:rPr sz="1600" b="0" dirty="0">
-                <a:solidFill>
-                  <a:srgbClr val="141414"/>
-                </a:solidFill>
-              </a:rPr>
-              <a:t>PDFs</a:t>
-            </a:r>
-            <a:r>
-              <a:rPr sz="1600" dirty="0"/>
-              <a:t/>
+              <a:t> PDFs</a:t>
             </a:r>
             <a:br>
               <a:rPr sz="1600" dirty="0"/>
             </a:br>
-            <a:r>
-              <a:rPr sz="1600" dirty="0"/>
-              <a:t/>
-            </a:r>
             <a:br>
               <a:rPr sz="1600" dirty="0"/>
             </a:br>
@@ -18743,14 +18511,14 @@
               <a:buChar char="•"/>
             </a:pPr>
             <a:r>
-              <a:rPr sz="1600" b="0" dirty="0" smtClean="0">
+              <a:rPr sz="1600" b="0" dirty="0">
                 <a:solidFill>
                   <a:srgbClr val="141414"/>
                 </a:solidFill>
               </a:rPr>
               <a:t>FIR identifier</a:t>
             </a:r>
-            <a:endParaRPr lang="en-US" sz="1600" dirty="0" smtClean="0"/>
+            <a:endParaRPr lang="en-US" sz="1600" dirty="0"/>
           </a:p>
           <a:p>
             <a:pPr marL="285750" indent="-285750" algn="l">
@@ -18761,14 +18529,14 @@
               <a:buChar char="•"/>
             </a:pPr>
             <a:r>
-              <a:rPr sz="1600" b="0" dirty="0" smtClean="0">
+              <a:rPr sz="1600" b="0" dirty="0">
                 <a:solidFill>
                   <a:srgbClr val="141414"/>
                 </a:solidFill>
               </a:rPr>
               <a:t>Transaction identifier</a:t>
             </a:r>
-            <a:endParaRPr lang="en-US" sz="1600" dirty="0" smtClean="0"/>
+            <a:endParaRPr lang="en-US" sz="1600" dirty="0"/>
           </a:p>
           <a:p>
             <a:pPr marL="285750" indent="-285750" algn="l">
@@ -18779,30 +18547,14 @@
               <a:buChar char="•"/>
             </a:pPr>
             <a:r>
-              <a:rPr sz="1600" b="0" dirty="0" smtClean="0">
+              <a:rPr sz="1600" b="0" dirty="0">
                 <a:solidFill>
                   <a:srgbClr val="141414"/>
                 </a:solidFill>
               </a:rPr>
-              <a:t>Record </a:t>
+              <a:t>Record and document hashes</a:t>
             </a:r>
-            <a:r>
-              <a:rPr sz="1600" b="0" dirty="0">
-                <a:solidFill>
-                  <a:srgbClr val="141414"/>
-                </a:solidFill>
-              </a:rPr>
-              <a:t>and document </a:t>
-            </a:r>
-            <a:r>
-              <a:rPr sz="1600" b="0" dirty="0" smtClean="0">
-                <a:solidFill>
-                  <a:srgbClr val="141414"/>
-                </a:solidFill>
-              </a:rPr>
-              <a:t>hashes</a:t>
-            </a:r>
-            <a:endParaRPr lang="en-US" sz="1600" dirty="0" smtClean="0"/>
+            <a:endParaRPr lang="en-US" sz="1600" dirty="0"/>
           </a:p>
           <a:p>
             <a:pPr marL="285750" indent="-285750" algn="l">
@@ -18813,30 +18565,14 @@
               <a:buChar char="•"/>
             </a:pPr>
             <a:r>
-              <a:rPr sz="1600" b="0" dirty="0" smtClean="0">
+              <a:rPr sz="1600" b="0" dirty="0">
                 <a:solidFill>
                   <a:srgbClr val="141414"/>
                 </a:solidFill>
               </a:rPr>
-              <a:t>Operation </a:t>
+              <a:t>Operation type and status</a:t>
             </a:r>
-            <a:r>
-              <a:rPr sz="1600" b="0" dirty="0">
-                <a:solidFill>
-                  <a:srgbClr val="141414"/>
-                </a:solidFill>
-              </a:rPr>
-              <a:t>type and </a:t>
-            </a:r>
-            <a:r>
-              <a:rPr sz="1600" b="0" dirty="0" smtClean="0">
-                <a:solidFill>
-                  <a:srgbClr val="141414"/>
-                </a:solidFill>
-              </a:rPr>
-              <a:t>status</a:t>
-            </a:r>
-            <a:endParaRPr lang="en-US" sz="1600" dirty="0" smtClean="0"/>
+            <a:endParaRPr lang="en-US" sz="1600" dirty="0"/>
           </a:p>
           <a:p>
             <a:pPr marL="285750" indent="-285750" algn="l">
@@ -18847,30 +18583,14 @@
               <a:buChar char="•"/>
             </a:pPr>
             <a:r>
-              <a:rPr sz="1600" b="0" dirty="0" smtClean="0">
+              <a:rPr sz="1600" b="0" dirty="0">
                 <a:solidFill>
                   <a:srgbClr val="141414"/>
                 </a:solidFill>
               </a:rPr>
-              <a:t>Officer </a:t>
+              <a:t>Officer / organization identifier</a:t>
             </a:r>
-            <a:r>
-              <a:rPr sz="1600" b="0" dirty="0">
-                <a:solidFill>
-                  <a:srgbClr val="141414"/>
-                </a:solidFill>
-              </a:rPr>
-              <a:t>/ organization </a:t>
-            </a:r>
-            <a:r>
-              <a:rPr sz="1600" b="0" dirty="0" smtClean="0">
-                <a:solidFill>
-                  <a:srgbClr val="141414"/>
-                </a:solidFill>
-              </a:rPr>
-              <a:t>identifier</a:t>
-            </a:r>
-            <a:endParaRPr lang="en-US" sz="1600" dirty="0" smtClean="0"/>
+            <a:endParaRPr lang="en-US" sz="1600" dirty="0"/>
           </a:p>
           <a:p>
             <a:pPr marL="285750" indent="-285750" algn="l">
@@ -18881,30 +18601,14 @@
               <a:buChar char="•"/>
             </a:pPr>
             <a:r>
-              <a:rPr sz="1600" b="0" dirty="0" smtClean="0">
+              <a:rPr sz="1600" b="0" dirty="0">
                 <a:solidFill>
                   <a:srgbClr val="141414"/>
                 </a:solidFill>
               </a:rPr>
-              <a:t>Timestamp </a:t>
+              <a:t>Timestamp and workflow state</a:t>
             </a:r>
-            <a:r>
-              <a:rPr sz="1600" b="0" dirty="0">
-                <a:solidFill>
-                  <a:srgbClr val="141414"/>
-                </a:solidFill>
-              </a:rPr>
-              <a:t>and workflow </a:t>
-            </a:r>
-            <a:r>
-              <a:rPr sz="1600" b="0" dirty="0" smtClean="0">
-                <a:solidFill>
-                  <a:srgbClr val="141414"/>
-                </a:solidFill>
-              </a:rPr>
-              <a:t>state</a:t>
-            </a:r>
-            <a:endParaRPr lang="en-US" sz="1600" dirty="0" smtClean="0"/>
+            <a:endParaRPr lang="en-US" sz="1600" dirty="0"/>
           </a:p>
           <a:p>
             <a:pPr marL="285750" indent="-285750" algn="l">
@@ -18915,32 +18619,16 @@
               <a:buChar char="•"/>
             </a:pPr>
             <a:r>
-              <a:rPr sz="1600" b="0" dirty="0" smtClean="0">
+              <a:rPr sz="1600" b="0" dirty="0">
                 <a:solidFill>
                   <a:srgbClr val="141414"/>
                 </a:solidFill>
               </a:rPr>
-              <a:t>Approval </a:t>
-            </a:r>
-            <a:r>
-              <a:rPr sz="1600" b="0" dirty="0">
-                <a:solidFill>
-                  <a:srgbClr val="141414"/>
-                </a:solidFill>
-              </a:rPr>
-              <a:t>and audit events</a:t>
-            </a:r>
-            <a:r>
-              <a:rPr sz="1600" dirty="0"/>
-              <a:t/>
+              <a:t>Approval and audit events</a:t>
             </a:r>
             <a:br>
               <a:rPr sz="1600" dirty="0"/>
             </a:br>
-            <a:r>
-              <a:rPr sz="1600" dirty="0"/>
-              <a:t/>
-            </a:r>
             <a:br>
               <a:rPr sz="1600" dirty="0"/>
             </a:br>
@@ -19031,13 +18719,6 @@
       </p:transition>
     </mc:Fallback>
   </mc:AlternateContent>
-  <p:timing>
-    <p:tnLst>
-      <p:par>
-        <p:cTn id="1" dur="indefinite" restart="never" nodeType="tmRoot"/>
-      </p:par>
-    </p:tnLst>
-  </p:timing>
 </p:sld>
 </file>
 
@@ -20032,13 +19713,6 @@
       </p:transition>
     </mc:Fallback>
   </mc:AlternateContent>
-  <p:timing>
-    <p:tnLst>
-      <p:par>
-        <p:cTn id="1" dur="indefinite" restart="never" nodeType="tmRoot"/>
-      </p:par>
-    </p:tnLst>
-  </p:timing>
 </p:sld>
 </file>
 
@@ -20117,13 +19791,6 @@
       </p:transition>
     </mc:Fallback>
   </mc:AlternateContent>
-  <p:timing>
-    <p:tnLst>
-      <p:par>
-        <p:cTn id="1" dur="indefinite" restart="never" nodeType="tmRoot"/>
-      </p:par>
-    </p:tnLst>
-  </p:timing>
 </p:sld>
 </file>
 
@@ -20340,30 +20007,14 @@
               <a:buChar char="•"/>
             </a:pPr>
             <a:r>
-              <a:rPr sz="1550" b="0" dirty="0" smtClean="0">
+              <a:rPr sz="1550" b="0" dirty="0">
                 <a:solidFill>
                   <a:srgbClr val="141414"/>
                 </a:solidFill>
               </a:rPr>
-              <a:t>Authentication </a:t>
+              <a:t>Authentication and identity</a:t>
             </a:r>
-            <a:r>
-              <a:rPr sz="1550" b="0" dirty="0">
-                <a:solidFill>
-                  <a:srgbClr val="141414"/>
-                </a:solidFill>
-              </a:rPr>
-              <a:t>and </a:t>
-            </a:r>
-            <a:r>
-              <a:rPr sz="1550" b="0" dirty="0" smtClean="0">
-                <a:solidFill>
-                  <a:srgbClr val="141414"/>
-                </a:solidFill>
-              </a:rPr>
-              <a:t>identity</a:t>
-            </a:r>
-            <a:endParaRPr lang="en-US" sz="1550" dirty="0" smtClean="0"/>
+            <a:endParaRPr lang="en-US" sz="1550" dirty="0"/>
           </a:p>
           <a:p>
             <a:pPr marL="285750" indent="-285750" algn="l">
@@ -20374,30 +20025,14 @@
               <a:buChar char="•"/>
             </a:pPr>
             <a:r>
-              <a:rPr sz="1550" b="0" dirty="0" smtClean="0">
+              <a:rPr sz="1550" b="0" dirty="0">
                 <a:solidFill>
                   <a:srgbClr val="141414"/>
                 </a:solidFill>
               </a:rPr>
-              <a:t>Citizen </a:t>
+              <a:t>Citizen complaint portal</a:t>
             </a:r>
-            <a:r>
-              <a:rPr sz="1550" b="0" dirty="0">
-                <a:solidFill>
-                  <a:srgbClr val="141414"/>
-                </a:solidFill>
-              </a:rPr>
-              <a:t>complaint </a:t>
-            </a:r>
-            <a:r>
-              <a:rPr sz="1550" b="0" dirty="0" smtClean="0">
-                <a:solidFill>
-                  <a:srgbClr val="141414"/>
-                </a:solidFill>
-              </a:rPr>
-              <a:t>portal</a:t>
-            </a:r>
-            <a:endParaRPr lang="en-US" sz="1550" dirty="0" smtClean="0"/>
+            <a:endParaRPr lang="en-US" sz="1550" dirty="0"/>
           </a:p>
           <a:p>
             <a:pPr marL="285750" indent="-285750" algn="l">
@@ -20408,30 +20043,14 @@
               <a:buChar char="•"/>
             </a:pPr>
             <a:r>
-              <a:rPr sz="1550" b="0" dirty="0" smtClean="0">
+              <a:rPr sz="1550" b="0" dirty="0">
                 <a:solidFill>
                   <a:srgbClr val="141414"/>
                 </a:solidFill>
               </a:rPr>
-              <a:t>FIR </a:t>
+              <a:t>FIR creation, approval, tracking</a:t>
             </a:r>
-            <a:r>
-              <a:rPr sz="1550" b="0" dirty="0">
-                <a:solidFill>
-                  <a:srgbClr val="141414"/>
-                </a:solidFill>
-              </a:rPr>
-              <a:t>creation, approval, </a:t>
-            </a:r>
-            <a:r>
-              <a:rPr sz="1550" b="0" dirty="0" smtClean="0">
-                <a:solidFill>
-                  <a:srgbClr val="141414"/>
-                </a:solidFill>
-              </a:rPr>
-              <a:t>tracking</a:t>
-            </a:r>
-            <a:endParaRPr lang="en-US" sz="1550" dirty="0" smtClean="0"/>
+            <a:endParaRPr lang="en-US" sz="1550" dirty="0"/>
           </a:p>
           <a:p>
             <a:pPr marL="285750" indent="-285750" algn="l">
@@ -20442,30 +20061,14 @@
               <a:buChar char="•"/>
             </a:pPr>
             <a:r>
-              <a:rPr sz="1550" b="0" dirty="0" smtClean="0">
+              <a:rPr sz="1550" b="0" dirty="0">
                 <a:solidFill>
                   <a:srgbClr val="141414"/>
                 </a:solidFill>
               </a:rPr>
-              <a:t>Police </a:t>
+              <a:t>Police station management</a:t>
             </a:r>
-            <a:r>
-              <a:rPr sz="1550" b="0" dirty="0">
-                <a:solidFill>
-                  <a:srgbClr val="141414"/>
-                </a:solidFill>
-              </a:rPr>
-              <a:t>station </a:t>
-            </a:r>
-            <a:r>
-              <a:rPr sz="1550" b="0" dirty="0" smtClean="0">
-                <a:solidFill>
-                  <a:srgbClr val="141414"/>
-                </a:solidFill>
-              </a:rPr>
-              <a:t>management</a:t>
-            </a:r>
-            <a:endParaRPr lang="en-US" sz="1550" dirty="0" smtClean="0"/>
+            <a:endParaRPr lang="en-US" sz="1550" dirty="0"/>
           </a:p>
           <a:p>
             <a:pPr marL="285750" indent="-285750" algn="l">
@@ -20476,30 +20079,14 @@
               <a:buChar char="•"/>
             </a:pPr>
             <a:r>
-              <a:rPr sz="1550" b="0" dirty="0" smtClean="0">
+              <a:rPr sz="1550" b="0" dirty="0">
                 <a:solidFill>
                   <a:srgbClr val="141414"/>
                 </a:solidFill>
               </a:rPr>
-              <a:t>Investigation </a:t>
+              <a:t>Investigation and officer assignment</a:t>
             </a:r>
-            <a:r>
-              <a:rPr sz="1550" b="0" dirty="0">
-                <a:solidFill>
-                  <a:srgbClr val="141414"/>
-                </a:solidFill>
-              </a:rPr>
-              <a:t>and officer </a:t>
-            </a:r>
-            <a:r>
-              <a:rPr sz="1550" b="0" dirty="0" smtClean="0">
-                <a:solidFill>
-                  <a:srgbClr val="141414"/>
-                </a:solidFill>
-              </a:rPr>
-              <a:t>assignment</a:t>
-            </a:r>
-            <a:endParaRPr lang="en-US" sz="1550" dirty="0" smtClean="0"/>
+            <a:endParaRPr lang="en-US" sz="1550" dirty="0"/>
           </a:p>
           <a:p>
             <a:pPr marL="285750" indent="-285750" algn="l">
@@ -20510,30 +20097,14 @@
               <a:buChar char="•"/>
             </a:pPr>
             <a:r>
-              <a:rPr sz="1550" b="0" dirty="0" smtClean="0">
+              <a:rPr sz="1550" b="0" dirty="0">
                 <a:solidFill>
                   <a:srgbClr val="141414"/>
                 </a:solidFill>
               </a:rPr>
-              <a:t>Evidence </a:t>
+              <a:t>Evidence and SHA 256 hashing</a:t>
             </a:r>
-            <a:r>
-              <a:rPr sz="1550" b="0" dirty="0">
-                <a:solidFill>
-                  <a:srgbClr val="141414"/>
-                </a:solidFill>
-              </a:rPr>
-              <a:t>and SHA 256 </a:t>
-            </a:r>
-            <a:r>
-              <a:rPr sz="1550" b="0" dirty="0" smtClean="0">
-                <a:solidFill>
-                  <a:srgbClr val="141414"/>
-                </a:solidFill>
-              </a:rPr>
-              <a:t>hashing</a:t>
-            </a:r>
-            <a:endParaRPr lang="en-US" sz="1550" dirty="0" smtClean="0"/>
+            <a:endParaRPr lang="en-US" sz="1550" dirty="0"/>
           </a:p>
           <a:p>
             <a:pPr marL="285750" indent="-285750" algn="l">
@@ -20544,7 +20115,7 @@
               <a:buChar char="•"/>
             </a:pPr>
             <a:r>
-              <a:rPr sz="1550" b="0" dirty="0" err="1" smtClean="0">
+              <a:rPr sz="1550" b="0" dirty="0" err="1">
                 <a:solidFill>
                   <a:srgbClr val="141414"/>
                 </a:solidFill>
@@ -20552,30 +20123,14 @@
               <a:t>Hyperledger</a:t>
             </a:r>
             <a:r>
-              <a:rPr sz="1550" b="0" dirty="0" smtClean="0">
+              <a:rPr sz="1550" b="0" dirty="0">
                 <a:solidFill>
                   <a:srgbClr val="141414"/>
                 </a:solidFill>
               </a:rPr>
-              <a:t> </a:t>
+              <a:t> Fabric transactions</a:t>
             </a:r>
-            <a:r>
-              <a:rPr sz="1550" b="0" dirty="0">
-                <a:solidFill>
-                  <a:srgbClr val="141414"/>
-                </a:solidFill>
-              </a:rPr>
-              <a:t>Fabric </a:t>
-            </a:r>
-            <a:r>
-              <a:rPr sz="1550" b="0" dirty="0" smtClean="0">
-                <a:solidFill>
-                  <a:srgbClr val="141414"/>
-                </a:solidFill>
-              </a:rPr>
-              <a:t>transactions</a:t>
-            </a:r>
-            <a:endParaRPr lang="en-US" sz="1550" dirty="0" smtClean="0"/>
+            <a:endParaRPr lang="en-US" sz="1550" dirty="0"/>
           </a:p>
           <a:p>
             <a:pPr marL="285750" indent="-285750" algn="l">
@@ -20586,30 +20141,14 @@
               <a:buChar char="•"/>
             </a:pPr>
             <a:r>
-              <a:rPr sz="1550" b="0" dirty="0" smtClean="0">
+              <a:rPr sz="1550" b="0" dirty="0">
                 <a:solidFill>
                   <a:srgbClr val="141414"/>
                 </a:solidFill>
               </a:rPr>
-              <a:t>Audit </a:t>
+              <a:t>Audit trail and history</a:t>
             </a:r>
-            <a:r>
-              <a:rPr sz="1550" b="0" dirty="0">
-                <a:solidFill>
-                  <a:srgbClr val="141414"/>
-                </a:solidFill>
-              </a:rPr>
-              <a:t>trail and </a:t>
-            </a:r>
-            <a:r>
-              <a:rPr sz="1550" b="0" dirty="0" smtClean="0">
-                <a:solidFill>
-                  <a:srgbClr val="141414"/>
-                </a:solidFill>
-              </a:rPr>
-              <a:t>history</a:t>
-            </a:r>
-            <a:endParaRPr lang="en-US" sz="1550" dirty="0" smtClean="0"/>
+            <a:endParaRPr lang="en-US" sz="1550" dirty="0"/>
           </a:p>
           <a:p>
             <a:pPr marL="285750" indent="-285750" algn="l">
@@ -20620,20 +20159,12 @@
               <a:buChar char="•"/>
             </a:pPr>
             <a:r>
-              <a:rPr sz="1550" b="0" dirty="0" smtClean="0">
+              <a:rPr sz="1550" b="0" dirty="0">
                 <a:solidFill>
                   <a:srgbClr val="141414"/>
                 </a:solidFill>
               </a:rPr>
-              <a:t>Notifications</a:t>
-            </a:r>
-            <a:r>
-              <a:rPr sz="1550" b="0" dirty="0">
-                <a:solidFill>
-                  <a:srgbClr val="141414"/>
-                </a:solidFill>
-              </a:rPr>
-              <a:t>, analytics, administration</a:t>
+              <a:t>Notifications, analytics, administration</a:t>
             </a:r>
           </a:p>
         </p:txBody>
@@ -20793,30 +20324,14 @@
               <a:buChar char="•"/>
             </a:pPr>
             <a:r>
-              <a:rPr sz="1550" b="0" dirty="0" smtClean="0">
+              <a:rPr sz="1550" b="0" dirty="0">
                 <a:solidFill>
                   <a:srgbClr val="141414"/>
                 </a:solidFill>
               </a:rPr>
-              <a:t>Live </a:t>
+              <a:t>Live Pakistan Police integration</a:t>
             </a:r>
-            <a:r>
-              <a:rPr sz="1550" b="0" dirty="0">
-                <a:solidFill>
-                  <a:srgbClr val="141414"/>
-                </a:solidFill>
-              </a:rPr>
-              <a:t>Pakistan Police </a:t>
-            </a:r>
-            <a:r>
-              <a:rPr sz="1550" b="0" dirty="0" smtClean="0">
-                <a:solidFill>
-                  <a:srgbClr val="141414"/>
-                </a:solidFill>
-              </a:rPr>
-              <a:t>integration</a:t>
-            </a:r>
-            <a:endParaRPr lang="en-US" sz="1550" dirty="0" smtClean="0"/>
+            <a:endParaRPr lang="en-US" sz="1550" dirty="0"/>
           </a:p>
           <a:p>
             <a:pPr marL="285750" indent="-285750" algn="l">
@@ -20827,30 +20342,14 @@
               <a:buChar char="•"/>
             </a:pPr>
             <a:r>
-              <a:rPr sz="1550" b="0" dirty="0" smtClean="0">
+              <a:rPr sz="1550" b="0" dirty="0">
                 <a:solidFill>
                   <a:srgbClr val="141414"/>
                 </a:solidFill>
               </a:rPr>
-              <a:t>Real </a:t>
+              <a:t>Real NADRA verification</a:t>
             </a:r>
-            <a:r>
-              <a:rPr sz="1550" b="0" dirty="0">
-                <a:solidFill>
-                  <a:srgbClr val="141414"/>
-                </a:solidFill>
-              </a:rPr>
-              <a:t>NADRA </a:t>
-            </a:r>
-            <a:r>
-              <a:rPr sz="1550" b="0" dirty="0" smtClean="0">
-                <a:solidFill>
-                  <a:srgbClr val="141414"/>
-                </a:solidFill>
-              </a:rPr>
-              <a:t>verification</a:t>
-            </a:r>
-            <a:endParaRPr lang="en-US" sz="1550" dirty="0" smtClean="0"/>
+            <a:endParaRPr lang="en-US" sz="1550" dirty="0"/>
           </a:p>
           <a:p>
             <a:pPr marL="285750" indent="-285750" algn="l">
@@ -20861,30 +20360,14 @@
               <a:buChar char="•"/>
             </a:pPr>
             <a:r>
-              <a:rPr sz="1550" b="0" dirty="0" smtClean="0">
+              <a:rPr sz="1550" b="0" dirty="0">
                 <a:solidFill>
                   <a:srgbClr val="141414"/>
                 </a:solidFill>
               </a:rPr>
-              <a:t>Real </a:t>
+              <a:t>Real criminal history data</a:t>
             </a:r>
-            <a:r>
-              <a:rPr sz="1550" b="0" dirty="0">
-                <a:solidFill>
-                  <a:srgbClr val="141414"/>
-                </a:solidFill>
-              </a:rPr>
-              <a:t>criminal history </a:t>
-            </a:r>
-            <a:r>
-              <a:rPr sz="1550" b="0" dirty="0" smtClean="0">
-                <a:solidFill>
-                  <a:srgbClr val="141414"/>
-                </a:solidFill>
-              </a:rPr>
-              <a:t>data</a:t>
-            </a:r>
-            <a:endParaRPr lang="en-US" sz="1550" dirty="0" smtClean="0"/>
+            <a:endParaRPr lang="en-US" sz="1550" dirty="0"/>
           </a:p>
           <a:p>
             <a:pPr marL="285750" indent="-285750" algn="l">
@@ -20895,30 +20378,14 @@
               <a:buChar char="•"/>
             </a:pPr>
             <a:r>
-              <a:rPr sz="1550" b="0" dirty="0" smtClean="0">
+              <a:rPr sz="1550" b="0" dirty="0">
                 <a:solidFill>
                   <a:srgbClr val="141414"/>
                 </a:solidFill>
               </a:rPr>
-              <a:t>AI </a:t>
+              <a:t>AI based profiling or prediction</a:t>
             </a:r>
-            <a:r>
-              <a:rPr sz="1550" b="0" dirty="0">
-                <a:solidFill>
-                  <a:srgbClr val="141414"/>
-                </a:solidFill>
-              </a:rPr>
-              <a:t>based profiling or </a:t>
-            </a:r>
-            <a:r>
-              <a:rPr sz="1550" b="0" dirty="0" smtClean="0">
-                <a:solidFill>
-                  <a:srgbClr val="141414"/>
-                </a:solidFill>
-              </a:rPr>
-              <a:t>prediction</a:t>
-            </a:r>
-            <a:endParaRPr lang="en-US" sz="1550" dirty="0" smtClean="0"/>
+            <a:endParaRPr lang="en-US" sz="1550" dirty="0"/>
           </a:p>
           <a:p>
             <a:pPr marL="285750" indent="-285750" algn="l">
@@ -20929,14 +20396,14 @@
               <a:buChar char="•"/>
             </a:pPr>
             <a:r>
-              <a:rPr sz="1550" b="0" dirty="0" smtClean="0">
+              <a:rPr sz="1550" b="0" dirty="0">
                 <a:solidFill>
                   <a:srgbClr val="141414"/>
                 </a:solidFill>
               </a:rPr>
               <a:t>Production deployment</a:t>
             </a:r>
-            <a:endParaRPr lang="en-US" sz="1550" dirty="0" smtClean="0"/>
+            <a:endParaRPr lang="en-US" sz="1550" dirty="0"/>
           </a:p>
           <a:p>
             <a:pPr marL="285750" indent="-285750" algn="l">
@@ -20944,32 +20411,16 @@
               <a:buChar char="•"/>
             </a:pPr>
             <a:r>
-              <a:rPr sz="1550" b="0" dirty="0" smtClean="0">
+              <a:rPr sz="1550" b="0" dirty="0">
                 <a:solidFill>
                   <a:srgbClr val="141414"/>
                 </a:solidFill>
               </a:rPr>
-              <a:t>Legal </a:t>
-            </a:r>
-            <a:r>
-              <a:rPr sz="1550" b="0" dirty="0">
-                <a:solidFill>
-                  <a:srgbClr val="141414"/>
-                </a:solidFill>
-              </a:rPr>
-              <a:t>authorization of real FIRs</a:t>
-            </a:r>
-            <a:r>
-              <a:rPr sz="1550" dirty="0"/>
-              <a:t/>
+              <a:t>Legal authorization of real FIRs</a:t>
             </a:r>
             <a:br>
               <a:rPr sz="1550" dirty="0"/>
             </a:br>
-            <a:r>
-              <a:rPr sz="1550" dirty="0"/>
-              <a:t/>
-            </a:r>
             <a:br>
               <a:rPr sz="1550" dirty="0"/>
             </a:br>
@@ -21001,13 +20452,6 @@
       </p:transition>
     </mc:Fallback>
   </mc:AlternateContent>
-  <p:timing>
-    <p:tnLst>
-      <p:par>
-        <p:cTn id="1" dur="indefinite" restart="never" nodeType="tmRoot"/>
-      </p:par>
-    </p:tnLst>
-  </p:timing>
 </p:sld>
 </file>
 
@@ -21538,7 +20982,7 @@
           <a:p>
             <a:pPr algn="l"/>
             <a:r>
-              <a:rPr b="0" dirty="0" smtClean="0">
+              <a:rPr b="0" dirty="0">
                 <a:solidFill>
                   <a:srgbClr val="141414"/>
                 </a:solidFill>
@@ -21547,7 +20991,7 @@
               <a:t>Frontend, </a:t>
             </a:r>
             <a:r>
-              <a:rPr b="0" dirty="0" err="1" smtClean="0">
+              <a:rPr b="0" dirty="0" err="1">
                 <a:solidFill>
                   <a:srgbClr val="141414"/>
                 </a:solidFill>
@@ -21556,7 +21000,7 @@
               <a:t>FastAPI</a:t>
             </a:r>
             <a:r>
-              <a:rPr b="0" dirty="0" smtClean="0">
+              <a:rPr b="0" dirty="0">
                 <a:solidFill>
                   <a:srgbClr val="141414"/>
                 </a:solidFill>
@@ -21564,12 +21008,6 @@
               </a:rPr>
               <a:t> backend, authentication, FIR modules</a:t>
             </a:r>
-            <a:endParaRPr b="0" dirty="0">
-              <a:solidFill>
-                <a:srgbClr val="141414"/>
-              </a:solidFill>
-              <a:latin typeface="Arial"/>
-            </a:endParaRPr>
           </a:p>
         </p:txBody>
       </p:sp>
@@ -22123,13 +21561,6 @@
       </p:transition>
     </mc:Fallback>
   </mc:AlternateContent>
-  <p:timing>
-    <p:tnLst>
-      <p:par>
-        <p:cTn id="1" dur="indefinite" restart="never" nodeType="tmRoot"/>
-      </p:par>
-    </p:tnLst>
-  </p:timing>
 </p:sld>
 </file>
 
@@ -22331,15 +21762,7 @@
                   <a:srgbClr val="141414"/>
                 </a:solidFill>
               </a:rPr>
-              <a:t>System Architecture and Blockchain </a:t>
-            </a:r>
-            <a:r>
-              <a:rPr sz="1300" b="1" dirty="0" smtClean="0">
-                <a:solidFill>
-                  <a:srgbClr val="141414"/>
-                </a:solidFill>
-              </a:rPr>
-              <a:t>Lead</a:t>
+              <a:t>System Architecture and Blockchain Lead</a:t>
             </a:r>
             <a:endParaRPr lang="en-US" sz="1600" b="0" dirty="0">
               <a:solidFill>
@@ -22354,30 +21777,14 @@
               <a:buChar char="•"/>
             </a:pPr>
             <a:r>
-              <a:rPr b="0" dirty="0" smtClean="0">
+              <a:rPr b="0" dirty="0">
                 <a:solidFill>
                   <a:srgbClr val="141414"/>
                 </a:solidFill>
               </a:rPr>
-              <a:t>Architecture </a:t>
+              <a:t>Architecture and requirements coordination</a:t>
             </a:r>
-            <a:r>
-              <a:rPr b="0" dirty="0">
-                <a:solidFill>
-                  <a:srgbClr val="141414"/>
-                </a:solidFill>
-              </a:rPr>
-              <a:t>and requirements </a:t>
-            </a:r>
-            <a:r>
-              <a:rPr b="0" dirty="0" smtClean="0">
-                <a:solidFill>
-                  <a:srgbClr val="141414"/>
-                </a:solidFill>
-              </a:rPr>
-              <a:t>coordination</a:t>
-            </a:r>
-            <a:endParaRPr lang="en-US" dirty="0" smtClean="0"/>
+            <a:endParaRPr lang="en-US" dirty="0"/>
           </a:p>
           <a:p>
             <a:pPr marL="171450" indent="-171450" algn="l">
@@ -22385,7 +21792,7 @@
               <a:buChar char="•"/>
             </a:pPr>
             <a:r>
-              <a:rPr b="0" dirty="0" err="1" smtClean="0">
+              <a:rPr b="0" dirty="0" err="1">
                 <a:solidFill>
                   <a:srgbClr val="141414"/>
                 </a:solidFill>
@@ -22393,20 +21800,12 @@
               <a:t>Hyperledger</a:t>
             </a:r>
             <a:r>
-              <a:rPr b="0" dirty="0" smtClean="0">
+              <a:rPr b="0" dirty="0">
                 <a:solidFill>
                   <a:srgbClr val="141414"/>
                 </a:solidFill>
               </a:rPr>
-              <a:t> </a:t>
-            </a:r>
-            <a:r>
-              <a:rPr b="0" dirty="0">
-                <a:solidFill>
-                  <a:srgbClr val="141414"/>
-                </a:solidFill>
-              </a:rPr>
-              <a:t>Fabric and </a:t>
+              <a:t> Fabric and </a:t>
             </a:r>
             <a:r>
               <a:rPr b="0" dirty="0" err="1">
@@ -22422,17 +21821,9 @@
                   <a:srgbClr val="141414"/>
                 </a:solidFill>
               </a:rPr>
-              <a:t> </a:t>
+              <a:t> coordination</a:t>
             </a:r>
-            <a:r>
-              <a:rPr b="0" dirty="0" smtClean="0">
-                <a:solidFill>
-                  <a:srgbClr val="141414"/>
-                </a:solidFill>
-              </a:rPr>
-              <a:t>coordination</a:t>
-            </a:r>
-            <a:endParaRPr lang="en-US" dirty="0" smtClean="0"/>
+            <a:endParaRPr lang="en-US" dirty="0"/>
           </a:p>
           <a:p>
             <a:pPr marL="171450" indent="-171450" algn="l">
@@ -22440,30 +21831,14 @@
               <a:buChar char="•"/>
             </a:pPr>
             <a:r>
-              <a:rPr b="0" dirty="0" smtClean="0">
+              <a:rPr b="0" dirty="0">
                 <a:solidFill>
                   <a:srgbClr val="141414"/>
                 </a:solidFill>
               </a:rPr>
-              <a:t>Hash </a:t>
+              <a:t>Hash and integrity architecture</a:t>
             </a:r>
-            <a:r>
-              <a:rPr b="0" dirty="0">
-                <a:solidFill>
-                  <a:srgbClr val="141414"/>
-                </a:solidFill>
-              </a:rPr>
-              <a:t>and integrity </a:t>
-            </a:r>
-            <a:r>
-              <a:rPr b="0" dirty="0" smtClean="0">
-                <a:solidFill>
-                  <a:srgbClr val="141414"/>
-                </a:solidFill>
-              </a:rPr>
-              <a:t>architecture</a:t>
-            </a:r>
-            <a:endParaRPr lang="en-US" dirty="0" smtClean="0"/>
+            <a:endParaRPr lang="en-US" dirty="0"/>
           </a:p>
           <a:p>
             <a:pPr marL="171450" indent="-171450" algn="l">
@@ -22471,30 +21846,14 @@
               <a:buChar char="•"/>
             </a:pPr>
             <a:r>
-              <a:rPr b="0" dirty="0" smtClean="0">
+              <a:rPr b="0" dirty="0">
                 <a:solidFill>
                   <a:srgbClr val="141414"/>
                 </a:solidFill>
               </a:rPr>
-              <a:t>Security </a:t>
+              <a:t>Security architecture and integration</a:t>
             </a:r>
-            <a:r>
-              <a:rPr b="0" dirty="0">
-                <a:solidFill>
-                  <a:srgbClr val="141414"/>
-                </a:solidFill>
-              </a:rPr>
-              <a:t>architecture and </a:t>
-            </a:r>
-            <a:r>
-              <a:rPr b="0" dirty="0" smtClean="0">
-                <a:solidFill>
-                  <a:srgbClr val="141414"/>
-                </a:solidFill>
-              </a:rPr>
-              <a:t>integration</a:t>
-            </a:r>
-            <a:endParaRPr lang="en-US" dirty="0" smtClean="0"/>
+            <a:endParaRPr lang="en-US" dirty="0"/>
           </a:p>
           <a:p>
             <a:pPr marL="171450" indent="-171450" algn="l">
@@ -22502,20 +21861,12 @@
               <a:buChar char="•"/>
             </a:pPr>
             <a:r>
-              <a:rPr b="0" dirty="0" smtClean="0">
+              <a:rPr b="0" dirty="0">
                 <a:solidFill>
                   <a:srgbClr val="141414"/>
                 </a:solidFill>
               </a:rPr>
-              <a:t>GitHub </a:t>
-            </a:r>
-            <a:r>
-              <a:rPr b="0" dirty="0">
-                <a:solidFill>
-                  <a:srgbClr val="141414"/>
-                </a:solidFill>
-              </a:rPr>
-              <a:t>and deployment coordination</a:t>
+              <a:t>GitHub and deployment coordination</a:t>
             </a:r>
           </a:p>
         </p:txBody>
@@ -22674,21 +22025,13 @@
                   <a:srgbClr val="141414"/>
                 </a:solidFill>
               </a:rPr>
-              <a:t>Backend and Database </a:t>
+              <a:t>Backend and Database Lead</a:t>
             </a:r>
-            <a:r>
-              <a:rPr sz="1300" b="1" dirty="0" smtClean="0">
-                <a:solidFill>
-                  <a:srgbClr val="141414"/>
-                </a:solidFill>
-              </a:rPr>
-              <a:t>Lead</a:t>
-            </a:r>
-            <a:endParaRPr lang="en-US" sz="1300" b="1" dirty="0" smtClean="0"/>
+            <a:endParaRPr lang="en-US" sz="1300" b="1" dirty="0"/>
           </a:p>
           <a:p>
             <a:pPr algn="l"/>
-            <a:endParaRPr lang="en-US" dirty="0" smtClean="0"/>
+            <a:endParaRPr lang="en-US" dirty="0"/>
           </a:p>
           <a:p>
             <a:pPr marL="285750" indent="-285750" algn="l">
@@ -22699,30 +22042,22 @@
               <a:buChar char="•"/>
             </a:pPr>
             <a:r>
-              <a:rPr sz="1300" b="0" dirty="0" smtClean="0">
+              <a:rPr sz="1300" b="0" dirty="0">
                 <a:solidFill>
                   <a:srgbClr val="141414"/>
                 </a:solidFill>
               </a:rPr>
-              <a:t>Python </a:t>
+              <a:t>Python and </a:t>
             </a:r>
             <a:r>
-              <a:rPr sz="1300" b="0" dirty="0">
-                <a:solidFill>
-                  <a:srgbClr val="141414"/>
-                </a:solidFill>
-              </a:rPr>
-              <a:t>and </a:t>
-            </a:r>
-            <a:r>
-              <a:rPr sz="1300" b="0" dirty="0" err="1" smtClean="0">
+              <a:rPr sz="1300" b="0" dirty="0" err="1">
                 <a:solidFill>
                   <a:srgbClr val="141414"/>
                 </a:solidFill>
               </a:rPr>
               <a:t>FastAPI</a:t>
             </a:r>
-            <a:endParaRPr lang="en-US" sz="1300" dirty="0" smtClean="0"/>
+            <a:endParaRPr lang="en-US" sz="1300" dirty="0"/>
           </a:p>
           <a:p>
             <a:pPr marL="285750" indent="-285750" algn="l">
@@ -22733,30 +22068,14 @@
               <a:buChar char="•"/>
             </a:pPr>
             <a:r>
-              <a:rPr sz="1300" b="0" dirty="0" smtClean="0">
+              <a:rPr sz="1300" b="0" dirty="0">
                 <a:solidFill>
                   <a:srgbClr val="141414"/>
                 </a:solidFill>
               </a:rPr>
-              <a:t>REST </a:t>
+              <a:t>REST APIs and PostgreSQL</a:t>
             </a:r>
-            <a:r>
-              <a:rPr sz="1300" b="0" dirty="0">
-                <a:solidFill>
-                  <a:srgbClr val="141414"/>
-                </a:solidFill>
-              </a:rPr>
-              <a:t>APIs and </a:t>
-            </a:r>
-            <a:r>
-              <a:rPr sz="1300" b="0" dirty="0" smtClean="0">
-                <a:solidFill>
-                  <a:srgbClr val="141414"/>
-                </a:solidFill>
-              </a:rPr>
-              <a:t>PostgreSQL</a:t>
-            </a:r>
-            <a:endParaRPr lang="en-US" sz="1300" dirty="0" smtClean="0"/>
+            <a:endParaRPr lang="en-US" sz="1300" dirty="0"/>
           </a:p>
           <a:p>
             <a:pPr marL="285750" indent="-285750" algn="l">
@@ -22767,30 +22086,14 @@
               <a:buChar char="•"/>
             </a:pPr>
             <a:r>
-              <a:rPr sz="1300" b="0" dirty="0" smtClean="0">
+              <a:rPr sz="1300" b="0" dirty="0">
                 <a:solidFill>
                   <a:srgbClr val="141414"/>
                 </a:solidFill>
               </a:rPr>
-              <a:t>Authentication </a:t>
+              <a:t>Authentication and RBAC</a:t>
             </a:r>
-            <a:r>
-              <a:rPr sz="1300" b="0" dirty="0">
-                <a:solidFill>
-                  <a:srgbClr val="141414"/>
-                </a:solidFill>
-              </a:rPr>
-              <a:t>and </a:t>
-            </a:r>
-            <a:r>
-              <a:rPr sz="1300" b="0" dirty="0" smtClean="0">
-                <a:solidFill>
-                  <a:srgbClr val="141414"/>
-                </a:solidFill>
-              </a:rPr>
-              <a:t>RBAC</a:t>
-            </a:r>
-            <a:endParaRPr lang="en-US" sz="1300" dirty="0" smtClean="0"/>
+            <a:endParaRPr lang="en-US" sz="1300" dirty="0"/>
           </a:p>
           <a:p>
             <a:pPr marL="285750" indent="-285750" algn="l">
@@ -22801,30 +22104,14 @@
               <a:buChar char="•"/>
             </a:pPr>
             <a:r>
-              <a:rPr sz="1300" b="0" dirty="0" smtClean="0">
+              <a:rPr sz="1300" b="0" dirty="0">
                 <a:solidFill>
                   <a:srgbClr val="141414"/>
                 </a:solidFill>
               </a:rPr>
-              <a:t>FIR</a:t>
+              <a:t>FIR, investigation, evidence APIs</a:t>
             </a:r>
-            <a:r>
-              <a:rPr sz="1300" b="0" dirty="0">
-                <a:solidFill>
-                  <a:srgbClr val="141414"/>
-                </a:solidFill>
-              </a:rPr>
-              <a:t>, investigation, evidence </a:t>
-            </a:r>
-            <a:r>
-              <a:rPr sz="1300" b="0" dirty="0" smtClean="0">
-                <a:solidFill>
-                  <a:srgbClr val="141414"/>
-                </a:solidFill>
-              </a:rPr>
-              <a:t>APIs</a:t>
-            </a:r>
-            <a:endParaRPr lang="en-US" sz="1300" dirty="0" smtClean="0"/>
+            <a:endParaRPr lang="en-US" sz="1300" dirty="0"/>
           </a:p>
           <a:p>
             <a:pPr marL="285750" indent="-285750" algn="l">
@@ -22835,20 +22122,12 @@
               <a:buChar char="•"/>
             </a:pPr>
             <a:r>
-              <a:rPr sz="1300" b="0" dirty="0" smtClean="0">
+              <a:rPr sz="1300" b="0" dirty="0">
                 <a:solidFill>
                   <a:srgbClr val="141414"/>
                 </a:solidFill>
               </a:rPr>
-              <a:t>Backend </a:t>
-            </a:r>
-            <a:r>
-              <a:rPr sz="1300" b="0" dirty="0">
-                <a:solidFill>
-                  <a:srgbClr val="141414"/>
-                </a:solidFill>
-              </a:rPr>
-              <a:t>testing</a:t>
+              <a:t>Backend testing</a:t>
             </a:r>
           </a:p>
         </p:txBody>
@@ -23007,21 +22286,13 @@
                   <a:srgbClr val="141414"/>
                 </a:solidFill>
               </a:rPr>
-              <a:t>Frontend and Testing </a:t>
+              <a:t>Frontend and Testing Lead</a:t>
             </a:r>
-            <a:r>
-              <a:rPr sz="1300" b="1" dirty="0" smtClean="0">
-                <a:solidFill>
-                  <a:srgbClr val="141414"/>
-                </a:solidFill>
-              </a:rPr>
-              <a:t>Lead</a:t>
-            </a:r>
-            <a:endParaRPr lang="en-US" sz="1300" b="1" dirty="0" smtClean="0"/>
+            <a:endParaRPr lang="en-US" sz="1300" b="1" dirty="0"/>
           </a:p>
           <a:p>
             <a:pPr algn="l"/>
-            <a:endParaRPr lang="en-US" sz="1300" b="0" dirty="0" smtClean="0">
+            <a:endParaRPr lang="en-US" sz="1300" b="0" dirty="0">
               <a:solidFill>
                 <a:srgbClr val="141414"/>
               </a:solidFill>
@@ -23036,30 +22307,22 @@
               <a:buChar char="•"/>
             </a:pPr>
             <a:r>
-              <a:rPr sz="1300" b="0" dirty="0" smtClean="0">
+              <a:rPr sz="1300" b="0" dirty="0">
                 <a:solidFill>
                   <a:srgbClr val="141414"/>
                 </a:solidFill>
               </a:rPr>
-              <a:t>React </a:t>
+              <a:t>React and </a:t>
             </a:r>
             <a:r>
-              <a:rPr sz="1300" b="0" dirty="0">
-                <a:solidFill>
-                  <a:srgbClr val="141414"/>
-                </a:solidFill>
-              </a:rPr>
-              <a:t>and </a:t>
-            </a:r>
-            <a:r>
-              <a:rPr sz="1300" b="0" dirty="0" err="1" smtClean="0">
+              <a:rPr sz="1300" b="0" dirty="0" err="1">
                 <a:solidFill>
                   <a:srgbClr val="141414"/>
                 </a:solidFill>
               </a:rPr>
               <a:t>TypeScript</a:t>
             </a:r>
-            <a:endParaRPr lang="en-US" sz="1300" dirty="0" smtClean="0"/>
+            <a:endParaRPr lang="en-US" sz="1300" dirty="0"/>
           </a:p>
           <a:p>
             <a:pPr marL="285750" indent="-285750" algn="l">
@@ -23070,30 +22333,14 @@
               <a:buChar char="•"/>
             </a:pPr>
             <a:r>
-              <a:rPr sz="1300" b="0" dirty="0" smtClean="0">
+              <a:rPr sz="1300" b="0" dirty="0">
                 <a:solidFill>
                   <a:srgbClr val="141414"/>
                 </a:solidFill>
               </a:rPr>
-              <a:t>UI </a:t>
+              <a:t>UI and UX</a:t>
             </a:r>
-            <a:r>
-              <a:rPr sz="1300" b="0" dirty="0">
-                <a:solidFill>
-                  <a:srgbClr val="141414"/>
-                </a:solidFill>
-              </a:rPr>
-              <a:t>and </a:t>
-            </a:r>
-            <a:r>
-              <a:rPr sz="1300" b="0" dirty="0" smtClean="0">
-                <a:solidFill>
-                  <a:srgbClr val="141414"/>
-                </a:solidFill>
-              </a:rPr>
-              <a:t>UX</a:t>
-            </a:r>
-            <a:endParaRPr lang="en-US" sz="1300" dirty="0" smtClean="0"/>
+            <a:endParaRPr lang="en-US" sz="1300" dirty="0"/>
           </a:p>
           <a:p>
             <a:pPr marL="285750" indent="-285750" algn="l">
@@ -23104,30 +22351,14 @@
               <a:buChar char="•"/>
             </a:pPr>
             <a:r>
-              <a:rPr sz="1300" b="0" dirty="0" smtClean="0">
+              <a:rPr sz="1300" b="0" dirty="0">
                 <a:solidFill>
                   <a:srgbClr val="141414"/>
                 </a:solidFill>
               </a:rPr>
-              <a:t>Dashboards </a:t>
+              <a:t>Dashboards and forms</a:t>
             </a:r>
-            <a:r>
-              <a:rPr sz="1300" b="0" dirty="0">
-                <a:solidFill>
-                  <a:srgbClr val="141414"/>
-                </a:solidFill>
-              </a:rPr>
-              <a:t>and </a:t>
-            </a:r>
-            <a:r>
-              <a:rPr sz="1300" b="0" dirty="0" smtClean="0">
-                <a:solidFill>
-                  <a:srgbClr val="141414"/>
-                </a:solidFill>
-              </a:rPr>
-              <a:t>forms</a:t>
-            </a:r>
-            <a:endParaRPr lang="en-US" sz="1300" dirty="0" smtClean="0"/>
+            <a:endParaRPr lang="en-US" sz="1300" dirty="0"/>
           </a:p>
           <a:p>
             <a:pPr marL="285750" indent="-285750" algn="l">
@@ -23138,30 +22369,14 @@
               <a:buChar char="•"/>
             </a:pPr>
             <a:r>
-              <a:rPr sz="1300" b="0" dirty="0" smtClean="0">
+              <a:rPr sz="1300" b="0" dirty="0">
                 <a:solidFill>
                   <a:srgbClr val="141414"/>
                 </a:solidFill>
               </a:rPr>
-              <a:t>Audit </a:t>
+              <a:t>Audit and charts interface</a:t>
             </a:r>
-            <a:r>
-              <a:rPr sz="1300" b="0" dirty="0">
-                <a:solidFill>
-                  <a:srgbClr val="141414"/>
-                </a:solidFill>
-              </a:rPr>
-              <a:t>and charts </a:t>
-            </a:r>
-            <a:r>
-              <a:rPr sz="1300" b="0" dirty="0" smtClean="0">
-                <a:solidFill>
-                  <a:srgbClr val="141414"/>
-                </a:solidFill>
-              </a:rPr>
-              <a:t>interface</a:t>
-            </a:r>
-            <a:endParaRPr lang="en-US" sz="1300" dirty="0" smtClean="0"/>
+            <a:endParaRPr lang="en-US" sz="1300" dirty="0"/>
           </a:p>
           <a:p>
             <a:pPr marL="285750" indent="-285750" algn="l">
@@ -23172,20 +22387,12 @@
               <a:buChar char="•"/>
             </a:pPr>
             <a:r>
-              <a:rPr sz="1300" b="0" dirty="0" smtClean="0">
+              <a:rPr sz="1300" b="0" dirty="0">
                 <a:solidFill>
                   <a:srgbClr val="141414"/>
                 </a:solidFill>
               </a:rPr>
-              <a:t>UI </a:t>
-            </a:r>
-            <a:r>
-              <a:rPr sz="1300" b="0" dirty="0">
-                <a:solidFill>
-                  <a:srgbClr val="141414"/>
-                </a:solidFill>
-              </a:rPr>
-              <a:t>and usability testing</a:t>
+              <a:t>UI and usability testing</a:t>
             </a:r>
           </a:p>
         </p:txBody>
@@ -23220,19 +22427,10 @@
                 </a:solidFill>
                 <a:latin typeface="Arial"/>
               </a:rPr>
-              <a:t>Shared: research, documentation, GitHub, code review, integration, security testing, final report, </a:t>
+              <a:t>Shared: research, documentation, GitHub, code review, integration, security testing, final report, presentation</a:t>
             </a:r>
             <a:r>
-              <a:rPr sz="1400" b="1" dirty="0" smtClean="0">
-                <a:solidFill>
-                  <a:srgbClr val="1F497D"/>
-                </a:solidFill>
-                <a:latin typeface="Arial"/>
-              </a:rPr>
-              <a:t>presentation</a:t>
-            </a:r>
-            <a:r>
-              <a:rPr lang="en-US" sz="1400" b="1" dirty="0" smtClean="0">
+              <a:rPr lang="en-US" sz="1400" b="1" dirty="0">
                 <a:solidFill>
                   <a:srgbClr val="1F497D"/>
                 </a:solidFill>
@@ -23241,22 +22439,13 @@
               <a:t> and</a:t>
             </a:r>
             <a:r>
-              <a:rPr sz="1400" b="1" dirty="0" smtClean="0">
+              <a:rPr sz="1400" b="1" dirty="0">
                 <a:solidFill>
                   <a:srgbClr val="1F497D"/>
                 </a:solidFill>
                 <a:latin typeface="Arial"/>
               </a:rPr>
-              <a:t> </a:t>
-            </a:r>
-            <a:r>
-              <a:rPr sz="1400" b="1" dirty="0">
-                <a:solidFill>
-                  <a:srgbClr val="1F497D"/>
-                </a:solidFill>
-                <a:latin typeface="Arial"/>
-              </a:rPr>
-              <a:t>viva preparation.</a:t>
+              <a:t> viva preparation.</a:t>
             </a:r>
           </a:p>
         </p:txBody>
@@ -23278,13 +22467,6 @@
       </p:transition>
     </mc:Fallback>
   </mc:AlternateContent>
-  <p:timing>
-    <p:tnLst>
-      <p:par>
-        <p:cTn id="1" dur="indefinite" restart="never" nodeType="tmRoot"/>
-      </p:par>
-    </p:tnLst>
-  </p:timing>
 </p:sld>
 </file>
 
@@ -23468,13 +22650,6 @@
       </p:transition>
     </mc:Fallback>
   </mc:AlternateContent>
-  <p:timing>
-    <p:tnLst>
-      <p:par>
-        <p:cTn id="1" dur="indefinite" restart="never" nodeType="tmRoot"/>
-      </p:par>
-    </p:tnLst>
-  </p:timing>
 </p:sld>
 </file>
 
@@ -23530,13 +22705,6 @@
   <p:transition spd="slow">
     <p:cover/>
   </p:transition>
-  <p:timing>
-    <p:tnLst>
-      <p:par>
-        <p:cTn id="1" dur="indefinite" restart="never" nodeType="tmRoot"/>
-      </p:par>
-    </p:tnLst>
-  </p:timing>
 </p:sld>
 </file>
 
@@ -23623,16 +22791,10 @@
               </a:defRPr>
             </a:pPr>
             <a:r>
-              <a:rPr dirty="0" smtClean="0">
+              <a:rPr dirty="0">
                 <a:latin typeface="Arial"/>
               </a:rPr>
-              <a:t>Academic </a:t>
-            </a:r>
-            <a:r>
-              <a:rPr dirty="0">
-                <a:latin typeface="Arial"/>
-              </a:rPr>
-              <a:t>prototype only, not a production police system</a:t>
+              <a:t>Academic prototype only, not a production police system</a:t>
             </a:r>
           </a:p>
           <a:p>
@@ -23653,16 +22815,10 @@
               </a:defRPr>
             </a:pPr>
             <a:r>
-              <a:rPr dirty="0" smtClean="0">
+              <a:rPr dirty="0">
                 <a:latin typeface="Arial"/>
               </a:rPr>
-              <a:t>Synthetic </a:t>
-            </a:r>
-            <a:r>
-              <a:rPr dirty="0">
-                <a:latin typeface="Arial"/>
-              </a:rPr>
-              <a:t>or demonstration data only</a:t>
+              <a:t>Synthetic or demonstration data only</a:t>
             </a:r>
           </a:p>
           <a:p>
@@ -23683,16 +22839,10 @@
               </a:defRPr>
             </a:pPr>
             <a:r>
-              <a:rPr dirty="0" smtClean="0">
+              <a:rPr dirty="0">
                 <a:latin typeface="Arial"/>
               </a:rPr>
-              <a:t>No </a:t>
-            </a:r>
-            <a:r>
-              <a:rPr dirty="0">
-                <a:latin typeface="Arial"/>
-              </a:rPr>
-              <a:t>NADRA, live police, or government system integration</a:t>
+              <a:t>No NADRA, live police, or government system integration</a:t>
             </a:r>
           </a:p>
           <a:p>
@@ -23713,16 +22863,10 @@
               </a:defRPr>
             </a:pPr>
             <a:r>
-              <a:rPr dirty="0" smtClean="0">
+              <a:rPr dirty="0">
                 <a:latin typeface="Arial"/>
               </a:rPr>
-              <a:t>Small </a:t>
-            </a:r>
-            <a:r>
-              <a:rPr dirty="0">
-                <a:latin typeface="Arial"/>
-              </a:rPr>
-              <a:t>controlled blockchain network for demonstration</a:t>
+              <a:t>Small controlled blockchain network for demonstration</a:t>
             </a:r>
           </a:p>
           <a:p>
@@ -23743,16 +22887,10 @@
               </a:defRPr>
             </a:pPr>
             <a:r>
-              <a:rPr dirty="0" smtClean="0">
+              <a:rPr dirty="0">
                 <a:latin typeface="Arial"/>
               </a:rPr>
-              <a:t>Performance </a:t>
-            </a:r>
-            <a:r>
-              <a:rPr dirty="0">
-                <a:latin typeface="Arial"/>
-              </a:rPr>
-              <a:t>and scale testing limited by available student infrastructure</a:t>
+              <a:t>Performance and scale testing limited by available student infrastructure</a:t>
             </a:r>
           </a:p>
           <a:p>
@@ -23773,16 +22911,10 @@
               </a:defRPr>
             </a:pPr>
             <a:r>
-              <a:rPr dirty="0" smtClean="0">
+              <a:rPr dirty="0">
                 <a:latin typeface="Arial"/>
               </a:rPr>
-              <a:t>No </a:t>
-            </a:r>
-            <a:r>
-              <a:rPr dirty="0">
-                <a:latin typeface="Arial"/>
-              </a:rPr>
-              <a:t>legally binding digital FIR functionality</a:t>
+              <a:t>No legally binding digital FIR functionality</a:t>
             </a:r>
           </a:p>
         </p:txBody>
@@ -23964,13 +23096,6 @@
       </p:transition>
     </mc:Fallback>
   </mc:AlternateContent>
-  <p:timing>
-    <p:tnLst>
-      <p:par>
-        <p:cTn id="1" dur="indefinite" restart="never" nodeType="tmRoot"/>
-      </p:par>
-    </p:tnLst>
-  </p:timing>
 </p:sld>
 </file>
 
@@ -24173,30 +23298,14 @@
               <a:buChar char="•"/>
             </a:pPr>
             <a:r>
-              <a:rPr sz="1500" b="0" dirty="0" smtClean="0">
+              <a:rPr sz="1500" b="0" dirty="0">
                 <a:solidFill>
                   <a:srgbClr val="141414"/>
                 </a:solidFill>
               </a:rPr>
-              <a:t>Improved </a:t>
+              <a:t>Improved record integrity through cryptographic verification</a:t>
             </a:r>
-            <a:r>
-              <a:rPr sz="1500" b="0" dirty="0">
-                <a:solidFill>
-                  <a:srgbClr val="141414"/>
-                </a:solidFill>
-              </a:rPr>
-              <a:t>record integrity through cryptographic </a:t>
-            </a:r>
-            <a:r>
-              <a:rPr sz="1500" b="0" dirty="0" smtClean="0">
-                <a:solidFill>
-                  <a:srgbClr val="141414"/>
-                </a:solidFill>
-              </a:rPr>
-              <a:t>verification</a:t>
-            </a:r>
-            <a:endParaRPr lang="en-US" sz="1500" dirty="0" smtClean="0"/>
+            <a:endParaRPr lang="en-US" sz="1500" dirty="0"/>
           </a:p>
           <a:p>
             <a:pPr marL="285750" indent="-285750" algn="l">
@@ -24207,30 +23316,14 @@
               <a:buChar char="•"/>
             </a:pPr>
             <a:r>
-              <a:rPr sz="1500" b="0" dirty="0" smtClean="0">
+              <a:rPr sz="1500" b="0" dirty="0">
                 <a:solidFill>
                   <a:srgbClr val="141414"/>
                 </a:solidFill>
               </a:rPr>
-              <a:t>Stronger </a:t>
+              <a:t>Stronger accountability through RBAC and blockchain audit trails</a:t>
             </a:r>
-            <a:r>
-              <a:rPr sz="1500" b="0" dirty="0">
-                <a:solidFill>
-                  <a:srgbClr val="141414"/>
-                </a:solidFill>
-              </a:rPr>
-              <a:t>accountability through RBAC and blockchain audit </a:t>
-            </a:r>
-            <a:r>
-              <a:rPr sz="1500" b="0" dirty="0" smtClean="0">
-                <a:solidFill>
-                  <a:srgbClr val="141414"/>
-                </a:solidFill>
-              </a:rPr>
-              <a:t>trails</a:t>
-            </a:r>
-            <a:endParaRPr lang="en-US" sz="1500" dirty="0" smtClean="0"/>
+            <a:endParaRPr lang="en-US" sz="1500" dirty="0"/>
           </a:p>
           <a:p>
             <a:pPr marL="285750" indent="-285750" algn="l">
@@ -24241,30 +23334,14 @@
               <a:buChar char="•"/>
             </a:pPr>
             <a:r>
-              <a:rPr sz="1500" b="0" dirty="0" smtClean="0">
+              <a:rPr sz="1500" b="0" dirty="0">
                 <a:solidFill>
                   <a:srgbClr val="141414"/>
                 </a:solidFill>
               </a:rPr>
-              <a:t>Clearer </a:t>
+              <a:t>Clearer visibility into the FIR lifecycle</a:t>
             </a:r>
-            <a:r>
-              <a:rPr sz="1500" b="0" dirty="0">
-                <a:solidFill>
-                  <a:srgbClr val="141414"/>
-                </a:solidFill>
-              </a:rPr>
-              <a:t>visibility into the FIR </a:t>
-            </a:r>
-            <a:r>
-              <a:rPr sz="1500" b="0" dirty="0" smtClean="0">
-                <a:solidFill>
-                  <a:srgbClr val="141414"/>
-                </a:solidFill>
-              </a:rPr>
-              <a:t>lifecycle</a:t>
-            </a:r>
-            <a:endParaRPr lang="en-US" sz="1500" dirty="0" smtClean="0"/>
+            <a:endParaRPr lang="en-US" sz="1500" dirty="0"/>
           </a:p>
           <a:p>
             <a:pPr marL="285750" indent="-285750" algn="l">
@@ -24275,30 +23352,14 @@
               <a:buChar char="•"/>
             </a:pPr>
             <a:r>
-              <a:rPr sz="1500" b="0" dirty="0" smtClean="0">
+              <a:rPr sz="1500" b="0" dirty="0">
                 <a:solidFill>
                   <a:srgbClr val="141414"/>
                 </a:solidFill>
               </a:rPr>
-              <a:t>Tamper </a:t>
+              <a:t>Tamper evident evidence and document history</a:t>
             </a:r>
-            <a:r>
-              <a:rPr sz="1500" b="0" dirty="0">
-                <a:solidFill>
-                  <a:srgbClr val="141414"/>
-                </a:solidFill>
-              </a:rPr>
-              <a:t>evident evidence and document </a:t>
-            </a:r>
-            <a:r>
-              <a:rPr sz="1500" b="0" dirty="0" smtClean="0">
-                <a:solidFill>
-                  <a:srgbClr val="141414"/>
-                </a:solidFill>
-              </a:rPr>
-              <a:t>history</a:t>
-            </a:r>
-            <a:endParaRPr lang="en-US" sz="1500" dirty="0" smtClean="0"/>
+            <a:endParaRPr lang="en-US" sz="1500" dirty="0"/>
           </a:p>
           <a:p>
             <a:pPr marL="285750" indent="-285750" algn="l">
@@ -24309,20 +23370,12 @@
               <a:buChar char="•"/>
             </a:pPr>
             <a:r>
-              <a:rPr sz="1500" b="0" dirty="0" smtClean="0">
+              <a:rPr sz="1500" b="0" dirty="0">
                 <a:solidFill>
                   <a:srgbClr val="141414"/>
                 </a:solidFill>
               </a:rPr>
-              <a:t>Practical </a:t>
-            </a:r>
-            <a:r>
-              <a:rPr sz="1500" b="0" dirty="0">
-                <a:solidFill>
-                  <a:srgbClr val="141414"/>
-                </a:solidFill>
-              </a:rPr>
-              <a:t>demonstration of permissioned blockchain in a public sector workflow</a:t>
+              <a:t>Practical demonstration of permissioned blockchain in a public sector workflow</a:t>
             </a:r>
           </a:p>
         </p:txBody>
@@ -24479,30 +23532,14 @@
               <a:buChar char="•"/>
             </a:pPr>
             <a:r>
-              <a:rPr sz="1500" b="0" dirty="0" smtClean="0">
+              <a:rPr sz="1500" b="0" dirty="0">
                 <a:solidFill>
                   <a:srgbClr val="141414"/>
                 </a:solidFill>
               </a:rPr>
-              <a:t>Authorized </a:t>
+              <a:t>Authorized users authenticate and roles are enforced</a:t>
             </a:r>
-            <a:r>
-              <a:rPr sz="1500" b="0" dirty="0">
-                <a:solidFill>
-                  <a:srgbClr val="141414"/>
-                </a:solidFill>
-              </a:rPr>
-              <a:t>users authenticate and roles are </a:t>
-            </a:r>
-            <a:r>
-              <a:rPr sz="1500" b="0" dirty="0" smtClean="0">
-                <a:solidFill>
-                  <a:srgbClr val="141414"/>
-                </a:solidFill>
-              </a:rPr>
-              <a:t>enforced</a:t>
-            </a:r>
-            <a:endParaRPr lang="en-US" sz="1500" dirty="0" smtClean="0"/>
+            <a:endParaRPr lang="en-US" sz="1500" dirty="0"/>
           </a:p>
           <a:p>
             <a:pPr marL="285750" indent="-285750" algn="l">
@@ -24510,30 +23547,14 @@
               <a:buChar char="•"/>
             </a:pPr>
             <a:r>
-              <a:rPr sz="1500" b="0" dirty="0" smtClean="0">
+              <a:rPr sz="1500" b="0" dirty="0">
                 <a:solidFill>
                   <a:srgbClr val="141414"/>
                 </a:solidFill>
               </a:rPr>
-              <a:t>FIRs </a:t>
+              <a:t>FIRs move through defined workflow states</a:t>
             </a:r>
-            <a:r>
-              <a:rPr sz="1500" b="0" dirty="0">
-                <a:solidFill>
-                  <a:srgbClr val="141414"/>
-                </a:solidFill>
-              </a:rPr>
-              <a:t>move through defined workflow </a:t>
-            </a:r>
-            <a:r>
-              <a:rPr sz="1500" b="0" dirty="0" smtClean="0">
-                <a:solidFill>
-                  <a:srgbClr val="141414"/>
-                </a:solidFill>
-              </a:rPr>
-              <a:t>states</a:t>
-            </a:r>
-            <a:endParaRPr lang="en-US" sz="1500" dirty="0" smtClean="0"/>
+            <a:endParaRPr lang="en-US" sz="1500" dirty="0"/>
           </a:p>
           <a:p>
             <a:pPr marL="285750" indent="-285750" algn="l">
@@ -24541,30 +23562,14 @@
               <a:buChar char="•"/>
             </a:pPr>
             <a:r>
-              <a:rPr sz="1500" b="0" dirty="0" smtClean="0">
+              <a:rPr sz="1500" b="0" dirty="0">
                 <a:solidFill>
                   <a:srgbClr val="141414"/>
                 </a:solidFill>
               </a:rPr>
-              <a:t>Evidence </a:t>
+              <a:t>Evidence hashes are generated and verified</a:t>
             </a:r>
-            <a:r>
-              <a:rPr sz="1500" b="0" dirty="0">
-                <a:solidFill>
-                  <a:srgbClr val="141414"/>
-                </a:solidFill>
-              </a:rPr>
-              <a:t>hashes are generated and </a:t>
-            </a:r>
-            <a:r>
-              <a:rPr sz="1500" b="0" dirty="0" smtClean="0">
-                <a:solidFill>
-                  <a:srgbClr val="141414"/>
-                </a:solidFill>
-              </a:rPr>
-              <a:t>verified</a:t>
-            </a:r>
-            <a:endParaRPr lang="en-US" sz="1500" dirty="0" smtClean="0"/>
+            <a:endParaRPr lang="en-US" sz="1500" dirty="0"/>
           </a:p>
           <a:p>
             <a:pPr marL="285750" indent="-285750" algn="l">
@@ -24572,30 +23577,14 @@
               <a:buChar char="•"/>
             </a:pPr>
             <a:r>
-              <a:rPr sz="1500" b="0" dirty="0" smtClean="0">
+              <a:rPr sz="1500" b="0" dirty="0">
                 <a:solidFill>
                   <a:srgbClr val="141414"/>
                 </a:solidFill>
               </a:rPr>
-              <a:t>Key </a:t>
+              <a:t>Key operations produce blockchain transactions</a:t>
             </a:r>
-            <a:r>
-              <a:rPr sz="1500" b="0" dirty="0">
-                <a:solidFill>
-                  <a:srgbClr val="141414"/>
-                </a:solidFill>
-              </a:rPr>
-              <a:t>operations produce blockchain </a:t>
-            </a:r>
-            <a:r>
-              <a:rPr sz="1500" b="0" dirty="0" smtClean="0">
-                <a:solidFill>
-                  <a:srgbClr val="141414"/>
-                </a:solidFill>
-              </a:rPr>
-              <a:t>transactions</a:t>
-            </a:r>
-            <a:endParaRPr lang="en-US" sz="1500" dirty="0" smtClean="0"/>
+            <a:endParaRPr lang="en-US" sz="1500" dirty="0"/>
           </a:p>
           <a:p>
             <a:pPr marL="285750" indent="-285750" algn="l">
@@ -24603,30 +23592,14 @@
               <a:buChar char="•"/>
             </a:pPr>
             <a:r>
-              <a:rPr sz="1500" b="0" dirty="0" smtClean="0">
+              <a:rPr sz="1500" b="0" dirty="0">
                 <a:solidFill>
                   <a:srgbClr val="141414"/>
                 </a:solidFill>
               </a:rPr>
-              <a:t>History </a:t>
+              <a:t>History can be retrieved and reconstructed</a:t>
             </a:r>
-            <a:r>
-              <a:rPr sz="1500" b="0" dirty="0">
-                <a:solidFill>
-                  <a:srgbClr val="141414"/>
-                </a:solidFill>
-              </a:rPr>
-              <a:t>can be retrieved and </a:t>
-            </a:r>
-            <a:r>
-              <a:rPr sz="1500" b="0" dirty="0" smtClean="0">
-                <a:solidFill>
-                  <a:srgbClr val="141414"/>
-                </a:solidFill>
-              </a:rPr>
-              <a:t>reconstructed</a:t>
-            </a:r>
-            <a:endParaRPr lang="en-US" sz="1500" dirty="0" smtClean="0"/>
+            <a:endParaRPr lang="en-US" sz="1500" dirty="0"/>
           </a:p>
           <a:p>
             <a:pPr marL="285750" indent="-285750" algn="l">
@@ -24634,30 +23607,14 @@
               <a:buChar char="•"/>
             </a:pPr>
             <a:r>
-              <a:rPr sz="1500" b="0" dirty="0" smtClean="0">
+              <a:rPr sz="1500" b="0" dirty="0">
                 <a:solidFill>
                   <a:srgbClr val="141414"/>
                 </a:solidFill>
               </a:rPr>
-              <a:t>Unauthorized </a:t>
+              <a:t>Unauthorized actions are rejected</a:t>
             </a:r>
-            <a:r>
-              <a:rPr sz="1500" b="0" dirty="0">
-                <a:solidFill>
-                  <a:srgbClr val="141414"/>
-                </a:solidFill>
-              </a:rPr>
-              <a:t>actions are </a:t>
-            </a:r>
-            <a:r>
-              <a:rPr sz="1500" b="0" dirty="0" smtClean="0">
-                <a:solidFill>
-                  <a:srgbClr val="141414"/>
-                </a:solidFill>
-              </a:rPr>
-              <a:t>rejected</a:t>
-            </a:r>
-            <a:endParaRPr lang="en-US" sz="1500" dirty="0" smtClean="0"/>
+            <a:endParaRPr lang="en-US" sz="1500" dirty="0"/>
           </a:p>
           <a:p>
             <a:pPr marL="285750" indent="-285750" algn="l">
@@ -24665,20 +23622,12 @@
               <a:buChar char="•"/>
             </a:pPr>
             <a:r>
-              <a:rPr sz="1500" b="0" dirty="0" smtClean="0">
+              <a:rPr sz="1500" b="0" dirty="0">
                 <a:solidFill>
                   <a:srgbClr val="141414"/>
                 </a:solidFill>
               </a:rPr>
-              <a:t>End </a:t>
-            </a:r>
-            <a:r>
-              <a:rPr sz="1500" b="0" dirty="0">
-                <a:solidFill>
-                  <a:srgbClr val="141414"/>
-                </a:solidFill>
-              </a:rPr>
-              <a:t>to end prototype works with synthetic data</a:t>
+              <a:t>End to end prototype works with synthetic data</a:t>
             </a:r>
           </a:p>
         </p:txBody>
@@ -24700,13 +23649,6 @@
       </p:transition>
     </mc:Fallback>
   </mc:AlternateContent>
-  <p:timing>
-    <p:tnLst>
-      <p:par>
-        <p:cTn id="1" dur="indefinite" restart="never" nodeType="tmRoot"/>
-      </p:par>
-    </p:tnLst>
-  </p:timing>
 </p:sld>
 </file>
 
@@ -24771,13 +23713,6 @@
       </p:transition>
     </mc:Fallback>
   </mc:AlternateContent>
-  <p:timing>
-    <p:tnLst>
-      <p:par>
-        <p:cTn id="1" dur="indefinite" restart="never" nodeType="tmRoot"/>
-      </p:par>
-    </p:tnLst>
-  </p:timing>
 </p:sld>
 </file>
 
@@ -24826,25 +23761,16 @@
               </a:lnSpc>
             </a:pPr>
             <a:r>
-              <a:rPr sz="2400" b="1" dirty="0" smtClean="0">
+              <a:rPr sz="2400" b="1" dirty="0">
                 <a:solidFill>
                   <a:srgbClr val="1F497D"/>
                 </a:solidFill>
                 <a:latin typeface="Arial"/>
               </a:rPr>
-              <a:t>Digital </a:t>
+              <a:t>Digital FIR combines a conventional secure database with a permissioned </a:t>
             </a:r>
             <a:r>
-              <a:rPr sz="2400" b="1" dirty="0" smtClean="0">
-                <a:solidFill>
-                  <a:srgbClr val="1F497D"/>
-                </a:solidFill>
-                <a:latin typeface="Arial"/>
-              </a:rPr>
-              <a:t>FIR combines a conventional secure database with a permissioned </a:t>
-            </a:r>
-            <a:r>
-              <a:rPr sz="2400" b="1" dirty="0" err="1" smtClean="0">
+              <a:rPr sz="2400" b="1" dirty="0" err="1">
                 <a:solidFill>
                   <a:srgbClr val="1F497D"/>
                 </a:solidFill>
@@ -24853,7 +23779,7 @@
               <a:t>Hyperledger</a:t>
             </a:r>
             <a:r>
-              <a:rPr sz="2400" b="1" dirty="0" smtClean="0">
+              <a:rPr sz="2400" b="1" dirty="0">
                 <a:solidFill>
                   <a:srgbClr val="1F497D"/>
                 </a:solidFill>
@@ -24861,12 +23787,6 @@
               </a:rPr>
               <a:t> Fabric layer to improve integrity, traceability and auditability of FIR workflows.</a:t>
             </a:r>
-            <a:endParaRPr sz="2400" b="1" dirty="0">
-              <a:solidFill>
-                <a:srgbClr val="1F497D"/>
-              </a:solidFill>
-              <a:latin typeface="Arial"/>
-            </a:endParaRPr>
           </a:p>
         </p:txBody>
       </p:sp>
@@ -25025,19 +23945,10 @@
                 </a:solidFill>
                 <a:latin typeface="Arial"/>
               </a:rPr>
-              <a:t>Sensitive information stays off chain. Hashes, transactions, workflow </a:t>
+              <a:t>Sensitive information stays off chain. Hashes, transactions, workflow events</a:t>
             </a:r>
             <a:r>
-              <a:rPr sz="1600" b="0" dirty="0" smtClean="0">
-                <a:solidFill>
-                  <a:srgbClr val="141414"/>
-                </a:solidFill>
-                <a:latin typeface="Arial"/>
-              </a:rPr>
-              <a:t>events</a:t>
-            </a:r>
-            <a:r>
-              <a:rPr lang="en-US" sz="1600" b="0" dirty="0" smtClean="0">
+              <a:rPr lang="en-US" sz="1600" b="0" dirty="0">
                 <a:solidFill>
                   <a:srgbClr val="141414"/>
                 </a:solidFill>
@@ -25046,22 +23957,13 @@
               <a:t> and</a:t>
             </a:r>
             <a:r>
-              <a:rPr sz="1600" b="0" dirty="0" smtClean="0">
+              <a:rPr sz="1600" b="0" dirty="0">
                 <a:solidFill>
                   <a:srgbClr val="141414"/>
                 </a:solidFill>
                 <a:latin typeface="Arial"/>
               </a:rPr>
-              <a:t> </a:t>
-            </a:r>
-            <a:r>
-              <a:rPr sz="1600" b="0" dirty="0">
-                <a:solidFill>
-                  <a:srgbClr val="141414"/>
-                </a:solidFill>
-                <a:latin typeface="Arial"/>
-              </a:rPr>
-              <a:t>integrity metadata provide the verifiable audit layer.</a:t>
+              <a:t> integrity metadata provide the verifiable audit layer.</a:t>
             </a:r>
           </a:p>
         </p:txBody>
@@ -25098,9 +24000,6 @@
               </a:rPr>
               <a:t>Thank You</a:t>
             </a:r>
-            <a:r>
-              <a:t/>
-            </a:r>
             <a:br/>
             <a:r>
               <a:rPr sz="2400" b="1">
@@ -25131,13 +24030,6 @@
       </p:transition>
     </mc:Fallback>
   </mc:AlternateContent>
-  <p:timing>
-    <p:tnLst>
-      <p:par>
-        <p:cTn id="1" dur="indefinite" restart="never" nodeType="tmRoot"/>
-      </p:par>
-    </p:tnLst>
-  </p:timing>
 </p:sld>
 </file>
 
@@ -25208,7 +24100,7 @@
         <p:spPr>
           <a:xfrm>
             <a:off x="640080" y="1508760"/>
-            <a:ext cx="3749039" cy="4210383"/>
+            <a:ext cx="3695097" cy="4656659"/>
           </a:xfrm>
           <a:prstGeom prst="rect">
             <a:avLst/>
@@ -25235,17 +24127,14 @@
               </a:defRPr>
             </a:pPr>
             <a:r>
-              <a:rPr sz="2400" dirty="0" smtClean="0">
+              <a:rPr sz="2400" dirty="0">
                 <a:latin typeface="Arial"/>
               </a:rPr>
-              <a:t>Introduction </a:t>
+              <a:t>Introduction and Background</a:t>
             </a:r>
-            <a:r>
-              <a:rPr sz="2400" dirty="0">
-                <a:latin typeface="Arial"/>
-              </a:rPr>
-              <a:t>and Background</a:t>
-            </a:r>
+            <a:endParaRPr lang="en-US" sz="2400" dirty="0">
+              <a:latin typeface="Arial"/>
+            </a:endParaRPr>
           </a:p>
           <a:p>
             <a:pPr marL="342900" indent="-342900">
@@ -25262,10 +24151,10 @@
               </a:defRPr>
             </a:pPr>
             <a:r>
-              <a:rPr lang="en-US" sz="2400" dirty="0" smtClean="0">
+              <a:rPr sz="2400" dirty="0">
                 <a:latin typeface="Arial"/>
               </a:rPr>
-              <a:t>Literature Review</a:t>
+              <a:t>Existing Systems in Pakistan</a:t>
             </a:r>
           </a:p>
           <a:p>
@@ -25283,16 +24172,10 @@
               </a:defRPr>
             </a:pPr>
             <a:r>
-              <a:rPr sz="2400" dirty="0" smtClean="0">
+              <a:rPr sz="2400" dirty="0">
                 <a:latin typeface="Arial"/>
               </a:rPr>
-              <a:t>Existing </a:t>
-            </a:r>
-            <a:r>
-              <a:rPr sz="2400" dirty="0">
-                <a:latin typeface="Arial"/>
-              </a:rPr>
-              <a:t>Systems in Pakistan</a:t>
+              <a:t>Gap Analysis</a:t>
             </a:r>
           </a:p>
           <a:p>
@@ -25310,16 +24193,10 @@
               </a:defRPr>
             </a:pPr>
             <a:r>
-              <a:rPr sz="2400" dirty="0" smtClean="0">
+              <a:rPr sz="2400" dirty="0">
                 <a:latin typeface="Arial"/>
               </a:rPr>
-              <a:t>Gap </a:t>
-            </a:r>
-            <a:r>
-              <a:rPr sz="2400" dirty="0">
-                <a:latin typeface="Arial"/>
-              </a:rPr>
-              <a:t>Analysis</a:t>
+              <a:t>Problem Statement</a:t>
             </a:r>
           </a:p>
           <a:p>
@@ -25337,16 +24214,10 @@
               </a:defRPr>
             </a:pPr>
             <a:r>
-              <a:rPr sz="2400" dirty="0" smtClean="0">
+              <a:rPr sz="2400" dirty="0">
                 <a:latin typeface="Arial"/>
               </a:rPr>
-              <a:t>Problem </a:t>
-            </a:r>
-            <a:r>
-              <a:rPr sz="2400" dirty="0">
-                <a:latin typeface="Arial"/>
-              </a:rPr>
-              <a:t>Statement</a:t>
+              <a:t>Proposed Solution and Methodology</a:t>
             </a:r>
           </a:p>
           <a:p>
@@ -25364,17 +24235,14 @@
               </a:defRPr>
             </a:pPr>
             <a:r>
-              <a:rPr sz="2400" dirty="0" smtClean="0">
+              <a:rPr sz="2400" dirty="0">
                 <a:latin typeface="Arial"/>
               </a:rPr>
-              <a:t>Proposed </a:t>
+              <a:t>System Architecture</a:t>
             </a:r>
-            <a:r>
-              <a:rPr sz="2400" dirty="0">
-                <a:latin typeface="Arial"/>
-              </a:rPr>
-              <a:t>Solution and Methodology</a:t>
-            </a:r>
+            <a:endParaRPr lang="en-GB" sz="2400" dirty="0">
+              <a:latin typeface="Arial"/>
+            </a:endParaRPr>
           </a:p>
           <a:p>
             <a:pPr marL="342900" indent="-342900">
@@ -25391,17 +24259,27 @@
               </a:defRPr>
             </a:pPr>
             <a:r>
-              <a:rPr sz="2400" dirty="0" smtClean="0">
-                <a:latin typeface="Arial"/>
-              </a:rPr>
-              <a:t>System </a:t>
+              <a:rPr lang="en-GB" sz="2400" dirty="0"/>
+              <a:t>Project Scope</a:t>
             </a:r>
-            <a:r>
-              <a:rPr sz="2400" dirty="0">
-                <a:latin typeface="Arial"/>
-              </a:rPr>
-              <a:t>Architecture</a:t>
-            </a:r>
+          </a:p>
+          <a:p>
+            <a:pPr marL="342900" indent="-342900">
+              <a:spcAft>
+                <a:spcPts val="600"/>
+              </a:spcAft>
+              <a:buFont typeface="Arial" panose="020B0604020202020204" pitchFamily="34" charset="0"/>
+              <a:buChar char="•"/>
+              <a:defRPr sz="1600">
+                <a:solidFill>
+                  <a:srgbClr val="141414"/>
+                </a:solidFill>
+                <a:latin typeface="Arial"/>
+              </a:defRPr>
+            </a:pPr>
+            <a:endParaRPr sz="2400" dirty="0">
+              <a:latin typeface="Arial"/>
+            </a:endParaRPr>
           </a:p>
         </p:txBody>
       </p:sp>
@@ -25414,7 +24292,7 @@
         <p:spPr>
           <a:xfrm>
             <a:off x="4434840" y="1508760"/>
-            <a:ext cx="3749039" cy="4133439"/>
+            <a:ext cx="3749039" cy="3687163"/>
           </a:xfrm>
           <a:prstGeom prst="rect">
             <a:avLst/>
@@ -25441,16 +24319,10 @@
               </a:defRPr>
             </a:pPr>
             <a:r>
-              <a:rPr sz="2400" dirty="0" smtClean="0">
+              <a:rPr sz="2400" dirty="0">
                 <a:latin typeface="Arial"/>
               </a:rPr>
-              <a:t>Project </a:t>
-            </a:r>
-            <a:r>
-              <a:rPr sz="2400" dirty="0">
-                <a:latin typeface="Arial"/>
-              </a:rPr>
-              <a:t>Scope</a:t>
+              <a:t>Work Breakdown Structure</a:t>
             </a:r>
           </a:p>
           <a:p>
@@ -25468,16 +24340,10 @@
               </a:defRPr>
             </a:pPr>
             <a:r>
-              <a:rPr sz="2400" dirty="0" smtClean="0">
+              <a:rPr sz="2400" dirty="0">
                 <a:latin typeface="Arial"/>
               </a:rPr>
-              <a:t>Work </a:t>
-            </a:r>
-            <a:r>
-              <a:rPr sz="2400" dirty="0">
-                <a:latin typeface="Arial"/>
-              </a:rPr>
-              <a:t>Breakdown Structure</a:t>
+              <a:t>Roles and Responsibilities</a:t>
             </a:r>
           </a:p>
           <a:p>
@@ -25495,16 +24361,10 @@
               </a:defRPr>
             </a:pPr>
             <a:r>
-              <a:rPr sz="2400" dirty="0" smtClean="0">
+              <a:rPr sz="2400" dirty="0">
                 <a:latin typeface="Arial"/>
               </a:rPr>
-              <a:t>Roles </a:t>
-            </a:r>
-            <a:r>
-              <a:rPr sz="2400" dirty="0">
-                <a:latin typeface="Arial"/>
-              </a:rPr>
-              <a:t>and Responsibilities</a:t>
+              <a:t>Constraints and Limitations</a:t>
             </a:r>
           </a:p>
           <a:p>
@@ -25522,16 +24382,10 @@
               </a:defRPr>
             </a:pPr>
             <a:r>
-              <a:rPr sz="2400" dirty="0" smtClean="0">
+              <a:rPr sz="2400" dirty="0">
                 <a:latin typeface="Arial"/>
               </a:rPr>
-              <a:t>Constraints </a:t>
-            </a:r>
-            <a:r>
-              <a:rPr sz="2400" dirty="0">
-                <a:latin typeface="Arial"/>
-              </a:rPr>
-              <a:t>and Limitations</a:t>
+              <a:t>Expected Benefits and Success Criteria</a:t>
             </a:r>
           </a:p>
           <a:p>
@@ -25549,43 +24403,10 @@
               </a:defRPr>
             </a:pPr>
             <a:r>
-              <a:rPr sz="2400" dirty="0" smtClean="0">
+              <a:rPr sz="2400" dirty="0">
                 <a:latin typeface="Arial"/>
               </a:rPr>
-              <a:t>Expected </a:t>
-            </a:r>
-            <a:r>
-              <a:rPr sz="2400" dirty="0">
-                <a:latin typeface="Arial"/>
-              </a:rPr>
-              <a:t>Benefits and Success Criteria</a:t>
-            </a:r>
-          </a:p>
-          <a:p>
-            <a:pPr marL="342900" indent="-342900">
-              <a:spcAft>
-                <a:spcPts val="600"/>
-              </a:spcAft>
-              <a:buFont typeface="Arial" panose="020B0604020202020204" pitchFamily="34" charset="0"/>
-              <a:buChar char="•"/>
-              <a:defRPr sz="1600">
-                <a:solidFill>
-                  <a:srgbClr val="141414"/>
-                </a:solidFill>
-                <a:latin typeface="Arial"/>
-              </a:defRPr>
-            </a:pPr>
-            <a:r>
-              <a:rPr sz="2400" dirty="0" smtClean="0">
-                <a:latin typeface="Arial"/>
-              </a:rPr>
-              <a:t>Conclusion </a:t>
-            </a:r>
-            <a:r>
-              <a:rPr sz="2400" dirty="0">
-                <a:latin typeface="Arial"/>
-              </a:rPr>
-              <a:t>and Q&amp;A</a:t>
+              <a:t>Conclusion and Q&amp;A</a:t>
             </a:r>
           </a:p>
         </p:txBody>
@@ -25607,13 +24428,6 @@
       </p:transition>
     </mc:Fallback>
   </mc:AlternateContent>
-  <p:timing>
-    <p:tnLst>
-      <p:par>
-        <p:cTn id="1" dur="indefinite" restart="never" nodeType="tmRoot"/>
-      </p:par>
-    </p:tnLst>
-  </p:timing>
 </p:sld>
 </file>
 
@@ -25692,13 +24506,6 @@
       </p:transition>
     </mc:Fallback>
   </mc:AlternateContent>
-  <p:timing>
-    <p:tnLst>
-      <p:par>
-        <p:cTn id="1" dur="indefinite" restart="never" nodeType="tmRoot"/>
-      </p:par>
-    </p:tnLst>
-  </p:timing>
 </p:sld>
 </file>
 
@@ -25915,19 +24722,10 @@
                 </a:solidFill>
                 <a:latin typeface="Arial"/>
               </a:rPr>
-              <a:t>An FIR formally opens the criminal justice process. It records the reported offence, identifies the </a:t>
+              <a:t>An FIR formally opens the criminal justice process. It records the reported offence, identifies the parties</a:t>
             </a:r>
             <a:r>
-              <a:rPr sz="1600" b="0" dirty="0" smtClean="0">
-                <a:solidFill>
-                  <a:srgbClr val="141414"/>
-                </a:solidFill>
-                <a:latin typeface="Arial"/>
-              </a:rPr>
-              <a:t>parties</a:t>
-            </a:r>
-            <a:r>
-              <a:rPr lang="en-US" sz="1600" b="0" dirty="0" smtClean="0">
+              <a:rPr lang="en-US" sz="1600" b="0" dirty="0">
                 <a:solidFill>
                   <a:srgbClr val="141414"/>
                 </a:solidFill>
@@ -25936,22 +24734,13 @@
               <a:t> and</a:t>
             </a:r>
             <a:r>
-              <a:rPr sz="1600" b="0" dirty="0" smtClean="0">
+              <a:rPr sz="1600" b="0" dirty="0">
                 <a:solidFill>
                   <a:srgbClr val="141414"/>
                 </a:solidFill>
                 <a:latin typeface="Arial"/>
               </a:rPr>
-              <a:t> </a:t>
-            </a:r>
-            <a:r>
-              <a:rPr sz="1600" b="0" dirty="0">
-                <a:solidFill>
-                  <a:srgbClr val="141414"/>
-                </a:solidFill>
-                <a:latin typeface="Arial"/>
-              </a:rPr>
-              <a:t>starts investigation.</a:t>
+              <a:t> starts investigation.</a:t>
             </a:r>
           </a:p>
         </p:txBody>
@@ -26111,19 +24900,10 @@
                 </a:solidFill>
                 <a:latin typeface="Arial"/>
               </a:rPr>
-              <a:t>Punjab, </a:t>
+              <a:t>Punjab, Sindh</a:t>
             </a:r>
             <a:r>
-              <a:rPr sz="1600" b="0" dirty="0" smtClean="0">
-                <a:solidFill>
-                  <a:srgbClr val="141414"/>
-                </a:solidFill>
-                <a:latin typeface="Arial"/>
-              </a:rPr>
-              <a:t>Sindh</a:t>
-            </a:r>
-            <a:r>
-              <a:rPr lang="en-US" sz="1600" b="0" dirty="0" smtClean="0">
+              <a:rPr lang="en-US" sz="1600" b="0" dirty="0">
                 <a:solidFill>
                   <a:srgbClr val="141414"/>
                 </a:solidFill>
@@ -26132,22 +24912,13 @@
               <a:t> and</a:t>
             </a:r>
             <a:r>
-              <a:rPr sz="1600" b="0" dirty="0" smtClean="0">
+              <a:rPr sz="1600" b="0" dirty="0">
                 <a:solidFill>
                   <a:srgbClr val="141414"/>
                 </a:solidFill>
                 <a:latin typeface="Arial"/>
               </a:rPr>
-              <a:t> </a:t>
-            </a:r>
-            <a:r>
-              <a:rPr sz="1600" b="0" dirty="0">
-                <a:solidFill>
-                  <a:srgbClr val="141414"/>
-                </a:solidFill>
-                <a:latin typeface="Arial"/>
-              </a:rPr>
-              <a:t>KP already use digital complaint and record systems. The project does not aim to replace these systems.</a:t>
+              <a:t> KP already use digital complaint and record systems. The project does not aim to replace these systems.</a:t>
             </a:r>
           </a:p>
         </p:txBody>
@@ -26325,19 +25096,10 @@
                 </a:solidFill>
                 <a:latin typeface="Arial"/>
               </a:rPr>
-              <a:t> Fabric layer for integrity, </a:t>
+              <a:t> Fabric layer for integrity, traceability</a:t>
             </a:r>
             <a:r>
-              <a:rPr sz="1600" b="0" dirty="0" smtClean="0">
-                <a:solidFill>
-                  <a:srgbClr val="141414"/>
-                </a:solidFill>
-                <a:latin typeface="Arial"/>
-              </a:rPr>
-              <a:t>traceability</a:t>
-            </a:r>
-            <a:r>
-              <a:rPr lang="en-US" sz="1600" b="0" dirty="0" smtClean="0">
+              <a:rPr lang="en-US" sz="1600" b="0" dirty="0">
                 <a:solidFill>
                   <a:srgbClr val="141414"/>
                 </a:solidFill>
@@ -26346,22 +25108,13 @@
               <a:t> and</a:t>
             </a:r>
             <a:r>
-              <a:rPr sz="1600" b="0" dirty="0" smtClean="0">
+              <a:rPr sz="1600" b="0" dirty="0">
                 <a:solidFill>
                   <a:srgbClr val="141414"/>
                 </a:solidFill>
                 <a:latin typeface="Arial"/>
               </a:rPr>
-              <a:t> </a:t>
-            </a:r>
-            <a:r>
-              <a:rPr sz="1600" b="0" dirty="0">
-                <a:solidFill>
-                  <a:srgbClr val="141414"/>
-                </a:solidFill>
-                <a:latin typeface="Arial"/>
-              </a:rPr>
-              <a:t>tamper evident auditing, while sensitive FIR data stays off chain.</a:t>
+              <a:t> tamper evident auditing, while sensitive FIR data stays off chain.</a:t>
             </a:r>
           </a:p>
         </p:txBody>
@@ -26374,13 +25127,6 @@
   <p:transition spd="med">
     <p:pull/>
   </p:transition>
-  <p:timing>
-    <p:tnLst>
-      <p:par>
-        <p:cTn id="1" dur="indefinite" restart="never" nodeType="tmRoot"/>
-      </p:par>
-    </p:tnLst>
-  </p:timing>
 </p:sld>
 </file>
 
@@ -26455,13 +25201,6 @@
   <p:transition spd="slow">
     <p:wipe/>
   </p:transition>
-  <p:timing>
-    <p:tnLst>
-      <p:par>
-        <p:cTn id="1" dur="indefinite" restart="never" nodeType="tmRoot"/>
-      </p:par>
-    </p:tnLst>
-  </p:timing>
 </p:sld>
 </file>
 
@@ -26548,11 +25287,41 @@
                 <a:tableStyleId>{5C22544A-7EE6-4342-B048-85BDC9FD1C3A}</a:tableStyleId>
               </a:tblPr>
               <a:tblGrid>
-                <a:gridCol w="2286000"/>
-                <a:gridCol w="1143000"/>
-                <a:gridCol w="1143000"/>
-                <a:gridCol w="1143000"/>
-                <a:gridCol w="2606040"/>
+                <a:gridCol w="2286000">
+                  <a:extLst>
+                    <a:ext uri="{9D8B030D-6E8A-4147-A177-3AD203B41FA5}">
+                      <a16:colId xmlns:a16="http://schemas.microsoft.com/office/drawing/2014/main" val="20000"/>
+                    </a:ext>
+                  </a:extLst>
+                </a:gridCol>
+                <a:gridCol w="1143000">
+                  <a:extLst>
+                    <a:ext uri="{9D8B030D-6E8A-4147-A177-3AD203B41FA5}">
+                      <a16:colId xmlns:a16="http://schemas.microsoft.com/office/drawing/2014/main" val="20001"/>
+                    </a:ext>
+                  </a:extLst>
+                </a:gridCol>
+                <a:gridCol w="1143000">
+                  <a:extLst>
+                    <a:ext uri="{9D8B030D-6E8A-4147-A177-3AD203B41FA5}">
+                      <a16:colId xmlns:a16="http://schemas.microsoft.com/office/drawing/2014/main" val="20002"/>
+                    </a:ext>
+                  </a:extLst>
+                </a:gridCol>
+                <a:gridCol w="1143000">
+                  <a:extLst>
+                    <a:ext uri="{9D8B030D-6E8A-4147-A177-3AD203B41FA5}">
+                      <a16:colId xmlns:a16="http://schemas.microsoft.com/office/drawing/2014/main" val="20003"/>
+                    </a:ext>
+                  </a:extLst>
+                </a:gridCol>
+                <a:gridCol w="2606040">
+                  <a:extLst>
+                    <a:ext uri="{9D8B030D-6E8A-4147-A177-3AD203B41FA5}">
+                      <a16:colId xmlns:a16="http://schemas.microsoft.com/office/drawing/2014/main" val="20004"/>
+                    </a:ext>
+                  </a:extLst>
+                </a:gridCol>
               </a:tblGrid>
               <a:tr h="560070">
                 <a:tc>
@@ -26670,6 +25439,11 @@
                     </a:solidFill>
                   </a:tcPr>
                 </a:tc>
+                <a:extLst>
+                  <a:ext uri="{0D108BD9-81ED-4DB2-BD59-A6C34878D82A}">
+                    <a16:rowId xmlns:a16="http://schemas.microsoft.com/office/drawing/2014/main" val="10000"/>
+                  </a:ext>
+                </a:extLst>
               </a:tr>
               <a:tr h="560070">
                 <a:tc>
@@ -26787,6 +25561,11 @@
                     </a:solidFill>
                   </a:tcPr>
                 </a:tc>
+                <a:extLst>
+                  <a:ext uri="{0D108BD9-81ED-4DB2-BD59-A6C34878D82A}">
+                    <a16:rowId xmlns:a16="http://schemas.microsoft.com/office/drawing/2014/main" val="10001"/>
+                  </a:ext>
+                </a:extLst>
               </a:tr>
               <a:tr h="560070">
                 <a:tc>
@@ -26904,6 +25683,11 @@
                     </a:solidFill>
                   </a:tcPr>
                 </a:tc>
+                <a:extLst>
+                  <a:ext uri="{0D108BD9-81ED-4DB2-BD59-A6C34878D82A}">
+                    <a16:rowId xmlns:a16="http://schemas.microsoft.com/office/drawing/2014/main" val="10002"/>
+                  </a:ext>
+                </a:extLst>
               </a:tr>
               <a:tr h="560070">
                 <a:tc>
@@ -27021,6 +25805,11 @@
                     </a:solidFill>
                   </a:tcPr>
                 </a:tc>
+                <a:extLst>
+                  <a:ext uri="{0D108BD9-81ED-4DB2-BD59-A6C34878D82A}">
+                    <a16:rowId xmlns:a16="http://schemas.microsoft.com/office/drawing/2014/main" val="10003"/>
+                  </a:ext>
+                </a:extLst>
               </a:tr>
               <a:tr h="560070">
                 <a:tc>
@@ -27138,6 +25927,11 @@
                     </a:solidFill>
                   </a:tcPr>
                 </a:tc>
+                <a:extLst>
+                  <a:ext uri="{0D108BD9-81ED-4DB2-BD59-A6C34878D82A}">
+                    <a16:rowId xmlns:a16="http://schemas.microsoft.com/office/drawing/2014/main" val="10004"/>
+                  </a:ext>
+                </a:extLst>
               </a:tr>
               <a:tr h="560070">
                 <a:tc>
@@ -27255,6 +26049,11 @@
                     </a:solidFill>
                   </a:tcPr>
                 </a:tc>
+                <a:extLst>
+                  <a:ext uri="{0D108BD9-81ED-4DB2-BD59-A6C34878D82A}">
+                    <a16:rowId xmlns:a16="http://schemas.microsoft.com/office/drawing/2014/main" val="10005"/>
+                  </a:ext>
+                </a:extLst>
               </a:tr>
               <a:tr h="560070">
                 <a:tc>
@@ -27372,6 +26171,11 @@
                     </a:solidFill>
                   </a:tcPr>
                 </a:tc>
+                <a:extLst>
+                  <a:ext uri="{0D108BD9-81ED-4DB2-BD59-A6C34878D82A}">
+                    <a16:rowId xmlns:a16="http://schemas.microsoft.com/office/drawing/2014/main" val="10006"/>
+                  </a:ext>
+                </a:extLst>
               </a:tr>
               <a:tr h="560070">
                 <a:tc>
@@ -27489,6 +26293,11 @@
                     </a:solidFill>
                   </a:tcPr>
                 </a:tc>
+                <a:extLst>
+                  <a:ext uri="{0D108BD9-81ED-4DB2-BD59-A6C34878D82A}">
+                    <a16:rowId xmlns:a16="http://schemas.microsoft.com/office/drawing/2014/main" val="10007"/>
+                  </a:ext>
+                </a:extLst>
               </a:tr>
             </a:tbl>
           </a:graphicData>
@@ -27502,13 +26311,6 @@
   <p:transition spd="slow">
     <p:push dir="u"/>
   </p:transition>
-  <p:timing>
-    <p:tnLst>
-      <p:par>
-        <p:cTn id="1" dur="indefinite" restart="never" nodeType="tmRoot"/>
-      </p:par>
-    </p:tnLst>
-  </p:timing>
 </p:sld>
 </file>
 
@@ -27569,23 +26371,7 @@
             </a:pPr>
             <a:r>
               <a:rPr lang="en-US" sz="1600" dirty="0"/>
-              <a:t>Digital police systems are already being used in Punjab, </a:t>
-            </a:r>
-            <a:r>
-              <a:rPr lang="en-US" sz="1600" dirty="0" smtClean="0"/>
-              <a:t>Sindh and </a:t>
-            </a:r>
-            <a:r>
-              <a:rPr lang="en-US" sz="1600" dirty="0"/>
-              <a:t>Khyber Pakhtunkhwa for complaints, FIR records, case </a:t>
-            </a:r>
-            <a:r>
-              <a:rPr lang="en-US" sz="1600" dirty="0" smtClean="0"/>
-              <a:t>tracking </a:t>
-            </a:r>
-            <a:r>
-              <a:rPr lang="en-US" sz="1600" dirty="0"/>
-              <a:t>and officer management.</a:t>
+              <a:t>Digital police systems are already being used in Punjab, Sindh and Khyber Pakhtunkhwa for complaints, FIR records, case tracking and officer management.</a:t>
             </a:r>
           </a:p>
           <a:p>
@@ -27607,15 +26393,7 @@
             </a:pPr>
             <a:r>
               <a:rPr lang="en-US" sz="1600" dirty="0"/>
-              <a:t>These systems have improved the way police records are created, </a:t>
-            </a:r>
-            <a:r>
-              <a:rPr lang="en-US" sz="1600" dirty="0" smtClean="0"/>
-              <a:t>stored and </a:t>
-            </a:r>
-            <a:r>
-              <a:rPr lang="en-US" sz="1600" dirty="0"/>
-              <a:t>accessed.</a:t>
+              <a:t>These systems have improved the way police records are created, stored and accessed.</a:t>
             </a:r>
           </a:p>
           <a:p>
@@ -27725,15 +26503,7 @@
             </a:pPr>
             <a:r>
               <a:rPr lang="en-US" sz="1600" dirty="0"/>
-              <a:t>Based on the reviewed systems, there is an opportunity to combine digital FIR management, blockchain, hashing, </a:t>
-            </a:r>
-            <a:r>
-              <a:rPr lang="en-US" sz="1600" dirty="0" smtClean="0"/>
-              <a:t>RBAC and </a:t>
-            </a:r>
-            <a:r>
-              <a:rPr lang="en-US" sz="1600" dirty="0"/>
-              <a:t>audit tracking in one system.</a:t>
+              <a:t>Based on the reviewed systems, there is an opportunity to combine digital FIR management, blockchain, hashing, RBAC and audit tracking in one system.</a:t>
             </a:r>
             <a:endParaRPr sz="1600" dirty="0"/>
           </a:p>
@@ -27761,13 +26531,6 @@
       </p:transition>
     </mc:Fallback>
   </mc:AlternateContent>
-  <p:timing>
-    <p:tnLst>
-      <p:par>
-        <p:cTn id="1" dur="indefinite" restart="never" nodeType="tmRoot"/>
-      </p:par>
-    </p:tnLst>
-  </p:timing>
 </p:sld>
 </file>
 
@@ -27846,13 +26609,6 @@
       </p:transition>
     </mc:Fallback>
   </mc:AlternateContent>
-  <p:timing>
-    <p:tnLst>
-      <p:par>
-        <p:cTn id="1" dur="indefinite" restart="never" nodeType="tmRoot"/>
-      </p:par>
-    </p:tnLst>
-  </p:timing>
 </p:sld>
 </file>
 

--- a/Final_Digital_FIR_Final_FYP_Presentation.pptx
+++ b/Final_Digital_FIR_Final_FYP_Presentation.pptx
@@ -280,7 +280,7 @@
       </p15:sldGuideLst>
     </p:ext>
     <p:ext uri="http://customooxmlschemas.google.com/">
-      <go:slidesCustomData xmlns:go="http://customooxmlschemas.google.com/" xmlns:ahyp="http://schemas.microsoft.com/office/drawing/2018/hyperlinkcolor" xmlns:p15="http://schemas.microsoft.com/office/powerpoint/2012/main" xmlns:p14="http://schemas.microsoft.com/office/powerpoint/2010/main" xmlns:com="http://schemas.openxmlformats.org/drawingml/2006/compatibility" xmlns:pvml="urn:schemas-microsoft-com:office:powerpoint" xmlns:v="urn:schemas-microsoft-com:vml" xmlns:o="urn:schemas-microsoft-com:office:office" xmlns:dgm="http://schemas.openxmlformats.org/drawingml/2006/diagram" xmlns:c="http://schemas.openxmlformats.org/drawingml/2006/chart" xmlns:mv="urn:schemas-microsoft-com:mac:vml" xmlns:mc="http://schemas.openxmlformats.org/markup-compatibility/2006" xmlns="" r:id="rId27" roundtripDataSignature="AMtx7mgqso+muD7qxSKyk66oXGt+27nMBQ=="/>
+      <go:slidesCustomData xmlns="" xmlns:mc="http://schemas.openxmlformats.org/markup-compatibility/2006" xmlns:mv="urn:schemas-microsoft-com:mac:vml" xmlns:c="http://schemas.openxmlformats.org/drawingml/2006/chart" xmlns:dgm="http://schemas.openxmlformats.org/drawingml/2006/diagram" xmlns:o="urn:schemas-microsoft-com:office:office" xmlns:v="urn:schemas-microsoft-com:vml" xmlns:pvml="urn:schemas-microsoft-com:office:powerpoint" xmlns:com="http://schemas.openxmlformats.org/drawingml/2006/compatibility" xmlns:p14="http://schemas.microsoft.com/office/powerpoint/2010/main" xmlns:p15="http://schemas.microsoft.com/office/powerpoint/2012/main" xmlns:ahyp="http://schemas.microsoft.com/office/drawing/2018/hyperlinkcolor" xmlns:go="http://customooxmlschemas.google.com/" r:id="rId27" roundtripDataSignature="AMtx7mgqso+muD7qxSKyk66oXGt+27nMBQ=="/>
     </p:ext>
   </p:extLst>
 </p:presentation>
@@ -18252,9 +18252,17 @@
               </a:rPr>
               <a:t> PDFs</a:t>
             </a:r>
+            <a:r>
+              <a:rPr sz="1600" dirty="0"/>
+              <a:t/>
+            </a:r>
             <a:br>
               <a:rPr sz="1600" dirty="0"/>
             </a:br>
+            <a:r>
+              <a:rPr sz="1600" dirty="0"/>
+              <a:t/>
+            </a:r>
             <a:br>
               <a:rPr sz="1600" dirty="0"/>
             </a:br>
@@ -18626,9 +18634,17 @@
               </a:rPr>
               <a:t>Approval and audit events</a:t>
             </a:r>
+            <a:r>
+              <a:rPr sz="1600" dirty="0"/>
+              <a:t/>
+            </a:r>
             <a:br>
               <a:rPr sz="1600" dirty="0"/>
             </a:br>
+            <a:r>
+              <a:rPr sz="1600" dirty="0"/>
+              <a:t/>
+            </a:r>
             <a:br>
               <a:rPr sz="1600" dirty="0"/>
             </a:br>
@@ -19823,7 +19839,7 @@
         </p:nvSpPr>
         <p:spPr>
           <a:xfrm>
-            <a:off x="722313" y="4406900"/>
+            <a:off x="722313" y="3972791"/>
             <a:ext cx="7772400" cy="1362075"/>
           </a:xfrm>
           <a:prstGeom prst="rect">
@@ -19860,7 +19876,7 @@
         </p:nvSpPr>
         <p:spPr>
           <a:xfrm>
-            <a:off x="502920" y="1325880"/>
+            <a:off x="502920" y="891771"/>
             <a:ext cx="3749039" cy="4480560"/>
           </a:xfrm>
           <a:prstGeom prst="roundRect">
@@ -19906,7 +19922,7 @@
         </p:nvSpPr>
         <p:spPr>
           <a:xfrm>
-            <a:off x="502920" y="1325880"/>
+            <a:off x="502920" y="891771"/>
             <a:ext cx="64008" cy="4480560"/>
           </a:xfrm>
           <a:prstGeom prst="rect">
@@ -19950,7 +19966,7 @@
         </p:nvSpPr>
         <p:spPr>
           <a:xfrm>
-            <a:off x="914401" y="1403604"/>
+            <a:off x="914401" y="969495"/>
             <a:ext cx="3520439" cy="347472"/>
           </a:xfrm>
           <a:prstGeom prst="rect">
@@ -19985,7 +20001,7 @@
         </p:nvSpPr>
         <p:spPr>
           <a:xfrm>
-            <a:off x="658368" y="1828800"/>
+            <a:off x="658368" y="1394691"/>
             <a:ext cx="3520439" cy="3602396"/>
           </a:xfrm>
           <a:prstGeom prst="rect">
@@ -20177,7 +20193,7 @@
         </p:nvSpPr>
         <p:spPr>
           <a:xfrm>
-            <a:off x="4526280" y="1335116"/>
+            <a:off x="4526280" y="901007"/>
             <a:ext cx="3749039" cy="4480560"/>
           </a:xfrm>
           <a:prstGeom prst="roundRect">
@@ -20223,7 +20239,7 @@
         </p:nvSpPr>
         <p:spPr>
           <a:xfrm>
-            <a:off x="4526280" y="1325880"/>
+            <a:off x="4526280" y="891771"/>
             <a:ext cx="64008" cy="4480560"/>
           </a:xfrm>
           <a:prstGeom prst="rect">
@@ -20267,7 +20283,7 @@
         </p:nvSpPr>
         <p:spPr>
           <a:xfrm>
-            <a:off x="4974274" y="1403604"/>
+            <a:off x="4974274" y="969495"/>
             <a:ext cx="3520439" cy="347472"/>
           </a:xfrm>
           <a:prstGeom prst="rect">
@@ -20302,7 +20318,7 @@
         </p:nvSpPr>
         <p:spPr>
           <a:xfrm>
-            <a:off x="4681728" y="1828800"/>
+            <a:off x="4681728" y="1394691"/>
             <a:ext cx="3520439" cy="2798458"/>
           </a:xfrm>
           <a:prstGeom prst="rect">
@@ -20418,9 +20434,17 @@
               </a:rPr>
               <a:t>Legal authorization of real FIRs</a:t>
             </a:r>
+            <a:r>
+              <a:rPr sz="1550" dirty="0"/>
+              <a:t/>
+            </a:r>
             <a:br>
               <a:rPr sz="1550" dirty="0"/>
             </a:br>
+            <a:r>
+              <a:rPr sz="1550" dirty="0"/>
+              <a:t/>
+            </a:r>
             <a:br>
               <a:rPr sz="1550" dirty="0"/>
             </a:br>
@@ -24000,6 +24024,9 @@
               </a:rPr>
               <a:t>Thank You</a:t>
             </a:r>
+            <a:r>
+              <a:t/>
+            </a:r>
             <a:br/>
             <a:r>
               <a:rPr sz="2400" b="1">
@@ -25290,35 +25317,35 @@
                 <a:gridCol w="2286000">
                   <a:extLst>
                     <a:ext uri="{9D8B030D-6E8A-4147-A177-3AD203B41FA5}">
-                      <a16:colId xmlns:a16="http://schemas.microsoft.com/office/drawing/2014/main" val="20000"/>
+                      <a16:colId xmlns:a16="http://schemas.microsoft.com/office/drawing/2014/main" xmlns="" val="20000"/>
                     </a:ext>
                   </a:extLst>
                 </a:gridCol>
                 <a:gridCol w="1143000">
                   <a:extLst>
                     <a:ext uri="{9D8B030D-6E8A-4147-A177-3AD203B41FA5}">
-                      <a16:colId xmlns:a16="http://schemas.microsoft.com/office/drawing/2014/main" val="20001"/>
+                      <a16:colId xmlns:a16="http://schemas.microsoft.com/office/drawing/2014/main" xmlns="" val="20001"/>
                     </a:ext>
                   </a:extLst>
                 </a:gridCol>
                 <a:gridCol w="1143000">
                   <a:extLst>
                     <a:ext uri="{9D8B030D-6E8A-4147-A177-3AD203B41FA5}">
-                      <a16:colId xmlns:a16="http://schemas.microsoft.com/office/drawing/2014/main" val="20002"/>
+                      <a16:colId xmlns:a16="http://schemas.microsoft.com/office/drawing/2014/main" xmlns="" val="20002"/>
                     </a:ext>
                   </a:extLst>
                 </a:gridCol>
                 <a:gridCol w="1143000">
                   <a:extLst>
                     <a:ext uri="{9D8B030D-6E8A-4147-A177-3AD203B41FA5}">
-                      <a16:colId xmlns:a16="http://schemas.microsoft.com/office/drawing/2014/main" val="20003"/>
+                      <a16:colId xmlns:a16="http://schemas.microsoft.com/office/drawing/2014/main" xmlns="" val="20003"/>
                     </a:ext>
                   </a:extLst>
                 </a:gridCol>
                 <a:gridCol w="2606040">
                   <a:extLst>
                     <a:ext uri="{9D8B030D-6E8A-4147-A177-3AD203B41FA5}">
-                      <a16:colId xmlns:a16="http://schemas.microsoft.com/office/drawing/2014/main" val="20004"/>
+                      <a16:colId xmlns:a16="http://schemas.microsoft.com/office/drawing/2014/main" xmlns="" val="20004"/>
                     </a:ext>
                   </a:extLst>
                 </a:gridCol>
@@ -25441,7 +25468,7 @@
                 </a:tc>
                 <a:extLst>
                   <a:ext uri="{0D108BD9-81ED-4DB2-BD59-A6C34878D82A}">
-                    <a16:rowId xmlns:a16="http://schemas.microsoft.com/office/drawing/2014/main" val="10000"/>
+                    <a16:rowId xmlns:a16="http://schemas.microsoft.com/office/drawing/2014/main" xmlns="" val="10000"/>
                   </a:ext>
                 </a:extLst>
               </a:tr>
@@ -25563,7 +25590,7 @@
                 </a:tc>
                 <a:extLst>
                   <a:ext uri="{0D108BD9-81ED-4DB2-BD59-A6C34878D82A}">
-                    <a16:rowId xmlns:a16="http://schemas.microsoft.com/office/drawing/2014/main" val="10001"/>
+                    <a16:rowId xmlns:a16="http://schemas.microsoft.com/office/drawing/2014/main" xmlns="" val="10001"/>
                   </a:ext>
                 </a:extLst>
               </a:tr>
@@ -25685,7 +25712,7 @@
                 </a:tc>
                 <a:extLst>
                   <a:ext uri="{0D108BD9-81ED-4DB2-BD59-A6C34878D82A}">
-                    <a16:rowId xmlns:a16="http://schemas.microsoft.com/office/drawing/2014/main" val="10002"/>
+                    <a16:rowId xmlns:a16="http://schemas.microsoft.com/office/drawing/2014/main" xmlns="" val="10002"/>
                   </a:ext>
                 </a:extLst>
               </a:tr>
@@ -25807,7 +25834,7 @@
                 </a:tc>
                 <a:extLst>
                   <a:ext uri="{0D108BD9-81ED-4DB2-BD59-A6C34878D82A}">
-                    <a16:rowId xmlns:a16="http://schemas.microsoft.com/office/drawing/2014/main" val="10003"/>
+                    <a16:rowId xmlns:a16="http://schemas.microsoft.com/office/drawing/2014/main" xmlns="" val="10003"/>
                   </a:ext>
                 </a:extLst>
               </a:tr>
@@ -25929,7 +25956,7 @@
                 </a:tc>
                 <a:extLst>
                   <a:ext uri="{0D108BD9-81ED-4DB2-BD59-A6C34878D82A}">
-                    <a16:rowId xmlns:a16="http://schemas.microsoft.com/office/drawing/2014/main" val="10004"/>
+                    <a16:rowId xmlns:a16="http://schemas.microsoft.com/office/drawing/2014/main" xmlns="" val="10004"/>
                   </a:ext>
                 </a:extLst>
               </a:tr>
@@ -26051,7 +26078,7 @@
                 </a:tc>
                 <a:extLst>
                   <a:ext uri="{0D108BD9-81ED-4DB2-BD59-A6C34878D82A}">
-                    <a16:rowId xmlns:a16="http://schemas.microsoft.com/office/drawing/2014/main" val="10005"/>
+                    <a16:rowId xmlns:a16="http://schemas.microsoft.com/office/drawing/2014/main" xmlns="" val="10005"/>
                   </a:ext>
                 </a:extLst>
               </a:tr>
@@ -26173,7 +26200,7 @@
                 </a:tc>
                 <a:extLst>
                   <a:ext uri="{0D108BD9-81ED-4DB2-BD59-A6C34878D82A}">
-                    <a16:rowId xmlns:a16="http://schemas.microsoft.com/office/drawing/2014/main" val="10006"/>
+                    <a16:rowId xmlns:a16="http://schemas.microsoft.com/office/drawing/2014/main" xmlns="" val="10006"/>
                   </a:ext>
                 </a:extLst>
               </a:tr>
@@ -26295,7 +26322,7 @@
                 </a:tc>
                 <a:extLst>
                   <a:ext uri="{0D108BD9-81ED-4DB2-BD59-A6C34878D82A}">
-                    <a16:rowId xmlns:a16="http://schemas.microsoft.com/office/drawing/2014/main" val="10007"/>
+                    <a16:rowId xmlns:a16="http://schemas.microsoft.com/office/drawing/2014/main" xmlns="" val="10007"/>
                   </a:ext>
                 </a:extLst>
               </a:tr>

--- a/Final_Digital_FIR_Final_FYP_Presentation.pptx
+++ b/Final_Digital_FIR_Final_FYP_Presentation.pptx
@@ -5,7 +5,7 @@
     <p:sldMasterId id="2147483648" r:id="rId1"/>
   </p:sldMasterIdLst>
   <p:notesMasterIdLst>
-    <p:notesMasterId r:id="rId26"/>
+    <p:notesMasterId r:id="rId27"/>
   </p:notesMasterIdLst>
   <p:sldIdLst>
     <p:sldId id="256" r:id="rId2"/>
@@ -24,14 +24,15 @@
     <p:sldId id="268" r:id="rId15"/>
     <p:sldId id="269" r:id="rId16"/>
     <p:sldId id="270" r:id="rId17"/>
-    <p:sldId id="271" r:id="rId18"/>
-    <p:sldId id="272" r:id="rId19"/>
-    <p:sldId id="273" r:id="rId20"/>
-    <p:sldId id="274" r:id="rId21"/>
-    <p:sldId id="275" r:id="rId22"/>
-    <p:sldId id="276" r:id="rId23"/>
-    <p:sldId id="277" r:id="rId24"/>
-    <p:sldId id="278" r:id="rId25"/>
+    <p:sldId id="281" r:id="rId18"/>
+    <p:sldId id="271" r:id="rId19"/>
+    <p:sldId id="272" r:id="rId20"/>
+    <p:sldId id="273" r:id="rId21"/>
+    <p:sldId id="274" r:id="rId22"/>
+    <p:sldId id="275" r:id="rId23"/>
+    <p:sldId id="276" r:id="rId24"/>
+    <p:sldId id="277" r:id="rId25"/>
+    <p:sldId id="278" r:id="rId26"/>
   </p:sldIdLst>
   <p:sldSz cx="9144000" cy="6858000" type="screen4x3"/>
   <p:notesSz cx="7315200" cy="9601200"/>
@@ -280,7 +281,7 @@
       </p15:sldGuideLst>
     </p:ext>
     <p:ext uri="http://customooxmlschemas.google.com/">
-      <go:slidesCustomData xmlns="" xmlns:mc="http://schemas.openxmlformats.org/markup-compatibility/2006" xmlns:mv="urn:schemas-microsoft-com:mac:vml" xmlns:c="http://schemas.openxmlformats.org/drawingml/2006/chart" xmlns:dgm="http://schemas.openxmlformats.org/drawingml/2006/diagram" xmlns:o="urn:schemas-microsoft-com:office:office" xmlns:v="urn:schemas-microsoft-com:vml" xmlns:pvml="urn:schemas-microsoft-com:office:powerpoint" xmlns:com="http://schemas.openxmlformats.org/drawingml/2006/compatibility" xmlns:p14="http://schemas.microsoft.com/office/powerpoint/2010/main" xmlns:p15="http://schemas.microsoft.com/office/powerpoint/2012/main" xmlns:ahyp="http://schemas.microsoft.com/office/drawing/2018/hyperlinkcolor" xmlns:go="http://customooxmlschemas.google.com/" r:id="rId27" roundtripDataSignature="AMtx7mgqso+muD7qxSKyk66oXGt+27nMBQ=="/>
+      <go:slidesCustomData xmlns:go="http://customooxmlschemas.google.com/" xmlns:ahyp="http://schemas.microsoft.com/office/drawing/2018/hyperlinkcolor" xmlns:p15="http://schemas.microsoft.com/office/powerpoint/2012/main" xmlns:p14="http://schemas.microsoft.com/office/powerpoint/2010/main" xmlns:com="http://schemas.openxmlformats.org/drawingml/2006/compatibility" xmlns:pvml="urn:schemas-microsoft-com:office:powerpoint" xmlns:v="urn:schemas-microsoft-com:vml" xmlns:o="urn:schemas-microsoft-com:office:office" xmlns:dgm="http://schemas.openxmlformats.org/drawingml/2006/diagram" xmlns:c="http://schemas.openxmlformats.org/drawingml/2006/chart" xmlns:mv="urn:schemas-microsoft-com:mac:vml" xmlns:mc="http://schemas.openxmlformats.org/markup-compatibility/2006" xmlns="" r:id="rId28" roundtripDataSignature="AMtx7mgqso+muD7qxSKyk66oXGt+27nMBQ=="/>
     </p:ext>
   </p:extLst>
 </p:presentation>
@@ -1891,6 +1892,133 @@
   <p:cSld>
     <p:spTree>
       <p:nvGrpSpPr>
+        <p:cNvPr id="1" name="Shape 165"/>
+        <p:cNvGrpSpPr/>
+        <p:nvPr/>
+      </p:nvGrpSpPr>
+      <p:grpSpPr>
+        <a:xfrm>
+          <a:off x="0" y="0"/>
+          <a:ext cx="0" cy="0"/>
+          <a:chOff x="0" y="0"/>
+          <a:chExt cx="0" cy="0"/>
+        </a:xfrm>
+      </p:grpSpPr>
+      <p:sp>
+        <p:nvSpPr>
+          <p:cNvPr id="166" name="Google Shape;166;p13:notes"/>
+          <p:cNvSpPr txBox="1">
+            <a:spLocks noGrp="1"/>
+          </p:cNvSpPr>
+          <p:nvPr>
+            <p:ph type="body" idx="1"/>
+          </p:nvPr>
+        </p:nvSpPr>
+        <p:spPr>
+          <a:xfrm>
+            <a:off x="731500" y="4560550"/>
+            <a:ext cx="5852150" cy="4320525"/>
+          </a:xfrm>
+          <a:prstGeom prst="rect">
+            <a:avLst/>
+          </a:prstGeom>
+          <a:noFill/>
+          <a:ln>
+            <a:noFill/>
+          </a:ln>
+        </p:spPr>
+        <p:txBody>
+          <a:bodyPr spcFirstLastPara="1" wrap="square" lIns="91425" tIns="91425" rIns="91425" bIns="91425" anchor="t" anchorCtr="0">
+            <a:noAutofit/>
+          </a:bodyPr>
+          <a:lstStyle/>
+          <a:p>
+            <a:pPr marL="0" lvl="0" indent="0" algn="l" rtl="0">
+              <a:lnSpc>
+                <a:spcPct val="100000"/>
+              </a:lnSpc>
+              <a:spcBef>
+                <a:spcPts val="0"/>
+              </a:spcBef>
+              <a:spcAft>
+                <a:spcPts val="0"/>
+              </a:spcAft>
+              <a:buSzPts val="1100"/>
+              <a:buNone/>
+            </a:pPr>
+            <a:endParaRPr/>
+          </a:p>
+        </p:txBody>
+      </p:sp>
+      <p:sp>
+        <p:nvSpPr>
+          <p:cNvPr id="167" name="Google Shape;167;p13:notes"/>
+          <p:cNvSpPr>
+            <a:spLocks noGrp="1" noRot="1" noChangeAspect="1"/>
+          </p:cNvSpPr>
+          <p:nvPr>
+            <p:ph type="sldImg" idx="2"/>
+          </p:nvPr>
+        </p:nvSpPr>
+        <p:spPr>
+          <a:xfrm>
+            <a:off x="1257300" y="720725"/>
+            <a:ext cx="4800600" cy="3600450"/>
+          </a:xfrm>
+          <a:custGeom>
+            <a:avLst/>
+            <a:gdLst/>
+            <a:ahLst/>
+            <a:cxnLst/>
+            <a:rect l="l" t="t" r="r" b="b"/>
+            <a:pathLst>
+              <a:path w="120000" h="120000" extrusionOk="0">
+                <a:moveTo>
+                  <a:pt x="0" y="0"/>
+                </a:moveTo>
+                <a:lnTo>
+                  <a:pt x="120000" y="0"/>
+                </a:lnTo>
+                <a:lnTo>
+                  <a:pt x="120000" y="120000"/>
+                </a:lnTo>
+                <a:lnTo>
+                  <a:pt x="0" y="120000"/>
+                </a:lnTo>
+                <a:close/>
+              </a:path>
+            </a:pathLst>
+          </a:custGeom>
+          <a:noFill/>
+          <a:ln w="9525" cap="flat" cmpd="sng">
+            <a:solidFill>
+              <a:srgbClr val="000000"/>
+            </a:solidFill>
+            <a:prstDash val="solid"/>
+            <a:round/>
+            <a:headEnd type="none" w="sm" len="sm"/>
+            <a:tailEnd type="none" w="sm" len="sm"/>
+          </a:ln>
+        </p:spPr>
+      </p:sp>
+    </p:spTree>
+    <p:extLst>
+      <p:ext uri="{BB962C8B-B14F-4D97-AF65-F5344CB8AC3E}">
+        <p14:creationId xmlns:p14="http://schemas.microsoft.com/office/powerpoint/2010/main" val="1941020794"/>
+      </p:ext>
+    </p:extLst>
+  </p:cSld>
+  <p:clrMapOvr>
+    <a:masterClrMapping/>
+  </p:clrMapOvr>
+</p:notes>
+</file>
+
+<file path=ppt/notesSlides/notesSlide18.xml><?xml version="1.0" encoding="utf-8"?>
+<p:notes xmlns:a="http://schemas.openxmlformats.org/drawingml/2006/main" xmlns:r="http://schemas.openxmlformats.org/officeDocument/2006/relationships" xmlns:p="http://schemas.openxmlformats.org/presentationml/2006/main" showMasterSp="0" showMasterPhAnim="0">
+  <p:cSld>
+    <p:spTree>
+      <p:nvGrpSpPr>
         <p:cNvPr id="1" name="Shape 171"/>
         <p:cNvGrpSpPr/>
         <p:nvPr/>
@@ -2013,7 +2141,7 @@
 </p:notes>
 </file>
 
-<file path=ppt/notesSlides/notesSlide18.xml><?xml version="1.0" encoding="utf-8"?>
+<file path=ppt/notesSlides/notesSlide19.xml><?xml version="1.0" encoding="utf-8"?>
 <p:notes xmlns:a="http://schemas.openxmlformats.org/drawingml/2006/main" xmlns:r="http://schemas.openxmlformats.org/officeDocument/2006/relationships" xmlns:p="http://schemas.openxmlformats.org/presentationml/2006/main" showMasterSp="0" showMasterPhAnim="0">
   <p:cSld>
     <p:spTree>
@@ -19749,6 +19877,67 @@
           <a:chExt cx="0" cy="0"/>
         </a:xfrm>
       </p:grpSpPr>
+      <p:pic>
+        <p:nvPicPr>
+          <p:cNvPr id="3" name="Picture 2"/>
+          <p:cNvPicPr>
+            <a:picLocks noChangeAspect="1"/>
+          </p:cNvPicPr>
+          <p:nvPr/>
+        </p:nvPicPr>
+        <p:blipFill>
+          <a:blip r:embed="rId3"/>
+          <a:stretch>
+            <a:fillRect/>
+          </a:stretch>
+        </p:blipFill>
+        <p:spPr>
+          <a:xfrm>
+            <a:off x="695275" y="120071"/>
+            <a:ext cx="7517448" cy="5652655"/>
+          </a:xfrm>
+          <a:prstGeom prst="rect">
+            <a:avLst/>
+          </a:prstGeom>
+        </p:spPr>
+      </p:pic>
+    </p:spTree>
+  </p:cSld>
+  <p:clrMapOvr>
+    <a:masterClrMapping/>
+  </p:clrMapOvr>
+  <mc:AlternateContent xmlns:mc="http://schemas.openxmlformats.org/markup-compatibility/2006" xmlns:p14="http://schemas.microsoft.com/office/powerpoint/2010/main">
+    <mc:Choice Requires="p14">
+      <p:transition spd="slow" p14:dur="1500">
+        <p:split orient="vert"/>
+      </p:transition>
+    </mc:Choice>
+    <mc:Fallback xmlns="">
+      <p:transition spd="slow">
+        <p:split orient="vert"/>
+      </p:transition>
+    </mc:Fallback>
+  </mc:AlternateContent>
+</p:sld>
+</file>
+
+<file path=ppt/slides/slide17.xml><?xml version="1.0" encoding="utf-8"?>
+<p:sld xmlns:a="http://schemas.openxmlformats.org/drawingml/2006/main" xmlns:r="http://schemas.openxmlformats.org/officeDocument/2006/relationships" xmlns:p="http://schemas.openxmlformats.org/presentationml/2006/main">
+  <p:cSld>
+    <p:spTree>
+      <p:nvGrpSpPr>
+        <p:cNvPr id="1" name="Shape 168"/>
+        <p:cNvGrpSpPr/>
+        <p:nvPr/>
+      </p:nvGrpSpPr>
+      <p:grpSpPr>
+        <a:xfrm>
+          <a:off x="0" y="0"/>
+          <a:ext cx="0" cy="0"/>
+          <a:chOff x="0" y="0"/>
+          <a:chExt cx="0" cy="0"/>
+        </a:xfrm>
+      </p:grpSpPr>
       <p:sp>
         <p:nvSpPr>
           <p:cNvPr id="169" name="Google Shape;169;p13"/>
@@ -19791,6 +19980,11 @@
         </p:txBody>
       </p:sp>
     </p:spTree>
+    <p:extLst>
+      <p:ext uri="{BB962C8B-B14F-4D97-AF65-F5344CB8AC3E}">
+        <p14:creationId xmlns:p14="http://schemas.microsoft.com/office/powerpoint/2010/main" val="1416078434"/>
+      </p:ext>
+    </p:extLst>
   </p:cSld>
   <p:clrMapOvr>
     <a:masterClrMapping/>
@@ -19810,7 +20004,7 @@
 </p:sld>
 </file>
 
-<file path=ppt/slides/slide17.xml><?xml version="1.0" encoding="utf-8"?>
+<file path=ppt/slides/slide18.xml><?xml version="1.0" encoding="utf-8"?>
 <p:sld xmlns:a="http://schemas.openxmlformats.org/drawingml/2006/main" xmlns:r="http://schemas.openxmlformats.org/officeDocument/2006/relationships" xmlns:p="http://schemas.openxmlformats.org/presentationml/2006/main">
   <p:cSld>
     <p:spTree>
@@ -20479,7 +20673,7 @@
 </p:sld>
 </file>
 
-<file path=ppt/slides/slide18.xml><?xml version="1.0" encoding="utf-8"?>
+<file path=ppt/slides/slide19.xml><?xml version="1.0" encoding="utf-8"?>
 <p:sld xmlns:a="http://schemas.openxmlformats.org/drawingml/2006/main" xmlns:r="http://schemas.openxmlformats.org/officeDocument/2006/relationships" xmlns:p="http://schemas.openxmlformats.org/presentationml/2006/main">
   <p:cSld>
     <p:spTree>
@@ -21582,912 +21776,6 @@
     <mc:Fallback xmlns="">
       <p:transition spd="slow">
         <p:checker/>
-      </p:transition>
-    </mc:Fallback>
-  </mc:AlternateContent>
-</p:sld>
-</file>
-
-<file path=ppt/slides/slide19.xml><?xml version="1.0" encoding="utf-8"?>
-<p:sld xmlns:a="http://schemas.openxmlformats.org/drawingml/2006/main" xmlns:r="http://schemas.openxmlformats.org/officeDocument/2006/relationships" xmlns:p="http://schemas.openxmlformats.org/presentationml/2006/main">
-  <p:cSld>
-    <p:spTree>
-      <p:nvGrpSpPr>
-        <p:cNvPr id="1" name=""/>
-        <p:cNvGrpSpPr/>
-        <p:nvPr/>
-      </p:nvGrpSpPr>
-      <p:grpSpPr>
-        <a:xfrm>
-          <a:off x="0" y="0"/>
-          <a:ext cx="0" cy="0"/>
-          <a:chOff x="0" y="0"/>
-          <a:chExt cx="0" cy="0"/>
-        </a:xfrm>
-      </p:grpSpPr>
-      <p:sp>
-        <p:nvSpPr>
-          <p:cNvPr id="2" name="Title 1"/>
-          <p:cNvSpPr>
-            <a:spLocks noGrp="1"/>
-          </p:cNvSpPr>
-          <p:nvPr>
-            <p:ph type="title"/>
-          </p:nvPr>
-        </p:nvSpPr>
-        <p:spPr/>
-        <p:txBody>
-          <a:bodyPr wrap="square" lIns="45720" tIns="18288" rIns="45720" bIns="18288"/>
-          <a:lstStyle/>
-          <a:p>
-            <a:r>
-              <a:rPr sz="2600" b="1">
-                <a:solidFill>
-                  <a:srgbClr val="1F497D"/>
-                </a:solidFill>
-                <a:latin typeface="Arial"/>
-              </a:rPr>
-              <a:t>Roles and Responsibilities</a:t>
-            </a:r>
-          </a:p>
-        </p:txBody>
-      </p:sp>
-      <p:sp>
-        <p:nvSpPr>
-          <p:cNvPr id="4" name="Rounded Rectangle 3"/>
-          <p:cNvSpPr/>
-          <p:nvPr/>
-        </p:nvSpPr>
-        <p:spPr>
-          <a:xfrm>
-            <a:off x="502920" y="1234440"/>
-            <a:ext cx="2514600" cy="3520440"/>
-          </a:xfrm>
-          <a:prstGeom prst="roundRect">
-            <a:avLst/>
-          </a:prstGeom>
-          <a:solidFill>
-            <a:srgbClr val="FFFFFF"/>
-          </a:solidFill>
-          <a:ln w="12700">
-            <a:solidFill>
-              <a:srgbClr val="CDD4DC"/>
-            </a:solidFill>
-          </a:ln>
-        </p:spPr>
-        <p:style>
-          <a:lnRef idx="1">
-            <a:schemeClr val="accent1"/>
-          </a:lnRef>
-          <a:fillRef idx="3">
-            <a:schemeClr val="accent1"/>
-          </a:fillRef>
-          <a:effectRef idx="2">
-            <a:schemeClr val="accent1"/>
-          </a:effectRef>
-          <a:fontRef idx="minor">
-            <a:schemeClr val="lt1"/>
-          </a:fontRef>
-        </p:style>
-        <p:txBody>
-          <a:bodyPr wrap="square" rtlCol="0" anchor="ctr"/>
-          <a:lstStyle/>
-          <a:p>
-            <a:pPr algn="ctr"/>
-            <a:endParaRPr/>
-          </a:p>
-        </p:txBody>
-      </p:sp>
-      <p:sp>
-        <p:nvSpPr>
-          <p:cNvPr id="5" name="Rectangle 4"/>
-          <p:cNvSpPr/>
-          <p:nvPr/>
-        </p:nvSpPr>
-        <p:spPr>
-          <a:xfrm>
-            <a:off x="502920" y="1234440"/>
-            <a:ext cx="64008" cy="3520440"/>
-          </a:xfrm>
-          <a:prstGeom prst="rect">
-            <a:avLst/>
-          </a:prstGeom>
-          <a:solidFill>
-            <a:srgbClr val="1F497D"/>
-          </a:solidFill>
-          <a:ln>
-            <a:noFill/>
-          </a:ln>
-        </p:spPr>
-        <p:style>
-          <a:lnRef idx="1">
-            <a:schemeClr val="accent1"/>
-          </a:lnRef>
-          <a:fillRef idx="3">
-            <a:schemeClr val="accent1"/>
-          </a:fillRef>
-          <a:effectRef idx="2">
-            <a:schemeClr val="accent1"/>
-          </a:effectRef>
-          <a:fontRef idx="minor">
-            <a:schemeClr val="lt1"/>
-          </a:fontRef>
-        </p:style>
-        <p:txBody>
-          <a:bodyPr wrap="square" rtlCol="0" anchor="ctr"/>
-          <a:lstStyle/>
-          <a:p>
-            <a:pPr algn="ctr"/>
-            <a:endParaRPr/>
-          </a:p>
-        </p:txBody>
-      </p:sp>
-      <p:sp>
-        <p:nvSpPr>
-          <p:cNvPr id="6" name="TextBox 5"/>
-          <p:cNvSpPr txBox="1"/>
-          <p:nvPr/>
-        </p:nvSpPr>
-        <p:spPr>
-          <a:xfrm>
-            <a:off x="658368" y="1344168"/>
-            <a:ext cx="2286000" cy="347472"/>
-          </a:xfrm>
-          <a:prstGeom prst="rect">
-            <a:avLst/>
-          </a:prstGeom>
-          <a:noFill/>
-        </p:spPr>
-        <p:txBody>
-          <a:bodyPr wrap="square" lIns="36576" tIns="27432" rIns="36576" bIns="27432">
-            <a:spAutoFit/>
-          </a:bodyPr>
-          <a:lstStyle/>
-          <a:p>
-            <a:pPr algn="l"/>
-            <a:r>
-              <a:rPr sz="1500" b="1">
-                <a:solidFill>
-                  <a:srgbClr val="1F497D"/>
-                </a:solidFill>
-                <a:latin typeface="Arial"/>
-              </a:rPr>
-              <a:t>Sharaiz Ahmed | 57288</a:t>
-            </a:r>
-          </a:p>
-        </p:txBody>
-      </p:sp>
-      <p:sp>
-        <p:nvSpPr>
-          <p:cNvPr id="7" name="TextBox 6"/>
-          <p:cNvSpPr txBox="1"/>
-          <p:nvPr/>
-        </p:nvSpPr>
-        <p:spPr>
-          <a:xfrm>
-            <a:off x="658368" y="1737360"/>
-            <a:ext cx="2286000" cy="2825389"/>
-          </a:xfrm>
-          <a:prstGeom prst="rect">
-            <a:avLst/>
-          </a:prstGeom>
-          <a:noFill/>
-        </p:spPr>
-        <p:txBody>
-          <a:bodyPr wrap="square" lIns="36576" tIns="27432" rIns="36576" bIns="27432">
-            <a:spAutoFit/>
-          </a:bodyPr>
-          <a:lstStyle/>
-          <a:p>
-            <a:pPr algn="l"/>
-            <a:r>
-              <a:rPr sz="1300" b="1" dirty="0">
-                <a:solidFill>
-                  <a:srgbClr val="141414"/>
-                </a:solidFill>
-              </a:rPr>
-              <a:t>System Architecture and Blockchain Lead</a:t>
-            </a:r>
-            <a:endParaRPr lang="en-US" sz="1600" b="0" dirty="0">
-              <a:solidFill>
-                <a:srgbClr val="141414"/>
-              </a:solidFill>
-              <a:latin typeface="Arial"/>
-            </a:endParaRPr>
-          </a:p>
-          <a:p>
-            <a:pPr marL="171450" indent="-171450" algn="l">
-              <a:buFont typeface="Arial" panose="020B0604020202020204" pitchFamily="34" charset="0"/>
-              <a:buChar char="•"/>
-            </a:pPr>
-            <a:r>
-              <a:rPr b="0" dirty="0">
-                <a:solidFill>
-                  <a:srgbClr val="141414"/>
-                </a:solidFill>
-              </a:rPr>
-              <a:t>Architecture and requirements coordination</a:t>
-            </a:r>
-            <a:endParaRPr lang="en-US" dirty="0"/>
-          </a:p>
-          <a:p>
-            <a:pPr marL="171450" indent="-171450" algn="l">
-              <a:buFont typeface="Arial" panose="020B0604020202020204" pitchFamily="34" charset="0"/>
-              <a:buChar char="•"/>
-            </a:pPr>
-            <a:r>
-              <a:rPr b="0" dirty="0" err="1">
-                <a:solidFill>
-                  <a:srgbClr val="141414"/>
-                </a:solidFill>
-              </a:rPr>
-              <a:t>Hyperledger</a:t>
-            </a:r>
-            <a:r>
-              <a:rPr b="0" dirty="0">
-                <a:solidFill>
-                  <a:srgbClr val="141414"/>
-                </a:solidFill>
-              </a:rPr>
-              <a:t> Fabric and </a:t>
-            </a:r>
-            <a:r>
-              <a:rPr b="0" dirty="0" err="1">
-                <a:solidFill>
-                  <a:srgbClr val="141414"/>
-                </a:solidFill>
-              </a:rPr>
-              <a:t>chaincode</a:t>
-            </a:r>
-            <a:r>
-              <a:rPr b="0" dirty="0">
-                <a:solidFill>
-                  <a:srgbClr val="141414"/>
-                </a:solidFill>
-              </a:rPr>
-              <a:t> coordination</a:t>
-            </a:r>
-            <a:endParaRPr lang="en-US" dirty="0"/>
-          </a:p>
-          <a:p>
-            <a:pPr marL="171450" indent="-171450" algn="l">
-              <a:buFont typeface="Arial" panose="020B0604020202020204" pitchFamily="34" charset="0"/>
-              <a:buChar char="•"/>
-            </a:pPr>
-            <a:r>
-              <a:rPr b="0" dirty="0">
-                <a:solidFill>
-                  <a:srgbClr val="141414"/>
-                </a:solidFill>
-              </a:rPr>
-              <a:t>Hash and integrity architecture</a:t>
-            </a:r>
-            <a:endParaRPr lang="en-US" dirty="0"/>
-          </a:p>
-          <a:p>
-            <a:pPr marL="171450" indent="-171450" algn="l">
-              <a:buFont typeface="Arial" panose="020B0604020202020204" pitchFamily="34" charset="0"/>
-              <a:buChar char="•"/>
-            </a:pPr>
-            <a:r>
-              <a:rPr b="0" dirty="0">
-                <a:solidFill>
-                  <a:srgbClr val="141414"/>
-                </a:solidFill>
-              </a:rPr>
-              <a:t>Security architecture and integration</a:t>
-            </a:r>
-            <a:endParaRPr lang="en-US" dirty="0"/>
-          </a:p>
-          <a:p>
-            <a:pPr marL="171450" indent="-171450" algn="l">
-              <a:buFont typeface="Arial" panose="020B0604020202020204" pitchFamily="34" charset="0"/>
-              <a:buChar char="•"/>
-            </a:pPr>
-            <a:r>
-              <a:rPr b="0" dirty="0">
-                <a:solidFill>
-                  <a:srgbClr val="141414"/>
-                </a:solidFill>
-              </a:rPr>
-              <a:t>GitHub and deployment coordination</a:t>
-            </a:r>
-          </a:p>
-        </p:txBody>
-      </p:sp>
-      <p:sp>
-        <p:nvSpPr>
-          <p:cNvPr id="8" name="Rounded Rectangle 7"/>
-          <p:cNvSpPr/>
-          <p:nvPr/>
-        </p:nvSpPr>
-        <p:spPr>
-          <a:xfrm>
-            <a:off x="3154680" y="1234440"/>
-            <a:ext cx="2514600" cy="3520440"/>
-          </a:xfrm>
-          <a:prstGeom prst="roundRect">
-            <a:avLst/>
-          </a:prstGeom>
-          <a:solidFill>
-            <a:srgbClr val="FFFFFF"/>
-          </a:solidFill>
-          <a:ln w="12700">
-            <a:solidFill>
-              <a:srgbClr val="CDD4DC"/>
-            </a:solidFill>
-          </a:ln>
-        </p:spPr>
-        <p:style>
-          <a:lnRef idx="1">
-            <a:schemeClr val="accent1"/>
-          </a:lnRef>
-          <a:fillRef idx="3">
-            <a:schemeClr val="accent1"/>
-          </a:fillRef>
-          <a:effectRef idx="2">
-            <a:schemeClr val="accent1"/>
-          </a:effectRef>
-          <a:fontRef idx="minor">
-            <a:schemeClr val="lt1"/>
-          </a:fontRef>
-        </p:style>
-        <p:txBody>
-          <a:bodyPr wrap="square" rtlCol="0" anchor="ctr"/>
-          <a:lstStyle/>
-          <a:p>
-            <a:pPr algn="ctr"/>
-            <a:endParaRPr/>
-          </a:p>
-        </p:txBody>
-      </p:sp>
-      <p:sp>
-        <p:nvSpPr>
-          <p:cNvPr id="9" name="Rectangle 8"/>
-          <p:cNvSpPr/>
-          <p:nvPr/>
-        </p:nvSpPr>
-        <p:spPr>
-          <a:xfrm>
-            <a:off x="3154680" y="1234440"/>
-            <a:ext cx="64008" cy="3520440"/>
-          </a:xfrm>
-          <a:prstGeom prst="rect">
-            <a:avLst/>
-          </a:prstGeom>
-          <a:solidFill>
-            <a:srgbClr val="DAA520"/>
-          </a:solidFill>
-          <a:ln>
-            <a:noFill/>
-          </a:ln>
-        </p:spPr>
-        <p:style>
-          <a:lnRef idx="1">
-            <a:schemeClr val="accent1"/>
-          </a:lnRef>
-          <a:fillRef idx="3">
-            <a:schemeClr val="accent1"/>
-          </a:fillRef>
-          <a:effectRef idx="2">
-            <a:schemeClr val="accent1"/>
-          </a:effectRef>
-          <a:fontRef idx="minor">
-            <a:schemeClr val="lt1"/>
-          </a:fontRef>
-        </p:style>
-        <p:txBody>
-          <a:bodyPr wrap="square" rtlCol="0" anchor="ctr"/>
-          <a:lstStyle/>
-          <a:p>
-            <a:pPr algn="ctr"/>
-            <a:endParaRPr/>
-          </a:p>
-        </p:txBody>
-      </p:sp>
-      <p:sp>
-        <p:nvSpPr>
-          <p:cNvPr id="10" name="TextBox 9"/>
-          <p:cNvSpPr txBox="1"/>
-          <p:nvPr/>
-        </p:nvSpPr>
-        <p:spPr>
-          <a:xfrm>
-            <a:off x="3310128" y="1344168"/>
-            <a:ext cx="2286000" cy="347472"/>
-          </a:xfrm>
-          <a:prstGeom prst="rect">
-            <a:avLst/>
-          </a:prstGeom>
-          <a:noFill/>
-        </p:spPr>
-        <p:txBody>
-          <a:bodyPr wrap="square" lIns="36576" tIns="27432" rIns="36576" bIns="27432">
-            <a:spAutoFit/>
-          </a:bodyPr>
-          <a:lstStyle/>
-          <a:p>
-            <a:pPr algn="l"/>
-            <a:r>
-              <a:rPr sz="1500" b="1">
-                <a:solidFill>
-                  <a:srgbClr val="DAA520"/>
-                </a:solidFill>
-                <a:latin typeface="Arial"/>
-              </a:rPr>
-              <a:t>Abdul Moiz | 54482</a:t>
-            </a:r>
-          </a:p>
-        </p:txBody>
-      </p:sp>
-      <p:sp>
-        <p:nvSpPr>
-          <p:cNvPr id="11" name="TextBox 10"/>
-          <p:cNvSpPr txBox="1"/>
-          <p:nvPr/>
-        </p:nvSpPr>
-        <p:spPr>
-          <a:xfrm>
-            <a:off x="3310128" y="1737360"/>
-            <a:ext cx="2286000" cy="2771528"/>
-          </a:xfrm>
-          <a:prstGeom prst="rect">
-            <a:avLst/>
-          </a:prstGeom>
-          <a:noFill/>
-        </p:spPr>
-        <p:txBody>
-          <a:bodyPr wrap="square" lIns="36576" tIns="27432" rIns="36576" bIns="27432">
-            <a:spAutoFit/>
-          </a:bodyPr>
-          <a:lstStyle/>
-          <a:p>
-            <a:pPr algn="l"/>
-            <a:r>
-              <a:rPr sz="1300" b="1" dirty="0">
-                <a:solidFill>
-                  <a:srgbClr val="141414"/>
-                </a:solidFill>
-              </a:rPr>
-              <a:t>Backend and Database Lead</a:t>
-            </a:r>
-            <a:endParaRPr lang="en-US" sz="1300" b="1" dirty="0"/>
-          </a:p>
-          <a:p>
-            <a:pPr algn="l"/>
-            <a:endParaRPr lang="en-US" dirty="0"/>
-          </a:p>
-          <a:p>
-            <a:pPr marL="285750" indent="-285750" algn="l">
-              <a:lnSpc>
-                <a:spcPct val="150000"/>
-              </a:lnSpc>
-              <a:buFont typeface="Arial" panose="020B0604020202020204" pitchFamily="34" charset="0"/>
-              <a:buChar char="•"/>
-            </a:pPr>
-            <a:r>
-              <a:rPr sz="1300" b="0" dirty="0">
-                <a:solidFill>
-                  <a:srgbClr val="141414"/>
-                </a:solidFill>
-              </a:rPr>
-              <a:t>Python and </a:t>
-            </a:r>
-            <a:r>
-              <a:rPr sz="1300" b="0" dirty="0" err="1">
-                <a:solidFill>
-                  <a:srgbClr val="141414"/>
-                </a:solidFill>
-              </a:rPr>
-              <a:t>FastAPI</a:t>
-            </a:r>
-            <a:endParaRPr lang="en-US" sz="1300" dirty="0"/>
-          </a:p>
-          <a:p>
-            <a:pPr marL="285750" indent="-285750" algn="l">
-              <a:lnSpc>
-                <a:spcPct val="150000"/>
-              </a:lnSpc>
-              <a:buFont typeface="Arial" panose="020B0604020202020204" pitchFamily="34" charset="0"/>
-              <a:buChar char="•"/>
-            </a:pPr>
-            <a:r>
-              <a:rPr sz="1300" b="0" dirty="0">
-                <a:solidFill>
-                  <a:srgbClr val="141414"/>
-                </a:solidFill>
-              </a:rPr>
-              <a:t>REST APIs and PostgreSQL</a:t>
-            </a:r>
-            <a:endParaRPr lang="en-US" sz="1300" dirty="0"/>
-          </a:p>
-          <a:p>
-            <a:pPr marL="285750" indent="-285750" algn="l">
-              <a:lnSpc>
-                <a:spcPct val="150000"/>
-              </a:lnSpc>
-              <a:buFont typeface="Arial" panose="020B0604020202020204" pitchFamily="34" charset="0"/>
-              <a:buChar char="•"/>
-            </a:pPr>
-            <a:r>
-              <a:rPr sz="1300" b="0" dirty="0">
-                <a:solidFill>
-                  <a:srgbClr val="141414"/>
-                </a:solidFill>
-              </a:rPr>
-              <a:t>Authentication and RBAC</a:t>
-            </a:r>
-            <a:endParaRPr lang="en-US" sz="1300" dirty="0"/>
-          </a:p>
-          <a:p>
-            <a:pPr marL="285750" indent="-285750" algn="l">
-              <a:lnSpc>
-                <a:spcPct val="150000"/>
-              </a:lnSpc>
-              <a:buFont typeface="Arial" panose="020B0604020202020204" pitchFamily="34" charset="0"/>
-              <a:buChar char="•"/>
-            </a:pPr>
-            <a:r>
-              <a:rPr sz="1300" b="0" dirty="0">
-                <a:solidFill>
-                  <a:srgbClr val="141414"/>
-                </a:solidFill>
-              </a:rPr>
-              <a:t>FIR, investigation, evidence APIs</a:t>
-            </a:r>
-            <a:endParaRPr lang="en-US" sz="1300" dirty="0"/>
-          </a:p>
-          <a:p>
-            <a:pPr marL="285750" indent="-285750" algn="l">
-              <a:lnSpc>
-                <a:spcPct val="150000"/>
-              </a:lnSpc>
-              <a:buFont typeface="Arial" panose="020B0604020202020204" pitchFamily="34" charset="0"/>
-              <a:buChar char="•"/>
-            </a:pPr>
-            <a:r>
-              <a:rPr sz="1300" b="0" dirty="0">
-                <a:solidFill>
-                  <a:srgbClr val="141414"/>
-                </a:solidFill>
-              </a:rPr>
-              <a:t>Backend testing</a:t>
-            </a:r>
-          </a:p>
-        </p:txBody>
-      </p:sp>
-      <p:sp>
-        <p:nvSpPr>
-          <p:cNvPr id="12" name="Rounded Rectangle 11"/>
-          <p:cNvSpPr/>
-          <p:nvPr/>
-        </p:nvSpPr>
-        <p:spPr>
-          <a:xfrm>
-            <a:off x="5806440" y="1234440"/>
-            <a:ext cx="2514600" cy="3520440"/>
-          </a:xfrm>
-          <a:prstGeom prst="roundRect">
-            <a:avLst/>
-          </a:prstGeom>
-          <a:solidFill>
-            <a:srgbClr val="FFFFFF"/>
-          </a:solidFill>
-          <a:ln w="12700">
-            <a:solidFill>
-              <a:srgbClr val="CDD4DC"/>
-            </a:solidFill>
-          </a:ln>
-        </p:spPr>
-        <p:style>
-          <a:lnRef idx="1">
-            <a:schemeClr val="accent1"/>
-          </a:lnRef>
-          <a:fillRef idx="3">
-            <a:schemeClr val="accent1"/>
-          </a:fillRef>
-          <a:effectRef idx="2">
-            <a:schemeClr val="accent1"/>
-          </a:effectRef>
-          <a:fontRef idx="minor">
-            <a:schemeClr val="lt1"/>
-          </a:fontRef>
-        </p:style>
-        <p:txBody>
-          <a:bodyPr wrap="square" rtlCol="0" anchor="ctr"/>
-          <a:lstStyle/>
-          <a:p>
-            <a:pPr algn="ctr"/>
-            <a:endParaRPr/>
-          </a:p>
-        </p:txBody>
-      </p:sp>
-      <p:sp>
-        <p:nvSpPr>
-          <p:cNvPr id="13" name="Rectangle 12"/>
-          <p:cNvSpPr/>
-          <p:nvPr/>
-        </p:nvSpPr>
-        <p:spPr>
-          <a:xfrm>
-            <a:off x="5806440" y="1234440"/>
-            <a:ext cx="64008" cy="3520440"/>
-          </a:xfrm>
-          <a:prstGeom prst="rect">
-            <a:avLst/>
-          </a:prstGeom>
-          <a:solidFill>
-            <a:srgbClr val="1F497D"/>
-          </a:solidFill>
-          <a:ln>
-            <a:noFill/>
-          </a:ln>
-        </p:spPr>
-        <p:style>
-          <a:lnRef idx="1">
-            <a:schemeClr val="accent1"/>
-          </a:lnRef>
-          <a:fillRef idx="3">
-            <a:schemeClr val="accent1"/>
-          </a:fillRef>
-          <a:effectRef idx="2">
-            <a:schemeClr val="accent1"/>
-          </a:effectRef>
-          <a:fontRef idx="minor">
-            <a:schemeClr val="lt1"/>
-          </a:fontRef>
-        </p:style>
-        <p:txBody>
-          <a:bodyPr wrap="square" rtlCol="0" anchor="ctr"/>
-          <a:lstStyle/>
-          <a:p>
-            <a:pPr algn="ctr"/>
-            <a:endParaRPr/>
-          </a:p>
-        </p:txBody>
-      </p:sp>
-      <p:sp>
-        <p:nvSpPr>
-          <p:cNvPr id="14" name="TextBox 13"/>
-          <p:cNvSpPr txBox="1"/>
-          <p:nvPr/>
-        </p:nvSpPr>
-        <p:spPr>
-          <a:xfrm>
-            <a:off x="5961888" y="1344168"/>
-            <a:ext cx="2286000" cy="347472"/>
-          </a:xfrm>
-          <a:prstGeom prst="rect">
-            <a:avLst/>
-          </a:prstGeom>
-          <a:noFill/>
-        </p:spPr>
-        <p:txBody>
-          <a:bodyPr wrap="square" lIns="36576" tIns="27432" rIns="36576" bIns="27432">
-            <a:spAutoFit/>
-          </a:bodyPr>
-          <a:lstStyle/>
-          <a:p>
-            <a:pPr algn="l"/>
-            <a:r>
-              <a:rPr sz="1500" b="1">
-                <a:solidFill>
-                  <a:srgbClr val="1F497D"/>
-                </a:solidFill>
-                <a:latin typeface="Arial"/>
-              </a:rPr>
-              <a:t>Basit Ali | 54596</a:t>
-            </a:r>
-          </a:p>
-        </p:txBody>
-      </p:sp>
-      <p:sp>
-        <p:nvSpPr>
-          <p:cNvPr id="15" name="TextBox 14"/>
-          <p:cNvSpPr txBox="1"/>
-          <p:nvPr/>
-        </p:nvSpPr>
-        <p:spPr>
-          <a:xfrm>
-            <a:off x="5961888" y="1765068"/>
-            <a:ext cx="2286000" cy="1955920"/>
-          </a:xfrm>
-          <a:prstGeom prst="rect">
-            <a:avLst/>
-          </a:prstGeom>
-          <a:noFill/>
-        </p:spPr>
-        <p:txBody>
-          <a:bodyPr wrap="square" lIns="36576" tIns="27432" rIns="36576" bIns="27432">
-            <a:spAutoFit/>
-          </a:bodyPr>
-          <a:lstStyle/>
-          <a:p>
-            <a:pPr algn="l"/>
-            <a:r>
-              <a:rPr sz="1300" b="1" dirty="0">
-                <a:solidFill>
-                  <a:srgbClr val="141414"/>
-                </a:solidFill>
-              </a:rPr>
-              <a:t>Frontend and Testing Lead</a:t>
-            </a:r>
-            <a:endParaRPr lang="en-US" sz="1300" b="1" dirty="0"/>
-          </a:p>
-          <a:p>
-            <a:pPr algn="l"/>
-            <a:endParaRPr lang="en-US" sz="1300" b="0" dirty="0">
-              <a:solidFill>
-                <a:srgbClr val="141414"/>
-              </a:solidFill>
-            </a:endParaRPr>
-          </a:p>
-          <a:p>
-            <a:pPr marL="285750" indent="-285750" algn="l">
-              <a:lnSpc>
-                <a:spcPct val="150000"/>
-              </a:lnSpc>
-              <a:buFont typeface="Arial" panose="020B0604020202020204" pitchFamily="34" charset="0"/>
-              <a:buChar char="•"/>
-            </a:pPr>
-            <a:r>
-              <a:rPr sz="1300" b="0" dirty="0">
-                <a:solidFill>
-                  <a:srgbClr val="141414"/>
-                </a:solidFill>
-              </a:rPr>
-              <a:t>React and </a:t>
-            </a:r>
-            <a:r>
-              <a:rPr sz="1300" b="0" dirty="0" err="1">
-                <a:solidFill>
-                  <a:srgbClr val="141414"/>
-                </a:solidFill>
-              </a:rPr>
-              <a:t>TypeScript</a:t>
-            </a:r>
-            <a:endParaRPr lang="en-US" sz="1300" dirty="0"/>
-          </a:p>
-          <a:p>
-            <a:pPr marL="285750" indent="-285750" algn="l">
-              <a:lnSpc>
-                <a:spcPct val="150000"/>
-              </a:lnSpc>
-              <a:buFont typeface="Arial" panose="020B0604020202020204" pitchFamily="34" charset="0"/>
-              <a:buChar char="•"/>
-            </a:pPr>
-            <a:r>
-              <a:rPr sz="1300" b="0" dirty="0">
-                <a:solidFill>
-                  <a:srgbClr val="141414"/>
-                </a:solidFill>
-              </a:rPr>
-              <a:t>UI and UX</a:t>
-            </a:r>
-            <a:endParaRPr lang="en-US" sz="1300" dirty="0"/>
-          </a:p>
-          <a:p>
-            <a:pPr marL="285750" indent="-285750" algn="l">
-              <a:lnSpc>
-                <a:spcPct val="150000"/>
-              </a:lnSpc>
-              <a:buFont typeface="Arial" panose="020B0604020202020204" pitchFamily="34" charset="0"/>
-              <a:buChar char="•"/>
-            </a:pPr>
-            <a:r>
-              <a:rPr sz="1300" b="0" dirty="0">
-                <a:solidFill>
-                  <a:srgbClr val="141414"/>
-                </a:solidFill>
-              </a:rPr>
-              <a:t>Dashboards and forms</a:t>
-            </a:r>
-            <a:endParaRPr lang="en-US" sz="1300" dirty="0"/>
-          </a:p>
-          <a:p>
-            <a:pPr marL="285750" indent="-285750" algn="l">
-              <a:lnSpc>
-                <a:spcPct val="150000"/>
-              </a:lnSpc>
-              <a:buFont typeface="Arial" panose="020B0604020202020204" pitchFamily="34" charset="0"/>
-              <a:buChar char="•"/>
-            </a:pPr>
-            <a:r>
-              <a:rPr sz="1300" b="0" dirty="0">
-                <a:solidFill>
-                  <a:srgbClr val="141414"/>
-                </a:solidFill>
-              </a:rPr>
-              <a:t>Audit and charts interface</a:t>
-            </a:r>
-            <a:endParaRPr lang="en-US" sz="1300" dirty="0"/>
-          </a:p>
-          <a:p>
-            <a:pPr marL="285750" indent="-285750" algn="l">
-              <a:lnSpc>
-                <a:spcPct val="150000"/>
-              </a:lnSpc>
-              <a:buFont typeface="Arial" panose="020B0604020202020204" pitchFamily="34" charset="0"/>
-              <a:buChar char="•"/>
-            </a:pPr>
-            <a:r>
-              <a:rPr sz="1300" b="0" dirty="0">
-                <a:solidFill>
-                  <a:srgbClr val="141414"/>
-                </a:solidFill>
-              </a:rPr>
-              <a:t>UI and usability testing</a:t>
-            </a:r>
-          </a:p>
-        </p:txBody>
-      </p:sp>
-      <p:sp>
-        <p:nvSpPr>
-          <p:cNvPr id="16" name="TextBox 15"/>
-          <p:cNvSpPr txBox="1"/>
-          <p:nvPr/>
-        </p:nvSpPr>
-        <p:spPr>
-          <a:xfrm>
-            <a:off x="731520" y="5074920"/>
-            <a:ext cx="7498079" cy="486287"/>
-          </a:xfrm>
-          <a:prstGeom prst="rect">
-            <a:avLst/>
-          </a:prstGeom>
-          <a:noFill/>
-        </p:spPr>
-        <p:txBody>
-          <a:bodyPr wrap="square" lIns="36576" tIns="27432" rIns="36576" bIns="27432">
-            <a:spAutoFit/>
-          </a:bodyPr>
-          <a:lstStyle/>
-          <a:p>
-            <a:pPr algn="ctr"/>
-            <a:r>
-              <a:rPr sz="1400" b="1" dirty="0">
-                <a:solidFill>
-                  <a:srgbClr val="1F497D"/>
-                </a:solidFill>
-                <a:latin typeface="Arial"/>
-              </a:rPr>
-              <a:t>Shared: research, documentation, GitHub, code review, integration, security testing, final report, presentation</a:t>
-            </a:r>
-            <a:r>
-              <a:rPr lang="en-US" sz="1400" b="1" dirty="0">
-                <a:solidFill>
-                  <a:srgbClr val="1F497D"/>
-                </a:solidFill>
-                <a:latin typeface="Arial"/>
-              </a:rPr>
-              <a:t> and</a:t>
-            </a:r>
-            <a:r>
-              <a:rPr sz="1400" b="1" dirty="0">
-                <a:solidFill>
-                  <a:srgbClr val="1F497D"/>
-                </a:solidFill>
-                <a:latin typeface="Arial"/>
-              </a:rPr>
-              <a:t> viva preparation.</a:t>
-            </a:r>
-          </a:p>
-        </p:txBody>
-      </p:sp>
-    </p:spTree>
-  </p:cSld>
-  <p:clrMapOvr>
-    <a:masterClrMapping/>
-  </p:clrMapOvr>
-  <mc:AlternateContent xmlns:mc="http://schemas.openxmlformats.org/markup-compatibility/2006" xmlns:p15="http://schemas.microsoft.com/office/powerpoint/2012/main">
-    <mc:Choice Requires="p15">
-      <p:transition xmlns:p14="http://schemas.microsoft.com/office/powerpoint/2010/main" spd="slow" p14:dur="2000">
-        <p15:prstTrans prst="fallOver"/>
-      </p:transition>
-    </mc:Choice>
-    <mc:Fallback xmlns="">
-      <p:transition spd="slow">
-        <p:fade/>
       </p:transition>
     </mc:Fallback>
   </mc:AlternateContent>
@@ -22716,6 +22004,912 @@
                 </a:solidFill>
                 <a:latin typeface="Arial"/>
               </a:rPr>
+              <a:t>Roles and Responsibilities</a:t>
+            </a:r>
+          </a:p>
+        </p:txBody>
+      </p:sp>
+      <p:sp>
+        <p:nvSpPr>
+          <p:cNvPr id="4" name="Rounded Rectangle 3"/>
+          <p:cNvSpPr/>
+          <p:nvPr/>
+        </p:nvSpPr>
+        <p:spPr>
+          <a:xfrm>
+            <a:off x="502920" y="1234440"/>
+            <a:ext cx="2514600" cy="3520440"/>
+          </a:xfrm>
+          <a:prstGeom prst="roundRect">
+            <a:avLst/>
+          </a:prstGeom>
+          <a:solidFill>
+            <a:srgbClr val="FFFFFF"/>
+          </a:solidFill>
+          <a:ln w="12700">
+            <a:solidFill>
+              <a:srgbClr val="CDD4DC"/>
+            </a:solidFill>
+          </a:ln>
+        </p:spPr>
+        <p:style>
+          <a:lnRef idx="1">
+            <a:schemeClr val="accent1"/>
+          </a:lnRef>
+          <a:fillRef idx="3">
+            <a:schemeClr val="accent1"/>
+          </a:fillRef>
+          <a:effectRef idx="2">
+            <a:schemeClr val="accent1"/>
+          </a:effectRef>
+          <a:fontRef idx="minor">
+            <a:schemeClr val="lt1"/>
+          </a:fontRef>
+        </p:style>
+        <p:txBody>
+          <a:bodyPr wrap="square" rtlCol="0" anchor="ctr"/>
+          <a:lstStyle/>
+          <a:p>
+            <a:pPr algn="ctr"/>
+            <a:endParaRPr/>
+          </a:p>
+        </p:txBody>
+      </p:sp>
+      <p:sp>
+        <p:nvSpPr>
+          <p:cNvPr id="5" name="Rectangle 4"/>
+          <p:cNvSpPr/>
+          <p:nvPr/>
+        </p:nvSpPr>
+        <p:spPr>
+          <a:xfrm>
+            <a:off x="502920" y="1234440"/>
+            <a:ext cx="64008" cy="3520440"/>
+          </a:xfrm>
+          <a:prstGeom prst="rect">
+            <a:avLst/>
+          </a:prstGeom>
+          <a:solidFill>
+            <a:srgbClr val="1F497D"/>
+          </a:solidFill>
+          <a:ln>
+            <a:noFill/>
+          </a:ln>
+        </p:spPr>
+        <p:style>
+          <a:lnRef idx="1">
+            <a:schemeClr val="accent1"/>
+          </a:lnRef>
+          <a:fillRef idx="3">
+            <a:schemeClr val="accent1"/>
+          </a:fillRef>
+          <a:effectRef idx="2">
+            <a:schemeClr val="accent1"/>
+          </a:effectRef>
+          <a:fontRef idx="minor">
+            <a:schemeClr val="lt1"/>
+          </a:fontRef>
+        </p:style>
+        <p:txBody>
+          <a:bodyPr wrap="square" rtlCol="0" anchor="ctr"/>
+          <a:lstStyle/>
+          <a:p>
+            <a:pPr algn="ctr"/>
+            <a:endParaRPr/>
+          </a:p>
+        </p:txBody>
+      </p:sp>
+      <p:sp>
+        <p:nvSpPr>
+          <p:cNvPr id="6" name="TextBox 5"/>
+          <p:cNvSpPr txBox="1"/>
+          <p:nvPr/>
+        </p:nvSpPr>
+        <p:spPr>
+          <a:xfrm>
+            <a:off x="658368" y="1344168"/>
+            <a:ext cx="2286000" cy="347472"/>
+          </a:xfrm>
+          <a:prstGeom prst="rect">
+            <a:avLst/>
+          </a:prstGeom>
+          <a:noFill/>
+        </p:spPr>
+        <p:txBody>
+          <a:bodyPr wrap="square" lIns="36576" tIns="27432" rIns="36576" bIns="27432">
+            <a:spAutoFit/>
+          </a:bodyPr>
+          <a:lstStyle/>
+          <a:p>
+            <a:pPr algn="l"/>
+            <a:r>
+              <a:rPr sz="1500" b="1">
+                <a:solidFill>
+                  <a:srgbClr val="1F497D"/>
+                </a:solidFill>
+                <a:latin typeface="Arial"/>
+              </a:rPr>
+              <a:t>Sharaiz Ahmed | 57288</a:t>
+            </a:r>
+          </a:p>
+        </p:txBody>
+      </p:sp>
+      <p:sp>
+        <p:nvSpPr>
+          <p:cNvPr id="7" name="TextBox 6"/>
+          <p:cNvSpPr txBox="1"/>
+          <p:nvPr/>
+        </p:nvSpPr>
+        <p:spPr>
+          <a:xfrm>
+            <a:off x="658368" y="1737360"/>
+            <a:ext cx="2286000" cy="2825389"/>
+          </a:xfrm>
+          <a:prstGeom prst="rect">
+            <a:avLst/>
+          </a:prstGeom>
+          <a:noFill/>
+        </p:spPr>
+        <p:txBody>
+          <a:bodyPr wrap="square" lIns="36576" tIns="27432" rIns="36576" bIns="27432">
+            <a:spAutoFit/>
+          </a:bodyPr>
+          <a:lstStyle/>
+          <a:p>
+            <a:pPr algn="l"/>
+            <a:r>
+              <a:rPr sz="1300" b="1" dirty="0">
+                <a:solidFill>
+                  <a:srgbClr val="141414"/>
+                </a:solidFill>
+              </a:rPr>
+              <a:t>System Architecture and Blockchain Lead</a:t>
+            </a:r>
+            <a:endParaRPr lang="en-US" sz="1600" b="0" dirty="0">
+              <a:solidFill>
+                <a:srgbClr val="141414"/>
+              </a:solidFill>
+              <a:latin typeface="Arial"/>
+            </a:endParaRPr>
+          </a:p>
+          <a:p>
+            <a:pPr marL="171450" indent="-171450" algn="l">
+              <a:buFont typeface="Arial" panose="020B0604020202020204" pitchFamily="34" charset="0"/>
+              <a:buChar char="•"/>
+            </a:pPr>
+            <a:r>
+              <a:rPr b="0" dirty="0">
+                <a:solidFill>
+                  <a:srgbClr val="141414"/>
+                </a:solidFill>
+              </a:rPr>
+              <a:t>Architecture and requirements coordination</a:t>
+            </a:r>
+            <a:endParaRPr lang="en-US" dirty="0"/>
+          </a:p>
+          <a:p>
+            <a:pPr marL="171450" indent="-171450" algn="l">
+              <a:buFont typeface="Arial" panose="020B0604020202020204" pitchFamily="34" charset="0"/>
+              <a:buChar char="•"/>
+            </a:pPr>
+            <a:r>
+              <a:rPr b="0" dirty="0" err="1">
+                <a:solidFill>
+                  <a:srgbClr val="141414"/>
+                </a:solidFill>
+              </a:rPr>
+              <a:t>Hyperledger</a:t>
+            </a:r>
+            <a:r>
+              <a:rPr b="0" dirty="0">
+                <a:solidFill>
+                  <a:srgbClr val="141414"/>
+                </a:solidFill>
+              </a:rPr>
+              <a:t> Fabric and </a:t>
+            </a:r>
+            <a:r>
+              <a:rPr b="0" dirty="0" err="1">
+                <a:solidFill>
+                  <a:srgbClr val="141414"/>
+                </a:solidFill>
+              </a:rPr>
+              <a:t>chaincode</a:t>
+            </a:r>
+            <a:r>
+              <a:rPr b="0" dirty="0">
+                <a:solidFill>
+                  <a:srgbClr val="141414"/>
+                </a:solidFill>
+              </a:rPr>
+              <a:t> coordination</a:t>
+            </a:r>
+            <a:endParaRPr lang="en-US" dirty="0"/>
+          </a:p>
+          <a:p>
+            <a:pPr marL="171450" indent="-171450" algn="l">
+              <a:buFont typeface="Arial" panose="020B0604020202020204" pitchFamily="34" charset="0"/>
+              <a:buChar char="•"/>
+            </a:pPr>
+            <a:r>
+              <a:rPr b="0" dirty="0">
+                <a:solidFill>
+                  <a:srgbClr val="141414"/>
+                </a:solidFill>
+              </a:rPr>
+              <a:t>Hash and integrity architecture</a:t>
+            </a:r>
+            <a:endParaRPr lang="en-US" dirty="0"/>
+          </a:p>
+          <a:p>
+            <a:pPr marL="171450" indent="-171450" algn="l">
+              <a:buFont typeface="Arial" panose="020B0604020202020204" pitchFamily="34" charset="0"/>
+              <a:buChar char="•"/>
+            </a:pPr>
+            <a:r>
+              <a:rPr b="0" dirty="0">
+                <a:solidFill>
+                  <a:srgbClr val="141414"/>
+                </a:solidFill>
+              </a:rPr>
+              <a:t>Security architecture and integration</a:t>
+            </a:r>
+            <a:endParaRPr lang="en-US" dirty="0"/>
+          </a:p>
+          <a:p>
+            <a:pPr marL="171450" indent="-171450" algn="l">
+              <a:buFont typeface="Arial" panose="020B0604020202020204" pitchFamily="34" charset="0"/>
+              <a:buChar char="•"/>
+            </a:pPr>
+            <a:r>
+              <a:rPr b="0" dirty="0">
+                <a:solidFill>
+                  <a:srgbClr val="141414"/>
+                </a:solidFill>
+              </a:rPr>
+              <a:t>GitHub and deployment coordination</a:t>
+            </a:r>
+          </a:p>
+        </p:txBody>
+      </p:sp>
+      <p:sp>
+        <p:nvSpPr>
+          <p:cNvPr id="8" name="Rounded Rectangle 7"/>
+          <p:cNvSpPr/>
+          <p:nvPr/>
+        </p:nvSpPr>
+        <p:spPr>
+          <a:xfrm>
+            <a:off x="3154680" y="1234440"/>
+            <a:ext cx="2514600" cy="3520440"/>
+          </a:xfrm>
+          <a:prstGeom prst="roundRect">
+            <a:avLst/>
+          </a:prstGeom>
+          <a:solidFill>
+            <a:srgbClr val="FFFFFF"/>
+          </a:solidFill>
+          <a:ln w="12700">
+            <a:solidFill>
+              <a:srgbClr val="CDD4DC"/>
+            </a:solidFill>
+          </a:ln>
+        </p:spPr>
+        <p:style>
+          <a:lnRef idx="1">
+            <a:schemeClr val="accent1"/>
+          </a:lnRef>
+          <a:fillRef idx="3">
+            <a:schemeClr val="accent1"/>
+          </a:fillRef>
+          <a:effectRef idx="2">
+            <a:schemeClr val="accent1"/>
+          </a:effectRef>
+          <a:fontRef idx="minor">
+            <a:schemeClr val="lt1"/>
+          </a:fontRef>
+        </p:style>
+        <p:txBody>
+          <a:bodyPr wrap="square" rtlCol="0" anchor="ctr"/>
+          <a:lstStyle/>
+          <a:p>
+            <a:pPr algn="ctr"/>
+            <a:endParaRPr/>
+          </a:p>
+        </p:txBody>
+      </p:sp>
+      <p:sp>
+        <p:nvSpPr>
+          <p:cNvPr id="9" name="Rectangle 8"/>
+          <p:cNvSpPr/>
+          <p:nvPr/>
+        </p:nvSpPr>
+        <p:spPr>
+          <a:xfrm>
+            <a:off x="3154680" y="1234440"/>
+            <a:ext cx="64008" cy="3520440"/>
+          </a:xfrm>
+          <a:prstGeom prst="rect">
+            <a:avLst/>
+          </a:prstGeom>
+          <a:solidFill>
+            <a:srgbClr val="DAA520"/>
+          </a:solidFill>
+          <a:ln>
+            <a:noFill/>
+          </a:ln>
+        </p:spPr>
+        <p:style>
+          <a:lnRef idx="1">
+            <a:schemeClr val="accent1"/>
+          </a:lnRef>
+          <a:fillRef idx="3">
+            <a:schemeClr val="accent1"/>
+          </a:fillRef>
+          <a:effectRef idx="2">
+            <a:schemeClr val="accent1"/>
+          </a:effectRef>
+          <a:fontRef idx="minor">
+            <a:schemeClr val="lt1"/>
+          </a:fontRef>
+        </p:style>
+        <p:txBody>
+          <a:bodyPr wrap="square" rtlCol="0" anchor="ctr"/>
+          <a:lstStyle/>
+          <a:p>
+            <a:pPr algn="ctr"/>
+            <a:endParaRPr/>
+          </a:p>
+        </p:txBody>
+      </p:sp>
+      <p:sp>
+        <p:nvSpPr>
+          <p:cNvPr id="10" name="TextBox 9"/>
+          <p:cNvSpPr txBox="1"/>
+          <p:nvPr/>
+        </p:nvSpPr>
+        <p:spPr>
+          <a:xfrm>
+            <a:off x="3310128" y="1344168"/>
+            <a:ext cx="2286000" cy="347472"/>
+          </a:xfrm>
+          <a:prstGeom prst="rect">
+            <a:avLst/>
+          </a:prstGeom>
+          <a:noFill/>
+        </p:spPr>
+        <p:txBody>
+          <a:bodyPr wrap="square" lIns="36576" tIns="27432" rIns="36576" bIns="27432">
+            <a:spAutoFit/>
+          </a:bodyPr>
+          <a:lstStyle/>
+          <a:p>
+            <a:pPr algn="l"/>
+            <a:r>
+              <a:rPr sz="1500" b="1">
+                <a:solidFill>
+                  <a:srgbClr val="DAA520"/>
+                </a:solidFill>
+                <a:latin typeface="Arial"/>
+              </a:rPr>
+              <a:t>Abdul Moiz | 54482</a:t>
+            </a:r>
+          </a:p>
+        </p:txBody>
+      </p:sp>
+      <p:sp>
+        <p:nvSpPr>
+          <p:cNvPr id="11" name="TextBox 10"/>
+          <p:cNvSpPr txBox="1"/>
+          <p:nvPr/>
+        </p:nvSpPr>
+        <p:spPr>
+          <a:xfrm>
+            <a:off x="3310128" y="1737360"/>
+            <a:ext cx="2286000" cy="2771528"/>
+          </a:xfrm>
+          <a:prstGeom prst="rect">
+            <a:avLst/>
+          </a:prstGeom>
+          <a:noFill/>
+        </p:spPr>
+        <p:txBody>
+          <a:bodyPr wrap="square" lIns="36576" tIns="27432" rIns="36576" bIns="27432">
+            <a:spAutoFit/>
+          </a:bodyPr>
+          <a:lstStyle/>
+          <a:p>
+            <a:pPr algn="l"/>
+            <a:r>
+              <a:rPr sz="1300" b="1" dirty="0">
+                <a:solidFill>
+                  <a:srgbClr val="141414"/>
+                </a:solidFill>
+              </a:rPr>
+              <a:t>Backend and Database Lead</a:t>
+            </a:r>
+            <a:endParaRPr lang="en-US" sz="1300" b="1" dirty="0"/>
+          </a:p>
+          <a:p>
+            <a:pPr algn="l"/>
+            <a:endParaRPr lang="en-US" dirty="0"/>
+          </a:p>
+          <a:p>
+            <a:pPr marL="285750" indent="-285750" algn="l">
+              <a:lnSpc>
+                <a:spcPct val="150000"/>
+              </a:lnSpc>
+              <a:buFont typeface="Arial" panose="020B0604020202020204" pitchFamily="34" charset="0"/>
+              <a:buChar char="•"/>
+            </a:pPr>
+            <a:r>
+              <a:rPr sz="1300" b="0" dirty="0">
+                <a:solidFill>
+                  <a:srgbClr val="141414"/>
+                </a:solidFill>
+              </a:rPr>
+              <a:t>Python and </a:t>
+            </a:r>
+            <a:r>
+              <a:rPr sz="1300" b="0" dirty="0" err="1">
+                <a:solidFill>
+                  <a:srgbClr val="141414"/>
+                </a:solidFill>
+              </a:rPr>
+              <a:t>FastAPI</a:t>
+            </a:r>
+            <a:endParaRPr lang="en-US" sz="1300" dirty="0"/>
+          </a:p>
+          <a:p>
+            <a:pPr marL="285750" indent="-285750" algn="l">
+              <a:lnSpc>
+                <a:spcPct val="150000"/>
+              </a:lnSpc>
+              <a:buFont typeface="Arial" panose="020B0604020202020204" pitchFamily="34" charset="0"/>
+              <a:buChar char="•"/>
+            </a:pPr>
+            <a:r>
+              <a:rPr sz="1300" b="0" dirty="0">
+                <a:solidFill>
+                  <a:srgbClr val="141414"/>
+                </a:solidFill>
+              </a:rPr>
+              <a:t>REST APIs and PostgreSQL</a:t>
+            </a:r>
+            <a:endParaRPr lang="en-US" sz="1300" dirty="0"/>
+          </a:p>
+          <a:p>
+            <a:pPr marL="285750" indent="-285750" algn="l">
+              <a:lnSpc>
+                <a:spcPct val="150000"/>
+              </a:lnSpc>
+              <a:buFont typeface="Arial" panose="020B0604020202020204" pitchFamily="34" charset="0"/>
+              <a:buChar char="•"/>
+            </a:pPr>
+            <a:r>
+              <a:rPr sz="1300" b="0" dirty="0">
+                <a:solidFill>
+                  <a:srgbClr val="141414"/>
+                </a:solidFill>
+              </a:rPr>
+              <a:t>Authentication and RBAC</a:t>
+            </a:r>
+            <a:endParaRPr lang="en-US" sz="1300" dirty="0"/>
+          </a:p>
+          <a:p>
+            <a:pPr marL="285750" indent="-285750" algn="l">
+              <a:lnSpc>
+                <a:spcPct val="150000"/>
+              </a:lnSpc>
+              <a:buFont typeface="Arial" panose="020B0604020202020204" pitchFamily="34" charset="0"/>
+              <a:buChar char="•"/>
+            </a:pPr>
+            <a:r>
+              <a:rPr sz="1300" b="0" dirty="0">
+                <a:solidFill>
+                  <a:srgbClr val="141414"/>
+                </a:solidFill>
+              </a:rPr>
+              <a:t>FIR, investigation, evidence APIs</a:t>
+            </a:r>
+            <a:endParaRPr lang="en-US" sz="1300" dirty="0"/>
+          </a:p>
+          <a:p>
+            <a:pPr marL="285750" indent="-285750" algn="l">
+              <a:lnSpc>
+                <a:spcPct val="150000"/>
+              </a:lnSpc>
+              <a:buFont typeface="Arial" panose="020B0604020202020204" pitchFamily="34" charset="0"/>
+              <a:buChar char="•"/>
+            </a:pPr>
+            <a:r>
+              <a:rPr sz="1300" b="0" dirty="0">
+                <a:solidFill>
+                  <a:srgbClr val="141414"/>
+                </a:solidFill>
+              </a:rPr>
+              <a:t>Backend testing</a:t>
+            </a:r>
+          </a:p>
+        </p:txBody>
+      </p:sp>
+      <p:sp>
+        <p:nvSpPr>
+          <p:cNvPr id="12" name="Rounded Rectangle 11"/>
+          <p:cNvSpPr/>
+          <p:nvPr/>
+        </p:nvSpPr>
+        <p:spPr>
+          <a:xfrm>
+            <a:off x="5806440" y="1234440"/>
+            <a:ext cx="2514600" cy="3520440"/>
+          </a:xfrm>
+          <a:prstGeom prst="roundRect">
+            <a:avLst/>
+          </a:prstGeom>
+          <a:solidFill>
+            <a:srgbClr val="FFFFFF"/>
+          </a:solidFill>
+          <a:ln w="12700">
+            <a:solidFill>
+              <a:srgbClr val="CDD4DC"/>
+            </a:solidFill>
+          </a:ln>
+        </p:spPr>
+        <p:style>
+          <a:lnRef idx="1">
+            <a:schemeClr val="accent1"/>
+          </a:lnRef>
+          <a:fillRef idx="3">
+            <a:schemeClr val="accent1"/>
+          </a:fillRef>
+          <a:effectRef idx="2">
+            <a:schemeClr val="accent1"/>
+          </a:effectRef>
+          <a:fontRef idx="minor">
+            <a:schemeClr val="lt1"/>
+          </a:fontRef>
+        </p:style>
+        <p:txBody>
+          <a:bodyPr wrap="square" rtlCol="0" anchor="ctr"/>
+          <a:lstStyle/>
+          <a:p>
+            <a:pPr algn="ctr"/>
+            <a:endParaRPr/>
+          </a:p>
+        </p:txBody>
+      </p:sp>
+      <p:sp>
+        <p:nvSpPr>
+          <p:cNvPr id="13" name="Rectangle 12"/>
+          <p:cNvSpPr/>
+          <p:nvPr/>
+        </p:nvSpPr>
+        <p:spPr>
+          <a:xfrm>
+            <a:off x="5806440" y="1234440"/>
+            <a:ext cx="64008" cy="3520440"/>
+          </a:xfrm>
+          <a:prstGeom prst="rect">
+            <a:avLst/>
+          </a:prstGeom>
+          <a:solidFill>
+            <a:srgbClr val="1F497D"/>
+          </a:solidFill>
+          <a:ln>
+            <a:noFill/>
+          </a:ln>
+        </p:spPr>
+        <p:style>
+          <a:lnRef idx="1">
+            <a:schemeClr val="accent1"/>
+          </a:lnRef>
+          <a:fillRef idx="3">
+            <a:schemeClr val="accent1"/>
+          </a:fillRef>
+          <a:effectRef idx="2">
+            <a:schemeClr val="accent1"/>
+          </a:effectRef>
+          <a:fontRef idx="minor">
+            <a:schemeClr val="lt1"/>
+          </a:fontRef>
+        </p:style>
+        <p:txBody>
+          <a:bodyPr wrap="square" rtlCol="0" anchor="ctr"/>
+          <a:lstStyle/>
+          <a:p>
+            <a:pPr algn="ctr"/>
+            <a:endParaRPr/>
+          </a:p>
+        </p:txBody>
+      </p:sp>
+      <p:sp>
+        <p:nvSpPr>
+          <p:cNvPr id="14" name="TextBox 13"/>
+          <p:cNvSpPr txBox="1"/>
+          <p:nvPr/>
+        </p:nvSpPr>
+        <p:spPr>
+          <a:xfrm>
+            <a:off x="5961888" y="1344168"/>
+            <a:ext cx="2286000" cy="347472"/>
+          </a:xfrm>
+          <a:prstGeom prst="rect">
+            <a:avLst/>
+          </a:prstGeom>
+          <a:noFill/>
+        </p:spPr>
+        <p:txBody>
+          <a:bodyPr wrap="square" lIns="36576" tIns="27432" rIns="36576" bIns="27432">
+            <a:spAutoFit/>
+          </a:bodyPr>
+          <a:lstStyle/>
+          <a:p>
+            <a:pPr algn="l"/>
+            <a:r>
+              <a:rPr sz="1500" b="1">
+                <a:solidFill>
+                  <a:srgbClr val="1F497D"/>
+                </a:solidFill>
+                <a:latin typeface="Arial"/>
+              </a:rPr>
+              <a:t>Basit Ali | 54596</a:t>
+            </a:r>
+          </a:p>
+        </p:txBody>
+      </p:sp>
+      <p:sp>
+        <p:nvSpPr>
+          <p:cNvPr id="15" name="TextBox 14"/>
+          <p:cNvSpPr txBox="1"/>
+          <p:nvPr/>
+        </p:nvSpPr>
+        <p:spPr>
+          <a:xfrm>
+            <a:off x="5961888" y="1765068"/>
+            <a:ext cx="2286000" cy="1955920"/>
+          </a:xfrm>
+          <a:prstGeom prst="rect">
+            <a:avLst/>
+          </a:prstGeom>
+          <a:noFill/>
+        </p:spPr>
+        <p:txBody>
+          <a:bodyPr wrap="square" lIns="36576" tIns="27432" rIns="36576" bIns="27432">
+            <a:spAutoFit/>
+          </a:bodyPr>
+          <a:lstStyle/>
+          <a:p>
+            <a:pPr algn="l"/>
+            <a:r>
+              <a:rPr sz="1300" b="1" dirty="0">
+                <a:solidFill>
+                  <a:srgbClr val="141414"/>
+                </a:solidFill>
+              </a:rPr>
+              <a:t>Frontend and Testing Lead</a:t>
+            </a:r>
+            <a:endParaRPr lang="en-US" sz="1300" b="1" dirty="0"/>
+          </a:p>
+          <a:p>
+            <a:pPr algn="l"/>
+            <a:endParaRPr lang="en-US" sz="1300" b="0" dirty="0">
+              <a:solidFill>
+                <a:srgbClr val="141414"/>
+              </a:solidFill>
+            </a:endParaRPr>
+          </a:p>
+          <a:p>
+            <a:pPr marL="285750" indent="-285750" algn="l">
+              <a:lnSpc>
+                <a:spcPct val="150000"/>
+              </a:lnSpc>
+              <a:buFont typeface="Arial" panose="020B0604020202020204" pitchFamily="34" charset="0"/>
+              <a:buChar char="•"/>
+            </a:pPr>
+            <a:r>
+              <a:rPr sz="1300" b="0" dirty="0">
+                <a:solidFill>
+                  <a:srgbClr val="141414"/>
+                </a:solidFill>
+              </a:rPr>
+              <a:t>React and </a:t>
+            </a:r>
+            <a:r>
+              <a:rPr sz="1300" b="0" dirty="0" err="1">
+                <a:solidFill>
+                  <a:srgbClr val="141414"/>
+                </a:solidFill>
+              </a:rPr>
+              <a:t>TypeScript</a:t>
+            </a:r>
+            <a:endParaRPr lang="en-US" sz="1300" dirty="0"/>
+          </a:p>
+          <a:p>
+            <a:pPr marL="285750" indent="-285750" algn="l">
+              <a:lnSpc>
+                <a:spcPct val="150000"/>
+              </a:lnSpc>
+              <a:buFont typeface="Arial" panose="020B0604020202020204" pitchFamily="34" charset="0"/>
+              <a:buChar char="•"/>
+            </a:pPr>
+            <a:r>
+              <a:rPr sz="1300" b="0" dirty="0">
+                <a:solidFill>
+                  <a:srgbClr val="141414"/>
+                </a:solidFill>
+              </a:rPr>
+              <a:t>UI and UX</a:t>
+            </a:r>
+            <a:endParaRPr lang="en-US" sz="1300" dirty="0"/>
+          </a:p>
+          <a:p>
+            <a:pPr marL="285750" indent="-285750" algn="l">
+              <a:lnSpc>
+                <a:spcPct val="150000"/>
+              </a:lnSpc>
+              <a:buFont typeface="Arial" panose="020B0604020202020204" pitchFamily="34" charset="0"/>
+              <a:buChar char="•"/>
+            </a:pPr>
+            <a:r>
+              <a:rPr sz="1300" b="0" dirty="0">
+                <a:solidFill>
+                  <a:srgbClr val="141414"/>
+                </a:solidFill>
+              </a:rPr>
+              <a:t>Dashboards and forms</a:t>
+            </a:r>
+            <a:endParaRPr lang="en-US" sz="1300" dirty="0"/>
+          </a:p>
+          <a:p>
+            <a:pPr marL="285750" indent="-285750" algn="l">
+              <a:lnSpc>
+                <a:spcPct val="150000"/>
+              </a:lnSpc>
+              <a:buFont typeface="Arial" panose="020B0604020202020204" pitchFamily="34" charset="0"/>
+              <a:buChar char="•"/>
+            </a:pPr>
+            <a:r>
+              <a:rPr sz="1300" b="0" dirty="0">
+                <a:solidFill>
+                  <a:srgbClr val="141414"/>
+                </a:solidFill>
+              </a:rPr>
+              <a:t>Audit and charts interface</a:t>
+            </a:r>
+            <a:endParaRPr lang="en-US" sz="1300" dirty="0"/>
+          </a:p>
+          <a:p>
+            <a:pPr marL="285750" indent="-285750" algn="l">
+              <a:lnSpc>
+                <a:spcPct val="150000"/>
+              </a:lnSpc>
+              <a:buFont typeface="Arial" panose="020B0604020202020204" pitchFamily="34" charset="0"/>
+              <a:buChar char="•"/>
+            </a:pPr>
+            <a:r>
+              <a:rPr sz="1300" b="0" dirty="0">
+                <a:solidFill>
+                  <a:srgbClr val="141414"/>
+                </a:solidFill>
+              </a:rPr>
+              <a:t>UI and usability testing</a:t>
+            </a:r>
+          </a:p>
+        </p:txBody>
+      </p:sp>
+      <p:sp>
+        <p:nvSpPr>
+          <p:cNvPr id="16" name="TextBox 15"/>
+          <p:cNvSpPr txBox="1"/>
+          <p:nvPr/>
+        </p:nvSpPr>
+        <p:spPr>
+          <a:xfrm>
+            <a:off x="731520" y="5074920"/>
+            <a:ext cx="7498079" cy="486287"/>
+          </a:xfrm>
+          <a:prstGeom prst="rect">
+            <a:avLst/>
+          </a:prstGeom>
+          <a:noFill/>
+        </p:spPr>
+        <p:txBody>
+          <a:bodyPr wrap="square" lIns="36576" tIns="27432" rIns="36576" bIns="27432">
+            <a:spAutoFit/>
+          </a:bodyPr>
+          <a:lstStyle/>
+          <a:p>
+            <a:pPr algn="ctr"/>
+            <a:r>
+              <a:rPr sz="1400" b="1" dirty="0">
+                <a:solidFill>
+                  <a:srgbClr val="1F497D"/>
+                </a:solidFill>
+                <a:latin typeface="Arial"/>
+              </a:rPr>
+              <a:t>Shared: research, documentation, GitHub, code review, integration, security testing, final report, presentation</a:t>
+            </a:r>
+            <a:r>
+              <a:rPr lang="en-US" sz="1400" b="1" dirty="0">
+                <a:solidFill>
+                  <a:srgbClr val="1F497D"/>
+                </a:solidFill>
+                <a:latin typeface="Arial"/>
+              </a:rPr>
+              <a:t> and</a:t>
+            </a:r>
+            <a:r>
+              <a:rPr sz="1400" b="1" dirty="0">
+                <a:solidFill>
+                  <a:srgbClr val="1F497D"/>
+                </a:solidFill>
+                <a:latin typeface="Arial"/>
+              </a:rPr>
+              <a:t> viva preparation.</a:t>
+            </a:r>
+          </a:p>
+        </p:txBody>
+      </p:sp>
+    </p:spTree>
+  </p:cSld>
+  <p:clrMapOvr>
+    <a:masterClrMapping/>
+  </p:clrMapOvr>
+  <mc:AlternateContent xmlns:mc="http://schemas.openxmlformats.org/markup-compatibility/2006" xmlns:p15="http://schemas.microsoft.com/office/powerpoint/2012/main">
+    <mc:Choice Requires="p15">
+      <p:transition xmlns:p14="http://schemas.microsoft.com/office/powerpoint/2010/main" spd="slow" p14:dur="2000">
+        <p15:prstTrans prst="fallOver"/>
+      </p:transition>
+    </mc:Choice>
+    <mc:Fallback xmlns="">
+      <p:transition spd="slow">
+        <p:fade/>
+      </p:transition>
+    </mc:Fallback>
+  </mc:AlternateContent>
+</p:sld>
+</file>
+
+<file path=ppt/slides/slide21.xml><?xml version="1.0" encoding="utf-8"?>
+<p:sld xmlns:a="http://schemas.openxmlformats.org/drawingml/2006/main" xmlns:r="http://schemas.openxmlformats.org/officeDocument/2006/relationships" xmlns:p="http://schemas.openxmlformats.org/presentationml/2006/main">
+  <p:cSld>
+    <p:spTree>
+      <p:nvGrpSpPr>
+        <p:cNvPr id="1" name=""/>
+        <p:cNvGrpSpPr/>
+        <p:nvPr/>
+      </p:nvGrpSpPr>
+      <p:grpSpPr>
+        <a:xfrm>
+          <a:off x="0" y="0"/>
+          <a:ext cx="0" cy="0"/>
+          <a:chOff x="0" y="0"/>
+          <a:chExt cx="0" cy="0"/>
+        </a:xfrm>
+      </p:grpSpPr>
+      <p:sp>
+        <p:nvSpPr>
+          <p:cNvPr id="2" name="Title 1"/>
+          <p:cNvSpPr>
+            <a:spLocks noGrp="1"/>
+          </p:cNvSpPr>
+          <p:nvPr>
+            <p:ph type="title"/>
+          </p:nvPr>
+        </p:nvSpPr>
+        <p:spPr/>
+        <p:txBody>
+          <a:bodyPr wrap="square" lIns="45720" tIns="18288" rIns="45720" bIns="18288"/>
+          <a:lstStyle/>
+          <a:p>
+            <a:r>
+              <a:rPr sz="2600" b="1">
+                <a:solidFill>
+                  <a:srgbClr val="1F497D"/>
+                </a:solidFill>
+                <a:latin typeface="Arial"/>
+              </a:rPr>
               <a:t>CONSTRAINTS AND LIMITATIONS</a:t>
             </a:r>
           </a:p>
@@ -22732,7 +22926,7 @@
 </p:sld>
 </file>
 
-<file path=ppt/slides/slide21.xml><?xml version="1.0" encoding="utf-8"?>
+<file path=ppt/slides/slide22.xml><?xml version="1.0" encoding="utf-8"?>
 <p:sld xmlns:a="http://schemas.openxmlformats.org/drawingml/2006/main" xmlns:r="http://schemas.openxmlformats.org/officeDocument/2006/relationships" xmlns:p="http://schemas.openxmlformats.org/presentationml/2006/main">
   <p:cSld>
     <p:spTree>
@@ -23123,7 +23317,7 @@
 </p:sld>
 </file>
 
-<file path=ppt/slides/slide22.xml><?xml version="1.0" encoding="utf-8"?>
+<file path=ppt/slides/slide23.xml><?xml version="1.0" encoding="utf-8"?>
 <p:sld xmlns:a="http://schemas.openxmlformats.org/drawingml/2006/main" xmlns:r="http://schemas.openxmlformats.org/officeDocument/2006/relationships" xmlns:p="http://schemas.openxmlformats.org/presentationml/2006/main">
   <p:cSld>
     <p:spTree>
@@ -23676,7 +23870,7 @@
 </p:sld>
 </file>
 
-<file path=ppt/slides/slide23.xml><?xml version="1.0" encoding="utf-8"?>
+<file path=ppt/slides/slide24.xml><?xml version="1.0" encoding="utf-8"?>
 <p:sld xmlns:a="http://schemas.openxmlformats.org/drawingml/2006/main" xmlns:r="http://schemas.openxmlformats.org/officeDocument/2006/relationships" xmlns:p="http://schemas.openxmlformats.org/presentationml/2006/main">
   <p:cSld>
     <p:spTree>
@@ -23740,7 +23934,7 @@
 </p:sld>
 </file>
 
-<file path=ppt/slides/slide24.xml><?xml version="1.0" encoding="utf-8"?>
+<file path=ppt/slides/slide25.xml><?xml version="1.0" encoding="utf-8"?>
 <p:sld xmlns:a="http://schemas.openxmlformats.org/drawingml/2006/main" xmlns:r="http://schemas.openxmlformats.org/officeDocument/2006/relationships" xmlns:p="http://schemas.openxmlformats.org/presentationml/2006/main">
   <p:cSld>
     <p:spTree>
@@ -25317,35 +25511,35 @@
                 <a:gridCol w="2286000">
                   <a:extLst>
                     <a:ext uri="{9D8B030D-6E8A-4147-A177-3AD203B41FA5}">
-                      <a16:colId xmlns:a16="http://schemas.microsoft.com/office/drawing/2014/main" xmlns="" val="20000"/>
+                      <a16:colId xmlns="" xmlns:a16="http://schemas.microsoft.com/office/drawing/2014/main" val="20000"/>
                     </a:ext>
                   </a:extLst>
                 </a:gridCol>
                 <a:gridCol w="1143000">
                   <a:extLst>
                     <a:ext uri="{9D8B030D-6E8A-4147-A177-3AD203B41FA5}">
-                      <a16:colId xmlns:a16="http://schemas.microsoft.com/office/drawing/2014/main" xmlns="" val="20001"/>
+                      <a16:colId xmlns="" xmlns:a16="http://schemas.microsoft.com/office/drawing/2014/main" val="20001"/>
                     </a:ext>
                   </a:extLst>
                 </a:gridCol>
                 <a:gridCol w="1143000">
                   <a:extLst>
                     <a:ext uri="{9D8B030D-6E8A-4147-A177-3AD203B41FA5}">
-                      <a16:colId xmlns:a16="http://schemas.microsoft.com/office/drawing/2014/main" xmlns="" val="20002"/>
+                      <a16:colId xmlns="" xmlns:a16="http://schemas.microsoft.com/office/drawing/2014/main" val="20002"/>
                     </a:ext>
                   </a:extLst>
                 </a:gridCol>
                 <a:gridCol w="1143000">
                   <a:extLst>
                     <a:ext uri="{9D8B030D-6E8A-4147-A177-3AD203B41FA5}">
-                      <a16:colId xmlns:a16="http://schemas.microsoft.com/office/drawing/2014/main" xmlns="" val="20003"/>
+                      <a16:colId xmlns="" xmlns:a16="http://schemas.microsoft.com/office/drawing/2014/main" val="20003"/>
                     </a:ext>
                   </a:extLst>
                 </a:gridCol>
                 <a:gridCol w="2606040">
                   <a:extLst>
                     <a:ext uri="{9D8B030D-6E8A-4147-A177-3AD203B41FA5}">
-                      <a16:colId xmlns:a16="http://schemas.microsoft.com/office/drawing/2014/main" xmlns="" val="20004"/>
+                      <a16:colId xmlns="" xmlns:a16="http://schemas.microsoft.com/office/drawing/2014/main" val="20004"/>
                     </a:ext>
                   </a:extLst>
                 </a:gridCol>
@@ -25468,7 +25662,7 @@
                 </a:tc>
                 <a:extLst>
                   <a:ext uri="{0D108BD9-81ED-4DB2-BD59-A6C34878D82A}">
-                    <a16:rowId xmlns:a16="http://schemas.microsoft.com/office/drawing/2014/main" xmlns="" val="10000"/>
+                    <a16:rowId xmlns="" xmlns:a16="http://schemas.microsoft.com/office/drawing/2014/main" val="10000"/>
                   </a:ext>
                 </a:extLst>
               </a:tr>
@@ -25590,7 +25784,7 @@
                 </a:tc>
                 <a:extLst>
                   <a:ext uri="{0D108BD9-81ED-4DB2-BD59-A6C34878D82A}">
-                    <a16:rowId xmlns:a16="http://schemas.microsoft.com/office/drawing/2014/main" xmlns="" val="10001"/>
+                    <a16:rowId xmlns="" xmlns:a16="http://schemas.microsoft.com/office/drawing/2014/main" val="10001"/>
                   </a:ext>
                 </a:extLst>
               </a:tr>
@@ -25712,7 +25906,7 @@
                 </a:tc>
                 <a:extLst>
                   <a:ext uri="{0D108BD9-81ED-4DB2-BD59-A6C34878D82A}">
-                    <a16:rowId xmlns:a16="http://schemas.microsoft.com/office/drawing/2014/main" xmlns="" val="10002"/>
+                    <a16:rowId xmlns="" xmlns:a16="http://schemas.microsoft.com/office/drawing/2014/main" val="10002"/>
                   </a:ext>
                 </a:extLst>
               </a:tr>
@@ -25834,7 +26028,7 @@
                 </a:tc>
                 <a:extLst>
                   <a:ext uri="{0D108BD9-81ED-4DB2-BD59-A6C34878D82A}">
-                    <a16:rowId xmlns:a16="http://schemas.microsoft.com/office/drawing/2014/main" xmlns="" val="10003"/>
+                    <a16:rowId xmlns="" xmlns:a16="http://schemas.microsoft.com/office/drawing/2014/main" val="10003"/>
                   </a:ext>
                 </a:extLst>
               </a:tr>
@@ -25956,7 +26150,7 @@
                 </a:tc>
                 <a:extLst>
                   <a:ext uri="{0D108BD9-81ED-4DB2-BD59-A6C34878D82A}">
-                    <a16:rowId xmlns:a16="http://schemas.microsoft.com/office/drawing/2014/main" xmlns="" val="10004"/>
+                    <a16:rowId xmlns="" xmlns:a16="http://schemas.microsoft.com/office/drawing/2014/main" val="10004"/>
                   </a:ext>
                 </a:extLst>
               </a:tr>
@@ -26078,7 +26272,7 @@
                 </a:tc>
                 <a:extLst>
                   <a:ext uri="{0D108BD9-81ED-4DB2-BD59-A6C34878D82A}">
-                    <a16:rowId xmlns:a16="http://schemas.microsoft.com/office/drawing/2014/main" xmlns="" val="10005"/>
+                    <a16:rowId xmlns="" xmlns:a16="http://schemas.microsoft.com/office/drawing/2014/main" val="10005"/>
                   </a:ext>
                 </a:extLst>
               </a:tr>
@@ -26200,7 +26394,7 @@
                 </a:tc>
                 <a:extLst>
                   <a:ext uri="{0D108BD9-81ED-4DB2-BD59-A6C34878D82A}">
-                    <a16:rowId xmlns:a16="http://schemas.microsoft.com/office/drawing/2014/main" xmlns="" val="10006"/>
+                    <a16:rowId xmlns="" xmlns:a16="http://schemas.microsoft.com/office/drawing/2014/main" val="10006"/>
                   </a:ext>
                 </a:extLst>
               </a:tr>
@@ -26322,7 +26516,7 @@
                 </a:tc>
                 <a:extLst>
                   <a:ext uri="{0D108BD9-81ED-4DB2-BD59-A6C34878D82A}">
-                    <a16:rowId xmlns:a16="http://schemas.microsoft.com/office/drawing/2014/main" xmlns="" val="10007"/>
+                    <a16:rowId xmlns="" xmlns:a16="http://schemas.microsoft.com/office/drawing/2014/main" val="10007"/>
                   </a:ext>
                 </a:extLst>
               </a:tr>
